--- a/OS 2 Úvod do paralélnych procesov a synchronizácie.pptx
+++ b/OS 2 Úvod do paralélnych procesov a synchronizácie.pptx
@@ -5,7 +5,7 @@
     <p:sldMasterId id="2147483648" r:id="rId1"/>
   </p:sldMasterIdLst>
   <p:notesMasterIdLst>
-    <p:notesMasterId r:id="rId56"/>
+    <p:notesMasterId r:id="rId55"/>
   </p:notesMasterIdLst>
   <p:sldIdLst>
     <p:sldId id="256" r:id="rId2"/>
@@ -27,41 +27,40 @@
     <p:sldId id="295" r:id="rId18"/>
     <p:sldId id="297" r:id="rId19"/>
     <p:sldId id="298" r:id="rId20"/>
-    <p:sldId id="306" r:id="rId21"/>
-    <p:sldId id="300" r:id="rId22"/>
-    <p:sldId id="301" r:id="rId23"/>
-    <p:sldId id="302" r:id="rId24"/>
-    <p:sldId id="303" r:id="rId25"/>
-    <p:sldId id="307" r:id="rId26"/>
-    <p:sldId id="311" r:id="rId27"/>
-    <p:sldId id="312" r:id="rId28"/>
-    <p:sldId id="314" r:id="rId29"/>
-    <p:sldId id="304" r:id="rId30"/>
-    <p:sldId id="305" r:id="rId31"/>
-    <p:sldId id="308" r:id="rId32"/>
-    <p:sldId id="321" r:id="rId33"/>
-    <p:sldId id="309" r:id="rId34"/>
-    <p:sldId id="266" r:id="rId35"/>
-    <p:sldId id="271" r:id="rId36"/>
-    <p:sldId id="272" r:id="rId37"/>
-    <p:sldId id="274" r:id="rId38"/>
-    <p:sldId id="316" r:id="rId39"/>
-    <p:sldId id="317" r:id="rId40"/>
-    <p:sldId id="318" r:id="rId41"/>
-    <p:sldId id="319" r:id="rId42"/>
-    <p:sldId id="320" r:id="rId43"/>
-    <p:sldId id="275" r:id="rId44"/>
-    <p:sldId id="276" r:id="rId45"/>
-    <p:sldId id="277" r:id="rId46"/>
-    <p:sldId id="280" r:id="rId47"/>
-    <p:sldId id="281" r:id="rId48"/>
-    <p:sldId id="282" r:id="rId49"/>
-    <p:sldId id="283" r:id="rId50"/>
-    <p:sldId id="284" r:id="rId51"/>
-    <p:sldId id="285" r:id="rId52"/>
-    <p:sldId id="286" r:id="rId53"/>
-    <p:sldId id="322" r:id="rId54"/>
-    <p:sldId id="287" r:id="rId55"/>
+    <p:sldId id="323" r:id="rId21"/>
+    <p:sldId id="325" r:id="rId22"/>
+    <p:sldId id="324" r:id="rId23"/>
+    <p:sldId id="306" r:id="rId24"/>
+    <p:sldId id="300" r:id="rId25"/>
+    <p:sldId id="301" r:id="rId26"/>
+    <p:sldId id="302" r:id="rId27"/>
+    <p:sldId id="303" r:id="rId28"/>
+    <p:sldId id="307" r:id="rId29"/>
+    <p:sldId id="311" r:id="rId30"/>
+    <p:sldId id="312" r:id="rId31"/>
+    <p:sldId id="314" r:id="rId32"/>
+    <p:sldId id="304" r:id="rId33"/>
+    <p:sldId id="305" r:id="rId34"/>
+    <p:sldId id="308" r:id="rId35"/>
+    <p:sldId id="321" r:id="rId36"/>
+    <p:sldId id="266" r:id="rId37"/>
+    <p:sldId id="271" r:id="rId38"/>
+    <p:sldId id="272" r:id="rId39"/>
+    <p:sldId id="274" r:id="rId40"/>
+    <p:sldId id="316" r:id="rId41"/>
+    <p:sldId id="317" r:id="rId42"/>
+    <p:sldId id="275" r:id="rId43"/>
+    <p:sldId id="276" r:id="rId44"/>
+    <p:sldId id="277" r:id="rId45"/>
+    <p:sldId id="280" r:id="rId46"/>
+    <p:sldId id="281" r:id="rId47"/>
+    <p:sldId id="282" r:id="rId48"/>
+    <p:sldId id="283" r:id="rId49"/>
+    <p:sldId id="284" r:id="rId50"/>
+    <p:sldId id="285" r:id="rId51"/>
+    <p:sldId id="286" r:id="rId52"/>
+    <p:sldId id="322" r:id="rId53"/>
+    <p:sldId id="287" r:id="rId54"/>
   </p:sldIdLst>
   <p:sldSz cx="12192000" cy="6858000"/>
   <p:notesSz cx="6858000" cy="9144000"/>
@@ -182,7 +181,7 @@
 <file path=ppt/revisionInfo.xml><?xml version="1.0" encoding="utf-8"?>
 <p1510:revInfo xmlns:a="http://schemas.openxmlformats.org/drawingml/2006/main" xmlns:r="http://schemas.openxmlformats.org/officeDocument/2006/relationships" xmlns:p1510="http://schemas.microsoft.com/office/powerpoint/2015/10/main">
   <p1510:revLst>
-    <p1510:client id="{609868B2-050D-5D45-9A55-620565FA2D56}" v="20" dt="2025-02-05T10:40:30.119"/>
+    <p1510:client id="{370BC3AC-5919-1247-B8AC-1DC04D9811EF}" v="56" dt="2026-02-03T11:50:35.132"/>
   </p1510:revLst>
 </p1510:revInfo>
 </file>
@@ -190,384 +189,20 @@
 <file path=ppt/changesInfos/changesInfo1.xml><?xml version="1.0" encoding="utf-8"?>
 <pc:chgInfo xmlns:a="http://schemas.openxmlformats.org/drawingml/2006/main" xmlns:r="http://schemas.openxmlformats.org/officeDocument/2006/relationships" xmlns:ac="http://schemas.microsoft.com/office/drawing/2013/main/command" xmlns:pc="http://schemas.microsoft.com/office/powerpoint/2013/main/command">
   <pc:docChgLst>
-    <pc:chgData name="Július Baráth" userId="e650c4ab-697e-4750-bd58-c1531aabce95" providerId="ADAL" clId="{2A7D18FC-E5D4-0541-9271-F79F622FB3C2}"/>
-    <pc:docChg chg="modSld">
-      <pc:chgData name="Július Baráth" userId="e650c4ab-697e-4750-bd58-c1531aabce95" providerId="ADAL" clId="{2A7D18FC-E5D4-0541-9271-F79F622FB3C2}" dt="2019-03-04T12:14:05.781" v="1" actId="20577"/>
-      <pc:docMkLst>
-        <pc:docMk/>
-      </pc:docMkLst>
-      <pc:sldChg chg="modSp">
-        <pc:chgData name="Július Baráth" userId="e650c4ab-697e-4750-bd58-c1531aabce95" providerId="ADAL" clId="{2A7D18FC-E5D4-0541-9271-F79F622FB3C2}" dt="2019-03-04T12:14:05.781" v="1" actId="20577"/>
-        <pc:sldMkLst>
-          <pc:docMk/>
-          <pc:sldMk cId="3235063092" sldId="306"/>
-        </pc:sldMkLst>
-      </pc:sldChg>
-      <pc:sldChg chg="modSp">
-        <pc:chgData name="Július Baráth" userId="e650c4ab-697e-4750-bd58-c1531aabce95" providerId="ADAL" clId="{2A7D18FC-E5D4-0541-9271-F79F622FB3C2}" dt="2019-02-19T11:35:46.351" v="0" actId="1076"/>
-        <pc:sldMkLst>
-          <pc:docMk/>
-          <pc:sldMk cId="2533591585" sldId="307"/>
-        </pc:sldMkLst>
-      </pc:sldChg>
-    </pc:docChg>
-  </pc:docChgLst>
-  <pc:docChgLst>
-    <pc:chgData name="Július Baráth" userId="e650c4ab-697e-4750-bd58-c1531aabce95" providerId="ADAL" clId="{E40962A9-F4BC-5D4C-8D78-28F34AE3805C}"/>
-    <pc:docChg chg="undo custSel delSld modSld sldOrd">
-      <pc:chgData name="Július Baráth" userId="e650c4ab-697e-4750-bd58-c1531aabce95" providerId="ADAL" clId="{E40962A9-F4BC-5D4C-8D78-28F34AE3805C}" dt="2022-02-15T16:46:47.631" v="580" actId="113"/>
+    <pc:chgData name="Baráth, Július" userId="aebde9b9-dccc-4475-a9ac-c05e78323d7a" providerId="ADAL" clId="{4A0811C8-ED2F-505E-B787-C8270CED5046}"/>
+    <pc:docChg chg="undo custSel addSld delSld modSld sldOrd">
+      <pc:chgData name="Baráth, Július" userId="aebde9b9-dccc-4475-a9ac-c05e78323d7a" providerId="ADAL" clId="{4A0811C8-ED2F-505E-B787-C8270CED5046}" dt="2026-02-03T11:50:35.132" v="568" actId="14100"/>
       <pc:docMkLst>
         <pc:docMk/>
       </pc:docMkLst>
       <pc:sldChg chg="modSp mod">
-        <pc:chgData name="Július Baráth" userId="e650c4ab-697e-4750-bd58-c1531aabce95" providerId="ADAL" clId="{E40962A9-F4BC-5D4C-8D78-28F34AE3805C}" dt="2022-02-11T08:58:20.595" v="9" actId="20577"/>
-        <pc:sldMkLst>
-          <pc:docMk/>
-          <pc:sldMk cId="3758411243" sldId="256"/>
-        </pc:sldMkLst>
-      </pc:sldChg>
-      <pc:sldChg chg="addSp delSp modSp mod chgLayout">
-        <pc:chgData name="Július Baráth" userId="e650c4ab-697e-4750-bd58-c1531aabce95" providerId="ADAL" clId="{E40962A9-F4BC-5D4C-8D78-28F34AE3805C}" dt="2022-02-15T09:39:46.796" v="28"/>
-        <pc:sldMkLst>
-          <pc:docMk/>
-          <pc:sldMk cId="2192710277" sldId="257"/>
-        </pc:sldMkLst>
-      </pc:sldChg>
-      <pc:sldChg chg="addSp delSp modSp mod modClrScheme chgLayout">
-        <pc:chgData name="Július Baráth" userId="e650c4ab-697e-4750-bd58-c1531aabce95" providerId="ADAL" clId="{E40962A9-F4BC-5D4C-8D78-28F34AE3805C}" dt="2022-02-15T09:54:39.338" v="316" actId="20577"/>
-        <pc:sldMkLst>
-          <pc:docMk/>
-          <pc:sldMk cId="2345067092" sldId="258"/>
-        </pc:sldMkLst>
-      </pc:sldChg>
-      <pc:sldChg chg="delSp modSp mod chgLayout">
-        <pc:chgData name="Július Baráth" userId="e650c4ab-697e-4750-bd58-c1531aabce95" providerId="ADAL" clId="{E40962A9-F4BC-5D4C-8D78-28F34AE3805C}" dt="2022-02-15T16:44:14.706" v="564" actId="14100"/>
-        <pc:sldMkLst>
-          <pc:docMk/>
-          <pc:sldMk cId="2830035912" sldId="259"/>
-        </pc:sldMkLst>
-      </pc:sldChg>
-      <pc:sldChg chg="addSp delSp modSp mod modClrScheme chgLayout">
-        <pc:chgData name="Július Baráth" userId="e650c4ab-697e-4750-bd58-c1531aabce95" providerId="ADAL" clId="{E40962A9-F4BC-5D4C-8D78-28F34AE3805C}" dt="2022-02-15T16:05:09.907" v="376" actId="20577"/>
-        <pc:sldMkLst>
-          <pc:docMk/>
-          <pc:sldMk cId="2525468959" sldId="260"/>
-        </pc:sldMkLst>
-      </pc:sldChg>
-      <pc:sldChg chg="addSp delSp modSp mod modClrScheme chgLayout">
-        <pc:chgData name="Július Baráth" userId="e650c4ab-697e-4750-bd58-c1531aabce95" providerId="ADAL" clId="{E40962A9-F4BC-5D4C-8D78-28F34AE3805C}" dt="2022-02-15T09:43:40.353" v="75"/>
-        <pc:sldMkLst>
-          <pc:docMk/>
-          <pc:sldMk cId="334612787" sldId="261"/>
-        </pc:sldMkLst>
-      </pc:sldChg>
-      <pc:sldChg chg="addSp delSp modSp mod modClrScheme chgLayout">
-        <pc:chgData name="Július Baráth" userId="e650c4ab-697e-4750-bd58-c1531aabce95" providerId="ADAL" clId="{E40962A9-F4BC-5D4C-8D78-28F34AE3805C}" dt="2022-02-15T16:07:42.917" v="377" actId="20577"/>
-        <pc:sldMkLst>
-          <pc:docMk/>
-          <pc:sldMk cId="1796127561" sldId="262"/>
-        </pc:sldMkLst>
-      </pc:sldChg>
-      <pc:sldChg chg="modSp mod">
-        <pc:chgData name="Július Baráth" userId="e650c4ab-697e-4750-bd58-c1531aabce95" providerId="ADAL" clId="{E40962A9-F4BC-5D4C-8D78-28F34AE3805C}" dt="2022-02-15T09:55:28.899" v="318" actId="20577"/>
-        <pc:sldMkLst>
-          <pc:docMk/>
-          <pc:sldMk cId="3347599706" sldId="263"/>
-        </pc:sldMkLst>
-      </pc:sldChg>
-      <pc:sldChg chg="modSp mod">
-        <pc:chgData name="Július Baráth" userId="e650c4ab-697e-4750-bd58-c1531aabce95" providerId="ADAL" clId="{E40962A9-F4BC-5D4C-8D78-28F34AE3805C}" dt="2022-02-15T09:44:49.598" v="89" actId="115"/>
-        <pc:sldMkLst>
-          <pc:docMk/>
-          <pc:sldMk cId="590433976" sldId="264"/>
-        </pc:sldMkLst>
-      </pc:sldChg>
-      <pc:sldChg chg="addSp delSp modSp mod ord modClrScheme chgLayout">
-        <pc:chgData name="Július Baráth" userId="e650c4ab-697e-4750-bd58-c1531aabce95" providerId="ADAL" clId="{E40962A9-F4BC-5D4C-8D78-28F34AE3805C}" dt="2022-02-15T16:16:18.097" v="395" actId="115"/>
-        <pc:sldMkLst>
-          <pc:docMk/>
-          <pc:sldMk cId="3873447503" sldId="265"/>
-        </pc:sldMkLst>
-      </pc:sldChg>
-      <pc:sldChg chg="del">
-        <pc:chgData name="Július Baráth" userId="e650c4ab-697e-4750-bd58-c1531aabce95" providerId="ADAL" clId="{E40962A9-F4BC-5D4C-8D78-28F34AE3805C}" dt="2022-02-15T16:36:03.745" v="496" actId="2696"/>
-        <pc:sldMkLst>
-          <pc:docMk/>
-          <pc:sldMk cId="2476636462" sldId="268"/>
-        </pc:sldMkLst>
-      </pc:sldChg>
-      <pc:sldChg chg="modSp mod">
-        <pc:chgData name="Július Baráth" userId="e650c4ab-697e-4750-bd58-c1531aabce95" providerId="ADAL" clId="{E40962A9-F4BC-5D4C-8D78-28F34AE3805C}" dt="2022-02-15T16:45:38.384" v="577" actId="368"/>
-        <pc:sldMkLst>
-          <pc:docMk/>
-          <pc:sldMk cId="1212709912" sldId="269"/>
-        </pc:sldMkLst>
-      </pc:sldChg>
-      <pc:sldChg chg="addSp modSp">
-        <pc:chgData name="Július Baráth" userId="e650c4ab-697e-4750-bd58-c1531aabce95" providerId="ADAL" clId="{E40962A9-F4BC-5D4C-8D78-28F34AE3805C}" dt="2022-02-15T16:35:45.506" v="495" actId="1076"/>
-        <pc:sldMkLst>
-          <pc:docMk/>
-          <pc:sldMk cId="1621904223" sldId="271"/>
-        </pc:sldMkLst>
-      </pc:sldChg>
-      <pc:sldChg chg="del">
-        <pc:chgData name="Július Baráth" userId="e650c4ab-697e-4750-bd58-c1531aabce95" providerId="ADAL" clId="{E40962A9-F4BC-5D4C-8D78-28F34AE3805C}" dt="2022-02-15T16:36:57.796" v="497" actId="2696"/>
-        <pc:sldMkLst>
-          <pc:docMk/>
-          <pc:sldMk cId="2586779955" sldId="273"/>
-        </pc:sldMkLst>
-      </pc:sldChg>
-      <pc:sldChg chg="modSp mod">
-        <pc:chgData name="Július Baráth" userId="e650c4ab-697e-4750-bd58-c1531aabce95" providerId="ADAL" clId="{E40962A9-F4BC-5D4C-8D78-28F34AE3805C}" dt="2022-02-15T16:37:07.340" v="500" actId="20577"/>
-        <pc:sldMkLst>
-          <pc:docMk/>
-          <pc:sldMk cId="32605011" sldId="274"/>
-        </pc:sldMkLst>
-      </pc:sldChg>
-      <pc:sldChg chg="addSp delSp modSp mod modClrScheme chgLayout">
-        <pc:chgData name="Július Baráth" userId="e650c4ab-697e-4750-bd58-c1531aabce95" providerId="ADAL" clId="{E40962A9-F4BC-5D4C-8D78-28F34AE3805C}" dt="2022-02-15T16:46:09.381" v="578" actId="6549"/>
-        <pc:sldMkLst>
-          <pc:docMk/>
-          <pc:sldMk cId="1657236488" sldId="275"/>
-        </pc:sldMkLst>
-      </pc:sldChg>
-      <pc:sldChg chg="addSp delSp modSp mod modClrScheme chgLayout">
-        <pc:chgData name="Július Baráth" userId="e650c4ab-697e-4750-bd58-c1531aabce95" providerId="ADAL" clId="{E40962A9-F4BC-5D4C-8D78-28F34AE3805C}" dt="2022-02-15T16:33:10" v="492"/>
-        <pc:sldMkLst>
-          <pc:docMk/>
-          <pc:sldMk cId="527861572" sldId="276"/>
-        </pc:sldMkLst>
-      </pc:sldChg>
-      <pc:sldChg chg="addSp delSp modSp mod modClrScheme chgLayout">
-        <pc:chgData name="Július Baráth" userId="e650c4ab-697e-4750-bd58-c1531aabce95" providerId="ADAL" clId="{E40962A9-F4BC-5D4C-8D78-28F34AE3805C}" dt="2022-02-15T16:32:28.207" v="480" actId="1076"/>
-        <pc:sldMkLst>
-          <pc:docMk/>
-          <pc:sldMk cId="512124060" sldId="277"/>
-        </pc:sldMkLst>
-      </pc:sldChg>
-      <pc:sldChg chg="addSp delSp modSp mod modClrScheme chgLayout">
-        <pc:chgData name="Július Baráth" userId="e650c4ab-697e-4750-bd58-c1531aabce95" providerId="ADAL" clId="{E40962A9-F4BC-5D4C-8D78-28F34AE3805C}" dt="2022-02-15T16:31:35.437" v="472"/>
-        <pc:sldMkLst>
-          <pc:docMk/>
-          <pc:sldMk cId="2893083369" sldId="280"/>
-        </pc:sldMkLst>
-      </pc:sldChg>
-      <pc:sldChg chg="addSp delSp modSp mod modClrScheme chgLayout">
-        <pc:chgData name="Július Baráth" userId="e650c4ab-697e-4750-bd58-c1531aabce95" providerId="ADAL" clId="{E40962A9-F4BC-5D4C-8D78-28F34AE3805C}" dt="2022-02-15T16:30:24.623" v="452" actId="368"/>
-        <pc:sldMkLst>
-          <pc:docMk/>
-          <pc:sldMk cId="3215213909" sldId="281"/>
-        </pc:sldMkLst>
-      </pc:sldChg>
-      <pc:sldChg chg="addSp delSp modSp mod modClrScheme chgLayout">
-        <pc:chgData name="Július Baráth" userId="e650c4ab-697e-4750-bd58-c1531aabce95" providerId="ADAL" clId="{E40962A9-F4BC-5D4C-8D78-28F34AE3805C}" dt="2022-02-15T16:29:49.368" v="446" actId="12"/>
-        <pc:sldMkLst>
-          <pc:docMk/>
-          <pc:sldMk cId="2886454487" sldId="282"/>
-        </pc:sldMkLst>
-      </pc:sldChg>
-      <pc:sldChg chg="modSp mod">
-        <pc:chgData name="Július Baráth" userId="e650c4ab-697e-4750-bd58-c1531aabce95" providerId="ADAL" clId="{E40962A9-F4BC-5D4C-8D78-28F34AE3805C}" dt="2022-02-15T16:46:47.631" v="580" actId="113"/>
-        <pc:sldMkLst>
-          <pc:docMk/>
-          <pc:sldMk cId="2858765742" sldId="283"/>
-        </pc:sldMkLst>
-      </pc:sldChg>
-      <pc:sldChg chg="addSp delSp modSp mod modClrScheme chgLayout">
-        <pc:chgData name="Július Baráth" userId="e650c4ab-697e-4750-bd58-c1531aabce95" providerId="ADAL" clId="{E40962A9-F4BC-5D4C-8D78-28F34AE3805C}" dt="2022-02-15T16:27:52.625" v="418" actId="20577"/>
-        <pc:sldMkLst>
-          <pc:docMk/>
-          <pc:sldMk cId="729735244" sldId="284"/>
-        </pc:sldMkLst>
-      </pc:sldChg>
-      <pc:sldChg chg="addSp delSp modSp mod modClrScheme chgLayout">
-        <pc:chgData name="Július Baráth" userId="e650c4ab-697e-4750-bd58-c1531aabce95" providerId="ADAL" clId="{E40962A9-F4BC-5D4C-8D78-28F34AE3805C}" dt="2022-02-15T16:29:36.427" v="445"/>
-        <pc:sldMkLst>
-          <pc:docMk/>
-          <pc:sldMk cId="1415647731" sldId="286"/>
-        </pc:sldMkLst>
-      </pc:sldChg>
-      <pc:sldChg chg="delSp modSp del mod chgLayout">
-        <pc:chgData name="Július Baráth" userId="e650c4ab-697e-4750-bd58-c1531aabce95" providerId="ADAL" clId="{E40962A9-F4BC-5D4C-8D78-28F34AE3805C}" dt="2022-02-15T16:17:31.618" v="396" actId="2696"/>
-        <pc:sldMkLst>
-          <pc:docMk/>
-          <pc:sldMk cId="1317281162" sldId="289"/>
-        </pc:sldMkLst>
-      </pc:sldChg>
-      <pc:sldChg chg="addSp delSp modSp mod modClrScheme chgLayout">
-        <pc:chgData name="Július Baráth" userId="e650c4ab-697e-4750-bd58-c1531aabce95" providerId="ADAL" clId="{E40962A9-F4BC-5D4C-8D78-28F34AE3805C}" dt="2022-02-15T16:17:45.022" v="397" actId="20577"/>
-        <pc:sldMkLst>
-          <pc:docMk/>
-          <pc:sldMk cId="4088828821" sldId="290"/>
-        </pc:sldMkLst>
-      </pc:sldChg>
-      <pc:sldChg chg="modSp mod chgLayout">
-        <pc:chgData name="Július Baráth" userId="e650c4ab-697e-4750-bd58-c1531aabce95" providerId="ADAL" clId="{E40962A9-F4BC-5D4C-8D78-28F34AE3805C}" dt="2022-02-15T16:44:36.264" v="569" actId="404"/>
-        <pc:sldMkLst>
-          <pc:docMk/>
-          <pc:sldMk cId="2068648163" sldId="291"/>
-        </pc:sldMkLst>
-      </pc:sldChg>
-      <pc:sldChg chg="modSp mod chgLayout">
-        <pc:chgData name="Július Baráth" userId="e650c4ab-697e-4750-bd58-c1531aabce95" providerId="ADAL" clId="{E40962A9-F4BC-5D4C-8D78-28F34AE3805C}" dt="2022-02-15T16:44:49.315" v="572" actId="404"/>
-        <pc:sldMkLst>
-          <pc:docMk/>
-          <pc:sldMk cId="2176794767" sldId="292"/>
-        </pc:sldMkLst>
-      </pc:sldChg>
-      <pc:sldChg chg="addSp delSp modSp mod modClrScheme chgLayout">
-        <pc:chgData name="Július Baráth" userId="e650c4ab-697e-4750-bd58-c1531aabce95" providerId="ADAL" clId="{E40962A9-F4BC-5D4C-8D78-28F34AE3805C}" dt="2022-02-15T09:58:19.761" v="331" actId="27636"/>
-        <pc:sldMkLst>
-          <pc:docMk/>
-          <pc:sldMk cId="1152080686" sldId="293"/>
-        </pc:sldMkLst>
-      </pc:sldChg>
-      <pc:sldChg chg="modSp mod">
-        <pc:chgData name="Július Baráth" userId="e650c4ab-697e-4750-bd58-c1531aabce95" providerId="ADAL" clId="{E40962A9-F4BC-5D4C-8D78-28F34AE3805C}" dt="2022-02-15T09:59:07.676" v="340" actId="14100"/>
-        <pc:sldMkLst>
-          <pc:docMk/>
-          <pc:sldMk cId="398281531" sldId="295"/>
-        </pc:sldMkLst>
-      </pc:sldChg>
-      <pc:sldChg chg="del">
-        <pc:chgData name="Július Baráth" userId="e650c4ab-697e-4750-bd58-c1531aabce95" providerId="ADAL" clId="{E40962A9-F4BC-5D4C-8D78-28F34AE3805C}" dt="2022-02-15T16:19:57.144" v="399" actId="2696"/>
-        <pc:sldMkLst>
-          <pc:docMk/>
-          <pc:sldMk cId="2102141856" sldId="296"/>
-        </pc:sldMkLst>
-      </pc:sldChg>
-      <pc:sldChg chg="addSp delSp modSp mod modClrScheme chgLayout">
-        <pc:chgData name="Július Baráth" userId="e650c4ab-697e-4750-bd58-c1531aabce95" providerId="ADAL" clId="{E40962A9-F4BC-5D4C-8D78-28F34AE3805C}" dt="2022-02-15T16:20:41.085" v="400" actId="12"/>
-        <pc:sldMkLst>
-          <pc:docMk/>
-          <pc:sldMk cId="3256878633" sldId="297"/>
-        </pc:sldMkLst>
-      </pc:sldChg>
-      <pc:sldChg chg="modSp mod">
-        <pc:chgData name="Július Baráth" userId="e650c4ab-697e-4750-bd58-c1531aabce95" providerId="ADAL" clId="{E40962A9-F4BC-5D4C-8D78-28F34AE3805C}" dt="2022-02-15T16:45:01.998" v="575" actId="404"/>
-        <pc:sldMkLst>
-          <pc:docMk/>
-          <pc:sldMk cId="4070380688" sldId="300"/>
-        </pc:sldMkLst>
-      </pc:sldChg>
-      <pc:sldChg chg="addSp delSp modSp mod modClrScheme chgLayout">
-        <pc:chgData name="Július Baráth" userId="e650c4ab-697e-4750-bd58-c1531aabce95" providerId="ADAL" clId="{E40962A9-F4BC-5D4C-8D78-28F34AE3805C}" dt="2022-02-15T16:22:23.966" v="405" actId="27636"/>
-        <pc:sldMkLst>
-          <pc:docMk/>
-          <pc:sldMk cId="1024189591" sldId="301"/>
-        </pc:sldMkLst>
-      </pc:sldChg>
-      <pc:sldChg chg="modSp mod">
-        <pc:chgData name="Július Baráth" userId="e650c4ab-697e-4750-bd58-c1531aabce95" providerId="ADAL" clId="{E40962A9-F4BC-5D4C-8D78-28F34AE3805C}" dt="2022-02-15T10:11:21.582" v="367" actId="20577"/>
-        <pc:sldMkLst>
-          <pc:docMk/>
-          <pc:sldMk cId="397644615" sldId="304"/>
-        </pc:sldMkLst>
-      </pc:sldChg>
-      <pc:sldChg chg="modSp mod">
-        <pc:chgData name="Július Baráth" userId="e650c4ab-697e-4750-bd58-c1531aabce95" providerId="ADAL" clId="{E40962A9-F4BC-5D4C-8D78-28F34AE3805C}" dt="2022-02-15T10:12:00.539" v="375" actId="15"/>
-        <pc:sldMkLst>
-          <pc:docMk/>
-          <pc:sldMk cId="4133182652" sldId="305"/>
-        </pc:sldMkLst>
-      </pc:sldChg>
-      <pc:sldChg chg="modSp mod">
-        <pc:chgData name="Július Baráth" userId="e650c4ab-697e-4750-bd58-c1531aabce95" providerId="ADAL" clId="{E40962A9-F4BC-5D4C-8D78-28F34AE3805C}" dt="2022-02-15T16:21:12.143" v="402" actId="403"/>
-        <pc:sldMkLst>
-          <pc:docMk/>
-          <pc:sldMk cId="3235063092" sldId="306"/>
-        </pc:sldMkLst>
-      </pc:sldChg>
-      <pc:sldChg chg="modSp mod">
-        <pc:chgData name="Július Baráth" userId="e650c4ab-697e-4750-bd58-c1531aabce95" providerId="ADAL" clId="{E40962A9-F4BC-5D4C-8D78-28F34AE3805C}" dt="2022-02-15T10:01:11.764" v="350" actId="12"/>
-        <pc:sldMkLst>
-          <pc:docMk/>
-          <pc:sldMk cId="2953323799" sldId="312"/>
-        </pc:sldMkLst>
-      </pc:sldChg>
-      <pc:sldChg chg="modSp mod">
-        <pc:chgData name="Július Baráth" userId="e650c4ab-697e-4750-bd58-c1531aabce95" providerId="ADAL" clId="{E40962A9-F4BC-5D4C-8D78-28F34AE3805C}" dt="2022-02-15T10:02:20.992" v="366" actId="6549"/>
-        <pc:sldMkLst>
-          <pc:docMk/>
-          <pc:sldMk cId="3914507190" sldId="314"/>
-        </pc:sldMkLst>
-      </pc:sldChg>
-      <pc:sldChg chg="mod modShow">
-        <pc:chgData name="Július Baráth" userId="e650c4ab-697e-4750-bd58-c1531aabce95" providerId="ADAL" clId="{E40962A9-F4BC-5D4C-8D78-28F34AE3805C}" dt="2022-02-15T16:38:07.145" v="501" actId="729"/>
-        <pc:sldMkLst>
-          <pc:docMk/>
-          <pc:sldMk cId="3274664270" sldId="318"/>
-        </pc:sldMkLst>
-      </pc:sldChg>
-      <pc:sldChg chg="mod modShow">
-        <pc:chgData name="Július Baráth" userId="e650c4ab-697e-4750-bd58-c1531aabce95" providerId="ADAL" clId="{E40962A9-F4BC-5D4C-8D78-28F34AE3805C}" dt="2022-02-15T16:38:22.173" v="502" actId="729"/>
-        <pc:sldMkLst>
-          <pc:docMk/>
-          <pc:sldMk cId="3836837614" sldId="319"/>
-        </pc:sldMkLst>
-      </pc:sldChg>
-      <pc:sldChg chg="mod modShow">
-        <pc:chgData name="Július Baráth" userId="e650c4ab-697e-4750-bd58-c1531aabce95" providerId="ADAL" clId="{E40962A9-F4BC-5D4C-8D78-28F34AE3805C}" dt="2022-02-15T16:38:30.830" v="503" actId="729"/>
-        <pc:sldMkLst>
-          <pc:docMk/>
-          <pc:sldMk cId="2443848241" sldId="320"/>
-        </pc:sldMkLst>
-      </pc:sldChg>
-      <pc:sldChg chg="modSp mod">
-        <pc:chgData name="Július Baráth" userId="e650c4ab-697e-4750-bd58-c1531aabce95" providerId="ADAL" clId="{E40962A9-F4BC-5D4C-8D78-28F34AE3805C}" dt="2022-02-15T16:45:19.946" v="576" actId="368"/>
-        <pc:sldMkLst>
-          <pc:docMk/>
-          <pc:sldMk cId="474640484" sldId="321"/>
-        </pc:sldMkLst>
-      </pc:sldChg>
-      <pc:sldMasterChg chg="delSldLayout">
-        <pc:chgData name="Július Baráth" userId="e650c4ab-697e-4750-bd58-c1531aabce95" providerId="ADAL" clId="{E40962A9-F4BC-5D4C-8D78-28F34AE3805C}" dt="2022-02-15T16:36:03.745" v="496" actId="2696"/>
-        <pc:sldMasterMkLst>
-          <pc:docMk/>
-          <pc:sldMasterMk cId="2638714038" sldId="2147483648"/>
-        </pc:sldMasterMkLst>
-        <pc:sldLayoutChg chg="del">
-          <pc:chgData name="Július Baráth" userId="e650c4ab-697e-4750-bd58-c1531aabce95" providerId="ADAL" clId="{E40962A9-F4BC-5D4C-8D78-28F34AE3805C}" dt="2022-02-15T16:36:03.745" v="496" actId="2696"/>
-          <pc:sldLayoutMkLst>
-            <pc:docMk/>
-            <pc:sldMasterMk cId="2638714038" sldId="2147483648"/>
-            <pc:sldLayoutMk cId="704331884" sldId="2147483661"/>
-          </pc:sldLayoutMkLst>
-        </pc:sldLayoutChg>
-      </pc:sldMasterChg>
-    </pc:docChg>
-  </pc:docChgLst>
-  <pc:docChgLst>
-    <pc:chgData name="Július Baráth" userId="e650c4ab-697e-4750-bd58-c1531aabce95" providerId="ADAL" clId="{FC22E533-60A8-0D48-A364-19D71A549F77}"/>
-    <pc:docChg chg="custSel modSld">
-      <pc:chgData name="Július Baráth" userId="e650c4ab-697e-4750-bd58-c1531aabce95" providerId="ADAL" clId="{FC22E533-60A8-0D48-A364-19D71A549F77}" dt="2020-02-18T12:39:08.154" v="9" actId="122"/>
-      <pc:docMkLst>
-        <pc:docMk/>
-      </pc:docMkLst>
-      <pc:sldChg chg="addSp delSp modSp">
-        <pc:chgData name="Július Baráth" userId="e650c4ab-697e-4750-bd58-c1531aabce95" providerId="ADAL" clId="{FC22E533-60A8-0D48-A364-19D71A549F77}" dt="2020-02-18T12:39:08.154" v="9" actId="122"/>
-        <pc:sldMkLst>
-          <pc:docMk/>
-          <pc:sldMk cId="4231621532" sldId="287"/>
-        </pc:sldMkLst>
-      </pc:sldChg>
-    </pc:docChg>
-  </pc:docChgLst>
-  <pc:docChgLst>
-    <pc:chgData name="Baráth, Július" userId="aebde9b9-dccc-4475-a9ac-c05e78323d7a" providerId="ADAL" clId="{609868B2-050D-5D45-9A55-620565FA2D56}"/>
-    <pc:docChg chg="undo custSel delSld modSld sldOrd">
-      <pc:chgData name="Baráth, Július" userId="aebde9b9-dccc-4475-a9ac-c05e78323d7a" providerId="ADAL" clId="{609868B2-050D-5D45-9A55-620565FA2D56}" dt="2025-02-05T10:40:30.118" v="388" actId="164"/>
-      <pc:docMkLst>
-        <pc:docMk/>
-      </pc:docMkLst>
-      <pc:sldChg chg="modSp mod">
-        <pc:chgData name="Baráth, Július" userId="aebde9b9-dccc-4475-a9ac-c05e78323d7a" providerId="ADAL" clId="{609868B2-050D-5D45-9A55-620565FA2D56}" dt="2025-02-05T08:02:52.547" v="31" actId="20577"/>
+        <pc:chgData name="Baráth, Július" userId="aebde9b9-dccc-4475-a9ac-c05e78323d7a" providerId="ADAL" clId="{4A0811C8-ED2F-505E-B787-C8270CED5046}" dt="2026-02-03T09:57:40.265" v="14" actId="15"/>
         <pc:sldMkLst>
           <pc:docMk/>
           <pc:sldMk cId="2192710277" sldId="257"/>
         </pc:sldMkLst>
         <pc:spChg chg="mod">
-          <ac:chgData name="Baráth, Július" userId="aebde9b9-dccc-4475-a9ac-c05e78323d7a" providerId="ADAL" clId="{609868B2-050D-5D45-9A55-620565FA2D56}" dt="2025-02-05T08:02:52.547" v="31" actId="20577"/>
+          <ac:chgData name="Baráth, Július" userId="aebde9b9-dccc-4475-a9ac-c05e78323d7a" providerId="ADAL" clId="{4A0811C8-ED2F-505E-B787-C8270CED5046}" dt="2026-02-03T09:57:40.265" v="14" actId="15"/>
           <ac:spMkLst>
             <pc:docMk/>
             <pc:sldMk cId="2192710277" sldId="257"/>
@@ -576,348 +211,120 @@
         </pc:spChg>
       </pc:sldChg>
       <pc:sldChg chg="modSp mod">
-        <pc:chgData name="Baráth, Július" userId="aebde9b9-dccc-4475-a9ac-c05e78323d7a" providerId="ADAL" clId="{609868B2-050D-5D45-9A55-620565FA2D56}" dt="2025-02-05T10:26:49.591" v="229" actId="1076"/>
+        <pc:chgData name="Baráth, Július" userId="aebde9b9-dccc-4475-a9ac-c05e78323d7a" providerId="ADAL" clId="{4A0811C8-ED2F-505E-B787-C8270CED5046}" dt="2026-02-03T11:48:29.273" v="556" actId="27636"/>
         <pc:sldMkLst>
           <pc:docMk/>
-          <pc:sldMk cId="4036880088" sldId="266"/>
+          <pc:sldMk cId="2345067092" sldId="258"/>
         </pc:sldMkLst>
         <pc:spChg chg="mod">
-          <ac:chgData name="Baráth, Július" userId="aebde9b9-dccc-4475-a9ac-c05e78323d7a" providerId="ADAL" clId="{609868B2-050D-5D45-9A55-620565FA2D56}" dt="2025-02-05T10:26:44.537" v="228" actId="27636"/>
+          <ac:chgData name="Baráth, Július" userId="aebde9b9-dccc-4475-a9ac-c05e78323d7a" providerId="ADAL" clId="{4A0811C8-ED2F-505E-B787-C8270CED5046}" dt="2026-02-03T11:48:29.273" v="556" actId="27636"/>
           <ac:spMkLst>
             <pc:docMk/>
-            <pc:sldMk cId="4036880088" sldId="266"/>
-            <ac:spMk id="16389" creationId="{00000000-0000-0000-0000-000000000000}"/>
-          </ac:spMkLst>
-        </pc:spChg>
-        <pc:picChg chg="mod">
-          <ac:chgData name="Baráth, Július" userId="aebde9b9-dccc-4475-a9ac-c05e78323d7a" providerId="ADAL" clId="{609868B2-050D-5D45-9A55-620565FA2D56}" dt="2025-02-05T10:26:49.591" v="229" actId="1076"/>
-          <ac:picMkLst>
-            <pc:docMk/>
-            <pc:sldMk cId="4036880088" sldId="266"/>
-            <ac:picMk id="16390" creationId="{00000000-0000-0000-0000-000000000000}"/>
-          </ac:picMkLst>
-        </pc:picChg>
-      </pc:sldChg>
-      <pc:sldChg chg="del ord">
-        <pc:chgData name="Baráth, Július" userId="aebde9b9-dccc-4475-a9ac-c05e78323d7a" providerId="ADAL" clId="{609868B2-050D-5D45-9A55-620565FA2D56}" dt="2025-02-05T10:32:26.792" v="270" actId="2696"/>
-        <pc:sldMkLst>
-          <pc:docMk/>
-          <pc:sldMk cId="1212709912" sldId="269"/>
-        </pc:sldMkLst>
-      </pc:sldChg>
-      <pc:sldChg chg="del">
-        <pc:chgData name="Baráth, Július" userId="aebde9b9-dccc-4475-a9ac-c05e78323d7a" providerId="ADAL" clId="{609868B2-050D-5D45-9A55-620565FA2D56}" dt="2025-02-05T10:31:54.086" v="268" actId="2696"/>
-        <pc:sldMkLst>
-          <pc:docMk/>
-          <pc:sldMk cId="3050482811" sldId="270"/>
-        </pc:sldMkLst>
-      </pc:sldChg>
-      <pc:sldChg chg="addSp delSp modSp mod modClrScheme chgLayout">
-        <pc:chgData name="Baráth, Július" userId="aebde9b9-dccc-4475-a9ac-c05e78323d7a" providerId="ADAL" clId="{609868B2-050D-5D45-9A55-620565FA2D56}" dt="2025-02-05T10:28:46.422" v="253" actId="14100"/>
-        <pc:sldMkLst>
-          <pc:docMk/>
-          <pc:sldMk cId="1621904223" sldId="271"/>
-        </pc:sldMkLst>
-        <pc:spChg chg="del mod">
-          <ac:chgData name="Baráth, Július" userId="aebde9b9-dccc-4475-a9ac-c05e78323d7a" providerId="ADAL" clId="{609868B2-050D-5D45-9A55-620565FA2D56}" dt="2025-02-05T10:27:53.607" v="235" actId="478"/>
-          <ac:spMkLst>
-            <pc:docMk/>
-            <pc:sldMk cId="1621904223" sldId="271"/>
-            <ac:spMk id="2" creationId="{71936A97-1181-4AD5-B703-F19582CE99C5}"/>
-          </ac:spMkLst>
-        </pc:spChg>
-        <pc:spChg chg="add mod ord">
-          <ac:chgData name="Baráth, Július" userId="aebde9b9-dccc-4475-a9ac-c05e78323d7a" providerId="ADAL" clId="{609868B2-050D-5D45-9A55-620565FA2D56}" dt="2025-02-05T10:28:46.422" v="253" actId="14100"/>
-          <ac:spMkLst>
-            <pc:docMk/>
-            <pc:sldMk cId="1621904223" sldId="271"/>
-            <ac:spMk id="5" creationId="{2DBF5AD7-8E63-55A6-535A-DFDCBFDB7CAF}"/>
-          </ac:spMkLst>
-        </pc:spChg>
-        <pc:spChg chg="mod ord">
-          <ac:chgData name="Baráth, Július" userId="aebde9b9-dccc-4475-a9ac-c05e78323d7a" providerId="ADAL" clId="{609868B2-050D-5D45-9A55-620565FA2D56}" dt="2025-02-05T10:28:04.594" v="238" actId="700"/>
-          <ac:spMkLst>
-            <pc:docMk/>
-            <pc:sldMk cId="1621904223" sldId="271"/>
-            <ac:spMk id="1028" creationId="{00000000-0000-0000-0000-000000000000}"/>
-          </ac:spMkLst>
-        </pc:spChg>
-        <pc:spChg chg="mod ord">
-          <ac:chgData name="Baráth, Július" userId="aebde9b9-dccc-4475-a9ac-c05e78323d7a" providerId="ADAL" clId="{609868B2-050D-5D45-9A55-620565FA2D56}" dt="2025-02-05T10:28:17.249" v="246" actId="6549"/>
-          <ac:spMkLst>
-            <pc:docMk/>
-            <pc:sldMk cId="1621904223" sldId="271"/>
-            <ac:spMk id="1029" creationId="{00000000-0000-0000-0000-000000000000}"/>
-          </ac:spMkLst>
-        </pc:spChg>
-        <pc:graphicFrameChg chg="del">
-          <ac:chgData name="Baráth, Július" userId="aebde9b9-dccc-4475-a9ac-c05e78323d7a" providerId="ADAL" clId="{609868B2-050D-5D45-9A55-620565FA2D56}" dt="2025-02-05T10:27:57.721" v="237" actId="478"/>
-          <ac:graphicFrameMkLst>
-            <pc:docMk/>
-            <pc:sldMk cId="1621904223" sldId="271"/>
-            <ac:graphicFrameMk id="1026" creationId="{00000000-0000-0000-0000-000000000000}"/>
-          </ac:graphicFrameMkLst>
-        </pc:graphicFrameChg>
-        <pc:picChg chg="del">
-          <ac:chgData name="Baráth, Július" userId="aebde9b9-dccc-4475-a9ac-c05e78323d7a" providerId="ADAL" clId="{609868B2-050D-5D45-9A55-620565FA2D56}" dt="2025-02-05T10:27:42.918" v="230" actId="478"/>
-          <ac:picMkLst>
-            <pc:docMk/>
-            <pc:sldMk cId="1621904223" sldId="271"/>
-            <ac:picMk id="1030" creationId="{00000000-0000-0000-0000-000000000000}"/>
-          </ac:picMkLst>
-        </pc:picChg>
-        <pc:cxnChg chg="del">
-          <ac:chgData name="Baráth, Július" userId="aebde9b9-dccc-4475-a9ac-c05e78323d7a" providerId="ADAL" clId="{609868B2-050D-5D45-9A55-620565FA2D56}" dt="2025-02-05T10:27:46.126" v="231" actId="478"/>
-          <ac:cxnSpMkLst>
-            <pc:docMk/>
-            <pc:sldMk cId="1621904223" sldId="271"/>
-            <ac:cxnSpMk id="3" creationId="{00000000-0000-0000-0000-000000000000}"/>
-          </ac:cxnSpMkLst>
-        </pc:cxnChg>
-        <pc:cxnChg chg="del">
-          <ac:chgData name="Baráth, Július" userId="aebde9b9-dccc-4475-a9ac-c05e78323d7a" providerId="ADAL" clId="{609868B2-050D-5D45-9A55-620565FA2D56}" dt="2025-02-05T10:27:47.265" v="232" actId="478"/>
-          <ac:cxnSpMkLst>
-            <pc:docMk/>
-            <pc:sldMk cId="1621904223" sldId="271"/>
-            <ac:cxnSpMk id="9" creationId="{00000000-0000-0000-0000-000000000000}"/>
-          </ac:cxnSpMkLst>
-        </pc:cxnChg>
-        <pc:cxnChg chg="del">
-          <ac:chgData name="Baráth, Július" userId="aebde9b9-dccc-4475-a9ac-c05e78323d7a" providerId="ADAL" clId="{609868B2-050D-5D45-9A55-620565FA2D56}" dt="2025-02-05T10:27:55.156" v="236" actId="478"/>
-          <ac:cxnSpMkLst>
-            <pc:docMk/>
-            <pc:sldMk cId="1621904223" sldId="271"/>
-            <ac:cxnSpMk id="11" creationId="{00000000-0000-0000-0000-000000000000}"/>
-          </ac:cxnSpMkLst>
-        </pc:cxnChg>
-        <pc:cxnChg chg="del">
-          <ac:chgData name="Baráth, Július" userId="aebde9b9-dccc-4475-a9ac-c05e78323d7a" providerId="ADAL" clId="{609868B2-050D-5D45-9A55-620565FA2D56}" dt="2025-02-05T10:27:49.752" v="233" actId="478"/>
-          <ac:cxnSpMkLst>
-            <pc:docMk/>
-            <pc:sldMk cId="1621904223" sldId="271"/>
-            <ac:cxnSpMk id="14" creationId="{00000000-0000-0000-0000-000000000000}"/>
-          </ac:cxnSpMkLst>
-        </pc:cxnChg>
-      </pc:sldChg>
-      <pc:sldChg chg="modSp mod">
-        <pc:chgData name="Baráth, Július" userId="aebde9b9-dccc-4475-a9ac-c05e78323d7a" providerId="ADAL" clId="{609868B2-050D-5D45-9A55-620565FA2D56}" dt="2025-02-05T10:30:15.256" v="260" actId="20577"/>
-        <pc:sldMkLst>
-          <pc:docMk/>
-          <pc:sldMk cId="836338946" sldId="272"/>
-        </pc:sldMkLst>
-        <pc:spChg chg="mod">
-          <ac:chgData name="Baráth, Július" userId="aebde9b9-dccc-4475-a9ac-c05e78323d7a" providerId="ADAL" clId="{609868B2-050D-5D45-9A55-620565FA2D56}" dt="2025-02-05T10:30:15.256" v="260" actId="20577"/>
-          <ac:spMkLst>
-            <pc:docMk/>
-            <pc:sldMk cId="836338946" sldId="272"/>
-            <ac:spMk id="21508" creationId="{00000000-0000-0000-0000-000000000000}"/>
-          </ac:spMkLst>
-        </pc:spChg>
-        <pc:spChg chg="mod">
-          <ac:chgData name="Baráth, Július" userId="aebde9b9-dccc-4475-a9ac-c05e78323d7a" providerId="ADAL" clId="{609868B2-050D-5D45-9A55-620565FA2D56}" dt="2025-02-05T10:30:06.811" v="257" actId="15"/>
-          <ac:spMkLst>
-            <pc:docMk/>
-            <pc:sldMk cId="836338946" sldId="272"/>
-            <ac:spMk id="21509" creationId="{00000000-0000-0000-0000-000000000000}"/>
-          </ac:spMkLst>
-        </pc:spChg>
-      </pc:sldChg>
-      <pc:sldChg chg="addSp delSp modSp mod modClrScheme chgLayout">
-        <pc:chgData name="Baráth, Július" userId="aebde9b9-dccc-4475-a9ac-c05e78323d7a" providerId="ADAL" clId="{609868B2-050D-5D45-9A55-620565FA2D56}" dt="2025-02-05T10:31:29.939" v="267" actId="20577"/>
-        <pc:sldMkLst>
-          <pc:docMk/>
-          <pc:sldMk cId="32605011" sldId="274"/>
-        </pc:sldMkLst>
-        <pc:spChg chg="add mod ord">
-          <ac:chgData name="Baráth, Július" userId="aebde9b9-dccc-4475-a9ac-c05e78323d7a" providerId="ADAL" clId="{609868B2-050D-5D45-9A55-620565FA2D56}" dt="2025-02-05T10:31:25.739" v="265" actId="21"/>
-          <ac:spMkLst>
-            <pc:docMk/>
-            <pc:sldMk cId="32605011" sldId="274"/>
-            <ac:spMk id="3" creationId="{53832DD1-125B-6997-C57B-E946D64247F7}"/>
-          </ac:spMkLst>
-        </pc:spChg>
-        <pc:spChg chg="mod ord">
-          <ac:chgData name="Baráth, Július" userId="aebde9b9-dccc-4475-a9ac-c05e78323d7a" providerId="ADAL" clId="{609868B2-050D-5D45-9A55-620565FA2D56}" dt="2025-02-05T10:31:19.504" v="263" actId="700"/>
-          <ac:spMkLst>
-            <pc:docMk/>
-            <pc:sldMk cId="32605011" sldId="274"/>
-            <ac:spMk id="3076" creationId="{00000000-0000-0000-0000-000000000000}"/>
-          </ac:spMkLst>
-        </pc:spChg>
-        <pc:spChg chg="mod ord">
-          <ac:chgData name="Baráth, Július" userId="aebde9b9-dccc-4475-a9ac-c05e78323d7a" providerId="ADAL" clId="{609868B2-050D-5D45-9A55-620565FA2D56}" dt="2025-02-05T10:31:29.939" v="267" actId="20577"/>
-          <ac:spMkLst>
-            <pc:docMk/>
-            <pc:sldMk cId="32605011" sldId="274"/>
-            <ac:spMk id="3077" creationId="{00000000-0000-0000-0000-000000000000}"/>
-          </ac:spMkLst>
-        </pc:spChg>
-        <pc:graphicFrameChg chg="del">
-          <ac:chgData name="Baráth, Július" userId="aebde9b9-dccc-4475-a9ac-c05e78323d7a" providerId="ADAL" clId="{609868B2-050D-5D45-9A55-620565FA2D56}" dt="2025-02-05T10:31:14.532" v="262" actId="478"/>
-          <ac:graphicFrameMkLst>
-            <pc:docMk/>
-            <pc:sldMk cId="32605011" sldId="274"/>
-            <ac:graphicFrameMk id="3074" creationId="{00000000-0000-0000-0000-000000000000}"/>
-          </ac:graphicFrameMkLst>
-        </pc:graphicFrameChg>
-        <pc:picChg chg="del">
-          <ac:chgData name="Baráth, Július" userId="aebde9b9-dccc-4475-a9ac-c05e78323d7a" providerId="ADAL" clId="{609868B2-050D-5D45-9A55-620565FA2D56}" dt="2025-02-05T10:31:11.848" v="261" actId="478"/>
-          <ac:picMkLst>
-            <pc:docMk/>
-            <pc:sldMk cId="32605011" sldId="274"/>
-            <ac:picMk id="2" creationId="{00000000-0000-0000-0000-000000000000}"/>
-          </ac:picMkLst>
-        </pc:picChg>
-      </pc:sldChg>
-      <pc:sldChg chg="modSp mod">
-        <pc:chgData name="Baráth, Július" userId="aebde9b9-dccc-4475-a9ac-c05e78323d7a" providerId="ADAL" clId="{609868B2-050D-5D45-9A55-620565FA2D56}" dt="2025-02-05T10:33:22.605" v="272" actId="20577"/>
-        <pc:sldMkLst>
-          <pc:docMk/>
-          <pc:sldMk cId="512124060" sldId="277"/>
-        </pc:sldMkLst>
-        <pc:spChg chg="mod">
-          <ac:chgData name="Baráth, Július" userId="aebde9b9-dccc-4475-a9ac-c05e78323d7a" providerId="ADAL" clId="{609868B2-050D-5D45-9A55-620565FA2D56}" dt="2025-02-05T10:33:22.605" v="272" actId="20577"/>
-          <ac:spMkLst>
-            <pc:docMk/>
-            <pc:sldMk cId="512124060" sldId="277"/>
-            <ac:spMk id="6" creationId="{A8ACDCBB-6AB6-4168-9D41-9480C9C157F3}"/>
+            <pc:sldMk cId="2345067092" sldId="258"/>
+            <ac:spMk id="3" creationId="{695E7A34-BAD0-FD4B-88EE-A80002625D51}"/>
           </ac:spMkLst>
         </pc:spChg>
       </pc:sldChg>
       <pc:sldChg chg="addSp modSp mod">
-        <pc:chgData name="Baráth, Július" userId="aebde9b9-dccc-4475-a9ac-c05e78323d7a" providerId="ADAL" clId="{609868B2-050D-5D45-9A55-620565FA2D56}" dt="2025-02-05T10:34:44.350" v="294" actId="164"/>
+        <pc:chgData name="Baráth, Július" userId="aebde9b9-dccc-4475-a9ac-c05e78323d7a" providerId="ADAL" clId="{4A0811C8-ED2F-505E-B787-C8270CED5046}" dt="2026-02-03T11:49:49.011" v="566" actId="1076"/>
         <pc:sldMkLst>
           <pc:docMk/>
-          <pc:sldMk cId="3215213909" sldId="281"/>
+          <pc:sldMk cId="2830035912" sldId="259"/>
         </pc:sldMkLst>
         <pc:spChg chg="add mod">
-          <ac:chgData name="Baráth, Július" userId="aebde9b9-dccc-4475-a9ac-c05e78323d7a" providerId="ADAL" clId="{609868B2-050D-5D45-9A55-620565FA2D56}" dt="2025-02-05T10:34:44.350" v="294" actId="164"/>
+          <ac:chgData name="Baráth, Július" userId="aebde9b9-dccc-4475-a9ac-c05e78323d7a" providerId="ADAL" clId="{4A0811C8-ED2F-505E-B787-C8270CED5046}" dt="2026-02-03T11:49:41.447" v="563" actId="1076"/>
           <ac:spMkLst>
             <pc:docMk/>
-            <pc:sldMk cId="3215213909" sldId="281"/>
-            <ac:spMk id="7" creationId="{90D99940-9123-4581-D9AC-BBE8F9D94D6C}"/>
+            <pc:sldMk cId="2830035912" sldId="259"/>
+            <ac:spMk id="3" creationId="{FD4062D0-D8A9-5393-FCF0-EE033298B0DD}"/>
+          </ac:spMkLst>
+        </pc:spChg>
+        <pc:picChg chg="mod">
+          <ac:chgData name="Baráth, Július" userId="aebde9b9-dccc-4475-a9ac-c05e78323d7a" providerId="ADAL" clId="{4A0811C8-ED2F-505E-B787-C8270CED5046}" dt="2026-02-03T11:49:49.011" v="566" actId="1076"/>
+          <ac:picMkLst>
+            <pc:docMk/>
+            <pc:sldMk cId="2830035912" sldId="259"/>
+            <ac:picMk id="11" creationId="{00000000-0000-0000-0000-000000000000}"/>
+          </ac:picMkLst>
+        </pc:picChg>
+      </pc:sldChg>
+      <pc:sldChg chg="modSp">
+        <pc:chgData name="Baráth, Július" userId="aebde9b9-dccc-4475-a9ac-c05e78323d7a" providerId="ADAL" clId="{4A0811C8-ED2F-505E-B787-C8270CED5046}" dt="2026-02-03T11:50:35.132" v="568" actId="14100"/>
+        <pc:sldMkLst>
+          <pc:docMk/>
+          <pc:sldMk cId="334612787" sldId="261"/>
+        </pc:sldMkLst>
+        <pc:spChg chg="mod">
+          <ac:chgData name="Baráth, Július" userId="aebde9b9-dccc-4475-a9ac-c05e78323d7a" providerId="ADAL" clId="{4A0811C8-ED2F-505E-B787-C8270CED5046}" dt="2026-02-03T11:50:35.132" v="568" actId="14100"/>
+          <ac:spMkLst>
+            <pc:docMk/>
+            <pc:sldMk cId="334612787" sldId="261"/>
+            <ac:spMk id="11272" creationId="{00000000-0000-0000-0000-000000000000}"/>
+          </ac:spMkLst>
+        </pc:spChg>
+      </pc:sldChg>
+      <pc:sldChg chg="modSp mod">
+        <pc:chgData name="Baráth, Július" userId="aebde9b9-dccc-4475-a9ac-c05e78323d7a" providerId="ADAL" clId="{4A0811C8-ED2F-505E-B787-C8270CED5046}" dt="2026-02-03T10:00:40.875" v="25" actId="20577"/>
+        <pc:sldMkLst>
+          <pc:docMk/>
+          <pc:sldMk cId="3347599706" sldId="263"/>
+        </pc:sldMkLst>
+        <pc:spChg chg="mod">
+          <ac:chgData name="Baráth, Július" userId="aebde9b9-dccc-4475-a9ac-c05e78323d7a" providerId="ADAL" clId="{4A0811C8-ED2F-505E-B787-C8270CED5046}" dt="2026-02-03T10:00:40.875" v="25" actId="20577"/>
+          <ac:spMkLst>
+            <pc:docMk/>
+            <pc:sldMk cId="3347599706" sldId="263"/>
+            <ac:spMk id="3" creationId="{00000000-0000-0000-0000-000000000000}"/>
+          </ac:spMkLst>
+        </pc:spChg>
+      </pc:sldChg>
+      <pc:sldChg chg="addSp delSp modSp mod">
+        <pc:chgData name="Baráth, Július" userId="aebde9b9-dccc-4475-a9ac-c05e78323d7a" providerId="ADAL" clId="{4A0811C8-ED2F-505E-B787-C8270CED5046}" dt="2026-02-03T10:47:25.906" v="299" actId="20577"/>
+        <pc:sldMkLst>
+          <pc:docMk/>
+          <pc:sldMk cId="2459821752" sldId="288"/>
+        </pc:sldMkLst>
+        <pc:spChg chg="mod">
+          <ac:chgData name="Baráth, Július" userId="aebde9b9-dccc-4475-a9ac-c05e78323d7a" providerId="ADAL" clId="{4A0811C8-ED2F-505E-B787-C8270CED5046}" dt="2026-02-03T10:47:25.906" v="299" actId="20577"/>
+          <ac:spMkLst>
+            <pc:docMk/>
+            <pc:sldMk cId="2459821752" sldId="288"/>
+            <ac:spMk id="3" creationId="{00000000-0000-0000-0000-000000000000}"/>
+          </ac:spMkLst>
+        </pc:spChg>
+        <pc:spChg chg="add del mod">
+          <ac:chgData name="Baráth, Július" userId="aebde9b9-dccc-4475-a9ac-c05e78323d7a" providerId="ADAL" clId="{4A0811C8-ED2F-505E-B787-C8270CED5046}" dt="2026-02-03T10:29:09.731" v="116"/>
+          <ac:spMkLst>
+            <pc:docMk/>
+            <pc:sldMk cId="2459821752" sldId="288"/>
+            <ac:spMk id="5" creationId="{2C399BD9-9DEA-10E2-E161-5C889833B7C6}"/>
           </ac:spMkLst>
         </pc:spChg>
         <pc:spChg chg="add mod">
-          <ac:chgData name="Baráth, Július" userId="aebde9b9-dccc-4475-a9ac-c05e78323d7a" providerId="ADAL" clId="{609868B2-050D-5D45-9A55-620565FA2D56}" dt="2025-02-05T10:34:44.350" v="294" actId="164"/>
+          <ac:chgData name="Baráth, Július" userId="aebde9b9-dccc-4475-a9ac-c05e78323d7a" providerId="ADAL" clId="{4A0811C8-ED2F-505E-B787-C8270CED5046}" dt="2026-02-03T10:28:59.728" v="113"/>
           <ac:spMkLst>
             <pc:docMk/>
-            <pc:sldMk cId="3215213909" sldId="281"/>
-            <ac:spMk id="8" creationId="{9C641B73-9397-2D5D-2C98-501BC496826F}"/>
+            <pc:sldMk cId="2459821752" sldId="288"/>
+            <ac:spMk id="6" creationId="{150CBCA0-5B40-FD02-4719-F8721FCDBF86}"/>
           </ac:spMkLst>
         </pc:spChg>
-        <pc:grpChg chg="add mod">
-          <ac:chgData name="Baráth, Július" userId="aebde9b9-dccc-4475-a9ac-c05e78323d7a" providerId="ADAL" clId="{609868B2-050D-5D45-9A55-620565FA2D56}" dt="2025-02-05T10:34:44.350" v="294" actId="164"/>
-          <ac:grpSpMkLst>
-            <pc:docMk/>
-            <pc:sldMk cId="3215213909" sldId="281"/>
-            <ac:grpSpMk id="9" creationId="{C10C6C14-C282-05BE-4E23-936782880D70}"/>
-          </ac:grpSpMkLst>
-        </pc:grpChg>
-        <pc:picChg chg="mod">
-          <ac:chgData name="Baráth, Július" userId="aebde9b9-dccc-4475-a9ac-c05e78323d7a" providerId="ADAL" clId="{609868B2-050D-5D45-9A55-620565FA2D56}" dt="2025-02-05T10:34:44.350" v="294" actId="164"/>
-          <ac:picMkLst>
-            <pc:docMk/>
-            <pc:sldMk cId="3215213909" sldId="281"/>
-            <ac:picMk id="28677" creationId="{00000000-0000-0000-0000-000000000000}"/>
-          </ac:picMkLst>
-        </pc:picChg>
       </pc:sldChg>
-      <pc:sldChg chg="addSp modSp mod">
-        <pc:chgData name="Baráth, Július" userId="aebde9b9-dccc-4475-a9ac-c05e78323d7a" providerId="ADAL" clId="{609868B2-050D-5D45-9A55-620565FA2D56}" dt="2025-02-05T10:40:30.118" v="388" actId="164"/>
-        <pc:sldMkLst>
-          <pc:docMk/>
-          <pc:sldMk cId="2858765742" sldId="283"/>
-        </pc:sldMkLst>
-        <pc:spChg chg="add mod">
-          <ac:chgData name="Baráth, Július" userId="aebde9b9-dccc-4475-a9ac-c05e78323d7a" providerId="ADAL" clId="{609868B2-050D-5D45-9A55-620565FA2D56}" dt="2025-02-05T10:40:30.118" v="388" actId="164"/>
-          <ac:spMkLst>
-            <pc:docMk/>
-            <pc:sldMk cId="2858765742" sldId="283"/>
-            <ac:spMk id="2" creationId="{AA08DD03-6F7E-E165-9B09-4FFA6AF1A614}"/>
-          </ac:spMkLst>
-        </pc:spChg>
-        <pc:spChg chg="add mod">
-          <ac:chgData name="Baráth, Július" userId="aebde9b9-dccc-4475-a9ac-c05e78323d7a" providerId="ADAL" clId="{609868B2-050D-5D45-9A55-620565FA2D56}" dt="2025-02-05T10:40:30.118" v="388" actId="164"/>
-          <ac:spMkLst>
-            <pc:docMk/>
-            <pc:sldMk cId="2858765742" sldId="283"/>
-            <ac:spMk id="3" creationId="{2724EDD8-0498-1A87-DB3B-E67B85440994}"/>
-          </ac:spMkLst>
-        </pc:spChg>
-        <pc:spChg chg="add mod">
-          <ac:chgData name="Baráth, Július" userId="aebde9b9-dccc-4475-a9ac-c05e78323d7a" providerId="ADAL" clId="{609868B2-050D-5D45-9A55-620565FA2D56}" dt="2025-02-05T10:40:30.118" v="388" actId="164"/>
-          <ac:spMkLst>
-            <pc:docMk/>
-            <pc:sldMk cId="2858765742" sldId="283"/>
-            <ac:spMk id="4" creationId="{4AA595C6-A7B9-D7AE-7165-372D758F681A}"/>
-          </ac:spMkLst>
-        </pc:spChg>
-        <pc:spChg chg="add mod">
-          <ac:chgData name="Baráth, Július" userId="aebde9b9-dccc-4475-a9ac-c05e78323d7a" providerId="ADAL" clId="{609868B2-050D-5D45-9A55-620565FA2D56}" dt="2025-02-05T10:40:30.118" v="388" actId="164"/>
-          <ac:spMkLst>
-            <pc:docMk/>
-            <pc:sldMk cId="2858765742" sldId="283"/>
-            <ac:spMk id="5" creationId="{DB89FE0C-2409-A354-0880-2769AFF69D3F}"/>
-          </ac:spMkLst>
-        </pc:spChg>
-        <pc:spChg chg="add mod">
-          <ac:chgData name="Baráth, Július" userId="aebde9b9-dccc-4475-a9ac-c05e78323d7a" providerId="ADAL" clId="{609868B2-050D-5D45-9A55-620565FA2D56}" dt="2025-02-05T10:40:30.118" v="388" actId="164"/>
-          <ac:spMkLst>
-            <pc:docMk/>
-            <pc:sldMk cId="2858765742" sldId="283"/>
-            <ac:spMk id="6" creationId="{7F1C8661-050A-6317-D7E6-BFB437AF9399}"/>
-          </ac:spMkLst>
-        </pc:spChg>
-        <pc:spChg chg="add mod">
-          <ac:chgData name="Baráth, Július" userId="aebde9b9-dccc-4475-a9ac-c05e78323d7a" providerId="ADAL" clId="{609868B2-050D-5D45-9A55-620565FA2D56}" dt="2025-02-05T10:40:30.118" v="388" actId="164"/>
-          <ac:spMkLst>
-            <pc:docMk/>
-            <pc:sldMk cId="2858765742" sldId="283"/>
-            <ac:spMk id="7" creationId="{4B42DE5A-DDB7-1E24-1F8B-6E2B5E3F6351}"/>
-          </ac:spMkLst>
-        </pc:spChg>
-        <pc:spChg chg="mod">
-          <ac:chgData name="Baráth, Július" userId="aebde9b9-dccc-4475-a9ac-c05e78323d7a" providerId="ADAL" clId="{609868B2-050D-5D45-9A55-620565FA2D56}" dt="2025-02-05T10:40:30.118" v="388" actId="164"/>
-          <ac:spMkLst>
-            <pc:docMk/>
-            <pc:sldMk cId="2858765742" sldId="283"/>
-            <ac:spMk id="30726" creationId="{00000000-0000-0000-0000-000000000000}"/>
-          </ac:spMkLst>
-        </pc:spChg>
-        <pc:grpChg chg="add mod">
-          <ac:chgData name="Baráth, Július" userId="aebde9b9-dccc-4475-a9ac-c05e78323d7a" providerId="ADAL" clId="{609868B2-050D-5D45-9A55-620565FA2D56}" dt="2025-02-05T10:40:30.118" v="388" actId="164"/>
-          <ac:grpSpMkLst>
-            <pc:docMk/>
-            <pc:sldMk cId="2858765742" sldId="283"/>
-            <ac:grpSpMk id="8" creationId="{50F56089-7340-88CC-8ADA-6F07E5497708}"/>
-          </ac:grpSpMkLst>
-        </pc:grpChg>
-        <pc:picChg chg="mod">
-          <ac:chgData name="Baráth, Július" userId="aebde9b9-dccc-4475-a9ac-c05e78323d7a" providerId="ADAL" clId="{609868B2-050D-5D45-9A55-620565FA2D56}" dt="2025-02-05T10:40:30.118" v="388" actId="164"/>
-          <ac:picMkLst>
-            <pc:docMk/>
-            <pc:sldMk cId="2858765742" sldId="283"/>
-            <ac:picMk id="30725" creationId="{00000000-0000-0000-0000-000000000000}"/>
-          </ac:picMkLst>
-        </pc:picChg>
-      </pc:sldChg>
-      <pc:sldChg chg="addSp modSp mod">
-        <pc:chgData name="Baráth, Július" userId="aebde9b9-dccc-4475-a9ac-c05e78323d7a" providerId="ADAL" clId="{609868B2-050D-5D45-9A55-620565FA2D56}" dt="2025-02-05T08:08:43.296" v="56" actId="1076"/>
+      <pc:sldChg chg="modSp mod">
+        <pc:chgData name="Baráth, Július" userId="aebde9b9-dccc-4475-a9ac-c05e78323d7a" providerId="ADAL" clId="{4A0811C8-ED2F-505E-B787-C8270CED5046}" dt="2026-02-03T10:54:29.284" v="317" actId="20577"/>
         <pc:sldMkLst>
           <pc:docMk/>
           <pc:sldMk cId="4088828821" sldId="290"/>
         </pc:sldMkLst>
         <pc:spChg chg="mod">
-          <ac:chgData name="Baráth, Július" userId="aebde9b9-dccc-4475-a9ac-c05e78323d7a" providerId="ADAL" clId="{609868B2-050D-5D45-9A55-620565FA2D56}" dt="2025-02-05T08:08:32.809" v="54" actId="1076"/>
+          <ac:chgData name="Baráth, Július" userId="aebde9b9-dccc-4475-a9ac-c05e78323d7a" providerId="ADAL" clId="{4A0811C8-ED2F-505E-B787-C8270CED5046}" dt="2026-02-03T10:54:29.284" v="317" actId="20577"/>
           <ac:spMkLst>
             <pc:docMk/>
             <pc:sldMk cId="4088828821" sldId="290"/>
             <ac:spMk id="2" creationId="{77AC8B45-E5C5-E444-A45D-D2726973EBAD}"/>
           </ac:spMkLst>
         </pc:spChg>
-        <pc:spChg chg="add mod">
-          <ac:chgData name="Baráth, Július" userId="aebde9b9-dccc-4475-a9ac-c05e78323d7a" providerId="ADAL" clId="{609868B2-050D-5D45-9A55-620565FA2D56}" dt="2025-02-05T08:08:43.296" v="56" actId="1076"/>
+        <pc:spChg chg="mod">
+          <ac:chgData name="Baráth, Július" userId="aebde9b9-dccc-4475-a9ac-c05e78323d7a" providerId="ADAL" clId="{4A0811C8-ED2F-505E-B787-C8270CED5046}" dt="2026-02-03T10:54:20.945" v="313" actId="403"/>
           <ac:spMkLst>
             <pc:docMk/>
             <pc:sldMk cId="4088828821" sldId="290"/>
@@ -926,13 +333,13 @@
         </pc:spChg>
       </pc:sldChg>
       <pc:sldChg chg="modSp mod">
-        <pc:chgData name="Baráth, Július" userId="aebde9b9-dccc-4475-a9ac-c05e78323d7a" providerId="ADAL" clId="{609868B2-050D-5D45-9A55-620565FA2D56}" dt="2025-02-05T08:08:57.701" v="58" actId="20577"/>
+        <pc:chgData name="Baráth, Július" userId="aebde9b9-dccc-4475-a9ac-c05e78323d7a" providerId="ADAL" clId="{4A0811C8-ED2F-505E-B787-C8270CED5046}" dt="2026-02-03T10:03:51.624" v="27" actId="1076"/>
         <pc:sldMkLst>
           <pc:docMk/>
           <pc:sldMk cId="2068648163" sldId="291"/>
         </pc:sldMkLst>
         <pc:spChg chg="mod">
-          <ac:chgData name="Baráth, Július" userId="aebde9b9-dccc-4475-a9ac-c05e78323d7a" providerId="ADAL" clId="{609868B2-050D-5D45-9A55-620565FA2D56}" dt="2025-02-05T08:08:57.701" v="58" actId="20577"/>
+          <ac:chgData name="Baráth, Július" userId="aebde9b9-dccc-4475-a9ac-c05e78323d7a" providerId="ADAL" clId="{4A0811C8-ED2F-505E-B787-C8270CED5046}" dt="2026-02-03T10:03:51.624" v="27" actId="1076"/>
           <ac:spMkLst>
             <pc:docMk/>
             <pc:sldMk cId="2068648163" sldId="291"/>
@@ -941,504 +348,411 @@
         </pc:spChg>
       </pc:sldChg>
       <pc:sldChg chg="modSp mod">
-        <pc:chgData name="Baráth, Július" userId="aebde9b9-dccc-4475-a9ac-c05e78323d7a" providerId="ADAL" clId="{609868B2-050D-5D45-9A55-620565FA2D56}" dt="2025-02-05T08:10:41.265" v="60" actId="113"/>
+        <pc:chgData name="Baráth, Július" userId="aebde9b9-dccc-4475-a9ac-c05e78323d7a" providerId="ADAL" clId="{4A0811C8-ED2F-505E-B787-C8270CED5046}" dt="2026-02-03T10:04:07.524" v="30" actId="27636"/>
         <pc:sldMkLst>
           <pc:docMk/>
-          <pc:sldMk cId="1024189591" sldId="301"/>
+          <pc:sldMk cId="2176794767" sldId="292"/>
         </pc:sldMkLst>
         <pc:spChg chg="mod">
-          <ac:chgData name="Baráth, Július" userId="aebde9b9-dccc-4475-a9ac-c05e78323d7a" providerId="ADAL" clId="{609868B2-050D-5D45-9A55-620565FA2D56}" dt="2025-02-05T08:10:41.265" v="60" actId="113"/>
+          <ac:chgData name="Baráth, Július" userId="aebde9b9-dccc-4475-a9ac-c05e78323d7a" providerId="ADAL" clId="{4A0811C8-ED2F-505E-B787-C8270CED5046}" dt="2026-02-03T10:03:27.848" v="26" actId="113"/>
           <ac:spMkLst>
             <pc:docMk/>
-            <pc:sldMk cId="1024189591" sldId="301"/>
-            <ac:spMk id="27652" creationId="{00000000-0000-0000-0000-000000000000}"/>
+            <pc:sldMk cId="2176794767" sldId="292"/>
+            <ac:spMk id="2" creationId="{00000000-0000-0000-0000-000000000000}"/>
+          </ac:spMkLst>
+        </pc:spChg>
+        <pc:spChg chg="mod">
+          <ac:chgData name="Baráth, Július" userId="aebde9b9-dccc-4475-a9ac-c05e78323d7a" providerId="ADAL" clId="{4A0811C8-ED2F-505E-B787-C8270CED5046}" dt="2026-02-03T10:04:07.524" v="30" actId="27636"/>
+          <ac:spMkLst>
+            <pc:docMk/>
+            <pc:sldMk cId="2176794767" sldId="292"/>
+            <ac:spMk id="4" creationId="{00000000-0000-0000-0000-000000000000}"/>
+          </ac:spMkLst>
+        </pc:spChg>
+      </pc:sldChg>
+      <pc:sldChg chg="addSp modSp mod">
+        <pc:chgData name="Baráth, Július" userId="aebde9b9-dccc-4475-a9ac-c05e78323d7a" providerId="ADAL" clId="{4A0811C8-ED2F-505E-B787-C8270CED5046}" dt="2026-02-03T11:06:40.153" v="460" actId="368"/>
+        <pc:sldMkLst>
+          <pc:docMk/>
+          <pc:sldMk cId="3256878633" sldId="297"/>
+        </pc:sldMkLst>
+        <pc:spChg chg="mod">
+          <ac:chgData name="Baráth, Július" userId="aebde9b9-dccc-4475-a9ac-c05e78323d7a" providerId="ADAL" clId="{4A0811C8-ED2F-505E-B787-C8270CED5046}" dt="2026-02-03T11:06:31.575" v="459" actId="27636"/>
+          <ac:spMkLst>
+            <pc:docMk/>
+            <pc:sldMk cId="3256878633" sldId="297"/>
+            <ac:spMk id="2" creationId="{22124CC1-E539-9D43-BE9F-145005443BEF}"/>
+          </ac:spMkLst>
+        </pc:spChg>
+        <pc:spChg chg="add">
+          <ac:chgData name="Baráth, Július" userId="aebde9b9-dccc-4475-a9ac-c05e78323d7a" providerId="ADAL" clId="{4A0811C8-ED2F-505E-B787-C8270CED5046}" dt="2026-02-03T11:04:32.051" v="425"/>
+          <ac:spMkLst>
+            <pc:docMk/>
+            <pc:sldMk cId="3256878633" sldId="297"/>
+            <ac:spMk id="3" creationId="{A9898511-FB6F-BCC4-00BC-B069AE8214A5}"/>
+          </ac:spMkLst>
+        </pc:spChg>
+        <pc:spChg chg="mod">
+          <ac:chgData name="Baráth, Július" userId="aebde9b9-dccc-4475-a9ac-c05e78323d7a" providerId="ADAL" clId="{4A0811C8-ED2F-505E-B787-C8270CED5046}" dt="2026-02-03T11:06:40.153" v="460" actId="368"/>
+          <ac:spMkLst>
+            <pc:docMk/>
+            <pc:sldMk cId="3256878633" sldId="297"/>
+            <ac:spMk id="23556" creationId="{00000000-0000-0000-0000-000000000000}"/>
+          </ac:spMkLst>
+        </pc:spChg>
+      </pc:sldChg>
+      <pc:sldChg chg="addSp modSp mod">
+        <pc:chgData name="Baráth, Július" userId="aebde9b9-dccc-4475-a9ac-c05e78323d7a" providerId="ADAL" clId="{4A0811C8-ED2F-505E-B787-C8270CED5046}" dt="2026-02-03T11:03:02.785" v="415" actId="20577"/>
+        <pc:sldMkLst>
+          <pc:docMk/>
+          <pc:sldMk cId="887361340" sldId="298"/>
+        </pc:sldMkLst>
+        <pc:spChg chg="add mod">
+          <ac:chgData name="Baráth, Július" userId="aebde9b9-dccc-4475-a9ac-c05e78323d7a" providerId="ADAL" clId="{4A0811C8-ED2F-505E-B787-C8270CED5046}" dt="2026-02-03T11:03:02.785" v="415" actId="20577"/>
+          <ac:spMkLst>
+            <pc:docMk/>
+            <pc:sldMk cId="887361340" sldId="298"/>
+            <ac:spMk id="2" creationId="{22D9CFC9-7A34-A25D-84B6-792F17980B5F}"/>
+          </ac:spMkLst>
+        </pc:spChg>
+        <pc:spChg chg="mod">
+          <ac:chgData name="Baráth, Július" userId="aebde9b9-dccc-4475-a9ac-c05e78323d7a" providerId="ADAL" clId="{4A0811C8-ED2F-505E-B787-C8270CED5046}" dt="2026-02-03T11:02:06.716" v="408" actId="113"/>
+          <ac:spMkLst>
+            <pc:docMk/>
+            <pc:sldMk cId="887361340" sldId="298"/>
+            <ac:spMk id="4" creationId="{2E04A82A-6BA7-1244-8440-256F60A16143}"/>
+          </ac:spMkLst>
+        </pc:spChg>
+        <pc:spChg chg="mod">
+          <ac:chgData name="Baráth, Július" userId="aebde9b9-dccc-4475-a9ac-c05e78323d7a" providerId="ADAL" clId="{4A0811C8-ED2F-505E-B787-C8270CED5046}" dt="2026-02-03T11:02:13.713" v="409" actId="1076"/>
+          <ac:spMkLst>
+            <pc:docMk/>
+            <pc:sldMk cId="887361340" sldId="298"/>
+            <ac:spMk id="24580" creationId="{00000000-0000-0000-0000-000000000000}"/>
+          </ac:spMkLst>
+        </pc:spChg>
+      </pc:sldChg>
+      <pc:sldChg chg="addSp modSp mod modClrScheme chgLayout">
+        <pc:chgData name="Baráth, Július" userId="aebde9b9-dccc-4475-a9ac-c05e78323d7a" providerId="ADAL" clId="{4A0811C8-ED2F-505E-B787-C8270CED5046}" dt="2026-02-03T11:13:01.899" v="515" actId="12"/>
+        <pc:sldMkLst>
+          <pc:docMk/>
+          <pc:sldMk cId="4070380688" sldId="300"/>
+        </pc:sldMkLst>
+        <pc:spChg chg="add mod ord">
+          <ac:chgData name="Baráth, Július" userId="aebde9b9-dccc-4475-a9ac-c05e78323d7a" providerId="ADAL" clId="{4A0811C8-ED2F-505E-B787-C8270CED5046}" dt="2026-02-03T11:13:01.899" v="515" actId="12"/>
+          <ac:spMkLst>
+            <pc:docMk/>
+            <pc:sldMk cId="4070380688" sldId="300"/>
+            <ac:spMk id="2" creationId="{6795B5F3-D4C8-C27A-C4E5-445C8779B727}"/>
+          </ac:spMkLst>
+        </pc:spChg>
+        <pc:spChg chg="mod ord">
+          <ac:chgData name="Baráth, Július" userId="aebde9b9-dccc-4475-a9ac-c05e78323d7a" providerId="ADAL" clId="{4A0811C8-ED2F-505E-B787-C8270CED5046}" dt="2026-02-03T11:12:59.440" v="514" actId="12"/>
+          <ac:spMkLst>
+            <pc:docMk/>
+            <pc:sldMk cId="4070380688" sldId="300"/>
+            <ac:spMk id="5" creationId="{00000000-0000-0000-0000-000000000000}"/>
+          </ac:spMkLst>
+        </pc:spChg>
+        <pc:spChg chg="mod ord">
+          <ac:chgData name="Baráth, Július" userId="aebde9b9-dccc-4475-a9ac-c05e78323d7a" providerId="ADAL" clId="{4A0811C8-ED2F-505E-B787-C8270CED5046}" dt="2026-02-03T11:11:42.989" v="479" actId="700"/>
+          <ac:spMkLst>
+            <pc:docMk/>
+            <pc:sldMk cId="4070380688" sldId="300"/>
+            <ac:spMk id="26627" creationId="{00000000-0000-0000-0000-000000000000}"/>
+          </ac:spMkLst>
+        </pc:spChg>
+        <pc:spChg chg="mod ord">
+          <ac:chgData name="Baráth, Július" userId="aebde9b9-dccc-4475-a9ac-c05e78323d7a" providerId="ADAL" clId="{4A0811C8-ED2F-505E-B787-C8270CED5046}" dt="2026-02-03T11:12:01.886" v="493" actId="20577"/>
+          <ac:spMkLst>
+            <pc:docMk/>
+            <pc:sldMk cId="4070380688" sldId="300"/>
+            <ac:spMk id="26628" creationId="{00000000-0000-0000-0000-000000000000}"/>
+          </ac:spMkLst>
+        </pc:spChg>
+      </pc:sldChg>
+      <pc:sldChg chg="addSp delSp modSp mod modClrScheme chgLayout">
+        <pc:chgData name="Baráth, Július" userId="aebde9b9-dccc-4475-a9ac-c05e78323d7a" providerId="ADAL" clId="{4A0811C8-ED2F-505E-B787-C8270CED5046}" dt="2026-02-03T11:42:23.968" v="549" actId="15"/>
+        <pc:sldMkLst>
+          <pc:docMk/>
+          <pc:sldMk cId="397644615" sldId="304"/>
+        </pc:sldMkLst>
+        <pc:spChg chg="add del mod">
+          <ac:chgData name="Baráth, Július" userId="aebde9b9-dccc-4475-a9ac-c05e78323d7a" providerId="ADAL" clId="{4A0811C8-ED2F-505E-B787-C8270CED5046}" dt="2026-02-03T11:40:01.712" v="526" actId="6264"/>
+          <ac:spMkLst>
+            <pc:docMk/>
+            <pc:sldMk cId="397644615" sldId="304"/>
+            <ac:spMk id="2" creationId="{E67FB9C2-574E-1BCD-B2DE-A8F40A4E67A2}"/>
+          </ac:spMkLst>
+        </pc:spChg>
+        <pc:spChg chg="add mod ord">
+          <ac:chgData name="Baráth, Július" userId="aebde9b9-dccc-4475-a9ac-c05e78323d7a" providerId="ADAL" clId="{4A0811C8-ED2F-505E-B787-C8270CED5046}" dt="2026-02-03T11:42:23.968" v="549" actId="15"/>
+          <ac:spMkLst>
+            <pc:docMk/>
+            <pc:sldMk cId="397644615" sldId="304"/>
+            <ac:spMk id="3" creationId="{C546CA57-7330-134E-82B3-A6C54F8156E0}"/>
+          </ac:spMkLst>
+        </pc:spChg>
+        <pc:spChg chg="mod ord">
+          <ac:chgData name="Baráth, Július" userId="aebde9b9-dccc-4475-a9ac-c05e78323d7a" providerId="ADAL" clId="{4A0811C8-ED2F-505E-B787-C8270CED5046}" dt="2026-02-03T11:40:11.159" v="527" actId="700"/>
+          <ac:spMkLst>
+            <pc:docMk/>
+            <pc:sldMk cId="397644615" sldId="304"/>
+            <ac:spMk id="30723" creationId="{00000000-0000-0000-0000-000000000000}"/>
+          </ac:spMkLst>
+        </pc:spChg>
+        <pc:spChg chg="del mod">
+          <ac:chgData name="Baráth, Július" userId="aebde9b9-dccc-4475-a9ac-c05e78323d7a" providerId="ADAL" clId="{4A0811C8-ED2F-505E-B787-C8270CED5046}" dt="2026-02-03T11:40:01.712" v="526" actId="6264"/>
+          <ac:spMkLst>
+            <pc:docMk/>
+            <pc:sldMk cId="397644615" sldId="304"/>
+            <ac:spMk id="30724" creationId="{00000000-0000-0000-0000-000000000000}"/>
+          </ac:spMkLst>
+        </pc:spChg>
+        <pc:spChg chg="mod ord">
+          <ac:chgData name="Baráth, Július" userId="aebde9b9-dccc-4475-a9ac-c05e78323d7a" providerId="ADAL" clId="{4A0811C8-ED2F-505E-B787-C8270CED5046}" dt="2026-02-03T11:41:28.793" v="538" actId="1076"/>
+          <ac:spMkLst>
+            <pc:docMk/>
+            <pc:sldMk cId="397644615" sldId="304"/>
+            <ac:spMk id="30725" creationId="{00000000-0000-0000-0000-000000000000}"/>
           </ac:spMkLst>
         </pc:spChg>
       </pc:sldChg>
       <pc:sldChg chg="modSp mod">
-        <pc:chgData name="Baráth, Július" userId="aebde9b9-dccc-4475-a9ac-c05e78323d7a" providerId="ADAL" clId="{609868B2-050D-5D45-9A55-620565FA2D56}" dt="2025-02-05T10:16:49.454" v="102" actId="6549"/>
+        <pc:chgData name="Baráth, Július" userId="aebde9b9-dccc-4475-a9ac-c05e78323d7a" providerId="ADAL" clId="{4A0811C8-ED2F-505E-B787-C8270CED5046}" dt="2026-02-03T11:41:58.392" v="541" actId="12"/>
         <pc:sldMkLst>
           <pc:docMk/>
-          <pc:sldMk cId="2533591585" sldId="307"/>
+          <pc:sldMk cId="4133182652" sldId="305"/>
         </pc:sldMkLst>
         <pc:spChg chg="mod">
-          <ac:chgData name="Baráth, Július" userId="aebde9b9-dccc-4475-a9ac-c05e78323d7a" providerId="ADAL" clId="{609868B2-050D-5D45-9A55-620565FA2D56}" dt="2025-02-05T10:16:49.454" v="102" actId="6549"/>
+          <ac:chgData name="Baráth, Július" userId="aebde9b9-dccc-4475-a9ac-c05e78323d7a" providerId="ADAL" clId="{4A0811C8-ED2F-505E-B787-C8270CED5046}" dt="2026-02-03T11:41:58.392" v="541" actId="12"/>
           <ac:spMkLst>
             <pc:docMk/>
-            <pc:sldMk cId="2533591585" sldId="307"/>
-            <ac:spMk id="3" creationId="{00000000-0000-0000-0000-000000000000}"/>
+            <pc:sldMk cId="4133182652" sldId="305"/>
+            <ac:spMk id="31748" creationId="{00000000-0000-0000-0000-000000000000}"/>
           </ac:spMkLst>
         </pc:spChg>
       </pc:sldChg>
-      <pc:sldChg chg="addSp modSp mod">
-        <pc:chgData name="Baráth, Július" userId="aebde9b9-dccc-4475-a9ac-c05e78323d7a" providerId="ADAL" clId="{609868B2-050D-5D45-9A55-620565FA2D56}" dt="2025-02-05T10:20:44.631" v="182" actId="164"/>
-        <pc:sldMkLst>
-          <pc:docMk/>
-          <pc:sldMk cId="2953323799" sldId="312"/>
-        </pc:sldMkLst>
-        <pc:spChg chg="add mod">
-          <ac:chgData name="Baráth, Július" userId="aebde9b9-dccc-4475-a9ac-c05e78323d7a" providerId="ADAL" clId="{609868B2-050D-5D45-9A55-620565FA2D56}" dt="2025-02-05T10:20:44.631" v="182" actId="164"/>
-          <ac:spMkLst>
-            <pc:docMk/>
-            <pc:sldMk cId="2953323799" sldId="312"/>
-            <ac:spMk id="2" creationId="{271712C1-E53B-095B-E962-82A6EBB97DD9}"/>
-          </ac:spMkLst>
-        </pc:spChg>
-        <pc:spChg chg="add mod">
-          <ac:chgData name="Baráth, Július" userId="aebde9b9-dccc-4475-a9ac-c05e78323d7a" providerId="ADAL" clId="{609868B2-050D-5D45-9A55-620565FA2D56}" dt="2025-02-05T10:20:44.631" v="182" actId="164"/>
-          <ac:spMkLst>
-            <pc:docMk/>
-            <pc:sldMk cId="2953323799" sldId="312"/>
-            <ac:spMk id="3" creationId="{92FB053B-FD9D-54C1-FD43-4177BCBCA25F}"/>
-          </ac:spMkLst>
-        </pc:spChg>
-        <pc:grpChg chg="add mod">
-          <ac:chgData name="Baráth, Július" userId="aebde9b9-dccc-4475-a9ac-c05e78323d7a" providerId="ADAL" clId="{609868B2-050D-5D45-9A55-620565FA2D56}" dt="2025-02-05T10:20:44.631" v="182" actId="164"/>
-          <ac:grpSpMkLst>
-            <pc:docMk/>
-            <pc:sldMk cId="2953323799" sldId="312"/>
-            <ac:grpSpMk id="4" creationId="{FE9A2A8D-E090-3C2D-07F6-56F40CDAC706}"/>
-          </ac:grpSpMkLst>
-        </pc:grpChg>
-        <pc:picChg chg="mod">
-          <ac:chgData name="Baráth, Július" userId="aebde9b9-dccc-4475-a9ac-c05e78323d7a" providerId="ADAL" clId="{609868B2-050D-5D45-9A55-620565FA2D56}" dt="2025-02-05T10:20:44.631" v="182" actId="164"/>
-          <ac:picMkLst>
-            <pc:docMk/>
-            <pc:sldMk cId="2953323799" sldId="312"/>
-            <ac:picMk id="17414" creationId="{00000000-0000-0000-0000-000000000000}"/>
-          </ac:picMkLst>
-        </pc:picChg>
-      </pc:sldChg>
-      <pc:sldChg chg="addSp modSp mod">
-        <pc:chgData name="Baráth, Július" userId="aebde9b9-dccc-4475-a9ac-c05e78323d7a" providerId="ADAL" clId="{609868B2-050D-5D45-9A55-620565FA2D56}" dt="2025-02-05T10:21:57.515" v="205" actId="1036"/>
-        <pc:sldMkLst>
-          <pc:docMk/>
-          <pc:sldMk cId="3914507190" sldId="314"/>
-        </pc:sldMkLst>
-        <pc:spChg chg="add mod">
-          <ac:chgData name="Baráth, Július" userId="aebde9b9-dccc-4475-a9ac-c05e78323d7a" providerId="ADAL" clId="{609868B2-050D-5D45-9A55-620565FA2D56}" dt="2025-02-05T10:21:46.074" v="204" actId="164"/>
-          <ac:spMkLst>
-            <pc:docMk/>
-            <pc:sldMk cId="3914507190" sldId="314"/>
-            <ac:spMk id="2" creationId="{15ED6D01-6038-BB0F-BF35-5887783A4CC6}"/>
-          </ac:spMkLst>
-        </pc:spChg>
-        <pc:spChg chg="add mod">
-          <ac:chgData name="Baráth, Július" userId="aebde9b9-dccc-4475-a9ac-c05e78323d7a" providerId="ADAL" clId="{609868B2-050D-5D45-9A55-620565FA2D56}" dt="2025-02-05T10:21:46.074" v="204" actId="164"/>
-          <ac:spMkLst>
-            <pc:docMk/>
-            <pc:sldMk cId="3914507190" sldId="314"/>
-            <ac:spMk id="3" creationId="{D712D3E0-55BC-EDB5-D39A-49DB4ABACE78}"/>
-          </ac:spMkLst>
-        </pc:spChg>
-        <pc:spChg chg="mod">
-          <ac:chgData name="Baráth, Július" userId="aebde9b9-dccc-4475-a9ac-c05e78323d7a" providerId="ADAL" clId="{609868B2-050D-5D45-9A55-620565FA2D56}" dt="2025-02-05T10:21:57.515" v="205" actId="1036"/>
-          <ac:spMkLst>
-            <pc:docMk/>
-            <pc:sldMk cId="3914507190" sldId="314"/>
-            <ac:spMk id="19459" creationId="{00000000-0000-0000-0000-000000000000}"/>
-          </ac:spMkLst>
-        </pc:spChg>
-        <pc:grpChg chg="add mod">
-          <ac:chgData name="Baráth, Július" userId="aebde9b9-dccc-4475-a9ac-c05e78323d7a" providerId="ADAL" clId="{609868B2-050D-5D45-9A55-620565FA2D56}" dt="2025-02-05T10:21:46.074" v="204" actId="164"/>
-          <ac:grpSpMkLst>
-            <pc:docMk/>
-            <pc:sldMk cId="3914507190" sldId="314"/>
-            <ac:grpSpMk id="4" creationId="{6EBD3982-C4B3-1B2B-9E3E-090F4A8C6940}"/>
-          </ac:grpSpMkLst>
-        </pc:grpChg>
-        <pc:picChg chg="mod">
-          <ac:chgData name="Baráth, Július" userId="aebde9b9-dccc-4475-a9ac-c05e78323d7a" providerId="ADAL" clId="{609868B2-050D-5D45-9A55-620565FA2D56}" dt="2025-02-05T10:21:46.074" v="204" actId="164"/>
-          <ac:picMkLst>
-            <pc:docMk/>
-            <pc:sldMk cId="3914507190" sldId="314"/>
-            <ac:picMk id="19462" creationId="{00000000-0000-0000-0000-000000000000}"/>
-          </ac:picMkLst>
-        </pc:picChg>
-      </pc:sldChg>
-    </pc:docChg>
-  </pc:docChgLst>
-  <pc:docChgLst>
-    <pc:chgData name="Baráth, Július" userId="aebde9b9-dccc-4475-a9ac-c05e78323d7a" providerId="ADAL" clId="{0AEE6C1F-B1CE-D84E-BBD9-8FE6BC46CE15}"/>
-    <pc:docChg chg="undo custSel modSld">
-      <pc:chgData name="Baráth, Július" userId="aebde9b9-dccc-4475-a9ac-c05e78323d7a" providerId="ADAL" clId="{0AEE6C1F-B1CE-D84E-BBD9-8FE6BC46CE15}" dt="2024-02-07T11:37:49.790" v="229" actId="113"/>
-      <pc:docMkLst>
-        <pc:docMk/>
-      </pc:docMkLst>
       <pc:sldChg chg="modSp mod">
-        <pc:chgData name="Baráth, Július" userId="aebde9b9-dccc-4475-a9ac-c05e78323d7a" providerId="ADAL" clId="{0AEE6C1F-B1CE-D84E-BBD9-8FE6BC46CE15}" dt="2024-02-07T10:32:00.602" v="20" actId="113"/>
-        <pc:sldMkLst>
-          <pc:docMk/>
-          <pc:sldMk cId="1796127561" sldId="262"/>
-        </pc:sldMkLst>
-      </pc:sldChg>
-      <pc:sldChg chg="modSp mod">
-        <pc:chgData name="Baráth, Július" userId="aebde9b9-dccc-4475-a9ac-c05e78323d7a" providerId="ADAL" clId="{0AEE6C1F-B1CE-D84E-BBD9-8FE6BC46CE15}" dt="2024-02-07T10:32:58.943" v="21" actId="113"/>
-        <pc:sldMkLst>
-          <pc:docMk/>
-          <pc:sldMk cId="3347599706" sldId="263"/>
-        </pc:sldMkLst>
-      </pc:sldChg>
-      <pc:sldChg chg="modSp mod">
-        <pc:chgData name="Baráth, Július" userId="aebde9b9-dccc-4475-a9ac-c05e78323d7a" providerId="ADAL" clId="{0AEE6C1F-B1CE-D84E-BBD9-8FE6BC46CE15}" dt="2024-02-07T10:33:29.251" v="23" actId="113"/>
-        <pc:sldMkLst>
-          <pc:docMk/>
-          <pc:sldMk cId="590433976" sldId="264"/>
-        </pc:sldMkLst>
-      </pc:sldChg>
-      <pc:sldChg chg="delSp modSp mod">
-        <pc:chgData name="Baráth, Július" userId="aebde9b9-dccc-4475-a9ac-c05e78323d7a" providerId="ADAL" clId="{0AEE6C1F-B1CE-D84E-BBD9-8FE6BC46CE15}" dt="2024-02-07T11:29:27.846" v="135" actId="478"/>
-        <pc:sldMkLst>
-          <pc:docMk/>
-          <pc:sldMk cId="1621904223" sldId="271"/>
-        </pc:sldMkLst>
-      </pc:sldChg>
-      <pc:sldChg chg="modSp mod">
-        <pc:chgData name="Baráth, Július" userId="aebde9b9-dccc-4475-a9ac-c05e78323d7a" providerId="ADAL" clId="{0AEE6C1F-B1CE-D84E-BBD9-8FE6BC46CE15}" dt="2024-02-07T11:30:37.854" v="138" actId="113"/>
-        <pc:sldMkLst>
-          <pc:docMk/>
-          <pc:sldMk cId="836338946" sldId="272"/>
-        </pc:sldMkLst>
-      </pc:sldChg>
-      <pc:sldChg chg="modSp">
-        <pc:chgData name="Baráth, Július" userId="aebde9b9-dccc-4475-a9ac-c05e78323d7a" providerId="ADAL" clId="{0AEE6C1F-B1CE-D84E-BBD9-8FE6BC46CE15}" dt="2024-02-07T11:31:11.095" v="140"/>
-        <pc:sldMkLst>
-          <pc:docMk/>
-          <pc:sldMk cId="32605011" sldId="274"/>
-        </pc:sldMkLst>
-      </pc:sldChg>
-      <pc:sldChg chg="modSp mod">
-        <pc:chgData name="Baráth, Július" userId="aebde9b9-dccc-4475-a9ac-c05e78323d7a" providerId="ADAL" clId="{0AEE6C1F-B1CE-D84E-BBD9-8FE6BC46CE15}" dt="2024-02-07T11:33:00.855" v="183" actId="20577"/>
-        <pc:sldMkLst>
-          <pc:docMk/>
-          <pc:sldMk cId="527861572" sldId="276"/>
-        </pc:sldMkLst>
-      </pc:sldChg>
-      <pc:sldChg chg="modSp mod">
-        <pc:chgData name="Baráth, Július" userId="aebde9b9-dccc-4475-a9ac-c05e78323d7a" providerId="ADAL" clId="{0AEE6C1F-B1CE-D84E-BBD9-8FE6BC46CE15}" dt="2024-02-07T11:33:50.257" v="185" actId="5793"/>
-        <pc:sldMkLst>
-          <pc:docMk/>
-          <pc:sldMk cId="2893083369" sldId="280"/>
-        </pc:sldMkLst>
-      </pc:sldChg>
-      <pc:sldChg chg="addSp modSp mod">
-        <pc:chgData name="Baráth, Július" userId="aebde9b9-dccc-4475-a9ac-c05e78323d7a" providerId="ADAL" clId="{0AEE6C1F-B1CE-D84E-BBD9-8FE6BC46CE15}" dt="2024-02-07T11:36:39.919" v="227" actId="1076"/>
-        <pc:sldMkLst>
-          <pc:docMk/>
-          <pc:sldMk cId="3215213909" sldId="281"/>
-        </pc:sldMkLst>
-      </pc:sldChg>
-      <pc:sldChg chg="modSp mod">
-        <pc:chgData name="Baráth, Július" userId="aebde9b9-dccc-4475-a9ac-c05e78323d7a" providerId="ADAL" clId="{0AEE6C1F-B1CE-D84E-BBD9-8FE6BC46CE15}" dt="2024-02-07T11:37:49.790" v="229" actId="113"/>
-        <pc:sldMkLst>
-          <pc:docMk/>
-          <pc:sldMk cId="1415647731" sldId="286"/>
-        </pc:sldMkLst>
-      </pc:sldChg>
-      <pc:sldChg chg="modSp mod">
-        <pc:chgData name="Baráth, Július" userId="aebde9b9-dccc-4475-a9ac-c05e78323d7a" providerId="ADAL" clId="{0AEE6C1F-B1CE-D84E-BBD9-8FE6BC46CE15}" dt="2024-02-07T10:36:45.808" v="25" actId="27636"/>
-        <pc:sldMkLst>
-          <pc:docMk/>
-          <pc:sldMk cId="4088828821" sldId="290"/>
-        </pc:sldMkLst>
-      </pc:sldChg>
-      <pc:sldChg chg="modSp mod">
-        <pc:chgData name="Baráth, Július" userId="aebde9b9-dccc-4475-a9ac-c05e78323d7a" providerId="ADAL" clId="{0AEE6C1F-B1CE-D84E-BBD9-8FE6BC46CE15}" dt="2024-02-07T10:38:15.583" v="46" actId="20577"/>
-        <pc:sldMkLst>
-          <pc:docMk/>
-          <pc:sldMk cId="2068648163" sldId="291"/>
-        </pc:sldMkLst>
-      </pc:sldChg>
-      <pc:sldChg chg="modSp mod">
-        <pc:chgData name="Baráth, Július" userId="aebde9b9-dccc-4475-a9ac-c05e78323d7a" providerId="ADAL" clId="{0AEE6C1F-B1CE-D84E-BBD9-8FE6BC46CE15}" dt="2024-02-07T10:39:50.117" v="77" actId="20577"/>
-        <pc:sldMkLst>
-          <pc:docMk/>
-          <pc:sldMk cId="1152080686" sldId="293"/>
-        </pc:sldMkLst>
-      </pc:sldChg>
-      <pc:sldChg chg="addSp modSp mod">
-        <pc:chgData name="Baráth, Július" userId="aebde9b9-dccc-4475-a9ac-c05e78323d7a" providerId="ADAL" clId="{0AEE6C1F-B1CE-D84E-BBD9-8FE6BC46CE15}" dt="2024-02-07T10:54:57.205" v="122" actId="1076"/>
+        <pc:chgData name="Baráth, Július" userId="aebde9b9-dccc-4475-a9ac-c05e78323d7a" providerId="ADAL" clId="{4A0811C8-ED2F-505E-B787-C8270CED5046}" dt="2026-02-03T10:24:22.594" v="89"/>
         <pc:sldMkLst>
           <pc:docMk/>
           <pc:sldMk cId="3235063092" sldId="306"/>
         </pc:sldMkLst>
+        <pc:spChg chg="mod">
+          <ac:chgData name="Baráth, Július" userId="aebde9b9-dccc-4475-a9ac-c05e78323d7a" providerId="ADAL" clId="{4A0811C8-ED2F-505E-B787-C8270CED5046}" dt="2026-02-03T10:15:00.675" v="68"/>
+          <ac:spMkLst>
+            <pc:docMk/>
+            <pc:sldMk cId="3235063092" sldId="306"/>
+            <ac:spMk id="2" creationId="{00000000-0000-0000-0000-000000000000}"/>
+          </ac:spMkLst>
+        </pc:spChg>
+        <pc:spChg chg="mod">
+          <ac:chgData name="Baráth, Július" userId="aebde9b9-dccc-4475-a9ac-c05e78323d7a" providerId="ADAL" clId="{4A0811C8-ED2F-505E-B787-C8270CED5046}" dt="2026-02-03T10:17:45.450" v="87" actId="27636"/>
+          <ac:spMkLst>
+            <pc:docMk/>
+            <pc:sldMk cId="3235063092" sldId="306"/>
+            <ac:spMk id="3" creationId="{00000000-0000-0000-0000-000000000000}"/>
+          </ac:spMkLst>
+        </pc:spChg>
+        <pc:spChg chg="mod">
+          <ac:chgData name="Baráth, Július" userId="aebde9b9-dccc-4475-a9ac-c05e78323d7a" providerId="ADAL" clId="{4A0811C8-ED2F-505E-B787-C8270CED5046}" dt="2026-02-03T10:24:22.594" v="89"/>
+          <ac:spMkLst>
+            <pc:docMk/>
+            <pc:sldMk cId="3235063092" sldId="306"/>
+            <ac:spMk id="6" creationId="{1996FD82-8067-2950-8203-05A0703821E7}"/>
+          </ac:spMkLst>
+        </pc:spChg>
       </pc:sldChg>
-      <pc:sldChg chg="modSp mod">
-        <pc:chgData name="Baráth, Július" userId="aebde9b9-dccc-4475-a9ac-c05e78323d7a" providerId="ADAL" clId="{0AEE6C1F-B1CE-D84E-BBD9-8FE6BC46CE15}" dt="2024-02-07T11:28:26.532" v="131" actId="20577"/>
+      <pc:sldChg chg="del">
+        <pc:chgData name="Baráth, Július" userId="aebde9b9-dccc-4475-a9ac-c05e78323d7a" providerId="ADAL" clId="{4A0811C8-ED2F-505E-B787-C8270CED5046}" dt="2026-02-03T11:43:55.098" v="550" actId="2696"/>
         <pc:sldMkLst>
           <pc:docMk/>
           <pc:sldMk cId="3109471324" sldId="309"/>
         </pc:sldMkLst>
       </pc:sldChg>
       <pc:sldChg chg="modSp mod">
-        <pc:chgData name="Baráth, Július" userId="aebde9b9-dccc-4475-a9ac-c05e78323d7a" providerId="ADAL" clId="{0AEE6C1F-B1CE-D84E-BBD9-8FE6BC46CE15}" dt="2024-02-07T11:31:52.783" v="162" actId="20577"/>
+        <pc:chgData name="Baráth, Július" userId="aebde9b9-dccc-4475-a9ac-c05e78323d7a" providerId="ADAL" clId="{4A0811C8-ED2F-505E-B787-C8270CED5046}" dt="2026-02-03T11:37:18.778" v="517" actId="113"/>
+        <pc:sldMkLst>
+          <pc:docMk/>
+          <pc:sldMk cId="650989019" sldId="311"/>
+        </pc:sldMkLst>
+        <pc:spChg chg="mod">
+          <ac:chgData name="Baráth, Július" userId="aebde9b9-dccc-4475-a9ac-c05e78323d7a" providerId="ADAL" clId="{4A0811C8-ED2F-505E-B787-C8270CED5046}" dt="2026-02-03T11:37:18.778" v="517" actId="113"/>
+          <ac:spMkLst>
+            <pc:docMk/>
+            <pc:sldMk cId="650989019" sldId="311"/>
+            <ac:spMk id="16388" creationId="{00000000-0000-0000-0000-000000000000}"/>
+          </ac:spMkLst>
+        </pc:spChg>
+      </pc:sldChg>
+      <pc:sldChg chg="modSp mod">
+        <pc:chgData name="Baráth, Július" userId="aebde9b9-dccc-4475-a9ac-c05e78323d7a" providerId="ADAL" clId="{4A0811C8-ED2F-505E-B787-C8270CED5046}" dt="2026-02-03T11:37:38.454" v="520" actId="113"/>
+        <pc:sldMkLst>
+          <pc:docMk/>
+          <pc:sldMk cId="2953323799" sldId="312"/>
+        </pc:sldMkLst>
+        <pc:spChg chg="mod">
+          <ac:chgData name="Baráth, Július" userId="aebde9b9-dccc-4475-a9ac-c05e78323d7a" providerId="ADAL" clId="{4A0811C8-ED2F-505E-B787-C8270CED5046}" dt="2026-02-03T11:37:38.454" v="520" actId="113"/>
+          <ac:spMkLst>
+            <pc:docMk/>
+            <pc:sldMk cId="2953323799" sldId="312"/>
+            <ac:spMk id="17412" creationId="{00000000-0000-0000-0000-000000000000}"/>
+          </ac:spMkLst>
+        </pc:spChg>
+      </pc:sldChg>
+      <pc:sldChg chg="modSp mod">
+        <pc:chgData name="Baráth, Július" userId="aebde9b9-dccc-4475-a9ac-c05e78323d7a" providerId="ADAL" clId="{4A0811C8-ED2F-505E-B787-C8270CED5046}" dt="2026-02-03T11:37:55.318" v="522" actId="113"/>
+        <pc:sldMkLst>
+          <pc:docMk/>
+          <pc:sldMk cId="3914507190" sldId="314"/>
+        </pc:sldMkLst>
+        <pc:spChg chg="mod">
+          <ac:chgData name="Baráth, Július" userId="aebde9b9-dccc-4475-a9ac-c05e78323d7a" providerId="ADAL" clId="{4A0811C8-ED2F-505E-B787-C8270CED5046}" dt="2026-02-03T11:37:55.318" v="522" actId="113"/>
+          <ac:spMkLst>
+            <pc:docMk/>
+            <pc:sldMk cId="3914507190" sldId="314"/>
+            <ac:spMk id="19460" creationId="{00000000-0000-0000-0000-000000000000}"/>
+          </ac:spMkLst>
+        </pc:spChg>
+      </pc:sldChg>
+      <pc:sldChg chg="del">
+        <pc:chgData name="Baráth, Július" userId="aebde9b9-dccc-4475-a9ac-c05e78323d7a" providerId="ADAL" clId="{4A0811C8-ED2F-505E-B787-C8270CED5046}" dt="2026-02-03T11:46:57.957" v="551" actId="2696"/>
         <pc:sldMkLst>
           <pc:docMk/>
           <pc:sldMk cId="3274664270" sldId="318"/>
         </pc:sldMkLst>
       </pc:sldChg>
-    </pc:docChg>
-  </pc:docChgLst>
-  <pc:docChgLst>
-    <pc:chgData name="Baráth, Július" userId="aebde9b9-dccc-4475-a9ac-c05e78323d7a" providerId="ADAL" clId="{74D1020D-1A6A-634C-BFEC-EE534C6290C0}"/>
-    <pc:docChg chg="custSel modSld">
-      <pc:chgData name="Baráth, Július" userId="aebde9b9-dccc-4475-a9ac-c05e78323d7a" providerId="ADAL" clId="{74D1020D-1A6A-634C-BFEC-EE534C6290C0}" dt="2023-02-07T13:33:40.800" v="86" actId="20577"/>
-      <pc:docMkLst>
-        <pc:docMk/>
-      </pc:docMkLst>
-      <pc:sldChg chg="modSp mod">
-        <pc:chgData name="Baráth, Július" userId="aebde9b9-dccc-4475-a9ac-c05e78323d7a" providerId="ADAL" clId="{74D1020D-1A6A-634C-BFEC-EE534C6290C0}" dt="2023-02-07T13:06:40.590" v="0" actId="6549"/>
+      <pc:sldChg chg="del">
+        <pc:chgData name="Baráth, Július" userId="aebde9b9-dccc-4475-a9ac-c05e78323d7a" providerId="ADAL" clId="{4A0811C8-ED2F-505E-B787-C8270CED5046}" dt="2026-02-03T11:46:58.654" v="552" actId="2696"/>
         <pc:sldMkLst>
           <pc:docMk/>
-          <pc:sldMk cId="2345067092" sldId="258"/>
-        </pc:sldMkLst>
-      </pc:sldChg>
-      <pc:sldChg chg="modSp mod">
-        <pc:chgData name="Baráth, Július" userId="aebde9b9-dccc-4475-a9ac-c05e78323d7a" providerId="ADAL" clId="{74D1020D-1A6A-634C-BFEC-EE534C6290C0}" dt="2023-02-07T13:08:31.006" v="2" actId="6549"/>
-        <pc:sldMkLst>
-          <pc:docMk/>
-          <pc:sldMk cId="334612787" sldId="261"/>
-        </pc:sldMkLst>
-      </pc:sldChg>
-      <pc:sldChg chg="modSp mod">
-        <pc:chgData name="Baráth, Július" userId="aebde9b9-dccc-4475-a9ac-c05e78323d7a" providerId="ADAL" clId="{74D1020D-1A6A-634C-BFEC-EE534C6290C0}" dt="2023-02-07T13:09:58.863" v="3" actId="6549"/>
-        <pc:sldMkLst>
-          <pc:docMk/>
-          <pc:sldMk cId="3873447503" sldId="265"/>
-        </pc:sldMkLst>
-      </pc:sldChg>
-      <pc:sldChg chg="modSp mod">
-        <pc:chgData name="Baráth, Július" userId="aebde9b9-dccc-4475-a9ac-c05e78323d7a" providerId="ADAL" clId="{74D1020D-1A6A-634C-BFEC-EE534C6290C0}" dt="2023-02-07T13:12:19.441" v="10" actId="20577"/>
-        <pc:sldMkLst>
-          <pc:docMk/>
-          <pc:sldMk cId="398281531" sldId="295"/>
-        </pc:sldMkLst>
-      </pc:sldChg>
-      <pc:sldChg chg="modSp mod">
-        <pc:chgData name="Baráth, Július" userId="aebde9b9-dccc-4475-a9ac-c05e78323d7a" providerId="ADAL" clId="{74D1020D-1A6A-634C-BFEC-EE534C6290C0}" dt="2023-02-07T13:33:27.550" v="80" actId="27636"/>
-        <pc:sldMkLst>
-          <pc:docMk/>
-          <pc:sldMk cId="1024189591" sldId="301"/>
-        </pc:sldMkLst>
-      </pc:sldChg>
-      <pc:sldChg chg="modSp mod">
-        <pc:chgData name="Baráth, Július" userId="aebde9b9-dccc-4475-a9ac-c05e78323d7a" providerId="ADAL" clId="{74D1020D-1A6A-634C-BFEC-EE534C6290C0}" dt="2023-02-07T13:17:28.202" v="45" actId="6549"/>
-        <pc:sldMkLst>
-          <pc:docMk/>
-          <pc:sldMk cId="1464020198" sldId="302"/>
-        </pc:sldMkLst>
-      </pc:sldChg>
-      <pc:sldChg chg="modSp mod">
-        <pc:chgData name="Baráth, Július" userId="aebde9b9-dccc-4475-a9ac-c05e78323d7a" providerId="ADAL" clId="{74D1020D-1A6A-634C-BFEC-EE534C6290C0}" dt="2023-02-07T13:14:32.973" v="25" actId="20577"/>
-        <pc:sldMkLst>
-          <pc:docMk/>
-          <pc:sldMk cId="3235063092" sldId="306"/>
-        </pc:sldMkLst>
-      </pc:sldChg>
-      <pc:sldChg chg="modSp mod">
-        <pc:chgData name="Baráth, Július" userId="aebde9b9-dccc-4475-a9ac-c05e78323d7a" providerId="ADAL" clId="{74D1020D-1A6A-634C-BFEC-EE534C6290C0}" dt="2023-02-07T13:18:35.568" v="47" actId="20577"/>
-        <pc:sldMkLst>
-          <pc:docMk/>
-          <pc:sldMk cId="2533591585" sldId="307"/>
-        </pc:sldMkLst>
-      </pc:sldChg>
-      <pc:sldChg chg="modSp mod">
-        <pc:chgData name="Baráth, Július" userId="aebde9b9-dccc-4475-a9ac-c05e78323d7a" providerId="ADAL" clId="{74D1020D-1A6A-634C-BFEC-EE534C6290C0}" dt="2023-02-07T13:26:14.946" v="61" actId="27636"/>
-        <pc:sldMkLst>
-          <pc:docMk/>
-          <pc:sldMk cId="3030418756" sldId="308"/>
-        </pc:sldMkLst>
-      </pc:sldChg>
-      <pc:sldChg chg="modSp mod">
-        <pc:chgData name="Baráth, Július" userId="aebde9b9-dccc-4475-a9ac-c05e78323d7a" providerId="ADAL" clId="{74D1020D-1A6A-634C-BFEC-EE534C6290C0}" dt="2023-02-07T13:18:54.824" v="49" actId="6549"/>
-        <pc:sldMkLst>
-          <pc:docMk/>
-          <pc:sldMk cId="650989019" sldId="311"/>
-        </pc:sldMkLst>
-      </pc:sldChg>
-      <pc:sldChg chg="modSp mod">
-        <pc:chgData name="Baráth, Július" userId="aebde9b9-dccc-4475-a9ac-c05e78323d7a" providerId="ADAL" clId="{74D1020D-1A6A-634C-BFEC-EE534C6290C0}" dt="2023-02-07T13:33:40.800" v="86" actId="20577"/>
-        <pc:sldMkLst>
-          <pc:docMk/>
-          <pc:sldMk cId="474640484" sldId="321"/>
-        </pc:sldMkLst>
-      </pc:sldChg>
-    </pc:docChg>
-  </pc:docChgLst>
-  <pc:docChgLst>
-    <pc:chgData name="Július Baráth" userId="e650c4ab-697e-4750-bd58-c1531aabce95" providerId="ADAL" clId="{A9A68A84-EDED-4C70-83E3-8BC044859702}"/>
-    <pc:docChg chg="undo custSel delSld modSld sldOrd">
-      <pc:chgData name="Július Baráth" userId="e650c4ab-697e-4750-bd58-c1531aabce95" providerId="ADAL" clId="{A9A68A84-EDED-4C70-83E3-8BC044859702}" dt="2021-02-24T07:47:27.477" v="273" actId="1036"/>
-      <pc:docMkLst>
-        <pc:docMk/>
-      </pc:docMkLst>
-      <pc:sldChg chg="modSp mod">
-        <pc:chgData name="Július Baráth" userId="e650c4ab-697e-4750-bd58-c1531aabce95" providerId="ADAL" clId="{A9A68A84-EDED-4C70-83E3-8BC044859702}" dt="2021-02-17T10:41:03.652" v="17" actId="20577"/>
-        <pc:sldMkLst>
-          <pc:docMk/>
-          <pc:sldMk cId="2192710277" sldId="257"/>
-        </pc:sldMkLst>
-      </pc:sldChg>
-      <pc:sldChg chg="modSp mod">
-        <pc:chgData name="Július Baráth" userId="e650c4ab-697e-4750-bd58-c1531aabce95" providerId="ADAL" clId="{A9A68A84-EDED-4C70-83E3-8BC044859702}" dt="2021-02-17T10:45:08.810" v="18" actId="6549"/>
-        <pc:sldMkLst>
-          <pc:docMk/>
-          <pc:sldMk cId="590433976" sldId="264"/>
-        </pc:sldMkLst>
-      </pc:sldChg>
-      <pc:sldChg chg="modSp mod">
-        <pc:chgData name="Július Baráth" userId="e650c4ab-697e-4750-bd58-c1531aabce95" providerId="ADAL" clId="{A9A68A84-EDED-4C70-83E3-8BC044859702}" dt="2021-02-23T10:19:00.720" v="145" actId="14100"/>
-        <pc:sldMkLst>
-          <pc:docMk/>
-          <pc:sldMk cId="4036880088" sldId="266"/>
-        </pc:sldMkLst>
-      </pc:sldChg>
-      <pc:sldChg chg="addSp delSp modSp del mod">
-        <pc:chgData name="Július Baráth" userId="e650c4ab-697e-4750-bd58-c1531aabce95" providerId="ADAL" clId="{A9A68A84-EDED-4C70-83E3-8BC044859702}" dt="2021-02-23T10:19:56.558" v="148" actId="47"/>
-        <pc:sldMkLst>
-          <pc:docMk/>
-          <pc:sldMk cId="2660299101" sldId="267"/>
-        </pc:sldMkLst>
-      </pc:sldChg>
-      <pc:sldChg chg="addSp modSp mod ord">
-        <pc:chgData name="Július Baráth" userId="e650c4ab-697e-4750-bd58-c1531aabce95" providerId="ADAL" clId="{A9A68A84-EDED-4C70-83E3-8BC044859702}" dt="2021-02-23T10:23:04.432" v="164"/>
-        <pc:sldMkLst>
-          <pc:docMk/>
-          <pc:sldMk cId="2476636462" sldId="268"/>
-        </pc:sldMkLst>
-      </pc:sldChg>
-      <pc:sldChg chg="ord">
-        <pc:chgData name="Július Baráth" userId="e650c4ab-697e-4750-bd58-c1531aabce95" providerId="ADAL" clId="{A9A68A84-EDED-4C70-83E3-8BC044859702}" dt="2021-02-23T10:23:15.723" v="166"/>
-        <pc:sldMkLst>
-          <pc:docMk/>
-          <pc:sldMk cId="1212709912" sldId="269"/>
-        </pc:sldMkLst>
-      </pc:sldChg>
-      <pc:sldChg chg="addSp modSp mod ord">
-        <pc:chgData name="Július Baráth" userId="e650c4ab-697e-4750-bd58-c1531aabce95" providerId="ADAL" clId="{A9A68A84-EDED-4C70-83E3-8BC044859702}" dt="2021-02-23T10:26:07.634" v="190" actId="207"/>
-        <pc:sldMkLst>
-          <pc:docMk/>
-          <pc:sldMk cId="1621904223" sldId="271"/>
-        </pc:sldMkLst>
-      </pc:sldChg>
-      <pc:sldChg chg="modSp mod">
-        <pc:chgData name="Július Baráth" userId="e650c4ab-697e-4750-bd58-c1531aabce95" providerId="ADAL" clId="{A9A68A84-EDED-4C70-83E3-8BC044859702}" dt="2021-02-23T10:26:59.977" v="191" actId="20577"/>
-        <pc:sldMkLst>
-          <pc:docMk/>
-          <pc:sldMk cId="836338946" sldId="272"/>
-        </pc:sldMkLst>
-      </pc:sldChg>
-      <pc:sldChg chg="modSp">
-        <pc:chgData name="Július Baráth" userId="e650c4ab-697e-4750-bd58-c1531aabce95" providerId="ADAL" clId="{A9A68A84-EDED-4C70-83E3-8BC044859702}" dt="2021-02-24T07:22:51.858" v="272"/>
-        <pc:sldMkLst>
-          <pc:docMk/>
-          <pc:sldMk cId="32605011" sldId="274"/>
-        </pc:sldMkLst>
-      </pc:sldChg>
-      <pc:sldChg chg="addSp modSp mod">
-        <pc:chgData name="Július Baráth" userId="e650c4ab-697e-4750-bd58-c1531aabce95" providerId="ADAL" clId="{A9A68A84-EDED-4C70-83E3-8BC044859702}" dt="2021-02-23T10:34:08.008" v="268" actId="6549"/>
-        <pc:sldMkLst>
-          <pc:docMk/>
-          <pc:sldMk cId="512124060" sldId="277"/>
-        </pc:sldMkLst>
-      </pc:sldChg>
-      <pc:sldChg chg="delSp del mod">
-        <pc:chgData name="Július Baráth" userId="e650c4ab-697e-4750-bd58-c1531aabce95" providerId="ADAL" clId="{A9A68A84-EDED-4C70-83E3-8BC044859702}" dt="2021-02-23T10:34:49" v="269" actId="47"/>
-        <pc:sldMkLst>
-          <pc:docMk/>
-          <pc:sldMk cId="4065842571" sldId="278"/>
+          <pc:sldMk cId="3836837614" sldId="319"/>
         </pc:sldMkLst>
       </pc:sldChg>
       <pc:sldChg chg="del">
-        <pc:chgData name="Július Baráth" userId="e650c4ab-697e-4750-bd58-c1531aabce95" providerId="ADAL" clId="{A9A68A84-EDED-4C70-83E3-8BC044859702}" dt="2021-02-23T10:35:18.760" v="270" actId="47"/>
+        <pc:chgData name="Baráth, Július" userId="aebde9b9-dccc-4475-a9ac-c05e78323d7a" providerId="ADAL" clId="{4A0811C8-ED2F-505E-B787-C8270CED5046}" dt="2026-02-03T11:46:59.588" v="553" actId="2696"/>
         <pc:sldMkLst>
           <pc:docMk/>
-          <pc:sldMk cId="1959048398" sldId="279"/>
+          <pc:sldMk cId="2443848241" sldId="320"/>
         </pc:sldMkLst>
       </pc:sldChg>
-      <pc:sldChg chg="modSp">
-        <pc:chgData name="Július Baráth" userId="e650c4ab-697e-4750-bd58-c1531aabce95" providerId="ADAL" clId="{A9A68A84-EDED-4C70-83E3-8BC044859702}" dt="2021-02-24T07:47:27.477" v="273" actId="1036"/>
+      <pc:sldChg chg="modSp new mod ord">
+        <pc:chgData name="Baráth, Július" userId="aebde9b9-dccc-4475-a9ac-c05e78323d7a" providerId="ADAL" clId="{4A0811C8-ED2F-505E-B787-C8270CED5046}" dt="2026-02-03T10:40:54.668" v="195" actId="20578"/>
         <pc:sldMkLst>
           <pc:docMk/>
-          <pc:sldMk cId="3215213909" sldId="281"/>
+          <pc:sldMk cId="4143176927" sldId="323"/>
         </pc:sldMkLst>
+        <pc:spChg chg="mod">
+          <ac:chgData name="Baráth, Július" userId="aebde9b9-dccc-4475-a9ac-c05e78323d7a" providerId="ADAL" clId="{4A0811C8-ED2F-505E-B787-C8270CED5046}" dt="2026-02-03T10:38:01.469" v="194" actId="1076"/>
+          <ac:spMkLst>
+            <pc:docMk/>
+            <pc:sldMk cId="4143176927" sldId="323"/>
+            <ac:spMk id="2" creationId="{389F8CB0-B231-AE94-1A65-7BE6252F199D}"/>
+          </ac:spMkLst>
+        </pc:spChg>
+        <pc:spChg chg="mod">
+          <ac:chgData name="Baráth, Július" userId="aebde9b9-dccc-4475-a9ac-c05e78323d7a" providerId="ADAL" clId="{4A0811C8-ED2F-505E-B787-C8270CED5046}" dt="2026-02-03T10:37:53.345" v="193" actId="115"/>
+          <ac:spMkLst>
+            <pc:docMk/>
+            <pc:sldMk cId="4143176927" sldId="323"/>
+            <ac:spMk id="3" creationId="{A0AC6075-5FE4-5CEE-4243-455D47306D1A}"/>
+          </ac:spMkLst>
+        </pc:spChg>
       </pc:sldChg>
-      <pc:sldChg chg="addSp modSp mod">
-        <pc:chgData name="Július Baráth" userId="e650c4ab-697e-4750-bd58-c1531aabce95" providerId="ADAL" clId="{A9A68A84-EDED-4C70-83E3-8BC044859702}" dt="2021-02-17T10:50:22.461" v="57" actId="1036"/>
+      <pc:sldChg chg="addSp modSp new mod modClrScheme chgLayout">
+        <pc:chgData name="Baráth, Július" userId="aebde9b9-dccc-4475-a9ac-c05e78323d7a" providerId="ADAL" clId="{4A0811C8-ED2F-505E-B787-C8270CED5046}" dt="2026-02-03T11:08:56.324" v="478" actId="27636"/>
         <pc:sldMkLst>
           <pc:docMk/>
-          <pc:sldMk cId="2068648163" sldId="291"/>
+          <pc:sldMk cId="3071328026" sldId="324"/>
         </pc:sldMkLst>
+        <pc:spChg chg="mod ord">
+          <ac:chgData name="Baráth, Július" userId="aebde9b9-dccc-4475-a9ac-c05e78323d7a" providerId="ADAL" clId="{4A0811C8-ED2F-505E-B787-C8270CED5046}" dt="2026-02-03T10:41:33.717" v="245" actId="700"/>
+          <ac:spMkLst>
+            <pc:docMk/>
+            <pc:sldMk cId="3071328026" sldId="324"/>
+            <ac:spMk id="2" creationId="{DEBD3764-4E11-D5ED-FCCE-24E6AD3F37E7}"/>
+          </ac:spMkLst>
+        </pc:spChg>
+        <pc:spChg chg="mod ord">
+          <ac:chgData name="Baráth, Július" userId="aebde9b9-dccc-4475-a9ac-c05e78323d7a" providerId="ADAL" clId="{4A0811C8-ED2F-505E-B787-C8270CED5046}" dt="2026-02-03T11:08:56.324" v="478" actId="27636"/>
+          <ac:spMkLst>
+            <pc:docMk/>
+            <pc:sldMk cId="3071328026" sldId="324"/>
+            <ac:spMk id="3" creationId="{DFF2BF87-46ED-5D64-7969-73B7C32A64F3}"/>
+          </ac:spMkLst>
+        </pc:spChg>
+        <pc:spChg chg="mod ord">
+          <ac:chgData name="Baráth, Július" userId="aebde9b9-dccc-4475-a9ac-c05e78323d7a" providerId="ADAL" clId="{4A0811C8-ED2F-505E-B787-C8270CED5046}" dt="2026-02-03T10:41:33.717" v="245" actId="700"/>
+          <ac:spMkLst>
+            <pc:docMk/>
+            <pc:sldMk cId="3071328026" sldId="324"/>
+            <ac:spMk id="4" creationId="{BF0FC116-C928-BEA6-584A-5ED4CCC30D64}"/>
+          </ac:spMkLst>
+        </pc:spChg>
+        <pc:spChg chg="add mod ord">
+          <ac:chgData name="Baráth, Július" userId="aebde9b9-dccc-4475-a9ac-c05e78323d7a" providerId="ADAL" clId="{4A0811C8-ED2F-505E-B787-C8270CED5046}" dt="2026-02-03T11:08:49.896" v="477" actId="27636"/>
+          <ac:spMkLst>
+            <pc:docMk/>
+            <pc:sldMk cId="3071328026" sldId="324"/>
+            <ac:spMk id="5" creationId="{A7B87D77-693F-0A51-7BF4-4BD37C814524}"/>
+          </ac:spMkLst>
+        </pc:spChg>
       </pc:sldChg>
-      <pc:sldChg chg="addSp modSp mod">
-        <pc:chgData name="Július Baráth" userId="e650c4ab-697e-4750-bd58-c1531aabce95" providerId="ADAL" clId="{A9A68A84-EDED-4C70-83E3-8BC044859702}" dt="2021-02-17T10:50:26.821" v="58"/>
+      <pc:sldChg chg="addSp delSp modSp new mod modClrScheme chgLayout">
+        <pc:chgData name="Baráth, Július" userId="aebde9b9-dccc-4475-a9ac-c05e78323d7a" providerId="ADAL" clId="{4A0811C8-ED2F-505E-B787-C8270CED5046}" dt="2026-02-03T11:00:25.374" v="390" actId="27636"/>
         <pc:sldMkLst>
           <pc:docMk/>
-          <pc:sldMk cId="2176794767" sldId="292"/>
+          <pc:sldMk cId="4236122441" sldId="325"/>
         </pc:sldMkLst>
-      </pc:sldChg>
-      <pc:sldChg chg="addSp delSp modSp mod modClrScheme chgLayout">
-        <pc:chgData name="Július Baráth" userId="e650c4ab-697e-4750-bd58-c1531aabce95" providerId="ADAL" clId="{A9A68A84-EDED-4C70-83E3-8BC044859702}" dt="2021-02-17T10:51:58.800" v="61" actId="700"/>
-        <pc:sldMkLst>
-          <pc:docMk/>
-          <pc:sldMk cId="1152080686" sldId="293"/>
-        </pc:sldMkLst>
-      </pc:sldChg>
-      <pc:sldChg chg="modSp mod">
-        <pc:chgData name="Július Baráth" userId="e650c4ab-697e-4750-bd58-c1531aabce95" providerId="ADAL" clId="{A9A68A84-EDED-4C70-83E3-8BC044859702}" dt="2021-02-17T11:04:09.319" v="70" actId="207"/>
-        <pc:sldMkLst>
-          <pc:docMk/>
-          <pc:sldMk cId="887361340" sldId="298"/>
-        </pc:sldMkLst>
-      </pc:sldChg>
-      <pc:sldChg chg="modSp mod">
-        <pc:chgData name="Július Baráth" userId="e650c4ab-697e-4750-bd58-c1531aabce95" providerId="ADAL" clId="{A9A68A84-EDED-4C70-83E3-8BC044859702}" dt="2021-02-23T10:14:54.637" v="99" actId="20577"/>
-        <pc:sldMkLst>
-          <pc:docMk/>
-          <pc:sldMk cId="397644615" sldId="304"/>
-        </pc:sldMkLst>
-      </pc:sldChg>
-      <pc:sldChg chg="modSp mod">
-        <pc:chgData name="Július Baráth" userId="e650c4ab-697e-4750-bd58-c1531aabce95" providerId="ADAL" clId="{A9A68A84-EDED-4C70-83E3-8BC044859702}" dt="2021-02-23T10:15:42.488" v="136" actId="20577"/>
-        <pc:sldMkLst>
-          <pc:docMk/>
-          <pc:sldMk cId="3030418756" sldId="308"/>
-        </pc:sldMkLst>
-      </pc:sldChg>
-      <pc:sldChg chg="modSp mod">
-        <pc:chgData name="Július Baráth" userId="e650c4ab-697e-4750-bd58-c1531aabce95" providerId="ADAL" clId="{A9A68A84-EDED-4C70-83E3-8BC044859702}" dt="2021-02-23T10:17:09.657" v="142" actId="6549"/>
-        <pc:sldMkLst>
-          <pc:docMk/>
-          <pc:sldMk cId="3109471324" sldId="309"/>
-        </pc:sldMkLst>
-      </pc:sldChg>
-      <pc:sldChg chg="modSp del mod">
-        <pc:chgData name="Július Baráth" userId="e650c4ab-697e-4750-bd58-c1531aabce95" providerId="ADAL" clId="{A9A68A84-EDED-4C70-83E3-8BC044859702}" dt="2021-02-23T10:11:44.630" v="76" actId="47"/>
-        <pc:sldMkLst>
-          <pc:docMk/>
-          <pc:sldMk cId="3698265225" sldId="310"/>
-        </pc:sldMkLst>
-      </pc:sldChg>
-      <pc:sldChg chg="modSp mod">
-        <pc:chgData name="Július Baráth" userId="e650c4ab-697e-4750-bd58-c1531aabce95" providerId="ADAL" clId="{A9A68A84-EDED-4C70-83E3-8BC044859702}" dt="2021-02-23T10:12:18.383" v="89" actId="20577"/>
-        <pc:sldMkLst>
-          <pc:docMk/>
-          <pc:sldMk cId="650989019" sldId="311"/>
-        </pc:sldMkLst>
-      </pc:sldChg>
-      <pc:sldChg chg="del">
-        <pc:chgData name="Július Baráth" userId="e650c4ab-697e-4750-bd58-c1531aabce95" providerId="ADAL" clId="{A9A68A84-EDED-4C70-83E3-8BC044859702}" dt="2021-02-17T11:08:57.740" v="71" actId="47"/>
-        <pc:sldMkLst>
-          <pc:docMk/>
-          <pc:sldMk cId="2846011861" sldId="313"/>
-        </pc:sldMkLst>
-      </pc:sldChg>
-      <pc:sldChg chg="del">
-        <pc:chgData name="Július Baráth" userId="e650c4ab-697e-4750-bd58-c1531aabce95" providerId="ADAL" clId="{A9A68A84-EDED-4C70-83E3-8BC044859702}" dt="2021-02-23T10:13:47.244" v="90" actId="47"/>
-        <pc:sldMkLst>
-          <pc:docMk/>
-          <pc:sldMk cId="1299619881" sldId="315"/>
-        </pc:sldMkLst>
+        <pc:spChg chg="del mod ord">
+          <ac:chgData name="Baráth, Július" userId="aebde9b9-dccc-4475-a9ac-c05e78323d7a" providerId="ADAL" clId="{4A0811C8-ED2F-505E-B787-C8270CED5046}" dt="2026-02-03T10:57:31.034" v="319" actId="700"/>
+          <ac:spMkLst>
+            <pc:docMk/>
+            <pc:sldMk cId="4236122441" sldId="325"/>
+            <ac:spMk id="2" creationId="{ECC91CC8-5995-BD6D-C584-B9BAA8B5F31E}"/>
+          </ac:spMkLst>
+        </pc:spChg>
+        <pc:spChg chg="del mod ord">
+          <ac:chgData name="Baráth, Július" userId="aebde9b9-dccc-4475-a9ac-c05e78323d7a" providerId="ADAL" clId="{4A0811C8-ED2F-505E-B787-C8270CED5046}" dt="2026-02-03T10:57:31.034" v="319" actId="700"/>
+          <ac:spMkLst>
+            <pc:docMk/>
+            <pc:sldMk cId="4236122441" sldId="325"/>
+            <ac:spMk id="3" creationId="{255D76F0-2E41-0292-C5C7-9F1D883F5D3F}"/>
+          </ac:spMkLst>
+        </pc:spChg>
+        <pc:spChg chg="mod ord">
+          <ac:chgData name="Baráth, Július" userId="aebde9b9-dccc-4475-a9ac-c05e78323d7a" providerId="ADAL" clId="{4A0811C8-ED2F-505E-B787-C8270CED5046}" dt="2026-02-03T10:57:31.034" v="319" actId="700"/>
+          <ac:spMkLst>
+            <pc:docMk/>
+            <pc:sldMk cId="4236122441" sldId="325"/>
+            <ac:spMk id="4" creationId="{391AF846-30F8-3112-C22A-91BAFF7E7F1D}"/>
+          </ac:spMkLst>
+        </pc:spChg>
+        <pc:spChg chg="add mod ord">
+          <ac:chgData name="Baráth, Július" userId="aebde9b9-dccc-4475-a9ac-c05e78323d7a" providerId="ADAL" clId="{4A0811C8-ED2F-505E-B787-C8270CED5046}" dt="2026-02-03T10:59:10.024" v="380" actId="20577"/>
+          <ac:spMkLst>
+            <pc:docMk/>
+            <pc:sldMk cId="4236122441" sldId="325"/>
+            <ac:spMk id="5" creationId="{008B4378-E2CA-1AF3-D6D9-5772F1653F42}"/>
+          </ac:spMkLst>
+        </pc:spChg>
+        <pc:spChg chg="add mod ord">
+          <ac:chgData name="Baráth, Július" userId="aebde9b9-dccc-4475-a9ac-c05e78323d7a" providerId="ADAL" clId="{4A0811C8-ED2F-505E-B787-C8270CED5046}" dt="2026-02-03T11:00:25.374" v="390" actId="27636"/>
+          <ac:spMkLst>
+            <pc:docMk/>
+            <pc:sldMk cId="4236122441" sldId="325"/>
+            <ac:spMk id="6" creationId="{4FAE959A-2B3C-6D10-B76E-78E2ACE4B104}"/>
+          </ac:spMkLst>
+        </pc:spChg>
+        <pc:spChg chg="add mod ord">
+          <ac:chgData name="Baráth, Július" userId="aebde9b9-dccc-4475-a9ac-c05e78323d7a" providerId="ADAL" clId="{4A0811C8-ED2F-505E-B787-C8270CED5046}" dt="2026-02-03T11:00:25.371" v="389" actId="27636"/>
+          <ac:spMkLst>
+            <pc:docMk/>
+            <pc:sldMk cId="4236122441" sldId="325"/>
+            <ac:spMk id="7" creationId="{2000FB27-96C3-2D21-4DE5-59E0FD7E06DC}"/>
+          </ac:spMkLst>
+        </pc:spChg>
       </pc:sldChg>
     </pc:docChg>
   </pc:docChgLst>
@@ -1527,7 +841,7 @@
           <a:p>
             <a:fld id="{10DBA715-3931-4B12-8F65-0C023D0C889C}" type="datetimeFigureOut">
               <a:rPr lang="sk-SK" smtClean="0"/>
-              <a:t>5.2.2025</a:t>
+              <a:t>3.2.2026</a:t>
             </a:fld>
             <a:endParaRPr lang="sk-SK"/>
           </a:p>
@@ -1944,7 +1258,7 @@
           <a:p>
             <a:fld id="{9DDEF68B-993A-41A5-AE02-BF81499BEBFF}" type="slidenum">
               <a:rPr lang="sk-SK" smtClean="0"/>
-              <a:t>28</a:t>
+              <a:t>31</a:t>
             </a:fld>
             <a:endParaRPr lang="sk-SK"/>
           </a:p>
@@ -2094,7 +1408,7 @@
           <a:p>
             <a:fld id="{FF409D81-0DDF-48BB-84A1-72E2E7B64FA8}" type="datetime1">
               <a:rPr lang="sk-SK" smtClean="0"/>
-              <a:t>5.2.2025</a:t>
+              <a:t>3.2.2026</a:t>
             </a:fld>
             <a:endParaRPr lang="sk-SK"/>
           </a:p>
@@ -2267,7 +1581,7 @@
           <a:p>
             <a:fld id="{A8BDDA65-704B-4A2E-88E9-9C89A9C7184F}" type="datetime1">
               <a:rPr lang="sk-SK" smtClean="0"/>
-              <a:t>5.2.2025</a:t>
+              <a:t>3.2.2026</a:t>
             </a:fld>
             <a:endParaRPr lang="sk-SK"/>
           </a:p>
@@ -2450,7 +1764,7 @@
           <a:p>
             <a:fld id="{C293AB0A-F26A-41CF-9202-51D7B560101E}" type="datetime1">
               <a:rPr lang="sk-SK" smtClean="0"/>
-              <a:t>5.2.2025</a:t>
+              <a:t>3.2.2026</a:t>
             </a:fld>
             <a:endParaRPr lang="sk-SK"/>
           </a:p>
@@ -2696,7 +2010,7 @@
             </a:pPr>
             <a:fld id="{D48FA258-C71C-40CD-814F-D5C504290866}" type="datetime1">
               <a:rPr lang="sk-SK" smtClean="0"/>
-              <a:t>5.2.2025</a:t>
+              <a:t>3.2.2026</a:t>
             </a:fld>
             <a:endParaRPr lang="sk-SK"/>
           </a:p>
@@ -2885,7 +2199,7 @@
           <a:p>
             <a:fld id="{E82BEFB5-8A8B-4407-8C61-8AE7B8D57719}" type="datetime1">
               <a:rPr lang="sk-SK" smtClean="0"/>
-              <a:t>5.2.2025</a:t>
+              <a:t>3.2.2026</a:t>
             </a:fld>
             <a:endParaRPr lang="sk-SK"/>
           </a:p>
@@ -3134,7 +2448,7 @@
           <a:p>
             <a:fld id="{502AAF14-A1CA-4E65-96DD-CCF66B07C433}" type="datetime1">
               <a:rPr lang="sk-SK" smtClean="0"/>
-              <a:t>5.2.2025</a:t>
+              <a:t>3.2.2026</a:t>
             </a:fld>
             <a:endParaRPr lang="sk-SK"/>
           </a:p>
@@ -3369,7 +2683,7 @@
           <a:p>
             <a:fld id="{8087A5FB-5486-48D2-95B9-9A8F76F73722}" type="datetime1">
               <a:rPr lang="sk-SK" smtClean="0"/>
-              <a:t>5.2.2025</a:t>
+              <a:t>3.2.2026</a:t>
             </a:fld>
             <a:endParaRPr lang="sk-SK"/>
           </a:p>
@@ -3739,7 +3053,7 @@
           <a:p>
             <a:fld id="{21BA8A66-795C-44EE-A6A1-16E491829098}" type="datetime1">
               <a:rPr lang="sk-SK" smtClean="0"/>
-              <a:t>5.2.2025</a:t>
+              <a:t>3.2.2026</a:t>
             </a:fld>
             <a:endParaRPr lang="sk-SK"/>
           </a:p>
@@ -3860,7 +3174,7 @@
           <a:p>
             <a:fld id="{3EF3BB14-32E4-4EBF-9407-66EF6DDF6C93}" type="datetime1">
               <a:rPr lang="sk-SK" smtClean="0"/>
-              <a:t>5.2.2025</a:t>
+              <a:t>3.2.2026</a:t>
             </a:fld>
             <a:endParaRPr lang="sk-SK"/>
           </a:p>
@@ -3958,7 +3272,7 @@
           <a:p>
             <a:fld id="{23DE504A-4A64-4A13-A20E-40EF1EDAF191}" type="datetime1">
               <a:rPr lang="sk-SK" smtClean="0"/>
-              <a:t>5.2.2025</a:t>
+              <a:t>3.2.2026</a:t>
             </a:fld>
             <a:endParaRPr lang="sk-SK"/>
           </a:p>
@@ -4238,7 +3552,7 @@
           <a:p>
             <a:fld id="{C5A1DF2D-F2EE-4C69-944D-FEF6D561633F}" type="datetime1">
               <a:rPr lang="sk-SK" smtClean="0"/>
-              <a:t>5.2.2025</a:t>
+              <a:t>3.2.2026</a:t>
             </a:fld>
             <a:endParaRPr lang="sk-SK"/>
           </a:p>
@@ -4494,7 +3808,7 @@
           <a:p>
             <a:fld id="{95D7758C-FDA2-483D-87E1-B45F5DFBD3FD}" type="datetime1">
               <a:rPr lang="sk-SK" smtClean="0"/>
-              <a:t>5.2.2025</a:t>
+              <a:t>3.2.2026</a:t>
             </a:fld>
             <a:endParaRPr lang="sk-SK"/>
           </a:p>
@@ -4710,7 +4024,7 @@
           <a:p>
             <a:fld id="{2605D2B5-92B7-4C8D-AC3A-18C18C239EE2}" type="datetime1">
               <a:rPr lang="sk-SK" smtClean="0"/>
-              <a:t>5.2.2025</a:t>
+              <a:t>3.2.2026</a:t>
             </a:fld>
             <a:endParaRPr lang="sk-SK"/>
           </a:p>
@@ -5706,7 +5020,7 @@
           <a:lstStyle/>
           <a:p>
             <a:r>
-              <a:rPr lang="sk-SK"/>
+              <a:rPr lang="sk-SK" dirty="0"/>
               <a:t>Implementácia čakania pred kritickou časťou</a:t>
             </a:r>
           </a:p>
@@ -5724,7 +5038,9 @@
         </p:nvSpPr>
         <p:spPr/>
         <p:txBody>
-          <a:bodyPr/>
+          <a:bodyPr>
+            <a:normAutofit/>
+          </a:bodyPr>
           <a:lstStyle/>
           <a:p>
             <a:r>
@@ -5778,14 +5094,36 @@
             <a:pPr lvl="1"/>
             <a:r>
               <a:rPr lang="sk-SK" dirty="0"/>
-              <a:t>Zdieľanou premennou</a:t>
+              <a:t>Zdieľanými premennými, Striedaním procesov 2 procesov</a:t>
+            </a:r>
+          </a:p>
+          <a:p>
+            <a:pPr lvl="2"/>
+            <a:r>
+              <a:rPr lang="sk-SK" dirty="0" err="1"/>
+              <a:t>Dekkerov</a:t>
+            </a:r>
+            <a:r>
+              <a:rPr lang="sk-SK" dirty="0"/>
+              <a:t> algoritmus</a:t>
+            </a:r>
+          </a:p>
+          <a:p>
+            <a:pPr lvl="2"/>
+            <a:r>
+              <a:rPr lang="sk-SK" dirty="0" err="1"/>
+              <a:t>Petersonov</a:t>
+            </a:r>
+            <a:r>
+              <a:rPr lang="sk-SK" dirty="0"/>
+              <a:t> algoritmus</a:t>
             </a:r>
           </a:p>
           <a:p>
             <a:pPr lvl="1"/>
             <a:r>
               <a:rPr lang="sk-SK" dirty="0"/>
-              <a:t>Striedaním procesov</a:t>
+              <a:t>zdieľané premenné (pole lístkov) Vzájomné vylúčenie N procesov - Pekárov algoritmus</a:t>
             </a:r>
           </a:p>
         </p:txBody>
@@ -5889,7 +5227,7 @@
         </p:spPr>
         <p:txBody>
           <a:bodyPr>
-            <a:normAutofit fontScale="92500" lnSpcReduction="10000"/>
+            <a:normAutofit/>
           </a:bodyPr>
           <a:lstStyle/>
           <a:p>
@@ -5897,45 +5235,40 @@
               <a:buNone/>
             </a:pPr>
             <a:r>
-              <a:rPr lang="sk-SK" b="1" dirty="0"/>
-              <a:t>Technika aplikácie:</a:t>
+              <a:rPr lang="sk-SK" dirty="0"/>
+              <a:t>Pri synchronizačných úlohách sa pasívne čakanie (</a:t>
+            </a:r>
+            <a:r>
+              <a:rPr lang="sk-SK" dirty="0" err="1"/>
+              <a:t>blocking</a:t>
             </a:r>
             <a:r>
               <a:rPr lang="sk-SK" dirty="0"/>
               <a:t> </a:t>
             </a:r>
-          </a:p>
-          <a:p>
-            <a:r>
-              <a:rPr lang="sk-SK" dirty="0"/>
-              <a:t>procesu po dobu čakania nie je pridelený reálny procesor</a:t>
-            </a:r>
-          </a:p>
-          <a:p>
-            <a:r>
-              <a:rPr lang="sk-SK" dirty="0"/>
-              <a:t>značná závislosť od implementácie virtuálneho procesora a podpory </a:t>
-            </a:r>
             <a:r>
               <a:rPr lang="sk-SK" dirty="0" err="1"/>
-              <a:t>tech</a:t>
-            </a:r>
-            <a:r>
-              <a:rPr lang="sk-SK" dirty="0"/>
-              <a:t>. prostriedkov </a:t>
-            </a:r>
-          </a:p>
-          <a:p>
-            <a:r>
-              <a:rPr lang="sk-SK" dirty="0"/>
-              <a:t>Požiadavka, aby niektoré synchronizačné operácie boli aspoň čiastočne vzájomne vylúčené.</a:t>
-            </a:r>
-          </a:p>
-          <a:p>
-            <a:pPr lvl="1"/>
-            <a:r>
-              <a:rPr lang="sk-SK" dirty="0"/>
-              <a:t>Riešené pomocou zákazu prerušenia v jadre OS - zamedzenie prepínania kontextu.</a:t>
+              <a:t>wait</a:t>
+            </a:r>
+            <a:r>
+              <a:rPr lang="sk-SK" dirty="0"/>
+              <a:t>) používa na to, aby proces neplytval procesorovým časom, keď nemôže vstúpiť do kritickej sekcie. Namiesto točenia v slučke (</a:t>
+            </a:r>
+            <a:r>
+              <a:rPr lang="sk-SK" dirty="0" err="1"/>
+              <a:t>busy</a:t>
+            </a:r>
+            <a:r>
+              <a:rPr lang="sk-SK" dirty="0"/>
+              <a:t> </a:t>
+            </a:r>
+            <a:r>
+              <a:rPr lang="sk-SK" dirty="0" err="1"/>
+              <a:t>waiting</a:t>
+            </a:r>
+            <a:r>
+              <a:rPr lang="sk-SK" dirty="0"/>
+              <a:t>) sa proces zablokuje a OS ho prebudí až vtedy, keď môže pokračovať.</a:t>
             </a:r>
           </a:p>
           <a:p>
@@ -5943,6 +5276,15 @@
               <a:buNone/>
             </a:pPr>
             <a:r>
+              <a:rPr lang="sk-SK" dirty="0"/>
+              <a:t>Riešené pomocou zákazu prerušenia v jadre OS - zamedzenie prepínania kontextu.</a:t>
+            </a:r>
+          </a:p>
+          <a:p>
+            <a:pPr marL="0" indent="0">
+              <a:buNone/>
+            </a:pPr>
+            <a:r>
               <a:rPr lang="sk-SK" u="sng" dirty="0"/>
               <a:t>Zákaz prepínania kontextu:</a:t>
             </a:r>
@@ -5963,12 +5305,6 @@
               <a:t>podmienený</a:t>
             </a:r>
             <a:endParaRPr lang="sk-SK" u="sng" dirty="0"/>
-          </a:p>
-          <a:p>
-            <a:endParaRPr lang="sk-SK" dirty="0"/>
-          </a:p>
-          <a:p>
-            <a:endParaRPr lang="sk-SK" dirty="0"/>
           </a:p>
         </p:txBody>
       </p:sp>
@@ -6129,8 +5465,8 @@
         </p:nvSpPr>
         <p:spPr>
           <a:xfrm>
-            <a:off x="5773270" y="4314359"/>
-            <a:ext cx="5172635" cy="2308324"/>
+            <a:off x="5163670" y="3740259"/>
+            <a:ext cx="6377166" cy="3046988"/>
           </a:xfrm>
           <a:prstGeom prst="rect">
             <a:avLst/>
@@ -6149,15 +5485,15 @@
           <a:lstStyle/>
           <a:p>
             <a:r>
-              <a:rPr lang="sk-SK" dirty="0"/>
+              <a:rPr lang="sk-SK" sz="2400" dirty="0"/>
               <a:t>Prepnutie kontextu (</a:t>
             </a:r>
             <a:r>
-              <a:rPr lang="sk-SK" dirty="0" err="1"/>
+              <a:rPr lang="sk-SK" sz="2400" dirty="0" err="1"/>
               <a:t>context</a:t>
             </a:r>
             <a:r>
-              <a:rPr lang="sk-SK" dirty="0"/>
+              <a:rPr lang="sk-SK" sz="2400" dirty="0"/>
               <a:t> switch) je proces, pri ktorom operačný systém prepína vykonávanie z jedného procesu alebo vlákna na iný. Táto činnosť je nevyhnutná pre multitasking a správne fungovanie operačného systému. </a:t>
             </a:r>
           </a:p>
@@ -6167,7 +5503,7 @@
               <a:buChar char="•"/>
             </a:pPr>
             <a:r>
-              <a:rPr lang="sk-SK" dirty="0"/>
+              <a:rPr lang="sk-SK" sz="2400" dirty="0"/>
               <a:t>Uloženie stavu aktuálneho procesu</a:t>
             </a:r>
           </a:p>
@@ -6177,7 +5513,7 @@
               <a:buChar char="•"/>
             </a:pPr>
             <a:r>
-              <a:rPr lang="sk-SK" dirty="0"/>
+              <a:rPr lang="sk-SK" sz="2400" dirty="0"/>
               <a:t>Obnovenie stavu nového procesu:</a:t>
             </a:r>
           </a:p>
@@ -6187,7 +5523,7 @@
               <a:buChar char="•"/>
             </a:pPr>
             <a:r>
-              <a:rPr lang="sk-SK" dirty="0"/>
+              <a:rPr lang="sk-SK" sz="2400" dirty="0"/>
               <a:t>Prechod na nový proces</a:t>
             </a:r>
           </a:p>
@@ -6288,7 +5624,7 @@
         </p:nvSpPr>
         <p:spPr>
           <a:xfrm>
-            <a:off x="839788" y="2057400"/>
+            <a:off x="838200" y="2549244"/>
             <a:ext cx="5082041" cy="3811588"/>
           </a:xfrm>
         </p:spPr>
@@ -6598,7 +5934,7 @@
           <a:lstStyle/>
           <a:p>
             <a:r>
-              <a:rPr lang="sk-SK" dirty="0"/>
+              <a:rPr lang="sk-SK" b="1" dirty="0"/>
               <a:t>Alternatíva zvyšovania a znižovania priority procesu</a:t>
             </a:r>
             <a:br>
@@ -6655,7 +5991,7 @@
         </p:spPr>
         <p:txBody>
           <a:bodyPr>
-            <a:normAutofit lnSpcReduction="10000"/>
+            <a:normAutofit/>
           </a:bodyPr>
           <a:lstStyle/>
           <a:p>
@@ -6664,13 +6000,7 @@
           <a:p>
             <a:r>
               <a:rPr lang="sk-SK" sz="2400" dirty="0"/>
-              <a:t>Priorita určuje poradie prepínania kontextu na procesy. Príklad</a:t>
-            </a:r>
-          </a:p>
-          <a:p>
-            <a:r>
-              <a:rPr lang="sk-SK" sz="2400" dirty="0"/>
-              <a:t>viď obr. ( ZV-zvýš prioritu, SN-zníž prioritu )</a:t>
+              <a:t>Priorita určuje poradie prepínania kontextu na procesy. Príklad viď obr. ( ZV-zvýš prioritu, SN-zníž prioritu )</a:t>
             </a:r>
           </a:p>
           <a:p>
@@ -8146,30 +7476,14 @@
         <p:spPr/>
         <p:txBody>
           <a:bodyPr>
-            <a:normAutofit fontScale="90000"/>
+            <a:normAutofit/>
           </a:bodyPr>
           <a:lstStyle/>
           <a:p>
             <a:r>
-              <a:rPr lang="sk-SK" sz="4000" b="1" dirty="0"/>
-              <a:t>Synchronizácia kritických</a:t>
-            </a:r>
-            <a:r>
-              <a:rPr lang="sk-SK" sz="4000" dirty="0"/>
-              <a:t> </a:t>
-            </a:r>
-            <a:r>
-              <a:rPr lang="sk-SK" sz="4000" b="1" dirty="0"/>
-              <a:t>sekcií aktívnym čakaním</a:t>
-            </a:r>
-            <a:br>
-              <a:rPr lang="sk-SK" sz="4000" b="1" dirty="0"/>
-            </a:br>
-            <a:r>
-              <a:rPr lang="sk-SK" sz="6000" b="1" u="sng" dirty="0"/>
+              <a:rPr lang="sk-SK" dirty="0"/>
               <a:t>DEKKEROV ALGORITMUS</a:t>
             </a:r>
-            <a:endParaRPr lang="sk-SK" sz="6000" dirty="0"/>
           </a:p>
         </p:txBody>
       </p:sp>
@@ -8189,124 +7503,121 @@
             <p:ph idx="1"/>
           </p:nvPr>
         </p:nvSpPr>
-        <p:spPr/>
+        <p:spPr>
+          <a:xfrm>
+            <a:off x="838200" y="1508289"/>
+            <a:ext cx="10515600" cy="4668674"/>
+          </a:xfrm>
+        </p:spPr>
         <p:txBody>
-          <a:bodyPr/>
+          <a:bodyPr>
+            <a:normAutofit fontScale="92500" lnSpcReduction="20000"/>
+          </a:bodyPr>
           <a:lstStyle/>
+          <a:p>
+            <a:r>
+              <a:rPr lang="sk-SK" dirty="0"/>
+              <a:t>Rieši vzájomné vylúčenie pre 2 procesy bez podpory hardvéru.</a:t>
+            </a:r>
+          </a:p>
+          <a:p>
+            <a:r>
+              <a:rPr lang="sk-SK" dirty="0"/>
+              <a:t>Používa aktívne čakanie (</a:t>
+            </a:r>
+            <a:r>
+              <a:rPr lang="sk-SK" dirty="0" err="1"/>
+              <a:t>busy</a:t>
+            </a:r>
+            <a:r>
+              <a:rPr lang="sk-SK" dirty="0"/>
+              <a:t> </a:t>
+            </a:r>
+            <a:r>
+              <a:rPr lang="sk-SK" dirty="0" err="1"/>
+              <a:t>waiting</a:t>
+            </a:r>
+            <a:r>
+              <a:rPr lang="sk-SK" dirty="0"/>
+              <a:t>).</a:t>
+            </a:r>
+          </a:p>
+          <a:p>
+            <a:r>
+              <a:rPr lang="sk-SK" dirty="0"/>
+              <a:t>Každý proces používa premennú </a:t>
+            </a:r>
+            <a:r>
+              <a:rPr lang="sk-SK" dirty="0" err="1"/>
+              <a:t>flag</a:t>
+            </a:r>
+            <a:r>
+              <a:rPr lang="sk-SK" dirty="0"/>
+              <a:t>[i], ktorou oznamuje, že chce vstúpiť do kritickej sekcie.</a:t>
+            </a:r>
+          </a:p>
+          <a:p>
+            <a:r>
+              <a:rPr lang="sk-SK" dirty="0"/>
+              <a:t>Keď chcú vstúpiť obaja, rozhoduje premenná </a:t>
+            </a:r>
+            <a:r>
+              <a:rPr lang="sk-SK" dirty="0" err="1"/>
+              <a:t>turn</a:t>
+            </a:r>
+            <a:r>
+              <a:rPr lang="sk-SK" dirty="0"/>
+              <a:t>, ktorá určuje, kto má prednosť.</a:t>
+            </a:r>
+          </a:p>
+          <a:p>
+            <a:r>
+              <a:rPr lang="sk-SK" dirty="0"/>
+              <a:t>Proces, ktorý nemá prednosť, dočasne zruší svoj záujem (</a:t>
+            </a:r>
+            <a:r>
+              <a:rPr lang="sk-SK" dirty="0" err="1"/>
+              <a:t>flag</a:t>
+            </a:r>
+            <a:r>
+              <a:rPr lang="sk-SK" dirty="0"/>
+              <a:t>[i] = </a:t>
+            </a:r>
+            <a:r>
+              <a:rPr lang="sk-SK" dirty="0" err="1"/>
+              <a:t>false</a:t>
+            </a:r>
+            <a:r>
+              <a:rPr lang="sk-SK" dirty="0"/>
+              <a:t>), čaká, kým sa prednosť nezmení, a potom sa opäť pokúsi vstúpiť.</a:t>
+            </a:r>
+          </a:p>
           <a:p>
             <a:pPr marL="0" indent="0">
               <a:buNone/>
             </a:pPr>
             <a:r>
               <a:rPr lang="sk-SK" dirty="0"/>
-              <a:t>založený na použití spoločných premenných (počet procesov +1):</a:t>
-            </a:r>
-          </a:p>
-          <a:p>
-            <a:pPr marL="0" indent="0">
-              <a:buNone/>
-            </a:pPr>
-            <a:r>
-              <a:rPr lang="sk-SK" dirty="0"/>
-              <a:t>  </a:t>
-            </a:r>
-          </a:p>
-          <a:p>
-            <a:pPr marL="0" indent="0">
-              <a:buNone/>
-            </a:pPr>
-            <a:r>
-              <a:rPr lang="sk-SK" dirty="0"/>
-              <a:t>  type OZNAČENIE_PROCESU </a:t>
-            </a:r>
-            <a:r>
-              <a:rPr lang="sk-SK" dirty="0" err="1"/>
-              <a:t>is</a:t>
-            </a:r>
-            <a:r>
-              <a:rPr lang="sk-SK" dirty="0"/>
-              <a:t> (P,Q);</a:t>
-            </a:r>
-          </a:p>
-          <a:p>
-            <a:pPr marL="0" indent="0">
-              <a:buNone/>
-            </a:pPr>
-            <a:r>
-              <a:rPr lang="sk-SK" dirty="0"/>
-              <a:t>  type STAV </a:t>
-            </a:r>
-            <a:r>
-              <a:rPr lang="sk-SK" dirty="0" err="1"/>
-              <a:t>is</a:t>
-            </a:r>
-            <a:r>
-              <a:rPr lang="sk-SK" dirty="0"/>
-              <a:t> (MIMO_KS, V_KS);</a:t>
-            </a:r>
-          </a:p>
-          <a:p>
-            <a:pPr marL="0" indent="0">
-              <a:buNone/>
-            </a:pPr>
-            <a:r>
-              <a:rPr lang="sk-SK" dirty="0"/>
-              <a:t>  -- spoločné premenné</a:t>
-            </a:r>
-          </a:p>
-          <a:p>
-            <a:pPr marL="0" indent="0">
-              <a:buNone/>
-            </a:pPr>
-            <a:r>
-              <a:rPr lang="sk-SK" dirty="0"/>
-              <a:t>  NECH_BEŽÍ: OZNAČENIE_PROCESU:=Q; -- na </a:t>
-            </a:r>
-            <a:r>
-              <a:rPr lang="sk-SK" dirty="0" err="1"/>
-              <a:t>poč</a:t>
-            </a:r>
-            <a:r>
-              <a:rPr lang="sk-SK" dirty="0"/>
-              <a:t>. hodnote nezáleží</a:t>
-            </a:r>
-          </a:p>
-          <a:p>
-            <a:pPr marL="0" indent="0">
-              <a:buNone/>
-            </a:pPr>
-            <a:r>
-              <a:rPr lang="sk-SK" dirty="0"/>
-              <a:t>  PRÍZNAK: </a:t>
-            </a:r>
-            <a:r>
-              <a:rPr lang="sk-SK" dirty="0" err="1"/>
-              <a:t>array</a:t>
-            </a:r>
-            <a:r>
-              <a:rPr lang="sk-SK" dirty="0"/>
-              <a:t> (OZNAČENIE_PROCESU) of STAV</a:t>
-            </a:r>
-          </a:p>
-          <a:p>
-            <a:pPr marL="0" indent="0">
-              <a:buNone/>
-            </a:pPr>
-            <a:r>
-              <a:rPr lang="sk-SK" dirty="0"/>
-              <a:t>                        := (MIMO_KS, MIMO_KS); --</a:t>
-            </a:r>
-            <a:r>
-              <a:rPr lang="sk-SK" dirty="0" err="1"/>
-              <a:t>poč</a:t>
-            </a:r>
-            <a:r>
-              <a:rPr lang="sk-SK" dirty="0"/>
-              <a:t>. hodnoty </a:t>
-            </a:r>
-          </a:p>
-          <a:p>
-            <a:endParaRPr lang="sk-SK" dirty="0"/>
+              <a:t>Zaručuje:</a:t>
+            </a:r>
+          </a:p>
+          <a:p>
+            <a:r>
+              <a:rPr lang="sk-SK" dirty="0"/>
+              <a:t>vzájomné vylúčenie,</a:t>
+            </a:r>
+          </a:p>
+          <a:p>
+            <a:r>
+              <a:rPr lang="sk-SK" dirty="0"/>
+              <a:t>absenciu hladovania,</a:t>
+            </a:r>
+          </a:p>
+          <a:p>
+            <a:r>
+              <a:rPr lang="sk-SK" dirty="0"/>
+              <a:t>spravodlivé striedanie. </a:t>
+            </a:r>
           </a:p>
         </p:txBody>
       </p:sp>
@@ -8636,8 +7947,8 @@
         </p:nvSpPr>
         <p:spPr bwMode="auto">
           <a:xfrm>
-            <a:off x="521661" y="530986"/>
-            <a:ext cx="5265738" cy="5578475"/>
+            <a:off x="4753324" y="561763"/>
+            <a:ext cx="2685351" cy="5632311"/>
           </a:xfrm>
           <a:prstGeom prst="rect">
             <a:avLst/>
@@ -8770,67 +8081,58 @@
           </a:lstStyle>
           <a:p>
             <a:r>
+              <a:rPr lang="sk-SK" sz="2000" b="1" dirty="0"/>
+              <a:t>Proces 0:</a:t>
+            </a:r>
+          </a:p>
+          <a:p>
+            <a:r>
+              <a:rPr lang="sk-SK" sz="2000" dirty="0" err="1"/>
+              <a:t>flag</a:t>
+            </a:r>
+            <a:r>
               <a:rPr lang="sk-SK" sz="2000" dirty="0"/>
-              <a:t>Proces P:</a:t>
-            </a:r>
-          </a:p>
-          <a:p>
-            <a:r>
-              <a:rPr lang="sk-SK" sz="2000" dirty="0"/>
-              <a:t>   </a:t>
+              <a:t>[0] = </a:t>
             </a:r>
             <a:r>
               <a:rPr lang="sk-SK" sz="2000" dirty="0" err="1"/>
-              <a:t>loop</a:t>
+              <a:t>true</a:t>
             </a:r>
             <a:endParaRPr lang="sk-SK" sz="2000" dirty="0"/>
           </a:p>
           <a:p>
-            <a:r>
-              <a:rPr lang="sk-SK" sz="2000" dirty="0"/>
-              <a:t>         </a:t>
-            </a:r>
-            <a:r>
-              <a:rPr lang="sk-SK" sz="2000" b="1" dirty="0">
-                <a:solidFill>
-                  <a:srgbClr val="0070C0"/>
-                </a:solidFill>
-              </a:rPr>
-              <a:t>A;</a:t>
-            </a:r>
-          </a:p>
-          <a:p>
-            <a:r>
-              <a:rPr lang="sk-SK" sz="2000" dirty="0"/>
-              <a:t>         PRÍZNAK(P) := V_KS;</a:t>
-            </a:r>
-          </a:p>
-          <a:p>
-            <a:r>
-              <a:rPr lang="sk-SK" sz="2000" dirty="0"/>
-              <a:t>         </a:t>
-            </a:r>
+            <a:endParaRPr lang="sk-SK" sz="2000" dirty="0"/>
+          </a:p>
+          <a:p>
             <a:r>
               <a:rPr lang="sk-SK" sz="2000" dirty="0" err="1"/>
               <a:t>while</a:t>
             </a:r>
             <a:r>
               <a:rPr lang="sk-SK" sz="2000" dirty="0"/>
-              <a:t> PRÍZNAK(Q) = V_KS</a:t>
-            </a:r>
-          </a:p>
-          <a:p>
+              <a:t> (</a:t>
+            </a:r>
+            <a:r>
+              <a:rPr lang="sk-SK" sz="2000" dirty="0" err="1"/>
+              <a:t>flag</a:t>
+            </a:r>
             <a:r>
               <a:rPr lang="sk-SK" sz="2000" dirty="0"/>
-              <a:t>             </a:t>
+              <a:t>[1] == </a:t>
             </a:r>
             <a:r>
               <a:rPr lang="sk-SK" sz="2000" dirty="0" err="1"/>
-              <a:t>loop</a:t>
+              <a:t>true</a:t>
             </a:r>
             <a:r>
               <a:rPr lang="sk-SK" sz="2000" dirty="0"/>
-              <a:t> </a:t>
+              <a:t>) {</a:t>
+            </a:r>
+          </a:p>
+          <a:p>
+            <a:r>
+              <a:rPr lang="sk-SK" sz="2000" dirty="0"/>
+              <a:t>    </a:t>
             </a:r>
             <a:r>
               <a:rPr lang="sk-SK" sz="2000" dirty="0" err="1"/>
@@ -8838,27 +8140,40 @@
             </a:r>
             <a:r>
               <a:rPr lang="sk-SK" sz="2000" dirty="0"/>
-              <a:t> NECH_BEŽÍ = Q </a:t>
-            </a:r>
-          </a:p>
-          <a:p>
+              <a:t> (</a:t>
+            </a:r>
+            <a:r>
+              <a:rPr lang="sk-SK" sz="2000" dirty="0" err="1"/>
+              <a:t>turn</a:t>
+            </a:r>
             <a:r>
               <a:rPr lang="sk-SK" sz="2000" dirty="0"/>
-              <a:t>                         </a:t>
+              <a:t> == 1) {</a:t>
+            </a:r>
+          </a:p>
+          <a:p>
+            <a:r>
+              <a:rPr lang="sk-SK" sz="2000" dirty="0"/>
+              <a:t>        </a:t>
             </a:r>
             <a:r>
               <a:rPr lang="sk-SK" sz="2000" dirty="0" err="1"/>
-              <a:t>then</a:t>
+              <a:t>flag</a:t>
             </a:r>
             <a:r>
               <a:rPr lang="sk-SK" sz="2000" dirty="0"/>
-              <a:t> PRÍZNAK(P) := MIMO_KS;</a:t>
-            </a:r>
+              <a:t>[0] = </a:t>
+            </a:r>
+            <a:r>
+              <a:rPr lang="sk-SK" sz="2000" dirty="0" err="1"/>
+              <a:t>false</a:t>
+            </a:r>
+            <a:endParaRPr lang="sk-SK" sz="2000" dirty="0"/>
           </a:p>
           <a:p>
             <a:r>
               <a:rPr lang="sk-SK" sz="2000" dirty="0"/>
-              <a:t>                                 </a:t>
+              <a:t>        </a:t>
             </a:r>
             <a:r>
               <a:rPr lang="sk-SK" sz="2000" dirty="0" err="1"/>
@@ -8866,148 +8181,99 @@
             </a:r>
             <a:r>
               <a:rPr lang="sk-SK" sz="2000" dirty="0"/>
-              <a:t> NECH_BEŽÍ = Q</a:t>
-            </a:r>
-          </a:p>
-          <a:p>
+              <a:t> (</a:t>
+            </a:r>
+            <a:r>
+              <a:rPr lang="sk-SK" sz="2000" dirty="0" err="1"/>
+              <a:t>turn</a:t>
+            </a:r>
             <a:r>
               <a:rPr lang="sk-SK" sz="2000" dirty="0"/>
-              <a:t>                                       </a:t>
+              <a:t> == 1) {</a:t>
+            </a:r>
+          </a:p>
+          <a:p>
+            <a:r>
+              <a:rPr lang="sk-SK" sz="2000" dirty="0"/>
+              <a:t>            ; čakaj</a:t>
+            </a:r>
+          </a:p>
+          <a:p>
+            <a:r>
+              <a:rPr lang="sk-SK" sz="2000" dirty="0"/>
+              <a:t>        }</a:t>
+            </a:r>
+          </a:p>
+          <a:p>
+            <a:r>
+              <a:rPr lang="sk-SK" sz="2000" dirty="0"/>
+              <a:t>        </a:t>
             </a:r>
             <a:r>
               <a:rPr lang="sk-SK" sz="2000" dirty="0" err="1"/>
-              <a:t>loop</a:t>
+              <a:t>flag</a:t>
             </a:r>
             <a:r>
               <a:rPr lang="sk-SK" sz="2000" dirty="0"/>
-              <a:t> </a:t>
+              <a:t>[0] = </a:t>
             </a:r>
             <a:r>
               <a:rPr lang="sk-SK" sz="2000" dirty="0" err="1"/>
-              <a:t>nill</a:t>
-            </a:r>
+              <a:t>true</a:t>
+            </a:r>
+            <a:endParaRPr lang="sk-SK" sz="2000" dirty="0"/>
+          </a:p>
+          <a:p>
             <a:r>
               <a:rPr lang="sk-SK" sz="2000" dirty="0"/>
-              <a:t> end </a:t>
-            </a:r>
+              <a:t>    }</a:t>
+            </a:r>
+          </a:p>
+          <a:p>
+            <a:r>
+              <a:rPr lang="sk-SK" sz="2000" dirty="0"/>
+              <a:t>}</a:t>
+            </a:r>
+          </a:p>
+          <a:p>
+            <a:endParaRPr lang="sk-SK" sz="2000" dirty="0"/>
+          </a:p>
+          <a:p>
+            <a:r>
+              <a:rPr lang="sk-SK" sz="2000" dirty="0"/>
+              <a:t>; --- kritická sekcia ---</a:t>
+            </a:r>
+          </a:p>
+          <a:p>
+            <a:endParaRPr lang="sk-SK" sz="2000" dirty="0"/>
+          </a:p>
+          <a:p>
             <a:r>
               <a:rPr lang="sk-SK" sz="2000" dirty="0" err="1"/>
-              <a:t>loop</a:t>
+              <a:t>turn</a:t>
             </a:r>
             <a:r>
               <a:rPr lang="sk-SK" sz="2000" dirty="0"/>
-              <a:t>;</a:t>
-            </a:r>
-          </a:p>
-          <a:p>
+              <a:t> = 1</a:t>
+            </a:r>
+          </a:p>
+          <a:p>
+            <a:r>
+              <a:rPr lang="sk-SK" sz="2000" dirty="0" err="1"/>
+              <a:t>flag</a:t>
+            </a:r>
             <a:r>
               <a:rPr lang="sk-SK" sz="2000" dirty="0"/>
-              <a:t>                                 PRÍZNAK(P) := V_KS;</a:t>
-            </a:r>
-          </a:p>
-          <a:p>
-            <a:r>
-              <a:rPr lang="sk-SK" sz="2000" dirty="0"/>
-              <a:t>                          </a:t>
+              <a:t>[0] = </a:t>
             </a:r>
             <a:r>
               <a:rPr lang="sk-SK" sz="2000" dirty="0" err="1"/>
-              <a:t>else</a:t>
-            </a:r>
-            <a:r>
-              <a:rPr lang="sk-SK" sz="2000" dirty="0"/>
-              <a:t> </a:t>
-            </a:r>
-            <a:r>
-              <a:rPr lang="sk-SK" sz="2000" dirty="0" err="1"/>
-              <a:t>nill</a:t>
-            </a:r>
-            <a:r>
-              <a:rPr lang="sk-SK" sz="2000" dirty="0"/>
-              <a:t>;</a:t>
-            </a:r>
-          </a:p>
-          <a:p>
-            <a:r>
-              <a:rPr lang="sk-SK" sz="2000" dirty="0"/>
-              <a:t>                      end </a:t>
-            </a:r>
-            <a:r>
-              <a:rPr lang="sk-SK" sz="2000" dirty="0" err="1"/>
-              <a:t>if</a:t>
-            </a:r>
-            <a:r>
-              <a:rPr lang="sk-SK" sz="2000" dirty="0"/>
-              <a:t>;</a:t>
-            </a:r>
-          </a:p>
-          <a:p>
-            <a:r>
-              <a:rPr lang="sk-SK" sz="2000" dirty="0"/>
-              <a:t>             end </a:t>
-            </a:r>
-            <a:r>
-              <a:rPr lang="sk-SK" sz="2000" dirty="0" err="1"/>
-              <a:t>loop</a:t>
-            </a:r>
-            <a:r>
-              <a:rPr lang="sk-SK" sz="2000" dirty="0"/>
-              <a:t>;</a:t>
-            </a:r>
-          </a:p>
-          <a:p>
-            <a:r>
-              <a:rPr lang="sk-SK" sz="2000" dirty="0"/>
-              <a:t>          </a:t>
-            </a:r>
-            <a:r>
-              <a:rPr lang="sk-SK" sz="2000" dirty="0">
-                <a:solidFill>
-                  <a:srgbClr val="0070C0"/>
-                </a:solidFill>
-              </a:rPr>
-              <a:t>KSP;</a:t>
-            </a:r>
-          </a:p>
-          <a:p>
-            <a:r>
-              <a:rPr lang="sk-SK" sz="2000" dirty="0"/>
-              <a:t>          NECH_BEŽÍ := Q;</a:t>
-            </a:r>
-          </a:p>
-          <a:p>
-            <a:r>
-              <a:rPr lang="sk-SK" sz="2000" dirty="0"/>
-              <a:t>          PRÍZNAK(P) :=MIMO_KS;</a:t>
-            </a:r>
-          </a:p>
-          <a:p>
-            <a:r>
-              <a:rPr lang="sk-SK" sz="2000" dirty="0"/>
-              <a:t>          </a:t>
-            </a:r>
-            <a:r>
-              <a:rPr lang="sk-SK" sz="2000" dirty="0">
-                <a:solidFill>
-                  <a:srgbClr val="0070C0"/>
-                </a:solidFill>
-              </a:rPr>
-              <a:t>B; </a:t>
-            </a:r>
-          </a:p>
-          <a:p>
-            <a:r>
-              <a:rPr lang="sk-SK" sz="2000" dirty="0"/>
-              <a:t>   end </a:t>
-            </a:r>
-            <a:r>
-              <a:rPr lang="sk-SK" sz="2000" dirty="0" err="1"/>
-              <a:t>loop</a:t>
-            </a:r>
-            <a:r>
-              <a:rPr lang="sk-SK" sz="2000" dirty="0"/>
-              <a:t>;</a:t>
-            </a:r>
+              <a:t>false</a:t>
+            </a:r>
+            <a:endParaRPr lang="sk-SK" sz="2000" dirty="0"/>
+          </a:p>
+          <a:p>
+            <a:endParaRPr lang="sk-SK" sz="2000" dirty="0"/>
           </a:p>
         </p:txBody>
       </p:sp>
@@ -9027,8 +8293,8 @@
         </p:nvSpPr>
         <p:spPr bwMode="auto">
           <a:xfrm>
-            <a:off x="5724876" y="530986"/>
-            <a:ext cx="5308600" cy="5943600"/>
+            <a:off x="8185272" y="500208"/>
+            <a:ext cx="2685351" cy="5693866"/>
           </a:xfrm>
           <a:prstGeom prst="rect">
             <a:avLst/>
@@ -9161,8 +8427,8 @@
           </a:lstStyle>
           <a:p>
             <a:r>
-              <a:rPr lang="sk-SK" sz="2000" dirty="0"/>
-              <a:t>Proces Q:</a:t>
+              <a:rPr lang="sk-SK" sz="2000" b="1" dirty="0"/>
+              <a:t>Proces 1:</a:t>
             </a:r>
           </a:p>
           <a:p>
@@ -9172,9 +8438,68 @@
             </a:r>
             <a:r>
               <a:rPr lang="sk-SK" sz="2000" dirty="0" err="1"/>
-              <a:t>loop</a:t>
+              <a:t>flag</a:t>
+            </a:r>
+            <a:r>
+              <a:rPr lang="sk-SK" sz="2000" dirty="0"/>
+              <a:t>[1] = </a:t>
+            </a:r>
+            <a:r>
+              <a:rPr lang="sk-SK" sz="2000" dirty="0" err="1"/>
+              <a:t>true</a:t>
             </a:r>
             <a:endParaRPr lang="sk-SK" sz="2000" dirty="0"/>
+          </a:p>
+          <a:p>
+            <a:endParaRPr lang="sk-SK" sz="2000" dirty="0"/>
+          </a:p>
+          <a:p>
+            <a:r>
+              <a:rPr lang="sk-SK" sz="2000" dirty="0" err="1"/>
+              <a:t>while</a:t>
+            </a:r>
+            <a:r>
+              <a:rPr lang="sk-SK" sz="2000" dirty="0"/>
+              <a:t> (</a:t>
+            </a:r>
+            <a:r>
+              <a:rPr lang="sk-SK" sz="2000" dirty="0" err="1"/>
+              <a:t>flag</a:t>
+            </a:r>
+            <a:r>
+              <a:rPr lang="sk-SK" sz="2000" dirty="0"/>
+              <a:t>[0] == </a:t>
+            </a:r>
+            <a:r>
+              <a:rPr lang="sk-SK" sz="2000" dirty="0" err="1"/>
+              <a:t>true</a:t>
+            </a:r>
+            <a:r>
+              <a:rPr lang="sk-SK" sz="2000" dirty="0"/>
+              <a:t>) {</a:t>
+            </a:r>
+          </a:p>
+          <a:p>
+            <a:r>
+              <a:rPr lang="sk-SK" sz="2000" dirty="0"/>
+              <a:t>    </a:t>
+            </a:r>
+            <a:r>
+              <a:rPr lang="sk-SK" sz="2000" dirty="0" err="1"/>
+              <a:t>if</a:t>
+            </a:r>
+            <a:r>
+              <a:rPr lang="sk-SK" sz="2000" dirty="0"/>
+              <a:t> (</a:t>
+            </a:r>
+            <a:r>
+              <a:rPr lang="sk-SK" sz="2000" dirty="0" err="1"/>
+              <a:t>turn</a:t>
+            </a:r>
+            <a:r>
+              <a:rPr lang="sk-SK" sz="2000" dirty="0"/>
+              <a:t> == 0) {</a:t>
+            </a:r>
           </a:p>
           <a:p>
             <a:r>
@@ -9182,24 +8507,23 @@
               <a:t>        </a:t>
             </a:r>
             <a:r>
-              <a:rPr lang="sk-SK" sz="2000" dirty="0">
-                <a:solidFill>
-                  <a:srgbClr val="0070C0"/>
-                </a:solidFill>
-              </a:rPr>
-              <a:t>C;</a:t>
-            </a:r>
-          </a:p>
-          <a:p>
+              <a:rPr lang="sk-SK" sz="2000" dirty="0" err="1"/>
+              <a:t>flag</a:t>
+            </a:r>
             <a:r>
               <a:rPr lang="sk-SK" sz="2000" dirty="0"/>
-              <a:t>         PRÍZNAK(Q) := V_KS;</a:t>
-            </a:r>
+              <a:t>[1] = </a:t>
+            </a:r>
+            <a:r>
+              <a:rPr lang="sk-SK" sz="2000" dirty="0" err="1"/>
+              <a:t>false</a:t>
+            </a:r>
+            <a:endParaRPr lang="sk-SK" sz="2000" dirty="0"/>
           </a:p>
           <a:p>
             <a:r>
               <a:rPr lang="sk-SK" sz="2000" dirty="0"/>
-              <a:t>         </a:t>
+              <a:t>        </a:t>
             </a:r>
             <a:r>
               <a:rPr lang="sk-SK" sz="2000" dirty="0" err="1"/>
@@ -9207,197 +8531,192 @@
             </a:r>
             <a:r>
               <a:rPr lang="sk-SK" sz="2000" dirty="0"/>
-              <a:t> PRÍZNAK(P) = V_KS</a:t>
-            </a:r>
-          </a:p>
-          <a:p>
+              <a:t> (</a:t>
+            </a:r>
+            <a:r>
+              <a:rPr lang="sk-SK" sz="2000" dirty="0" err="1"/>
+              <a:t>turn</a:t>
+            </a:r>
             <a:r>
               <a:rPr lang="sk-SK" sz="2000" dirty="0"/>
-              <a:t>             </a:t>
+              <a:t> == 0) {</a:t>
+            </a:r>
+          </a:p>
+          <a:p>
+            <a:r>
+              <a:rPr lang="sk-SK" sz="2000" dirty="0"/>
+              <a:t>            ; čakaj</a:t>
+            </a:r>
+          </a:p>
+          <a:p>
+            <a:r>
+              <a:rPr lang="sk-SK" sz="2000" dirty="0"/>
+              <a:t>        }</a:t>
+            </a:r>
+          </a:p>
+          <a:p>
+            <a:r>
+              <a:rPr lang="sk-SK" sz="2000" dirty="0"/>
+              <a:t>        </a:t>
             </a:r>
             <a:r>
               <a:rPr lang="sk-SK" sz="2000" dirty="0" err="1"/>
-              <a:t>loop</a:t>
+              <a:t>flag</a:t>
             </a:r>
             <a:r>
               <a:rPr lang="sk-SK" sz="2000" dirty="0"/>
-              <a:t> </a:t>
+              <a:t>[1] = </a:t>
             </a:r>
             <a:r>
               <a:rPr lang="sk-SK" sz="2000" dirty="0" err="1"/>
-              <a:t>if</a:t>
-            </a:r>
+              <a:t>true</a:t>
+            </a:r>
+            <a:endParaRPr lang="sk-SK" sz="2000" dirty="0"/>
+          </a:p>
+          <a:p>
             <a:r>
               <a:rPr lang="sk-SK" sz="2000" dirty="0"/>
-              <a:t> NECH_BEŽÍ = P </a:t>
+              <a:t>    }</a:t>
             </a:r>
           </a:p>
           <a:p>
             <a:r>
               <a:rPr lang="sk-SK" sz="2000" dirty="0"/>
-              <a:t>                         </a:t>
-            </a:r>
+              <a:t>}</a:t>
+            </a:r>
+          </a:p>
+          <a:p>
+            <a:endParaRPr lang="sk-SK" sz="2000" dirty="0"/>
+          </a:p>
+          <a:p>
+            <a:r>
+              <a:rPr lang="sk-SK" sz="2000" dirty="0"/>
+              <a:t>; --- kritická sekcia ---</a:t>
+            </a:r>
+          </a:p>
+          <a:p>
+            <a:endParaRPr lang="sk-SK" sz="2000" dirty="0"/>
+          </a:p>
+          <a:p>
             <a:r>
               <a:rPr lang="sk-SK" sz="2000" dirty="0" err="1"/>
-              <a:t>then</a:t>
+              <a:t>turn</a:t>
             </a:r>
             <a:r>
               <a:rPr lang="sk-SK" sz="2000" dirty="0"/>
-              <a:t> PRÍZNAK(Q) := MIMO_KS;</a:t>
-            </a:r>
-          </a:p>
-          <a:p>
+              <a:t> = 0</a:t>
+            </a:r>
+          </a:p>
+          <a:p>
+            <a:r>
+              <a:rPr lang="sk-SK" sz="2000" dirty="0" err="1"/>
+              <a:t>flag</a:t>
+            </a:r>
             <a:r>
               <a:rPr lang="sk-SK" sz="2000" dirty="0"/>
-              <a:t>                                 </a:t>
+              <a:t>[1] = </a:t>
             </a:r>
             <a:r>
               <a:rPr lang="sk-SK" sz="2000" dirty="0" err="1"/>
-              <a:t>while</a:t>
-            </a:r>
-            <a:r>
-              <a:rPr lang="sk-SK" sz="2000" dirty="0"/>
-              <a:t> NECH_BEŽÍ = P</a:t>
-            </a:r>
-          </a:p>
-          <a:p>
-            <a:r>
-              <a:rPr lang="sk-SK" sz="2000" dirty="0"/>
-              <a:t>                                       </a:t>
-            </a:r>
-            <a:r>
-              <a:rPr lang="sk-SK" sz="2000" dirty="0" err="1"/>
-              <a:t>loop</a:t>
-            </a:r>
-            <a:r>
-              <a:rPr lang="sk-SK" sz="2000" dirty="0"/>
-              <a:t> </a:t>
-            </a:r>
-            <a:r>
-              <a:rPr lang="sk-SK" sz="2000" dirty="0" err="1"/>
-              <a:t>nill</a:t>
-            </a:r>
-            <a:r>
-              <a:rPr lang="sk-SK" sz="2000" dirty="0"/>
-              <a:t> end </a:t>
-            </a:r>
-            <a:r>
-              <a:rPr lang="sk-SK" sz="2000" dirty="0" err="1"/>
-              <a:t>loop</a:t>
-            </a:r>
-            <a:r>
-              <a:rPr lang="sk-SK" sz="2000" dirty="0"/>
-              <a:t>;</a:t>
-            </a:r>
-          </a:p>
-          <a:p>
-            <a:r>
-              <a:rPr lang="sk-SK" sz="2000" dirty="0"/>
-              <a:t>                                 PRÍZNAK(Q) := V_KS;</a:t>
-            </a:r>
-          </a:p>
-          <a:p>
-            <a:r>
-              <a:rPr lang="sk-SK" sz="2000" dirty="0"/>
-              <a:t>                          </a:t>
-            </a:r>
-            <a:r>
-              <a:rPr lang="sk-SK" sz="2000" dirty="0" err="1"/>
-              <a:t>else</a:t>
-            </a:r>
-            <a:r>
-              <a:rPr lang="sk-SK" sz="2000" dirty="0"/>
-              <a:t> </a:t>
-            </a:r>
-            <a:r>
-              <a:rPr lang="sk-SK" sz="2000" dirty="0" err="1"/>
-              <a:t>nill</a:t>
-            </a:r>
-            <a:r>
-              <a:rPr lang="sk-SK" sz="2000" dirty="0"/>
-              <a:t>;</a:t>
-            </a:r>
-          </a:p>
-          <a:p>
-            <a:r>
-              <a:rPr lang="sk-SK" sz="2000" dirty="0"/>
-              <a:t>                      end </a:t>
-            </a:r>
-            <a:r>
-              <a:rPr lang="sk-SK" sz="2000" dirty="0" err="1"/>
-              <a:t>if</a:t>
-            </a:r>
-            <a:r>
-              <a:rPr lang="sk-SK" sz="2000" dirty="0"/>
-              <a:t>;</a:t>
-            </a:r>
-          </a:p>
-          <a:p>
-            <a:r>
-              <a:rPr lang="sk-SK" sz="2000" dirty="0"/>
-              <a:t>             end </a:t>
-            </a:r>
-            <a:r>
-              <a:rPr lang="sk-SK" sz="2000" dirty="0" err="1"/>
-              <a:t>loop</a:t>
-            </a:r>
-            <a:r>
-              <a:rPr lang="sk-SK" sz="2000" dirty="0"/>
-              <a:t>;</a:t>
-            </a:r>
-          </a:p>
-          <a:p>
-            <a:r>
-              <a:rPr lang="sk-SK" sz="2000" dirty="0"/>
-              <a:t>          </a:t>
-            </a:r>
-            <a:r>
-              <a:rPr lang="sk-SK" sz="2000" dirty="0">
-                <a:solidFill>
-                  <a:srgbClr val="0070C0"/>
-                </a:solidFill>
-              </a:rPr>
-              <a:t>KSQ;</a:t>
-            </a:r>
-          </a:p>
-          <a:p>
-            <a:r>
-              <a:rPr lang="sk-SK" sz="2000" dirty="0"/>
-              <a:t>          NECH_BEŽÍ := P;</a:t>
-            </a:r>
-          </a:p>
-          <a:p>
-            <a:r>
-              <a:rPr lang="sk-SK" sz="2000" dirty="0"/>
-              <a:t>          PRÍZNAK(Q) :=MIMO_KS;</a:t>
-            </a:r>
-          </a:p>
-          <a:p>
-            <a:r>
-              <a:rPr lang="sk-SK" sz="2000" dirty="0"/>
-              <a:t>          </a:t>
-            </a:r>
-            <a:r>
-              <a:rPr lang="sk-SK" sz="2000" dirty="0">
-                <a:solidFill>
-                  <a:srgbClr val="0070C0"/>
-                </a:solidFill>
-              </a:rPr>
-              <a:t>D; </a:t>
-            </a:r>
-          </a:p>
-          <a:p>
-            <a:r>
-              <a:rPr lang="sk-SK" sz="2000" dirty="0"/>
-              <a:t>   end </a:t>
-            </a:r>
-            <a:r>
-              <a:rPr lang="sk-SK" sz="2000" dirty="0" err="1"/>
-              <a:t>loop</a:t>
-            </a:r>
-            <a:r>
-              <a:rPr lang="sk-SK" sz="2000" dirty="0"/>
-              <a:t>;</a:t>
+              <a:t>false</a:t>
+            </a:r>
+            <a:endParaRPr lang="sk-SK" sz="2000" dirty="0"/>
+          </a:p>
+          <a:p>
+            <a:endParaRPr lang="sk-SK" dirty="0"/>
+          </a:p>
+        </p:txBody>
+      </p:sp>
+      <p:sp>
+        <p:nvSpPr>
+          <p:cNvPr id="2" name="BlokTextu 1">
+            <a:extLst>
+              <a:ext uri="{FF2B5EF4-FFF2-40B4-BE49-F238E27FC236}">
+                <a16:creationId xmlns:a16="http://schemas.microsoft.com/office/drawing/2014/main" id="{22D9CFC9-7A34-A25D-84B6-792F17980B5F}"/>
+              </a:ext>
+            </a:extLst>
+          </p:cNvPr>
+          <p:cNvSpPr txBox="1"/>
+          <p:nvPr/>
+        </p:nvSpPr>
+        <p:spPr>
+          <a:xfrm>
+            <a:off x="556181" y="561763"/>
+            <a:ext cx="3684022" cy="2585323"/>
+          </a:xfrm>
+          <a:prstGeom prst="rect">
+            <a:avLst/>
+          </a:prstGeom>
+          <a:noFill/>
+        </p:spPr>
+        <p:txBody>
+          <a:bodyPr wrap="none" rtlCol="0">
+            <a:spAutoFit/>
+          </a:bodyPr>
+          <a:lstStyle/>
+          <a:p>
+            <a:r>
+              <a:rPr lang="sk-SK" dirty="0"/>
+              <a:t>Použijeme iba tri zdieľané premenné:</a:t>
+            </a:r>
+          </a:p>
+          <a:p>
+            <a:r>
+              <a:rPr lang="sk-SK" dirty="0" err="1"/>
+              <a:t>flag</a:t>
+            </a:r>
+            <a:r>
+              <a:rPr lang="sk-SK" dirty="0"/>
+              <a:t>[0] – či P0 chce vstúpiť</a:t>
+            </a:r>
+          </a:p>
+          <a:p>
+            <a:r>
+              <a:rPr lang="sk-SK" dirty="0" err="1"/>
+              <a:t>flag</a:t>
+            </a:r>
+            <a:r>
+              <a:rPr lang="sk-SK" dirty="0"/>
+              <a:t>[1] – či P1 chce vstúpiť</a:t>
+            </a:r>
+          </a:p>
+          <a:p>
+            <a:r>
+              <a:rPr lang="sk-SK" dirty="0" err="1"/>
+              <a:t>turn</a:t>
+            </a:r>
+            <a:r>
+              <a:rPr lang="sk-SK" dirty="0"/>
+              <a:t> – komu patrí prednosť</a:t>
+            </a:r>
+          </a:p>
+          <a:p>
+            <a:endParaRPr lang="sk-SK" dirty="0"/>
+          </a:p>
+          <a:p>
+            <a:r>
+              <a:rPr lang="sk-SK" dirty="0"/>
+              <a:t>Hodnoty:</a:t>
+            </a:r>
+          </a:p>
+          <a:p>
+            <a:r>
+              <a:rPr lang="sk-SK" dirty="0" err="1"/>
+              <a:t>true</a:t>
+            </a:r>
+            <a:r>
+              <a:rPr lang="sk-SK" dirty="0"/>
+              <a:t> = 1</a:t>
+            </a:r>
+          </a:p>
+          <a:p>
+            <a:r>
+              <a:rPr lang="sk-SK" dirty="0" err="1"/>
+              <a:t>false</a:t>
+            </a:r>
+            <a:r>
+              <a:rPr lang="sk-SK" dirty="0"/>
+              <a:t> = 0</a:t>
             </a:r>
           </a:p>
           <a:p>
@@ -9479,10 +8798,15 @@
             <p:ph idx="1"/>
           </p:nvPr>
         </p:nvSpPr>
-        <p:spPr/>
+        <p:spPr>
+          <a:xfrm>
+            <a:off x="838200" y="1362635"/>
+            <a:ext cx="10515600" cy="4814328"/>
+          </a:xfrm>
+        </p:spPr>
         <p:txBody>
           <a:bodyPr>
-            <a:normAutofit fontScale="92500" lnSpcReduction="20000"/>
+            <a:normAutofit fontScale="85000" lnSpcReduction="20000"/>
           </a:bodyPr>
           <a:lstStyle/>
           <a:p>
@@ -9492,8 +8816,27 @@
               </a:spcBef>
             </a:pPr>
             <a:r>
-              <a:rPr lang="sk-SK" dirty="0"/>
-              <a:t>Proces - vykonávanie inštancie programu, ktorý obsahuje inštrukcie a dáta potrebné pre jeho realizáciu.</a:t>
+              <a:rPr lang="sk-SK" b="1" dirty="0"/>
+              <a:t>Proces</a:t>
+            </a:r>
+            <a:r>
+              <a:rPr lang="sk-SK" dirty="0"/>
+              <a:t> - vykonávanie inštancie programu, ktorý obsahuje inštrukcie a dáta potrebné pre jeho realizáciu, samostatná jednotka s vlastným adresným priestorom.</a:t>
+            </a:r>
+          </a:p>
+          <a:p>
+            <a:pPr lvl="1">
+              <a:spcBef>
+                <a:spcPct val="50000"/>
+              </a:spcBef>
+            </a:pPr>
+            <a:r>
+              <a:rPr lang="sk-SK" b="1" dirty="0"/>
+              <a:t>Vlákno</a:t>
+            </a:r>
+            <a:r>
+              <a:rPr lang="sk-SK" dirty="0"/>
+              <a:t> – ľahšia jednotka v rámci procesu, zdieľa pamäť.</a:t>
             </a:r>
           </a:p>
           <a:p>
@@ -9503,8 +8846,12 @@
               </a:spcBef>
             </a:pPr>
             <a:r>
-              <a:rPr lang="sk-SK" dirty="0"/>
-              <a:t>Procesor – vykonáva inštrukcie zadané procesom (programom)</a:t>
+              <a:rPr lang="sk-SK" b="1" dirty="0"/>
+              <a:t>Procesor</a:t>
+            </a:r>
+            <a:r>
+              <a:rPr lang="sk-SK" dirty="0"/>
+              <a:t> – vykonáva inštrukcie zadané procesom (programom)</a:t>
             </a:r>
           </a:p>
           <a:p>
@@ -9514,12 +8861,16 @@
               </a:spcBef>
             </a:pPr>
             <a:r>
-              <a:rPr lang="sk-SK" dirty="0"/>
-              <a:t>Paralelné procesy - na (jedno procesorovom a jadrovom) počítači sa síce v princípe vykonáva vždy len jeden proces, no vďaka (viacjadrovým procesorom alebo) jadru OS môže nad technickými prostriedkami vzniknúť niekoľko virtuálnych počítačov pracujúcich paralelne vďaka čomu môže na jednom počítači prebiehať niekoľko paralelných procesov</a:t>
-            </a:r>
-          </a:p>
-          <a:p>
-            <a:pPr>
+              <a:rPr lang="sk-SK" b="1" dirty="0"/>
+              <a:t>Paralelné procesy </a:t>
+            </a:r>
+            <a:r>
+              <a:rPr lang="sk-SK" dirty="0"/>
+              <a:t>- na (jedno procesorovom a jadrovom) počítači sa síce v princípe vykonáva vždy len jeden proces, no vďaka (viacjadrovým procesorom alebo) jadru OS môže nad technickými prostriedkami vzniknúť niekoľko virtuálnych počítačov pracujúcich paralelne vďaka čomu môže na jednom počítači prebiehať niekoľko paralelných procesov</a:t>
+            </a:r>
+          </a:p>
+          <a:p>
+            <a:pPr lvl="1">
               <a:spcBef>
                 <a:spcPct val="50000"/>
               </a:spcBef>
@@ -9728,6 +9079,1424 @@
       </p:grpSpPr>
       <p:sp>
         <p:nvSpPr>
+          <p:cNvPr id="2" name="Nadpis 1">
+            <a:extLst>
+              <a:ext uri="{FF2B5EF4-FFF2-40B4-BE49-F238E27FC236}">
+                <a16:creationId xmlns:a16="http://schemas.microsoft.com/office/drawing/2014/main" id="{389F8CB0-B231-AE94-1A65-7BE6252F199D}"/>
+              </a:ext>
+            </a:extLst>
+          </p:cNvPr>
+          <p:cNvSpPr>
+            <a:spLocks noGrp="1"/>
+          </p:cNvSpPr>
+          <p:nvPr>
+            <p:ph type="title"/>
+          </p:nvPr>
+        </p:nvSpPr>
+        <p:spPr>
+          <a:xfrm>
+            <a:off x="838200" y="136525"/>
+            <a:ext cx="10515600" cy="1325563"/>
+          </a:xfrm>
+        </p:spPr>
+        <p:txBody>
+          <a:bodyPr/>
+          <a:lstStyle/>
+          <a:p>
+            <a:r>
+              <a:rPr lang="sk-SK" dirty="0" err="1"/>
+              <a:t>Petersonov</a:t>
+            </a:r>
+            <a:r>
+              <a:rPr lang="sk-SK" dirty="0"/>
+              <a:t> algoritmus</a:t>
+            </a:r>
+          </a:p>
+        </p:txBody>
+      </p:sp>
+      <p:sp>
+        <p:nvSpPr>
+          <p:cNvPr id="3" name="Zástupný objekt pre obsah 2">
+            <a:extLst>
+              <a:ext uri="{FF2B5EF4-FFF2-40B4-BE49-F238E27FC236}">
+                <a16:creationId xmlns:a16="http://schemas.microsoft.com/office/drawing/2014/main" id="{A0AC6075-5FE4-5CEE-4243-455D47306D1A}"/>
+              </a:ext>
+            </a:extLst>
+          </p:cNvPr>
+          <p:cNvSpPr>
+            <a:spLocks noGrp="1"/>
+          </p:cNvSpPr>
+          <p:nvPr>
+            <p:ph idx="1"/>
+          </p:nvPr>
+        </p:nvSpPr>
+        <p:spPr>
+          <a:xfrm>
+            <a:off x="838200" y="1290918"/>
+            <a:ext cx="10515600" cy="5334000"/>
+          </a:xfrm>
+        </p:spPr>
+        <p:txBody>
+          <a:bodyPr>
+            <a:normAutofit fontScale="70000" lnSpcReduction="20000"/>
+          </a:bodyPr>
+          <a:lstStyle/>
+          <a:p>
+            <a:pPr marL="0" indent="0">
+              <a:buNone/>
+            </a:pPr>
+            <a:r>
+              <a:rPr lang="sk-SK" dirty="0"/>
+              <a:t>patrí medzi najjednoduchšie a zároveň najčistejšie softvérové riešenia vzájomného vylúčenia pre </a:t>
+            </a:r>
+            <a:r>
+              <a:rPr lang="sk-SK" b="1" dirty="0"/>
+              <a:t>dva procesy</a:t>
+            </a:r>
+            <a:r>
+              <a:rPr lang="sk-SK" dirty="0"/>
+              <a:t>. Jeho podstata stojí na dvoch myšlienkach: </a:t>
+            </a:r>
+            <a:r>
+              <a:rPr lang="sk-SK" i="1" u="sng" dirty="0"/>
+              <a:t>oznámení záujmu</a:t>
+            </a:r>
+            <a:r>
+              <a:rPr lang="sk-SK" u="sng" dirty="0"/>
+              <a:t> </a:t>
+            </a:r>
+            <a:r>
+              <a:rPr lang="sk-SK" dirty="0"/>
+              <a:t>a </a:t>
+            </a:r>
+            <a:r>
+              <a:rPr lang="sk-SK" i="1" u="sng" dirty="0"/>
+              <a:t>udelení prednosti</a:t>
+            </a:r>
+            <a:r>
+              <a:rPr lang="sk-SK" dirty="0"/>
+              <a:t>.</a:t>
+            </a:r>
+          </a:p>
+          <a:p>
+            <a:pPr marL="0" indent="0">
+              <a:buNone/>
+            </a:pPr>
+            <a:r>
+              <a:rPr lang="sk-SK" b="1" dirty="0"/>
+              <a:t>1. Každý proces oznámi, že chce vstúpiť do kritickej sekcie</a:t>
+            </a:r>
+          </a:p>
+          <a:p>
+            <a:r>
+              <a:rPr lang="sk-SK" dirty="0"/>
+              <a:t>Proces si nastaví svoju zdieľanú premennú </a:t>
+            </a:r>
+            <a:r>
+              <a:rPr lang="sk-SK" i="1" dirty="0" err="1"/>
+              <a:t>flag</a:t>
+            </a:r>
+            <a:r>
+              <a:rPr lang="sk-SK" i="1" dirty="0"/>
+              <a:t>[i] = </a:t>
+            </a:r>
+            <a:r>
+              <a:rPr lang="sk-SK" i="1" dirty="0" err="1"/>
+              <a:t>true</a:t>
+            </a:r>
+            <a:r>
+              <a:rPr lang="sk-SK" dirty="0"/>
+              <a:t>. Tým dáva najavo: „mám záujem vstúpiť“.</a:t>
+            </a:r>
+          </a:p>
+          <a:p>
+            <a:pPr marL="0" indent="0">
+              <a:buNone/>
+            </a:pPr>
+            <a:r>
+              <a:rPr lang="sk-SK" b="1" dirty="0"/>
+              <a:t>2. Proces prenechá prednosť druhému</a:t>
+            </a:r>
+          </a:p>
+          <a:p>
+            <a:r>
+              <a:rPr lang="sk-SK" dirty="0"/>
+              <a:t>Premenná </a:t>
+            </a:r>
+            <a:r>
+              <a:rPr lang="sk-SK" i="1" dirty="0" err="1"/>
+              <a:t>turn</a:t>
+            </a:r>
+            <a:r>
+              <a:rPr lang="sk-SK" dirty="0"/>
+              <a:t> sa nastaví na ID druhého procesu. Tým proces hovorí: „ak chceš ísť ty, máš prednosť“.</a:t>
+            </a:r>
+          </a:p>
+          <a:p>
+            <a:pPr marL="0" indent="0">
+              <a:buNone/>
+            </a:pPr>
+            <a:r>
+              <a:rPr lang="sk-SK" b="1" dirty="0"/>
+              <a:t>3. Aktívne čakanie, kým druhý proces buď:</a:t>
+            </a:r>
+          </a:p>
+          <a:p>
+            <a:r>
+              <a:rPr lang="sk-SK" b="1" dirty="0"/>
+              <a:t>nemá záujem</a:t>
+            </a:r>
+            <a:r>
+              <a:rPr lang="sk-SK" dirty="0"/>
+              <a:t> </a:t>
+            </a:r>
+            <a:r>
+              <a:rPr lang="sk-SK" i="1" dirty="0"/>
+              <a:t>(</a:t>
+            </a:r>
+            <a:r>
+              <a:rPr lang="sk-SK" i="1" dirty="0" err="1"/>
+              <a:t>flag</a:t>
+            </a:r>
+            <a:r>
+              <a:rPr lang="sk-SK" i="1" dirty="0"/>
+              <a:t>[</a:t>
+            </a:r>
+            <a:r>
+              <a:rPr lang="sk-SK" i="1" dirty="0" err="1"/>
+              <a:t>j</a:t>
+            </a:r>
+            <a:r>
+              <a:rPr lang="sk-SK" i="1" dirty="0"/>
+              <a:t>] == </a:t>
+            </a:r>
+            <a:r>
+              <a:rPr lang="sk-SK" i="1" dirty="0" err="1"/>
+              <a:t>false</a:t>
+            </a:r>
+            <a:r>
+              <a:rPr lang="sk-SK" i="1" dirty="0"/>
+              <a:t>), </a:t>
+            </a:r>
+            <a:r>
+              <a:rPr lang="sk-SK" dirty="0"/>
+              <a:t>alebo</a:t>
+            </a:r>
+          </a:p>
+          <a:p>
+            <a:r>
+              <a:rPr lang="sk-SK" b="1" dirty="0"/>
+              <a:t>nechce prednosť</a:t>
+            </a:r>
+            <a:r>
+              <a:rPr lang="sk-SK" dirty="0"/>
+              <a:t> </a:t>
+            </a:r>
+            <a:r>
+              <a:rPr lang="sk-SK" i="1" dirty="0"/>
+              <a:t>(</a:t>
+            </a:r>
+            <a:r>
+              <a:rPr lang="sk-SK" i="1" dirty="0" err="1"/>
+              <a:t>turn</a:t>
+            </a:r>
+            <a:r>
+              <a:rPr lang="sk-SK" i="1" dirty="0"/>
+              <a:t> != </a:t>
+            </a:r>
+            <a:r>
+              <a:rPr lang="sk-SK" i="1" dirty="0" err="1"/>
+              <a:t>j</a:t>
+            </a:r>
+            <a:r>
+              <a:rPr lang="sk-SK" i="1" dirty="0"/>
+              <a:t>).</a:t>
+            </a:r>
+          </a:p>
+          <a:p>
+            <a:r>
+              <a:rPr lang="sk-SK" dirty="0"/>
+              <a:t>Kým tieto podmienky neplatia, proces čaká v slučke.</a:t>
+            </a:r>
+          </a:p>
+          <a:p>
+            <a:pPr marL="0" indent="0">
+              <a:buNone/>
+            </a:pPr>
+            <a:r>
+              <a:rPr lang="sk-SK" b="1" dirty="0"/>
+              <a:t>4. Vstup do kritickej sekcie</a:t>
+            </a:r>
+          </a:p>
+          <a:p>
+            <a:r>
+              <a:rPr lang="sk-SK" dirty="0"/>
+              <a:t>Keď je bezpečné vstúpiť, proces vykoná kritickú sekciu.</a:t>
+            </a:r>
+          </a:p>
+          <a:p>
+            <a:pPr marL="0" indent="0">
+              <a:buNone/>
+            </a:pPr>
+            <a:r>
+              <a:rPr lang="sk-SK" b="1" dirty="0"/>
+              <a:t>5. Oznámenie odchodu</a:t>
+            </a:r>
+          </a:p>
+          <a:p>
+            <a:r>
+              <a:rPr lang="sk-SK" dirty="0"/>
+              <a:t>Po skončení nastaví </a:t>
+            </a:r>
+            <a:r>
+              <a:rPr lang="sk-SK" i="1" dirty="0" err="1"/>
+              <a:t>flag</a:t>
+            </a:r>
+            <a:r>
+              <a:rPr lang="sk-SK" i="1" dirty="0"/>
+              <a:t>[i] = </a:t>
+            </a:r>
+            <a:r>
+              <a:rPr lang="sk-SK" i="1" dirty="0" err="1"/>
+              <a:t>false</a:t>
+            </a:r>
+            <a:r>
+              <a:rPr lang="sk-SK" dirty="0"/>
+              <a:t>, čím uvoľní priestor pre druhého.</a:t>
+            </a:r>
+          </a:p>
+          <a:p>
+            <a:endParaRPr lang="sk-SK" dirty="0"/>
+          </a:p>
+        </p:txBody>
+      </p:sp>
+      <p:sp>
+        <p:nvSpPr>
+          <p:cNvPr id="4" name="Zástupný objekt pre číslo snímky 3">
+            <a:extLst>
+              <a:ext uri="{FF2B5EF4-FFF2-40B4-BE49-F238E27FC236}">
+                <a16:creationId xmlns:a16="http://schemas.microsoft.com/office/drawing/2014/main" id="{8BCFB6D8-E242-EF72-62CC-CC7E9539BD64}"/>
+              </a:ext>
+            </a:extLst>
+          </p:cNvPr>
+          <p:cNvSpPr>
+            <a:spLocks noGrp="1"/>
+          </p:cNvSpPr>
+          <p:nvPr>
+            <p:ph type="sldNum" sz="quarter" idx="12"/>
+          </p:nvPr>
+        </p:nvSpPr>
+        <p:spPr/>
+        <p:txBody>
+          <a:bodyPr/>
+          <a:lstStyle/>
+          <a:p>
+            <a:fld id="{5AB4CD34-DB5E-4606-AE4E-01019896DEAB}" type="slidenum">
+              <a:rPr lang="sk-SK" smtClean="0"/>
+              <a:t>20</a:t>
+            </a:fld>
+            <a:endParaRPr lang="sk-SK"/>
+          </a:p>
+        </p:txBody>
+      </p:sp>
+    </p:spTree>
+    <p:extLst>
+      <p:ext uri="{BB962C8B-B14F-4D97-AF65-F5344CB8AC3E}">
+        <p14:creationId xmlns:p14="http://schemas.microsoft.com/office/powerpoint/2010/main" val="4143176927"/>
+      </p:ext>
+    </p:extLst>
+  </p:cSld>
+  <p:clrMapOvr>
+    <a:masterClrMapping/>
+  </p:clrMapOvr>
+</p:sld>
+</file>
+
+<file path=ppt/slides/slide21.xml><?xml version="1.0" encoding="utf-8"?>
+<p:sld xmlns:a="http://schemas.openxmlformats.org/drawingml/2006/main" xmlns:r="http://schemas.openxmlformats.org/officeDocument/2006/relationships" xmlns:p="http://schemas.openxmlformats.org/presentationml/2006/main">
+  <p:cSld>
+    <p:spTree>
+      <p:nvGrpSpPr>
+        <p:cNvPr id="1" name=""/>
+        <p:cNvGrpSpPr/>
+        <p:nvPr/>
+      </p:nvGrpSpPr>
+      <p:grpSpPr>
+        <a:xfrm>
+          <a:off x="0" y="0"/>
+          <a:ext cx="0" cy="0"/>
+          <a:chOff x="0" y="0"/>
+          <a:chExt cx="0" cy="0"/>
+        </a:xfrm>
+      </p:grpSpPr>
+      <p:sp>
+        <p:nvSpPr>
+          <p:cNvPr id="5" name="Nadpis 4">
+            <a:extLst>
+              <a:ext uri="{FF2B5EF4-FFF2-40B4-BE49-F238E27FC236}">
+                <a16:creationId xmlns:a16="http://schemas.microsoft.com/office/drawing/2014/main" id="{008B4378-E2CA-1AF3-D6D9-5772F1653F42}"/>
+              </a:ext>
+            </a:extLst>
+          </p:cNvPr>
+          <p:cNvSpPr>
+            <a:spLocks noGrp="1"/>
+          </p:cNvSpPr>
+          <p:nvPr>
+            <p:ph type="title"/>
+          </p:nvPr>
+        </p:nvSpPr>
+        <p:spPr/>
+        <p:txBody>
+          <a:bodyPr/>
+          <a:lstStyle/>
+          <a:p>
+            <a:r>
+              <a:rPr lang="sk-SK" dirty="0" err="1"/>
+              <a:t>Petersonov</a:t>
+            </a:r>
+            <a:r>
+              <a:rPr lang="sk-SK" dirty="0"/>
+              <a:t> algoritmus</a:t>
+            </a:r>
+          </a:p>
+        </p:txBody>
+      </p:sp>
+      <p:sp>
+        <p:nvSpPr>
+          <p:cNvPr id="6" name="Zástupný objekt pre obsah 5">
+            <a:extLst>
+              <a:ext uri="{FF2B5EF4-FFF2-40B4-BE49-F238E27FC236}">
+                <a16:creationId xmlns:a16="http://schemas.microsoft.com/office/drawing/2014/main" id="{4FAE959A-2B3C-6D10-B76E-78E2ACE4B104}"/>
+              </a:ext>
+            </a:extLst>
+          </p:cNvPr>
+          <p:cNvSpPr>
+            <a:spLocks noGrp="1"/>
+          </p:cNvSpPr>
+          <p:nvPr>
+            <p:ph sz="half" idx="1"/>
+          </p:nvPr>
+        </p:nvSpPr>
+        <p:spPr/>
+        <p:txBody>
+          <a:bodyPr>
+            <a:normAutofit fontScale="77500" lnSpcReduction="20000"/>
+          </a:bodyPr>
+          <a:lstStyle/>
+          <a:p>
+            <a:pPr marL="0" indent="0">
+              <a:buNone/>
+            </a:pPr>
+            <a:r>
+              <a:rPr lang="sk-SK" b="1" dirty="0"/>
+              <a:t>Proces 0:</a:t>
+            </a:r>
+          </a:p>
+          <a:p>
+            <a:pPr marL="0" indent="0">
+              <a:buNone/>
+            </a:pPr>
+            <a:r>
+              <a:rPr lang="sk-SK" dirty="0" err="1"/>
+              <a:t>flag</a:t>
+            </a:r>
+            <a:r>
+              <a:rPr lang="sk-SK" dirty="0"/>
+              <a:t>[0] = </a:t>
+            </a:r>
+            <a:r>
+              <a:rPr lang="sk-SK" dirty="0" err="1"/>
+              <a:t>true</a:t>
+            </a:r>
+            <a:r>
+              <a:rPr lang="sk-SK" dirty="0"/>
+              <a:t> /či P0 chce vstúpiť</a:t>
+            </a:r>
+          </a:p>
+          <a:p>
+            <a:pPr marL="0" indent="0">
+              <a:buNone/>
+            </a:pPr>
+            <a:r>
+              <a:rPr lang="sk-SK" dirty="0" err="1"/>
+              <a:t>turn</a:t>
+            </a:r>
+            <a:r>
+              <a:rPr lang="sk-SK" dirty="0"/>
+              <a:t> = 1	/komu dáva proces prednosť</a:t>
+            </a:r>
+          </a:p>
+          <a:p>
+            <a:pPr marL="0" indent="0">
+              <a:buNone/>
+            </a:pPr>
+            <a:endParaRPr lang="sk-SK" dirty="0"/>
+          </a:p>
+          <a:p>
+            <a:pPr marL="0" indent="0">
+              <a:buNone/>
+            </a:pPr>
+            <a:r>
+              <a:rPr lang="sk-SK" dirty="0" err="1"/>
+              <a:t>while</a:t>
+            </a:r>
+            <a:r>
+              <a:rPr lang="sk-SK" dirty="0"/>
+              <a:t> (</a:t>
+            </a:r>
+            <a:r>
+              <a:rPr lang="sk-SK" dirty="0" err="1"/>
+              <a:t>flag</a:t>
+            </a:r>
+            <a:r>
+              <a:rPr lang="sk-SK" dirty="0"/>
+              <a:t>[1] == </a:t>
+            </a:r>
+            <a:r>
+              <a:rPr lang="sk-SK" dirty="0" err="1"/>
+              <a:t>true</a:t>
+            </a:r>
+            <a:r>
+              <a:rPr lang="sk-SK" dirty="0"/>
+              <a:t> &amp;&amp; </a:t>
+            </a:r>
+            <a:r>
+              <a:rPr lang="sk-SK" dirty="0" err="1"/>
+              <a:t>turn</a:t>
+            </a:r>
+            <a:r>
+              <a:rPr lang="sk-SK" dirty="0"/>
+              <a:t> == 1) {</a:t>
+            </a:r>
+          </a:p>
+          <a:p>
+            <a:pPr marL="0" indent="0">
+              <a:buNone/>
+            </a:pPr>
+            <a:r>
+              <a:rPr lang="sk-SK" dirty="0"/>
+              <a:t>    ; čakaj</a:t>
+            </a:r>
+          </a:p>
+          <a:p>
+            <a:pPr marL="0" indent="0">
+              <a:buNone/>
+            </a:pPr>
+            <a:r>
+              <a:rPr lang="sk-SK" dirty="0"/>
+              <a:t>}</a:t>
+            </a:r>
+          </a:p>
+          <a:p>
+            <a:pPr marL="0" indent="0">
+              <a:buNone/>
+            </a:pPr>
+            <a:endParaRPr lang="sk-SK" dirty="0"/>
+          </a:p>
+          <a:p>
+            <a:pPr marL="0" indent="0">
+              <a:buNone/>
+            </a:pPr>
+            <a:r>
+              <a:rPr lang="sk-SK" dirty="0"/>
+              <a:t>; --- kritická sekcia ---</a:t>
+            </a:r>
+          </a:p>
+          <a:p>
+            <a:pPr marL="0" indent="0">
+              <a:buNone/>
+            </a:pPr>
+            <a:endParaRPr lang="sk-SK" dirty="0"/>
+          </a:p>
+          <a:p>
+            <a:pPr marL="0" indent="0">
+              <a:buNone/>
+            </a:pPr>
+            <a:r>
+              <a:rPr lang="sk-SK" dirty="0" err="1"/>
+              <a:t>flag</a:t>
+            </a:r>
+            <a:r>
+              <a:rPr lang="sk-SK" dirty="0"/>
+              <a:t>[0] = </a:t>
+            </a:r>
+            <a:r>
+              <a:rPr lang="sk-SK" dirty="0" err="1"/>
+              <a:t>false</a:t>
+            </a:r>
+            <a:endParaRPr lang="sk-SK" dirty="0"/>
+          </a:p>
+          <a:p>
+            <a:endParaRPr lang="sk-SK" dirty="0"/>
+          </a:p>
+        </p:txBody>
+      </p:sp>
+      <p:sp>
+        <p:nvSpPr>
+          <p:cNvPr id="7" name="Zástupný objekt pre obsah 6">
+            <a:extLst>
+              <a:ext uri="{FF2B5EF4-FFF2-40B4-BE49-F238E27FC236}">
+                <a16:creationId xmlns:a16="http://schemas.microsoft.com/office/drawing/2014/main" id="{2000FB27-96C3-2D21-4DE5-59E0FD7E06DC}"/>
+              </a:ext>
+            </a:extLst>
+          </p:cNvPr>
+          <p:cNvSpPr>
+            <a:spLocks noGrp="1"/>
+          </p:cNvSpPr>
+          <p:nvPr>
+            <p:ph sz="half" idx="2"/>
+          </p:nvPr>
+        </p:nvSpPr>
+        <p:spPr/>
+        <p:txBody>
+          <a:bodyPr>
+            <a:normAutofit fontScale="77500" lnSpcReduction="20000"/>
+          </a:bodyPr>
+          <a:lstStyle/>
+          <a:p>
+            <a:pPr marL="0" indent="0">
+              <a:buNone/>
+            </a:pPr>
+            <a:r>
+              <a:rPr lang="sk-SK" b="1" dirty="0"/>
+              <a:t>Proces 1:</a:t>
+            </a:r>
+          </a:p>
+          <a:p>
+            <a:pPr marL="0" indent="0">
+              <a:buNone/>
+            </a:pPr>
+            <a:r>
+              <a:rPr lang="sk-SK" dirty="0" err="1"/>
+              <a:t>flag</a:t>
+            </a:r>
+            <a:r>
+              <a:rPr lang="sk-SK" dirty="0"/>
+              <a:t>[1] = </a:t>
+            </a:r>
+            <a:r>
+              <a:rPr lang="sk-SK" dirty="0" err="1"/>
+              <a:t>true</a:t>
+            </a:r>
+            <a:endParaRPr lang="sk-SK" dirty="0"/>
+          </a:p>
+          <a:p>
+            <a:pPr marL="0" indent="0">
+              <a:buNone/>
+            </a:pPr>
+            <a:r>
+              <a:rPr lang="sk-SK" dirty="0" err="1"/>
+              <a:t>turn</a:t>
+            </a:r>
+            <a:r>
+              <a:rPr lang="sk-SK" dirty="0"/>
+              <a:t> = 0</a:t>
+            </a:r>
+          </a:p>
+          <a:p>
+            <a:pPr marL="0" indent="0">
+              <a:buNone/>
+            </a:pPr>
+            <a:endParaRPr lang="sk-SK" dirty="0"/>
+          </a:p>
+          <a:p>
+            <a:pPr marL="0" indent="0">
+              <a:buNone/>
+            </a:pPr>
+            <a:r>
+              <a:rPr lang="sk-SK" dirty="0" err="1"/>
+              <a:t>while</a:t>
+            </a:r>
+            <a:r>
+              <a:rPr lang="sk-SK" dirty="0"/>
+              <a:t> (</a:t>
+            </a:r>
+            <a:r>
+              <a:rPr lang="sk-SK" dirty="0" err="1"/>
+              <a:t>flag</a:t>
+            </a:r>
+            <a:r>
+              <a:rPr lang="sk-SK" dirty="0"/>
+              <a:t>[0] == </a:t>
+            </a:r>
+            <a:r>
+              <a:rPr lang="sk-SK" dirty="0" err="1"/>
+              <a:t>true</a:t>
+            </a:r>
+            <a:r>
+              <a:rPr lang="sk-SK" dirty="0"/>
+              <a:t> &amp;&amp; </a:t>
+            </a:r>
+            <a:r>
+              <a:rPr lang="sk-SK" dirty="0" err="1"/>
+              <a:t>turn</a:t>
+            </a:r>
+            <a:r>
+              <a:rPr lang="sk-SK" dirty="0"/>
+              <a:t> == 0) {</a:t>
+            </a:r>
+          </a:p>
+          <a:p>
+            <a:pPr marL="0" indent="0">
+              <a:buNone/>
+            </a:pPr>
+            <a:r>
+              <a:rPr lang="sk-SK" dirty="0"/>
+              <a:t>    ; čakaj</a:t>
+            </a:r>
+          </a:p>
+          <a:p>
+            <a:pPr marL="0" indent="0">
+              <a:buNone/>
+            </a:pPr>
+            <a:r>
+              <a:rPr lang="sk-SK" dirty="0"/>
+              <a:t>}</a:t>
+            </a:r>
+          </a:p>
+          <a:p>
+            <a:pPr marL="0" indent="0">
+              <a:buNone/>
+            </a:pPr>
+            <a:endParaRPr lang="sk-SK" dirty="0"/>
+          </a:p>
+          <a:p>
+            <a:pPr marL="0" indent="0">
+              <a:buNone/>
+            </a:pPr>
+            <a:r>
+              <a:rPr lang="sk-SK" dirty="0"/>
+              <a:t>; --- kritická sekcia ---</a:t>
+            </a:r>
+          </a:p>
+          <a:p>
+            <a:pPr marL="0" indent="0">
+              <a:buNone/>
+            </a:pPr>
+            <a:endParaRPr lang="sk-SK" dirty="0"/>
+          </a:p>
+          <a:p>
+            <a:pPr marL="0" indent="0">
+              <a:buNone/>
+            </a:pPr>
+            <a:r>
+              <a:rPr lang="sk-SK" dirty="0" err="1"/>
+              <a:t>flag</a:t>
+            </a:r>
+            <a:r>
+              <a:rPr lang="sk-SK" dirty="0"/>
+              <a:t>[1] = </a:t>
+            </a:r>
+            <a:r>
+              <a:rPr lang="sk-SK" dirty="0" err="1"/>
+              <a:t>false</a:t>
+            </a:r>
+            <a:endParaRPr lang="sk-SK" dirty="0"/>
+          </a:p>
+          <a:p>
+            <a:endParaRPr lang="sk-SK" dirty="0"/>
+          </a:p>
+        </p:txBody>
+      </p:sp>
+      <p:sp>
+        <p:nvSpPr>
+          <p:cNvPr id="4" name="Zástupný objekt pre číslo snímky 3">
+            <a:extLst>
+              <a:ext uri="{FF2B5EF4-FFF2-40B4-BE49-F238E27FC236}">
+                <a16:creationId xmlns:a16="http://schemas.microsoft.com/office/drawing/2014/main" id="{391AF846-30F8-3112-C22A-91BAFF7E7F1D}"/>
+              </a:ext>
+            </a:extLst>
+          </p:cNvPr>
+          <p:cNvSpPr>
+            <a:spLocks noGrp="1"/>
+          </p:cNvSpPr>
+          <p:nvPr>
+            <p:ph type="sldNum" sz="quarter" idx="12"/>
+          </p:nvPr>
+        </p:nvSpPr>
+        <p:spPr/>
+        <p:txBody>
+          <a:bodyPr/>
+          <a:lstStyle/>
+          <a:p>
+            <a:fld id="{5AB4CD34-DB5E-4606-AE4E-01019896DEAB}" type="slidenum">
+              <a:rPr lang="sk-SK" smtClean="0"/>
+              <a:t>21</a:t>
+            </a:fld>
+            <a:endParaRPr lang="sk-SK"/>
+          </a:p>
+        </p:txBody>
+      </p:sp>
+    </p:spTree>
+    <p:extLst>
+      <p:ext uri="{BB962C8B-B14F-4D97-AF65-F5344CB8AC3E}">
+        <p14:creationId xmlns:p14="http://schemas.microsoft.com/office/powerpoint/2010/main" val="4236122441"/>
+      </p:ext>
+    </p:extLst>
+  </p:cSld>
+  <p:clrMapOvr>
+    <a:masterClrMapping/>
+  </p:clrMapOvr>
+</p:sld>
+</file>
+
+<file path=ppt/slides/slide22.xml><?xml version="1.0" encoding="utf-8"?>
+<p:sld xmlns:a="http://schemas.openxmlformats.org/drawingml/2006/main" xmlns:r="http://schemas.openxmlformats.org/officeDocument/2006/relationships" xmlns:p="http://schemas.openxmlformats.org/presentationml/2006/main">
+  <p:cSld>
+    <p:spTree>
+      <p:nvGrpSpPr>
+        <p:cNvPr id="1" name=""/>
+        <p:cNvGrpSpPr/>
+        <p:nvPr/>
+      </p:nvGrpSpPr>
+      <p:grpSpPr>
+        <a:xfrm>
+          <a:off x="0" y="0"/>
+          <a:ext cx="0" cy="0"/>
+          <a:chOff x="0" y="0"/>
+          <a:chExt cx="0" cy="0"/>
+        </a:xfrm>
+      </p:grpSpPr>
+      <p:sp>
+        <p:nvSpPr>
+          <p:cNvPr id="2" name="Nadpis 1">
+            <a:extLst>
+              <a:ext uri="{FF2B5EF4-FFF2-40B4-BE49-F238E27FC236}">
+                <a16:creationId xmlns:a16="http://schemas.microsoft.com/office/drawing/2014/main" id="{DEBD3764-4E11-D5ED-FCCE-24E6AD3F37E7}"/>
+              </a:ext>
+            </a:extLst>
+          </p:cNvPr>
+          <p:cNvSpPr>
+            <a:spLocks noGrp="1"/>
+          </p:cNvSpPr>
+          <p:nvPr>
+            <p:ph type="title"/>
+          </p:nvPr>
+        </p:nvSpPr>
+        <p:spPr/>
+        <p:txBody>
+          <a:bodyPr/>
+          <a:lstStyle/>
+          <a:p>
+            <a:r>
+              <a:rPr lang="sk-SK" dirty="0"/>
+              <a:t>Porovnanie </a:t>
+            </a:r>
+            <a:r>
+              <a:rPr lang="sk-SK" dirty="0" err="1"/>
+              <a:t>Dekkerovho</a:t>
+            </a:r>
+            <a:r>
+              <a:rPr lang="sk-SK" dirty="0"/>
+              <a:t> a </a:t>
+            </a:r>
+            <a:r>
+              <a:rPr lang="sk-SK" dirty="0" err="1"/>
+              <a:t>Petersonovho</a:t>
+            </a:r>
+            <a:r>
+              <a:rPr lang="sk-SK" dirty="0"/>
+              <a:t> algoritmu</a:t>
+            </a:r>
+          </a:p>
+        </p:txBody>
+      </p:sp>
+      <p:sp>
+        <p:nvSpPr>
+          <p:cNvPr id="3" name="Zástupný objekt pre obsah 2">
+            <a:extLst>
+              <a:ext uri="{FF2B5EF4-FFF2-40B4-BE49-F238E27FC236}">
+                <a16:creationId xmlns:a16="http://schemas.microsoft.com/office/drawing/2014/main" id="{DFF2BF87-46ED-5D64-7969-73B7C32A64F3}"/>
+              </a:ext>
+            </a:extLst>
+          </p:cNvPr>
+          <p:cNvSpPr>
+            <a:spLocks noGrp="1"/>
+          </p:cNvSpPr>
+          <p:nvPr>
+            <p:ph sz="half" idx="1"/>
+          </p:nvPr>
+        </p:nvSpPr>
+        <p:spPr/>
+        <p:txBody>
+          <a:bodyPr>
+            <a:normAutofit fontScale="92500" lnSpcReduction="10000"/>
+          </a:bodyPr>
+          <a:lstStyle/>
+          <a:p>
+            <a:pPr marL="0" indent="0">
+              <a:buNone/>
+            </a:pPr>
+            <a:r>
+              <a:rPr lang="sk-SK" sz="2000" b="1" dirty="0" err="1">
+                <a:latin typeface="Times New Roman" panose="02020603050405020304" pitchFamily="18" charset="0"/>
+                <a:cs typeface="Times New Roman" panose="02020603050405020304" pitchFamily="18" charset="0"/>
+              </a:rPr>
+              <a:t>Dekkerov</a:t>
+            </a:r>
+            <a:r>
+              <a:rPr lang="sk-SK" sz="2000" b="1" dirty="0">
+                <a:latin typeface="Times New Roman" panose="02020603050405020304" pitchFamily="18" charset="0"/>
+                <a:cs typeface="Times New Roman" panose="02020603050405020304" pitchFamily="18" charset="0"/>
+              </a:rPr>
+              <a:t> algoritmus</a:t>
+            </a:r>
+            <a:endParaRPr lang="sk-SK" sz="2000" dirty="0">
+              <a:latin typeface="Times New Roman" panose="02020603050405020304" pitchFamily="18" charset="0"/>
+              <a:cs typeface="Times New Roman" panose="02020603050405020304" pitchFamily="18" charset="0"/>
+            </a:endParaRPr>
+          </a:p>
+          <a:p>
+            <a:r>
+              <a:rPr lang="sk-SK" sz="2000" dirty="0">
+                <a:latin typeface="Times New Roman" panose="02020603050405020304" pitchFamily="18" charset="0"/>
+                <a:cs typeface="Times New Roman" panose="02020603050405020304" pitchFamily="18" charset="0"/>
+              </a:rPr>
+              <a:t>Každý proces nastaví svoj </a:t>
+            </a:r>
+            <a:r>
+              <a:rPr lang="sk-SK" sz="2000" dirty="0" err="1">
+                <a:latin typeface="Times New Roman" panose="02020603050405020304" pitchFamily="18" charset="0"/>
+                <a:cs typeface="Times New Roman" panose="02020603050405020304" pitchFamily="18" charset="0"/>
+              </a:rPr>
+              <a:t>flag</a:t>
+            </a:r>
+            <a:r>
+              <a:rPr lang="sk-SK" sz="2000" dirty="0">
+                <a:latin typeface="Times New Roman" panose="02020603050405020304" pitchFamily="18" charset="0"/>
+                <a:cs typeface="Times New Roman" panose="02020603050405020304" pitchFamily="18" charset="0"/>
+              </a:rPr>
+              <a:t>[i] = </a:t>
+            </a:r>
+            <a:r>
+              <a:rPr lang="sk-SK" sz="2000" dirty="0" err="1">
+                <a:latin typeface="Times New Roman" panose="02020603050405020304" pitchFamily="18" charset="0"/>
+                <a:cs typeface="Times New Roman" panose="02020603050405020304" pitchFamily="18" charset="0"/>
+              </a:rPr>
+              <a:t>true</a:t>
+            </a:r>
+            <a:r>
+              <a:rPr lang="sk-SK" sz="2000" dirty="0">
+                <a:latin typeface="Times New Roman" panose="02020603050405020304" pitchFamily="18" charset="0"/>
+                <a:cs typeface="Times New Roman" panose="02020603050405020304" pitchFamily="18" charset="0"/>
+              </a:rPr>
+              <a:t>.</a:t>
+            </a:r>
+          </a:p>
+          <a:p>
+            <a:r>
+              <a:rPr lang="sk-SK" sz="2000" dirty="0">
+                <a:latin typeface="Times New Roman" panose="02020603050405020304" pitchFamily="18" charset="0"/>
+                <a:cs typeface="Times New Roman" panose="02020603050405020304" pitchFamily="18" charset="0"/>
+              </a:rPr>
+              <a:t>Ak chcú vstúpiť obaja, rozhoduje </a:t>
+            </a:r>
+            <a:r>
+              <a:rPr lang="sk-SK" sz="2000" dirty="0" err="1">
+                <a:latin typeface="Times New Roman" panose="02020603050405020304" pitchFamily="18" charset="0"/>
+                <a:cs typeface="Times New Roman" panose="02020603050405020304" pitchFamily="18" charset="0"/>
+              </a:rPr>
+              <a:t>turn</a:t>
+            </a:r>
+            <a:r>
+              <a:rPr lang="sk-SK" sz="2000" dirty="0">
+                <a:latin typeface="Times New Roman" panose="02020603050405020304" pitchFamily="18" charset="0"/>
+                <a:cs typeface="Times New Roman" panose="02020603050405020304" pitchFamily="18" charset="0"/>
+              </a:rPr>
+              <a:t>.</a:t>
+            </a:r>
+          </a:p>
+          <a:p>
+            <a:r>
+              <a:rPr lang="sk-SK" sz="2000" dirty="0">
+                <a:latin typeface="Times New Roman" panose="02020603050405020304" pitchFamily="18" charset="0"/>
+                <a:cs typeface="Times New Roman" panose="02020603050405020304" pitchFamily="18" charset="0"/>
+              </a:rPr>
+              <a:t>Ak proces nemá prednosť, </a:t>
+            </a:r>
+            <a:r>
+              <a:rPr lang="sk-SK" sz="2000" i="1" dirty="0">
+                <a:latin typeface="Times New Roman" panose="02020603050405020304" pitchFamily="18" charset="0"/>
+                <a:cs typeface="Times New Roman" panose="02020603050405020304" pitchFamily="18" charset="0"/>
+              </a:rPr>
+              <a:t>vypne svoj </a:t>
+            </a:r>
+            <a:r>
+              <a:rPr lang="sk-SK" sz="2000" i="1" dirty="0" err="1">
+                <a:latin typeface="Times New Roman" panose="02020603050405020304" pitchFamily="18" charset="0"/>
+                <a:cs typeface="Times New Roman" panose="02020603050405020304" pitchFamily="18" charset="0"/>
+              </a:rPr>
+              <a:t>flag</a:t>
+            </a:r>
+            <a:r>
+              <a:rPr lang="sk-SK" sz="2000" dirty="0">
+                <a:latin typeface="Times New Roman" panose="02020603050405020304" pitchFamily="18" charset="0"/>
+                <a:cs typeface="Times New Roman" panose="02020603050405020304" pitchFamily="18" charset="0"/>
+              </a:rPr>
+              <a:t>, čaká, a potom ho opäť zapne.</a:t>
+            </a:r>
+          </a:p>
+          <a:p>
+            <a:r>
+              <a:rPr lang="sk-SK" sz="2000" dirty="0">
+                <a:latin typeface="Times New Roman" panose="02020603050405020304" pitchFamily="18" charset="0"/>
+                <a:cs typeface="Times New Roman" panose="02020603050405020304" pitchFamily="18" charset="0"/>
+              </a:rPr>
+              <a:t>Obsahuje viac vnútorných slučiek a podmienok.</a:t>
+            </a:r>
+          </a:p>
+          <a:p>
+            <a:pPr marL="0" indent="0">
+              <a:buNone/>
+            </a:pPr>
+            <a:r>
+              <a:rPr lang="sk-SK" sz="2000" b="1" dirty="0" err="1">
+                <a:latin typeface="Times New Roman" panose="02020603050405020304" pitchFamily="18" charset="0"/>
+                <a:cs typeface="Times New Roman" panose="02020603050405020304" pitchFamily="18" charset="0"/>
+              </a:rPr>
+              <a:t>Petersonov</a:t>
+            </a:r>
+            <a:r>
+              <a:rPr lang="sk-SK" sz="2000" b="1" dirty="0">
+                <a:latin typeface="Times New Roman" panose="02020603050405020304" pitchFamily="18" charset="0"/>
+                <a:cs typeface="Times New Roman" panose="02020603050405020304" pitchFamily="18" charset="0"/>
+              </a:rPr>
+              <a:t> algoritmus</a:t>
+            </a:r>
+            <a:endParaRPr lang="sk-SK" sz="2000" dirty="0">
+              <a:latin typeface="Times New Roman" panose="02020603050405020304" pitchFamily="18" charset="0"/>
+              <a:cs typeface="Times New Roman" panose="02020603050405020304" pitchFamily="18" charset="0"/>
+            </a:endParaRPr>
+          </a:p>
+          <a:p>
+            <a:r>
+              <a:rPr lang="sk-SK" sz="2000" dirty="0">
+                <a:latin typeface="Times New Roman" panose="02020603050405020304" pitchFamily="18" charset="0"/>
+                <a:cs typeface="Times New Roman" panose="02020603050405020304" pitchFamily="18" charset="0"/>
+              </a:rPr>
+              <a:t>Proces nastaví </a:t>
+            </a:r>
+            <a:r>
+              <a:rPr lang="sk-SK" sz="2000" dirty="0" err="1">
+                <a:latin typeface="Times New Roman" panose="02020603050405020304" pitchFamily="18" charset="0"/>
+                <a:cs typeface="Times New Roman" panose="02020603050405020304" pitchFamily="18" charset="0"/>
+              </a:rPr>
+              <a:t>flag</a:t>
+            </a:r>
+            <a:r>
+              <a:rPr lang="sk-SK" sz="2000" dirty="0">
+                <a:latin typeface="Times New Roman" panose="02020603050405020304" pitchFamily="18" charset="0"/>
+                <a:cs typeface="Times New Roman" panose="02020603050405020304" pitchFamily="18" charset="0"/>
+              </a:rPr>
+              <a:t>[i] = </a:t>
+            </a:r>
+            <a:r>
+              <a:rPr lang="sk-SK" sz="2000" dirty="0" err="1">
+                <a:latin typeface="Times New Roman" panose="02020603050405020304" pitchFamily="18" charset="0"/>
+                <a:cs typeface="Times New Roman" panose="02020603050405020304" pitchFamily="18" charset="0"/>
+              </a:rPr>
+              <a:t>true</a:t>
+            </a:r>
+            <a:r>
+              <a:rPr lang="sk-SK" sz="2000" dirty="0">
+                <a:latin typeface="Times New Roman" panose="02020603050405020304" pitchFamily="18" charset="0"/>
+                <a:cs typeface="Times New Roman" panose="02020603050405020304" pitchFamily="18" charset="0"/>
+              </a:rPr>
+              <a:t> a </a:t>
+            </a:r>
+            <a:r>
+              <a:rPr lang="sk-SK" sz="2000" i="1" dirty="0">
+                <a:latin typeface="Times New Roman" panose="02020603050405020304" pitchFamily="18" charset="0"/>
+                <a:cs typeface="Times New Roman" panose="02020603050405020304" pitchFamily="18" charset="0"/>
+              </a:rPr>
+              <a:t>hneď</a:t>
+            </a:r>
+            <a:r>
+              <a:rPr lang="sk-SK" sz="2000" dirty="0">
+                <a:latin typeface="Times New Roman" panose="02020603050405020304" pitchFamily="18" charset="0"/>
+                <a:cs typeface="Times New Roman" panose="02020603050405020304" pitchFamily="18" charset="0"/>
+              </a:rPr>
+              <a:t> prenechá prednosť druhému (</a:t>
+            </a:r>
+            <a:r>
+              <a:rPr lang="sk-SK" sz="2000" dirty="0" err="1">
+                <a:latin typeface="Times New Roman" panose="02020603050405020304" pitchFamily="18" charset="0"/>
+                <a:cs typeface="Times New Roman" panose="02020603050405020304" pitchFamily="18" charset="0"/>
+              </a:rPr>
+              <a:t>turn</a:t>
+            </a:r>
+            <a:r>
+              <a:rPr lang="sk-SK" sz="2000" dirty="0">
+                <a:latin typeface="Times New Roman" panose="02020603050405020304" pitchFamily="18" charset="0"/>
+                <a:cs typeface="Times New Roman" panose="02020603050405020304" pitchFamily="18" charset="0"/>
+              </a:rPr>
+              <a:t> = </a:t>
+            </a:r>
+            <a:r>
+              <a:rPr lang="sk-SK" sz="2000" dirty="0" err="1">
+                <a:latin typeface="Times New Roman" panose="02020603050405020304" pitchFamily="18" charset="0"/>
+                <a:cs typeface="Times New Roman" panose="02020603050405020304" pitchFamily="18" charset="0"/>
+              </a:rPr>
+              <a:t>j</a:t>
+            </a:r>
+            <a:r>
+              <a:rPr lang="sk-SK" sz="2000" dirty="0">
+                <a:latin typeface="Times New Roman" panose="02020603050405020304" pitchFamily="18" charset="0"/>
+                <a:cs typeface="Times New Roman" panose="02020603050405020304" pitchFamily="18" charset="0"/>
+              </a:rPr>
+              <a:t>).</a:t>
+            </a:r>
+          </a:p>
+          <a:p>
+            <a:r>
+              <a:rPr lang="sk-SK" sz="2000" dirty="0">
+                <a:latin typeface="Times New Roman" panose="02020603050405020304" pitchFamily="18" charset="0"/>
+                <a:cs typeface="Times New Roman" panose="02020603050405020304" pitchFamily="18" charset="0"/>
+              </a:rPr>
+              <a:t>Čaká, kým:</a:t>
+            </a:r>
+          </a:p>
+          <a:p>
+            <a:pPr lvl="1"/>
+            <a:r>
+              <a:rPr lang="sk-SK" sz="2000" dirty="0">
+                <a:latin typeface="Times New Roman" panose="02020603050405020304" pitchFamily="18" charset="0"/>
+                <a:cs typeface="Times New Roman" panose="02020603050405020304" pitchFamily="18" charset="0"/>
+              </a:rPr>
+              <a:t>druhý proces chce vstúpiť </a:t>
+            </a:r>
+            <a:r>
+              <a:rPr lang="sk-SK" sz="2000" b="1" dirty="0">
+                <a:latin typeface="Times New Roman" panose="02020603050405020304" pitchFamily="18" charset="0"/>
+                <a:cs typeface="Times New Roman" panose="02020603050405020304" pitchFamily="18" charset="0"/>
+              </a:rPr>
+              <a:t>a zároveň</a:t>
+            </a:r>
+            <a:endParaRPr lang="sk-SK" sz="2000" dirty="0">
+              <a:latin typeface="Times New Roman" panose="02020603050405020304" pitchFamily="18" charset="0"/>
+              <a:cs typeface="Times New Roman" panose="02020603050405020304" pitchFamily="18" charset="0"/>
+            </a:endParaRPr>
+          </a:p>
+          <a:p>
+            <a:pPr lvl="1"/>
+            <a:r>
+              <a:rPr lang="sk-SK" sz="2000" dirty="0">
+                <a:latin typeface="Times New Roman" panose="02020603050405020304" pitchFamily="18" charset="0"/>
+                <a:cs typeface="Times New Roman" panose="02020603050405020304" pitchFamily="18" charset="0"/>
+              </a:rPr>
+              <a:t>má prednosť (</a:t>
+            </a:r>
+            <a:r>
+              <a:rPr lang="sk-SK" sz="2000" dirty="0" err="1">
+                <a:latin typeface="Times New Roman" panose="02020603050405020304" pitchFamily="18" charset="0"/>
+                <a:cs typeface="Times New Roman" panose="02020603050405020304" pitchFamily="18" charset="0"/>
+              </a:rPr>
+              <a:t>turn</a:t>
+            </a:r>
+            <a:r>
+              <a:rPr lang="sk-SK" sz="2000" dirty="0">
+                <a:latin typeface="Times New Roman" panose="02020603050405020304" pitchFamily="18" charset="0"/>
+                <a:cs typeface="Times New Roman" panose="02020603050405020304" pitchFamily="18" charset="0"/>
+              </a:rPr>
+              <a:t> == </a:t>
+            </a:r>
+            <a:r>
+              <a:rPr lang="sk-SK" sz="2000" dirty="0" err="1">
+                <a:latin typeface="Times New Roman" panose="02020603050405020304" pitchFamily="18" charset="0"/>
+                <a:cs typeface="Times New Roman" panose="02020603050405020304" pitchFamily="18" charset="0"/>
+              </a:rPr>
+              <a:t>j</a:t>
+            </a:r>
+            <a:r>
+              <a:rPr lang="sk-SK" sz="2000" dirty="0">
+                <a:latin typeface="Times New Roman" panose="02020603050405020304" pitchFamily="18" charset="0"/>
+                <a:cs typeface="Times New Roman" panose="02020603050405020304" pitchFamily="18" charset="0"/>
+              </a:rPr>
+              <a:t>).</a:t>
+            </a:r>
+          </a:p>
+          <a:p>
+            <a:r>
+              <a:rPr lang="sk-SK" sz="2000" dirty="0">
+                <a:latin typeface="Times New Roman" panose="02020603050405020304" pitchFamily="18" charset="0"/>
+                <a:cs typeface="Times New Roman" panose="02020603050405020304" pitchFamily="18" charset="0"/>
+              </a:rPr>
+              <a:t>Logika je výrazne jednoduchšia.</a:t>
+            </a:r>
+          </a:p>
+        </p:txBody>
+      </p:sp>
+      <p:sp>
+        <p:nvSpPr>
+          <p:cNvPr id="5" name="Zástupný objekt pre obsah 4">
+            <a:extLst>
+              <a:ext uri="{FF2B5EF4-FFF2-40B4-BE49-F238E27FC236}">
+                <a16:creationId xmlns:a16="http://schemas.microsoft.com/office/drawing/2014/main" id="{A7B87D77-693F-0A51-7BF4-4BD37C814524}"/>
+              </a:ext>
+            </a:extLst>
+          </p:cNvPr>
+          <p:cNvSpPr>
+            <a:spLocks noGrp="1"/>
+          </p:cNvSpPr>
+          <p:nvPr>
+            <p:ph sz="half" idx="2"/>
+          </p:nvPr>
+        </p:nvSpPr>
+        <p:spPr>
+          <a:xfrm>
+            <a:off x="6172200" y="1216058"/>
+            <a:ext cx="5181600" cy="4960905"/>
+          </a:xfrm>
+        </p:spPr>
+        <p:txBody>
+          <a:bodyPr>
+            <a:normAutofit fontScale="55000" lnSpcReduction="20000"/>
+          </a:bodyPr>
+          <a:lstStyle/>
+          <a:p>
+            <a:pPr marL="0" indent="0">
+              <a:buNone/>
+            </a:pPr>
+            <a:r>
+              <a:rPr lang="sk-SK" b="1" dirty="0"/>
+              <a:t>Zložitosť a prehľadnosť</a:t>
+            </a:r>
+          </a:p>
+          <a:p>
+            <a:r>
+              <a:rPr lang="sk-SK" b="1" dirty="0" err="1"/>
+              <a:t>Dekker</a:t>
+            </a:r>
+            <a:r>
+              <a:rPr lang="sk-SK" b="1" dirty="0"/>
+              <a:t>:</a:t>
+            </a:r>
+            <a:r>
+              <a:rPr lang="sk-SK" dirty="0"/>
+              <a:t> zložitejší, viac krokov, ťažšie sa overuje.</a:t>
+            </a:r>
+          </a:p>
+          <a:p>
+            <a:r>
+              <a:rPr lang="sk-SK" b="1" dirty="0" err="1"/>
+              <a:t>Peterson</a:t>
+            </a:r>
+            <a:r>
+              <a:rPr lang="sk-SK" b="1" dirty="0"/>
+              <a:t>:</a:t>
+            </a:r>
+            <a:r>
+              <a:rPr lang="sk-SK" dirty="0"/>
+              <a:t> minimalistický, ľahko sa dokazuje jeho korektnosť.</a:t>
+            </a:r>
+          </a:p>
+          <a:p>
+            <a:pPr marL="0" indent="0">
+              <a:buNone/>
+            </a:pPr>
+            <a:r>
+              <a:rPr lang="sk-SK" b="1" dirty="0"/>
+              <a:t>Spravodlivosť</a:t>
+            </a:r>
+          </a:p>
+          <a:p>
+            <a:r>
+              <a:rPr lang="sk-SK" dirty="0"/>
+              <a:t>Oba algoritmy zabezpečujú, že žiadny proces nebude hladovať.</a:t>
+            </a:r>
+          </a:p>
+          <a:p>
+            <a:r>
+              <a:rPr lang="sk-SK" dirty="0" err="1"/>
+              <a:t>Peterson</a:t>
+            </a:r>
+            <a:r>
+              <a:rPr lang="sk-SK" dirty="0"/>
+              <a:t> to robí čistejšie vďaka premenným </a:t>
+            </a:r>
+            <a:r>
+              <a:rPr lang="sk-SK" dirty="0" err="1"/>
+              <a:t>flag</a:t>
+            </a:r>
+            <a:r>
+              <a:rPr lang="sk-SK" dirty="0"/>
+              <a:t> + </a:t>
+            </a:r>
+            <a:r>
+              <a:rPr lang="sk-SK" dirty="0" err="1"/>
+              <a:t>turn</a:t>
+            </a:r>
+            <a:r>
+              <a:rPr lang="sk-SK" dirty="0"/>
+              <a:t>.</a:t>
+            </a:r>
+          </a:p>
+          <a:p>
+            <a:pPr marL="0" indent="0">
+              <a:buNone/>
+            </a:pPr>
+            <a:r>
+              <a:rPr lang="sk-SK" b="1" dirty="0"/>
+              <a:t>Vzájomné vylúčenie</a:t>
+            </a:r>
+          </a:p>
+          <a:p>
+            <a:r>
+              <a:rPr lang="sk-SK" dirty="0"/>
+              <a:t>Oba algoritmy ho garantujú.</a:t>
+            </a:r>
+          </a:p>
+          <a:p>
+            <a:r>
+              <a:rPr lang="sk-SK" dirty="0" err="1"/>
+              <a:t>Peterson</a:t>
+            </a:r>
+            <a:r>
+              <a:rPr lang="sk-SK" dirty="0"/>
+              <a:t> je považovaný za „učebnicový ideál“ – jednoduchý a korektný.</a:t>
+            </a:r>
+          </a:p>
+          <a:p>
+            <a:pPr marL="0" indent="0">
+              <a:buNone/>
+            </a:pPr>
+            <a:r>
+              <a:rPr lang="sk-SK" b="1" dirty="0"/>
+              <a:t>Aktívne čakanie</a:t>
+            </a:r>
+          </a:p>
+          <a:p>
+            <a:r>
+              <a:rPr lang="sk-SK" dirty="0"/>
+              <a:t>Oba používajú </a:t>
+            </a:r>
+            <a:r>
+              <a:rPr lang="sk-SK" b="1" dirty="0" err="1"/>
+              <a:t>busy</a:t>
+            </a:r>
+            <a:r>
+              <a:rPr lang="sk-SK" b="1" dirty="0"/>
+              <a:t> </a:t>
+            </a:r>
+            <a:r>
+              <a:rPr lang="sk-SK" b="1" dirty="0" err="1"/>
+              <a:t>waiting</a:t>
+            </a:r>
+            <a:r>
+              <a:rPr lang="sk-SK" dirty="0"/>
+              <a:t>.</a:t>
+            </a:r>
+          </a:p>
+          <a:p>
+            <a:r>
+              <a:rPr lang="sk-SK" dirty="0" err="1"/>
+              <a:t>Dekker</a:t>
+            </a:r>
+            <a:r>
+              <a:rPr lang="sk-SK" dirty="0"/>
+              <a:t> má viac vnútorných cyklov, </a:t>
+            </a:r>
+            <a:r>
+              <a:rPr lang="sk-SK" dirty="0" err="1"/>
+              <a:t>Peterson</a:t>
+            </a:r>
+            <a:r>
+              <a:rPr lang="sk-SK" dirty="0"/>
+              <a:t> len jeden.</a:t>
+            </a:r>
+          </a:p>
+          <a:p>
+            <a:pPr marL="0" indent="0">
+              <a:buNone/>
+            </a:pPr>
+            <a:r>
+              <a:rPr lang="sk-SK" b="1" dirty="0"/>
+              <a:t>Rozšíriteľnosť</a:t>
+            </a:r>
+          </a:p>
+          <a:p>
+            <a:r>
+              <a:rPr lang="sk-SK" dirty="0"/>
+              <a:t>Ani jeden nie je rozšíriteľný na N procesov.</a:t>
+            </a:r>
+          </a:p>
+          <a:p>
+            <a:r>
+              <a:rPr lang="sk-SK" dirty="0"/>
+              <a:t>Pre N procesov existuje Pekárov (</a:t>
+            </a:r>
+            <a:r>
+              <a:rPr lang="sk-SK" dirty="0" err="1"/>
+              <a:t>Bakery</a:t>
+            </a:r>
+            <a:r>
+              <a:rPr lang="sk-SK" dirty="0"/>
+              <a:t>) algoritmus.</a:t>
+            </a:r>
+          </a:p>
+        </p:txBody>
+      </p:sp>
+      <p:sp>
+        <p:nvSpPr>
+          <p:cNvPr id="4" name="Zástupný objekt pre číslo snímky 3">
+            <a:extLst>
+              <a:ext uri="{FF2B5EF4-FFF2-40B4-BE49-F238E27FC236}">
+                <a16:creationId xmlns:a16="http://schemas.microsoft.com/office/drawing/2014/main" id="{BF0FC116-C928-BEA6-584A-5ED4CCC30D64}"/>
+              </a:ext>
+            </a:extLst>
+          </p:cNvPr>
+          <p:cNvSpPr>
+            <a:spLocks noGrp="1"/>
+          </p:cNvSpPr>
+          <p:nvPr>
+            <p:ph type="sldNum" sz="quarter" idx="12"/>
+          </p:nvPr>
+        </p:nvSpPr>
+        <p:spPr/>
+        <p:txBody>
+          <a:bodyPr/>
+          <a:lstStyle/>
+          <a:p>
+            <a:fld id="{5AB4CD34-DB5E-4606-AE4E-01019896DEAB}" type="slidenum">
+              <a:rPr lang="sk-SK" smtClean="0"/>
+              <a:t>22</a:t>
+            </a:fld>
+            <a:endParaRPr lang="sk-SK"/>
+          </a:p>
+        </p:txBody>
+      </p:sp>
+    </p:spTree>
+    <p:extLst>
+      <p:ext uri="{BB962C8B-B14F-4D97-AF65-F5344CB8AC3E}">
+        <p14:creationId xmlns:p14="http://schemas.microsoft.com/office/powerpoint/2010/main" val="3071328026"/>
+      </p:ext>
+    </p:extLst>
+  </p:cSld>
+  <p:clrMapOvr>
+    <a:masterClrMapping/>
+  </p:clrMapOvr>
+</p:sld>
+</file>
+
+<file path=ppt/slides/slide23.xml><?xml version="1.0" encoding="utf-8"?>
+<p:sld xmlns:a="http://schemas.openxmlformats.org/drawingml/2006/main" xmlns:r="http://schemas.openxmlformats.org/officeDocument/2006/relationships" xmlns:p="http://schemas.openxmlformats.org/presentationml/2006/main">
+  <p:cSld>
+    <p:spTree>
+      <p:nvGrpSpPr>
+        <p:cNvPr id="1" name=""/>
+        <p:cNvGrpSpPr/>
+        <p:nvPr/>
+      </p:nvGrpSpPr>
+      <p:grpSpPr>
+        <a:xfrm>
+          <a:off x="0" y="0"/>
+          <a:ext cx="0" cy="0"/>
+          <a:chOff x="0" y="0"/>
+          <a:chExt cx="0" cy="0"/>
+        </a:xfrm>
+      </p:grpSpPr>
+      <p:sp>
+        <p:nvSpPr>
           <p:cNvPr id="2" name="Title 1"/>
           <p:cNvSpPr>
             <a:spLocks noGrp="1"/>
@@ -9743,7 +10512,15 @@
           <a:p>
             <a:r>
               <a:rPr lang="sk-SK" dirty="0"/>
-              <a:t>Pekárov algoritmus</a:t>
+              <a:t>Pekárov (</a:t>
+            </a:r>
+            <a:r>
+              <a:rPr lang="sk-SK" dirty="0" err="1"/>
+              <a:t>Bakery</a:t>
+            </a:r>
+            <a:r>
+              <a:rPr lang="sk-SK" dirty="0"/>
+              <a:t>) algoritmus</a:t>
             </a:r>
           </a:p>
         </p:txBody>
@@ -9760,158 +10537,58 @@
         </p:nvSpPr>
         <p:spPr>
           <a:xfrm>
-            <a:off x="838200" y="1381125"/>
-            <a:ext cx="7086600" cy="4795838"/>
+            <a:off x="569259" y="1470772"/>
+            <a:ext cx="5266765" cy="4795838"/>
           </a:xfrm>
         </p:spPr>
         <p:txBody>
           <a:bodyPr>
-            <a:normAutofit fontScale="40000" lnSpcReduction="20000"/>
+            <a:normAutofit fontScale="62500" lnSpcReduction="20000"/>
           </a:bodyPr>
           <a:lstStyle/>
           <a:p>
-            <a:pPr marL="0" indent="0">
-              <a:buNone/>
-            </a:pPr>
+            <a:r>
+              <a:rPr lang="sk-SK" sz="4400" dirty="0"/>
+              <a:t>používa pri synchronizačných úlohách na </a:t>
+            </a:r>
+            <a:r>
+              <a:rPr lang="sk-SK" sz="4400" b="1" dirty="0"/>
+              <a:t>zabezpečenie vzájomného vylúčenia</a:t>
+            </a:r>
+            <a:r>
+              <a:rPr lang="sk-SK" sz="4400" dirty="0"/>
+              <a:t> (</a:t>
+            </a:r>
+            <a:r>
+              <a:rPr lang="sk-SK" sz="4400" dirty="0" err="1"/>
+              <a:t>mutual</a:t>
+            </a:r>
+            <a:r>
+              <a:rPr lang="sk-SK" sz="4400" dirty="0"/>
+              <a:t> </a:t>
+            </a:r>
+            <a:r>
+              <a:rPr lang="sk-SK" sz="4400" dirty="0" err="1"/>
+              <a:t>exclusion</a:t>
+            </a:r>
+            <a:r>
+              <a:rPr lang="sk-SK" sz="4400" dirty="0"/>
+              <a:t>) pre </a:t>
+            </a:r>
+            <a:r>
+              <a:rPr lang="sk-SK" sz="4400" i="1" dirty="0"/>
+              <a:t>ľubovoľný počet procesov</a:t>
+            </a:r>
+            <a:r>
+              <a:rPr lang="sk-SK" sz="4400" dirty="0"/>
+              <a:t> bez použitia špeciálnych hardvérových inštrukcií. </a:t>
+            </a:r>
+            <a:endParaRPr lang="sk-SK" sz="4200" noProof="1"/>
+          </a:p>
+          <a:p>
             <a:r>
               <a:rPr lang="sk-SK" sz="4200" noProof="1"/>
               <a:t>Princíp – procesu je pri žiadosti o prístup do kritického úseku priradené poradové číslo. Prednosť má proces s najnižším poradovým číslom, v prípade, že dva procesy majú toto číslo rovnaké, rozhoduje iné kritérium – napr. PID</a:t>
-            </a:r>
-          </a:p>
-          <a:p>
-            <a:pPr marL="0" indent="0">
-              <a:buNone/>
-            </a:pPr>
-            <a:r>
-              <a:rPr lang="en-US" noProof="1"/>
-              <a:t>shared int poradie[n] = (0,0,...,0);</a:t>
-            </a:r>
-          </a:p>
-          <a:p>
-            <a:pPr marL="0" indent="0">
-              <a:buNone/>
-            </a:pPr>
-            <a:r>
-              <a:rPr lang="en-US" noProof="1"/>
-              <a:t>shared int prirazuje[n] = (0,0,...,0);</a:t>
-            </a:r>
-          </a:p>
-          <a:p>
-            <a:pPr marL="0" indent="0">
-              <a:buNone/>
-            </a:pPr>
-            <a:r>
-              <a:rPr lang="sk-SK" noProof="1"/>
-              <a:t>...</a:t>
-            </a:r>
-          </a:p>
-          <a:p>
-            <a:pPr marL="0" indent="0">
-              <a:buNone/>
-            </a:pPr>
-            <a:r>
-              <a:rPr lang="sk-SK" noProof="1"/>
-              <a:t>prirazuje[X] = 1;		// po dobu priradzovania poradia budeme ”chránení”</a:t>
-            </a:r>
-          </a:p>
-          <a:p>
-            <a:pPr marL="0" indent="0">
-              <a:buNone/>
-            </a:pPr>
-            <a:r>
-              <a:rPr lang="sk-SK" noProof="1"/>
-              <a:t>poradie[X] = DajNajvyssie(poradie) + 1; // získame poradové číslo</a:t>
-            </a:r>
-          </a:p>
-          <a:p>
-            <a:pPr marL="0" indent="0">
-              <a:buNone/>
-            </a:pPr>
-            <a:r>
-              <a:rPr lang="sk-SK" noProof="1"/>
-              <a:t>prirazuje[X] = 0; 		// koniec priradzovania poradového čísla</a:t>
-            </a:r>
-          </a:p>
-          <a:p>
-            <a:pPr marL="0" indent="0">
-              <a:buNone/>
-            </a:pPr>
-            <a:endParaRPr lang="sk-SK" noProof="1"/>
-          </a:p>
-          <a:p>
-            <a:pPr marL="0" indent="0">
-              <a:buNone/>
-            </a:pPr>
-            <a:r>
-              <a:rPr lang="sk-SK" noProof="1"/>
-              <a:t>for (j=0; j&lt;n; j++) { 		// zisťujeme, ktoré procesy majú prednosť</a:t>
-            </a:r>
-          </a:p>
-          <a:p>
-            <a:pPr marL="0" indent="0">
-              <a:buNone/>
-            </a:pPr>
-            <a:r>
-              <a:rPr lang="sk-SK" noProof="1"/>
-              <a:t>    while (prirazuje[j]) {}; 		// j-tému procesu je priradzované poradové číslo</a:t>
-            </a:r>
-          </a:p>
-          <a:p>
-            <a:pPr marL="0" indent="0">
-              <a:buNone/>
-            </a:pPr>
-            <a:r>
-              <a:rPr lang="sk-SK" noProof="1"/>
-              <a:t>    while ((poradie[j]) &amp;&amp; 		// j-ty proces žiada o rovnaký prostriedok</a:t>
-            </a:r>
-          </a:p>
-          <a:p>
-            <a:pPr marL="0" indent="0">
-              <a:buNone/>
-            </a:pPr>
-            <a:r>
-              <a:rPr lang="pl-PL" noProof="1"/>
-              <a:t>   ((poradie[j]&lt;poradie[X]) || 	// je pred nami</a:t>
-            </a:r>
-          </a:p>
-          <a:p>
-            <a:pPr marL="0" indent="0">
-              <a:buNone/>
-            </a:pPr>
-            <a:r>
-              <a:rPr lang="sk-SK" noProof="1"/>
-              <a:t>   ((poradie[j]==poradie[X])&amp;&amp;(j&lt;X)))) {}; // rovnaké číslo, ale menšie PID</a:t>
-            </a:r>
-          </a:p>
-          <a:p>
-            <a:pPr marL="0" indent="0">
-              <a:buNone/>
-            </a:pPr>
-            <a:r>
-              <a:rPr lang="sk-SK" noProof="1"/>
-              <a:t>} </a:t>
-            </a:r>
-          </a:p>
-          <a:p>
-            <a:pPr marL="0" indent="0">
-              <a:buNone/>
-            </a:pPr>
-            <a:r>
-              <a:rPr lang="sk-SK" noProof="1"/>
-              <a:t>KS();</a:t>
-            </a:r>
-          </a:p>
-          <a:p>
-            <a:pPr marL="0" indent="0">
-              <a:buNone/>
-            </a:pPr>
-            <a:r>
-              <a:rPr lang="sk-SK" noProof="1"/>
-              <a:t>poradie[X] = 0; </a:t>
-            </a:r>
-            <a:r>
-              <a:rPr lang="sk-SK" dirty="0"/>
-              <a:t>		// o prostriedok už nežiadame</a:t>
             </a:r>
           </a:p>
         </p:txBody>
@@ -9933,7 +10610,7 @@
           <a:p>
             <a:fld id="{5AB4CD34-DB5E-4606-AE4E-01019896DEAB}" type="slidenum">
               <a:rPr lang="sk-SK" smtClean="0"/>
-              <a:t>20</a:t>
+              <a:t>23</a:t>
             </a:fld>
             <a:endParaRPr lang="sk-SK"/>
           </a:p>
@@ -9953,8 +10630,8 @@
         </p:nvSpPr>
         <p:spPr>
           <a:xfrm>
-            <a:off x="6174377" y="2279859"/>
-            <a:ext cx="6096000" cy="2585323"/>
+            <a:off x="5932330" y="1470772"/>
+            <a:ext cx="6096000" cy="1477328"/>
           </a:xfrm>
           <a:prstGeom prst="rect">
             <a:avLst/>
@@ -9967,105 +10644,55 @@
           </a:bodyPr>
           <a:lstStyle/>
           <a:p>
-            <a:pPr marL="285750" indent="-285750">
-              <a:buFont typeface="Arial" panose="020B0604020202020204" pitchFamily="34" charset="0"/>
-              <a:buChar char="•"/>
-            </a:pPr>
-            <a:r>
-              <a:rPr lang="sk-SK" dirty="0"/>
-              <a:t>Pekárov algoritmus spĺňa podmienku vzájomného vylučovania</a:t>
-            </a:r>
-          </a:p>
-          <a:p>
-            <a:pPr marL="285750" indent="-285750">
-              <a:buFont typeface="Arial" panose="020B0604020202020204" pitchFamily="34" charset="0"/>
-              <a:buChar char="•"/>
-            </a:pPr>
-            <a:r>
-              <a:rPr lang="sk-SK" dirty="0"/>
-              <a:t>Pekárov algoritmus spĺňa podmienku pokroku.</a:t>
-            </a:r>
-          </a:p>
-          <a:p>
-            <a:pPr marL="285750" indent="-285750">
-              <a:buFont typeface="Arial" panose="020B0604020202020204" pitchFamily="34" charset="0"/>
-              <a:buChar char="•"/>
-            </a:pPr>
-            <a:r>
-              <a:rPr lang="sk-SK" dirty="0"/>
-              <a:t>Pekárov algoritmus spĺňa podmienku ohraničeného čakania. </a:t>
-            </a:r>
-          </a:p>
-          <a:p>
-            <a:pPr marL="285750" indent="-285750">
-              <a:buFont typeface="Arial" panose="020B0604020202020204" pitchFamily="34" charset="0"/>
-              <a:buChar char="•"/>
-            </a:pPr>
-            <a:r>
-              <a:rPr lang="sk-SK" dirty="0"/>
-              <a:t>Pekárov algoritmus je použiteľný na riešenie problému kritickej sekcie v prípade viacerých procesov. </a:t>
-            </a:r>
-          </a:p>
-          <a:p>
-            <a:pPr marL="285750" indent="-285750">
-              <a:buFont typeface="Arial" panose="020B0604020202020204" pitchFamily="34" charset="0"/>
-              <a:buChar char="•"/>
-            </a:pPr>
-            <a:endParaRPr lang="sk-SK" dirty="0"/>
-          </a:p>
-          <a:p>
-            <a:pPr marL="285750" indent="-285750">
-              <a:buFont typeface="Arial" panose="020B0604020202020204" pitchFamily="34" charset="0"/>
-              <a:buChar char="•"/>
-            </a:pPr>
-            <a:endParaRPr lang="sk-SK" dirty="0"/>
-          </a:p>
-          <a:p>
-            <a:pPr marL="285750" indent="-285750">
-              <a:buFont typeface="Arial" panose="020B0604020202020204" pitchFamily="34" charset="0"/>
-              <a:buChar char="•"/>
-            </a:pPr>
-            <a:r>
-              <a:rPr lang="sk-SK" dirty="0"/>
-              <a:t>Zdroj: </a:t>
-            </a:r>
-            <a:r>
-              <a:rPr lang="sk-SK" dirty="0" err="1"/>
-              <a:t>https</a:t>
-            </a:r>
-            <a:r>
-              <a:rPr lang="sk-SK" dirty="0"/>
-              <a:t>://</a:t>
-            </a:r>
-            <a:r>
-              <a:rPr lang="sk-SK" dirty="0" err="1"/>
-              <a:t>ics.upjs.sk</a:t>
-            </a:r>
-            <a:r>
-              <a:rPr lang="sk-SK" dirty="0"/>
-              <a:t>/</a:t>
-            </a:r>
-            <a:r>
-              <a:rPr lang="sk-SK" dirty="0" err="1"/>
-              <a:t>pub</a:t>
-            </a:r>
-            <a:r>
-              <a:rPr lang="sk-SK" dirty="0"/>
-              <a:t>/</a:t>
-            </a:r>
-            <a:r>
-              <a:rPr lang="sk-SK" dirty="0" err="1"/>
-              <a:t>svk</a:t>
-            </a:r>
-            <a:r>
-              <a:rPr lang="sk-SK" dirty="0"/>
-              <a:t>/2009/</a:t>
-            </a:r>
-            <a:r>
-              <a:rPr lang="sk-SK" dirty="0" err="1"/>
-              <a:t>Vojtko.pdf</a:t>
-            </a:r>
-            <a:endParaRPr lang="sk-SK" dirty="0"/>
+            <a:r>
+              <a:rPr lang="sk-SK" b="1" dirty="0"/>
+              <a:t>Aktívne čakanie (</a:t>
+            </a:r>
+            <a:r>
+              <a:rPr lang="sk-SK" b="1" dirty="0" err="1"/>
+              <a:t>busy</a:t>
+            </a:r>
+            <a:r>
+              <a:rPr lang="sk-SK" b="1" dirty="0"/>
+              <a:t> </a:t>
+            </a:r>
+            <a:r>
+              <a:rPr lang="sk-SK" b="1" dirty="0" err="1"/>
+              <a:t>waiting</a:t>
+            </a:r>
+            <a:r>
+              <a:rPr lang="sk-SK" b="1" dirty="0"/>
+              <a:t>)</a:t>
+            </a:r>
+          </a:p>
+          <a:p>
+            <a:r>
+              <a:rPr lang="sk-SK" dirty="0"/>
+              <a:t>Procesy čakajú v slučke, kým na nich nepríde rad. Algoritmus teda používa:</a:t>
+            </a:r>
+          </a:p>
+          <a:p>
+            <a:r>
+              <a:rPr lang="sk-SK" b="1" dirty="0"/>
+              <a:t>zdieľané premenné</a:t>
+            </a:r>
+            <a:r>
+              <a:rPr lang="sk-SK" dirty="0"/>
+              <a:t> (pole lístkov),</a:t>
+            </a:r>
+          </a:p>
+          <a:p>
+            <a:r>
+              <a:rPr lang="sk-SK" b="1" dirty="0"/>
+              <a:t>aktívne čakanie</a:t>
+            </a:r>
+            <a:r>
+              <a:rPr lang="sk-SK" dirty="0"/>
+              <a:t>, nie blokovanie.</a:t>
+            </a:r>
+            <a:endParaRPr lang="sk-SK" dirty="0">
+              <a:effectLst/>
+            </a:endParaRPr>
           </a:p>
         </p:txBody>
       </p:sp>
@@ -10082,7 +10709,7 @@
 </p:sld>
 </file>
 
-<file path=ppt/slides/slide21.xml><?xml version="1.0" encoding="utf-8"?>
+<file path=ppt/slides/slide24.xml><?xml version="1.0" encoding="utf-8"?>
 <p:sld xmlns:a="http://schemas.openxmlformats.org/drawingml/2006/main" xmlns:r="http://schemas.openxmlformats.org/officeDocument/2006/relationships" xmlns:p="http://schemas.openxmlformats.org/presentationml/2006/main">
   <p:cSld>
     <p:spTree>
@@ -10115,8 +10742,8 @@
           <a:lstStyle/>
           <a:p>
             <a:r>
-              <a:rPr lang="sk-SK"/>
-              <a:t>Rozdelenie synchronizačných nástrojov</a:t>
+              <a:rPr lang="sk-SK" dirty="0"/>
+              <a:t>Rozdelenie synchronizačných nástrojov podľa čakania</a:t>
             </a:r>
           </a:p>
         </p:txBody>
@@ -10128,7 +10755,7 @@
             <a:spLocks noGrp="1"/>
           </p:cNvSpPr>
           <p:nvPr>
-            <p:ph idx="1"/>
+            <p:ph sz="half" idx="1"/>
           </p:nvPr>
         </p:nvSpPr>
         <p:spPr/>
@@ -10138,15 +10765,153 @@
           </a:bodyPr>
           <a:lstStyle/>
           <a:p>
-            <a:r>
-              <a:rPr lang="sk-SK" dirty="0"/>
-              <a:t>SEMAFÓRY (jednoduchšia forma - signály)</a:t>
-            </a:r>
-          </a:p>
-          <a:p>
-            <a:r>
-              <a:rPr lang="sk-SK" dirty="0"/>
-              <a:t>POSIELANIE SPRÁV (typické pre RT systémy)</a:t>
+            <a:pPr marL="0" indent="0">
+              <a:buNone/>
+            </a:pPr>
+            <a:r>
+              <a:rPr lang="sk-SK" b="1" dirty="0"/>
+              <a:t>Aktívne čakanie (</a:t>
+            </a:r>
+            <a:r>
+              <a:rPr lang="sk-SK" b="1" dirty="0" err="1"/>
+              <a:t>busy</a:t>
+            </a:r>
+            <a:r>
+              <a:rPr lang="sk-SK" b="1" dirty="0"/>
+              <a:t> </a:t>
+            </a:r>
+            <a:r>
+              <a:rPr lang="sk-SK" b="1" dirty="0" err="1"/>
+              <a:t>waiting</a:t>
+            </a:r>
+            <a:r>
+              <a:rPr lang="sk-SK" b="1" dirty="0"/>
+              <a:t>)</a:t>
+            </a:r>
+          </a:p>
+          <a:p>
+            <a:pPr marL="0" indent="0">
+              <a:buNone/>
+            </a:pPr>
+            <a:r>
+              <a:rPr lang="sk-SK" dirty="0"/>
+              <a:t>Proces sa točí v slučke a spotrebúva CPU.</a:t>
+            </a:r>
+          </a:p>
+          <a:p>
+            <a:r>
+              <a:rPr lang="sk-SK" dirty="0" err="1"/>
+              <a:t>Dekkerov</a:t>
+            </a:r>
+            <a:r>
+              <a:rPr lang="sk-SK" dirty="0"/>
+              <a:t> algoritmus</a:t>
+            </a:r>
+          </a:p>
+          <a:p>
+            <a:r>
+              <a:rPr lang="sk-SK" dirty="0" err="1"/>
+              <a:t>Petersonov</a:t>
+            </a:r>
+            <a:r>
+              <a:rPr lang="sk-SK" dirty="0"/>
+              <a:t> algoritmus</a:t>
+            </a:r>
+          </a:p>
+          <a:p>
+            <a:r>
+              <a:rPr lang="sk-SK" dirty="0"/>
+              <a:t>Test-and-set </a:t>
+            </a:r>
+            <a:r>
+              <a:rPr lang="sk-SK" dirty="0" err="1"/>
+              <a:t>lock</a:t>
+            </a:r>
+            <a:endParaRPr lang="sk-SK" dirty="0"/>
+          </a:p>
+          <a:p>
+            <a:r>
+              <a:rPr lang="sk-SK" dirty="0" err="1"/>
+              <a:t>Spinlocky</a:t>
+            </a:r>
+            <a:endParaRPr lang="sk-SK" dirty="0"/>
+          </a:p>
+          <a:p>
+            <a:r>
+              <a:rPr lang="sk-SK" dirty="0"/>
+              <a:t>Algoritmy bez zámkov (</a:t>
+            </a:r>
+            <a:r>
+              <a:rPr lang="sk-SK" dirty="0" err="1"/>
+              <a:t>lock-free</a:t>
+            </a:r>
+            <a:r>
+              <a:rPr lang="sk-SK" dirty="0"/>
+              <a:t>, CAS)</a:t>
+            </a:r>
+          </a:p>
+        </p:txBody>
+      </p:sp>
+      <p:sp>
+        <p:nvSpPr>
+          <p:cNvPr id="2" name="Zástupný objekt pre obsah 1">
+            <a:extLst>
+              <a:ext uri="{FF2B5EF4-FFF2-40B4-BE49-F238E27FC236}">
+                <a16:creationId xmlns:a16="http://schemas.microsoft.com/office/drawing/2014/main" id="{6795B5F3-D4C8-C27A-C4E5-445C8779B727}"/>
+              </a:ext>
+            </a:extLst>
+          </p:cNvPr>
+          <p:cNvSpPr>
+            <a:spLocks noGrp="1"/>
+          </p:cNvSpPr>
+          <p:nvPr>
+            <p:ph sz="half" idx="2"/>
+          </p:nvPr>
+        </p:nvSpPr>
+        <p:spPr/>
+        <p:txBody>
+          <a:bodyPr>
+            <a:normAutofit/>
+          </a:bodyPr>
+          <a:lstStyle/>
+          <a:p>
+            <a:pPr marL="0" indent="0">
+              <a:buNone/>
+            </a:pPr>
+            <a:r>
+              <a:rPr lang="sk-SK" b="1" dirty="0"/>
+              <a:t>Pasívne čakanie (</a:t>
+            </a:r>
+            <a:r>
+              <a:rPr lang="sk-SK" b="1" dirty="0" err="1"/>
+              <a:t>blocking</a:t>
+            </a:r>
+            <a:r>
+              <a:rPr lang="sk-SK" b="1" dirty="0"/>
+              <a:t>)</a:t>
+            </a:r>
+          </a:p>
+          <a:p>
+            <a:pPr marL="0" indent="0">
+              <a:buNone/>
+            </a:pPr>
+            <a:r>
+              <a:rPr lang="sk-SK" dirty="0"/>
+              <a:t>Proces sa uspí a OS ho prebudí, keď môže pokračovať.</a:t>
+            </a:r>
+          </a:p>
+          <a:p>
+            <a:r>
+              <a:rPr lang="sk-SK" dirty="0"/>
+              <a:t>Semafory (blokujúce </a:t>
+            </a:r>
+            <a:r>
+              <a:rPr lang="sk-SK" dirty="0" err="1"/>
+              <a:t>wait</a:t>
+            </a:r>
+            <a:r>
+              <a:rPr lang="sk-SK" dirty="0"/>
+              <a:t>())</a:t>
             </a:r>
           </a:p>
           <a:p>
@@ -10158,7 +10923,40 @@
           <a:p>
             <a:r>
               <a:rPr lang="sk-SK" dirty="0"/>
-              <a:t>Volanie vzdialenej procedúry (RPC)</a:t>
+              <a:t>Podmienené premenné</a:t>
+            </a:r>
+          </a:p>
+          <a:p>
+            <a:r>
+              <a:rPr lang="sk-SK" dirty="0"/>
+              <a:t>Blokujúce </a:t>
+            </a:r>
+            <a:r>
+              <a:rPr lang="sk-SK" dirty="0" err="1"/>
+              <a:t>mutexy</a:t>
+            </a:r>
+            <a:endParaRPr lang="sk-SK" dirty="0"/>
+          </a:p>
+          <a:p>
+            <a:r>
+              <a:rPr lang="sk-SK" dirty="0"/>
+              <a:t>Blokujúce IPC (</a:t>
+            </a:r>
+            <a:r>
+              <a:rPr lang="sk-SK" dirty="0" err="1"/>
+              <a:t>pipes</a:t>
+            </a:r>
+            <a:r>
+              <a:rPr lang="sk-SK" dirty="0"/>
+              <a:t>, </a:t>
+            </a:r>
+            <a:r>
+              <a:rPr lang="sk-SK" dirty="0" err="1"/>
+              <a:t>sockets</a:t>
+            </a:r>
+            <a:r>
+              <a:rPr lang="sk-SK" dirty="0"/>
+              <a:t>)</a:t>
             </a:r>
           </a:p>
           <a:p>
@@ -10281,7 +11079,7 @@
             <a:fld id="{3C5B460E-4FE7-48D6-BF1F-4D9366810D54}" type="slidenum">
               <a:rPr lang="sk-SK" sz="1600" smtClean="0"/>
               <a:pPr/>
-              <a:t>21</a:t>
+              <a:t>24</a:t>
             </a:fld>
             <a:endParaRPr lang="sk-SK" dirty="0"/>
           </a:p>
@@ -10447,7 +11245,7 @@
 </p:sld>
 </file>
 
-<file path=ppt/slides/slide22.xml><?xml version="1.0" encoding="utf-8"?>
+<file path=ppt/slides/slide25.xml><?xml version="1.0" encoding="utf-8"?>
 <p:sld xmlns:a="http://schemas.openxmlformats.org/drawingml/2006/main" xmlns:r="http://schemas.openxmlformats.org/officeDocument/2006/relationships" xmlns:p="http://schemas.openxmlformats.org/presentationml/2006/main">
   <p:cSld>
     <p:spTree>
@@ -10797,7 +11595,7 @@
             <a:fld id="{6C3E72F2-569B-4ACB-BA69-02F1234EA04B}" type="slidenum">
               <a:rPr lang="sk-SK" sz="1400"/>
               <a:pPr/>
-              <a:t>22</a:t>
+              <a:t>25</a:t>
             </a:fld>
             <a:endParaRPr lang="sk-SK" sz="1400"/>
           </a:p>
@@ -10816,7 +11614,7 @@
 </p:sld>
 </file>
 
-<file path=ppt/slides/slide23.xml><?xml version="1.0" encoding="utf-8"?>
+<file path=ppt/slides/slide26.xml><?xml version="1.0" encoding="utf-8"?>
 <p:sld xmlns:a="http://schemas.openxmlformats.org/drawingml/2006/main" xmlns:r="http://schemas.openxmlformats.org/officeDocument/2006/relationships" xmlns:p="http://schemas.openxmlformats.org/presentationml/2006/main">
   <p:cSld>
     <p:spTree>
@@ -10970,7 +11768,7 @@
             <a:fld id="{CA320F56-3467-4A90-82CF-AF0821193630}" type="slidenum">
               <a:rPr lang="sk-SK" sz="1400"/>
               <a:pPr/>
-              <a:t>23</a:t>
+              <a:t>26</a:t>
             </a:fld>
             <a:endParaRPr lang="sk-SK" sz="1400"/>
           </a:p>
@@ -11348,7 +12146,7 @@
 </p:sld>
 </file>
 
-<file path=ppt/slides/slide24.xml><?xml version="1.0" encoding="utf-8"?>
+<file path=ppt/slides/slide27.xml><?xml version="1.0" encoding="utf-8"?>
 <p:sld xmlns:a="http://schemas.openxmlformats.org/drawingml/2006/main" xmlns:r="http://schemas.openxmlformats.org/officeDocument/2006/relationships" xmlns:p="http://schemas.openxmlformats.org/presentationml/2006/main">
   <p:cSld>
     <p:spTree>
@@ -11502,7 +12300,7 @@
             <a:fld id="{74059663-F392-46B4-8684-C7C8BAEBE72D}" type="slidenum">
               <a:rPr lang="sk-SK" sz="1400"/>
               <a:pPr/>
-              <a:t>24</a:t>
+              <a:t>27</a:t>
             </a:fld>
             <a:endParaRPr lang="sk-SK" sz="1400"/>
           </a:p>
@@ -11868,7 +12666,7 @@
 </p:sld>
 </file>
 
-<file path=ppt/slides/slide25.xml><?xml version="1.0" encoding="utf-8"?>
+<file path=ppt/slides/slide28.xml><?xml version="1.0" encoding="utf-8"?>
 <p:sld xmlns:a="http://schemas.openxmlformats.org/drawingml/2006/main" xmlns:r="http://schemas.openxmlformats.org/officeDocument/2006/relationships" xmlns:p="http://schemas.openxmlformats.org/presentationml/2006/main">
   <p:cSld>
     <p:spTree>
@@ -12063,7 +12861,7 @@
           <a:p>
             <a:fld id="{5AB4CD34-DB5E-4606-AE4E-01019896DEAB}" type="slidenum">
               <a:rPr lang="sk-SK" smtClean="0"/>
-              <a:t>25</a:t>
+              <a:t>28</a:t>
             </a:fld>
             <a:endParaRPr lang="sk-SK"/>
           </a:p>
@@ -12082,7 +12880,7 @@
 </p:sld>
 </file>
 
-<file path=ppt/slides/slide26.xml><?xml version="1.0" encoding="utf-8"?>
+<file path=ppt/slides/slide29.xml><?xml version="1.0" encoding="utf-8"?>
 <p:sld xmlns:a="http://schemas.openxmlformats.org/drawingml/2006/main" xmlns:r="http://schemas.openxmlformats.org/officeDocument/2006/relationships" xmlns:p="http://schemas.openxmlformats.org/presentationml/2006/main">
   <p:cSld>
     <p:spTree>
@@ -12115,10 +12913,9 @@
           <a:lstStyle/>
           <a:p>
             <a:r>
-              <a:rPr lang="sk-SK" sz="3200"/>
+              <a:rPr lang="sk-SK" b="1" dirty="0"/>
               <a:t>Posielanie správ</a:t>
             </a:r>
-            <a:endParaRPr lang="sk-SK"/>
           </a:p>
         </p:txBody>
       </p:sp>
@@ -12376,7 +13173,7 @@
             <a:fld id="{BCE4B957-8578-4DD1-85E1-8AF0B1F936CC}" type="slidenum">
               <a:rPr lang="sk-SK" sz="1400"/>
               <a:pPr/>
-              <a:t>26</a:t>
+              <a:t>29</a:t>
             </a:fld>
             <a:endParaRPr lang="sk-SK" sz="1400"/>
           </a:p>
@@ -12542,7 +13339,297 @@
 </p:sld>
 </file>
 
-<file path=ppt/slides/slide27.xml><?xml version="1.0" encoding="utf-8"?>
+<file path=ppt/slides/slide3.xml><?xml version="1.0" encoding="utf-8"?>
+<p:sld xmlns:a="http://schemas.openxmlformats.org/drawingml/2006/main" xmlns:r="http://schemas.openxmlformats.org/officeDocument/2006/relationships" xmlns:p="http://schemas.openxmlformats.org/presentationml/2006/main">
+  <p:cSld>
+    <p:spTree>
+      <p:nvGrpSpPr>
+        <p:cNvPr id="1" name=""/>
+        <p:cNvGrpSpPr/>
+        <p:nvPr/>
+      </p:nvGrpSpPr>
+      <p:grpSpPr>
+        <a:xfrm>
+          <a:off x="0" y="0"/>
+          <a:ext cx="0" cy="0"/>
+          <a:chOff x="0" y="0"/>
+          <a:chExt cx="0" cy="0"/>
+        </a:xfrm>
+      </p:grpSpPr>
+      <p:sp>
+        <p:nvSpPr>
+          <p:cNvPr id="2" name="Nadpis 1">
+            <a:extLst>
+              <a:ext uri="{FF2B5EF4-FFF2-40B4-BE49-F238E27FC236}">
+                <a16:creationId xmlns:a16="http://schemas.microsoft.com/office/drawing/2014/main" id="{C835533E-FDA7-BF44-AD80-A6BF983E2BE6}"/>
+              </a:ext>
+            </a:extLst>
+          </p:cNvPr>
+          <p:cNvSpPr>
+            <a:spLocks noGrp="1"/>
+          </p:cNvSpPr>
+          <p:nvPr>
+            <p:ph type="title"/>
+          </p:nvPr>
+        </p:nvSpPr>
+        <p:spPr/>
+        <p:txBody>
+          <a:bodyPr/>
+          <a:lstStyle/>
+          <a:p>
+            <a:r>
+              <a:rPr lang="sk-SK" dirty="0"/>
+              <a:t>Jazykové prostriedky paralelizmu</a:t>
+            </a:r>
+          </a:p>
+        </p:txBody>
+      </p:sp>
+      <p:sp>
+        <p:nvSpPr>
+          <p:cNvPr id="3" name="Zástupný objekt pre obsah 2">
+            <a:extLst>
+              <a:ext uri="{FF2B5EF4-FFF2-40B4-BE49-F238E27FC236}">
+                <a16:creationId xmlns:a16="http://schemas.microsoft.com/office/drawing/2014/main" id="{695E7A34-BAD0-FD4B-88EE-A80002625D51}"/>
+              </a:ext>
+            </a:extLst>
+          </p:cNvPr>
+          <p:cNvSpPr>
+            <a:spLocks noGrp="1"/>
+          </p:cNvSpPr>
+          <p:nvPr>
+            <p:ph idx="1"/>
+          </p:nvPr>
+        </p:nvSpPr>
+        <p:spPr/>
+        <p:txBody>
+          <a:bodyPr>
+            <a:normAutofit fontScale="92500"/>
+          </a:bodyPr>
+          <a:lstStyle/>
+          <a:p>
+            <a:pPr marL="0" indent="0">
+              <a:spcBef>
+                <a:spcPct val="50000"/>
+              </a:spcBef>
+              <a:buNone/>
+            </a:pPr>
+            <a:r>
+              <a:rPr lang="sk-SK" sz="3200" dirty="0"/>
+              <a:t>Vývojový diagram paralelných procesov:</a:t>
+            </a:r>
+          </a:p>
+          <a:p>
+            <a:pPr>
+              <a:spcBef>
+                <a:spcPct val="50000"/>
+              </a:spcBef>
+            </a:pPr>
+            <a:r>
+              <a:rPr lang="sk-SK" dirty="0"/>
+              <a:t>FORK (vidlička) : vstupuje práve jedna spojnica, počet výstupných spojníc, ktoré znamenajú aktiváciu samostatného procesu, je neobmedzený</a:t>
+            </a:r>
+          </a:p>
+          <a:p>
+            <a:pPr>
+              <a:spcBef>
+                <a:spcPct val="50000"/>
+              </a:spcBef>
+            </a:pPr>
+            <a:r>
+              <a:rPr lang="sk-SK" dirty="0"/>
+              <a:t>JOIN (spojovací bod) : vystupuje práve jedna spojnica, počet vstupných spojníc je neobmedzený, no čaká sa na dokončenie všetkých procesov ktoré do neho vstupujú</a:t>
+            </a:r>
+          </a:p>
+          <a:p>
+            <a:pPr>
+              <a:spcBef>
+                <a:spcPct val="50000"/>
+              </a:spcBef>
+            </a:pPr>
+            <a:r>
+              <a:rPr lang="sk-SK" u="sng" dirty="0"/>
+              <a:t>Problém</a:t>
+            </a:r>
+            <a:r>
+              <a:rPr lang="sk-SK" dirty="0"/>
+              <a:t> - vývojový diagram nedokáže vyjadriť napr.: postupnosť príkazov v akej sa majú vykonávať, </a:t>
+            </a:r>
+            <a:r>
+              <a:rPr lang="sk-SK" dirty="0" err="1"/>
+              <a:t>t.z</a:t>
+            </a:r>
+            <a:r>
+              <a:rPr lang="sk-SK" dirty="0"/>
+              <a:t>. neumožňujú vytvoriť obecný prostriedok pre vyjadrenie všetkých podmienok pre </a:t>
+            </a:r>
+            <a:r>
+              <a:rPr lang="sk-SK" dirty="0" err="1"/>
+              <a:t>paral.procesy</a:t>
+            </a:r>
+            <a:r>
+              <a:rPr lang="sk-SK" dirty="0"/>
+              <a:t>, preto sa obmedzíme len na ich štruktúrované použitie </a:t>
+            </a:r>
+          </a:p>
+        </p:txBody>
+      </p:sp>
+      <p:sp>
+        <p:nvSpPr>
+          <p:cNvPr id="8195" name="Zástupný symbol čísla snímky 3"/>
+          <p:cNvSpPr>
+            <a:spLocks noGrp="1"/>
+          </p:cNvSpPr>
+          <p:nvPr>
+            <p:ph type="sldNum" sz="quarter" idx="12"/>
+          </p:nvPr>
+        </p:nvSpPr>
+        <p:spPr>
+          <a:noFill/>
+          <a:ln/>
+          <a:extLst>
+            <a:ext uri="{909E8E84-426E-40DD-AFC4-6F175D3DCCD1}">
+              <a14:hiddenFill xmlns:a14="http://schemas.microsoft.com/office/drawing/2010/main">
+                <a:solidFill>
+                  <a:srgbClr val="FFFFFF"/>
+                </a:solidFill>
+              </a14:hiddenFill>
+            </a:ext>
+            <a:ext uri="{91240B29-F687-4F45-9708-019B960494DF}">
+              <a14:hiddenLine xmlns:a14="http://schemas.microsoft.com/office/drawing/2010/main" w="9525">
+                <a:solidFill>
+                  <a:srgbClr val="000000"/>
+                </a:solidFill>
+                <a:miter lim="800000"/>
+                <a:headEnd/>
+                <a:tailEnd/>
+              </a14:hiddenLine>
+            </a:ext>
+          </a:extLst>
+        </p:spPr>
+        <p:txBody>
+          <a:bodyPr/>
+          <a:lstStyle>
+            <a:lvl1pPr>
+              <a:defRPr sz="4000" b="1">
+                <a:solidFill>
+                  <a:schemeClr val="tx1"/>
+                </a:solidFill>
+                <a:latin typeface="Times New Roman" panose="02020603050405020304" pitchFamily="18" charset="0"/>
+              </a:defRPr>
+            </a:lvl1pPr>
+            <a:lvl2pPr marL="742950" indent="-285750">
+              <a:defRPr sz="4000" b="1">
+                <a:solidFill>
+                  <a:schemeClr val="tx1"/>
+                </a:solidFill>
+                <a:latin typeface="Times New Roman" panose="02020603050405020304" pitchFamily="18" charset="0"/>
+              </a:defRPr>
+            </a:lvl2pPr>
+            <a:lvl3pPr marL="1143000" indent="-228600">
+              <a:defRPr sz="4000" b="1">
+                <a:solidFill>
+                  <a:schemeClr val="tx1"/>
+                </a:solidFill>
+                <a:latin typeface="Times New Roman" panose="02020603050405020304" pitchFamily="18" charset="0"/>
+              </a:defRPr>
+            </a:lvl3pPr>
+            <a:lvl4pPr marL="1600200" indent="-228600">
+              <a:defRPr sz="4000" b="1">
+                <a:solidFill>
+                  <a:schemeClr val="tx1"/>
+                </a:solidFill>
+                <a:latin typeface="Times New Roman" panose="02020603050405020304" pitchFamily="18" charset="0"/>
+              </a:defRPr>
+            </a:lvl4pPr>
+            <a:lvl5pPr marL="2057400" indent="-228600">
+              <a:defRPr sz="4000" b="1">
+                <a:solidFill>
+                  <a:schemeClr val="tx1"/>
+                </a:solidFill>
+                <a:latin typeface="Times New Roman" panose="02020603050405020304" pitchFamily="18" charset="0"/>
+              </a:defRPr>
+            </a:lvl5pPr>
+            <a:lvl6pPr marL="2514600" indent="-228600" algn="ctr" eaLnBrk="0" fontAlgn="base" hangingPunct="0">
+              <a:spcBef>
+                <a:spcPct val="0"/>
+              </a:spcBef>
+              <a:spcAft>
+                <a:spcPct val="0"/>
+              </a:spcAft>
+              <a:defRPr sz="4000" b="1">
+                <a:solidFill>
+                  <a:schemeClr val="tx1"/>
+                </a:solidFill>
+                <a:latin typeface="Times New Roman" panose="02020603050405020304" pitchFamily="18" charset="0"/>
+              </a:defRPr>
+            </a:lvl6pPr>
+            <a:lvl7pPr marL="2971800" indent="-228600" algn="ctr" eaLnBrk="0" fontAlgn="base" hangingPunct="0">
+              <a:spcBef>
+                <a:spcPct val="0"/>
+              </a:spcBef>
+              <a:spcAft>
+                <a:spcPct val="0"/>
+              </a:spcAft>
+              <a:defRPr sz="4000" b="1">
+                <a:solidFill>
+                  <a:schemeClr val="tx1"/>
+                </a:solidFill>
+                <a:latin typeface="Times New Roman" panose="02020603050405020304" pitchFamily="18" charset="0"/>
+              </a:defRPr>
+            </a:lvl7pPr>
+            <a:lvl8pPr marL="3429000" indent="-228600" algn="ctr" eaLnBrk="0" fontAlgn="base" hangingPunct="0">
+              <a:spcBef>
+                <a:spcPct val="0"/>
+              </a:spcBef>
+              <a:spcAft>
+                <a:spcPct val="0"/>
+              </a:spcAft>
+              <a:defRPr sz="4000" b="1">
+                <a:solidFill>
+                  <a:schemeClr val="tx1"/>
+                </a:solidFill>
+                <a:latin typeface="Times New Roman" panose="02020603050405020304" pitchFamily="18" charset="0"/>
+              </a:defRPr>
+            </a:lvl8pPr>
+            <a:lvl9pPr marL="3886200" indent="-228600" algn="ctr" eaLnBrk="0" fontAlgn="base" hangingPunct="0">
+              <a:spcBef>
+                <a:spcPct val="0"/>
+              </a:spcBef>
+              <a:spcAft>
+                <a:spcPct val="0"/>
+              </a:spcAft>
+              <a:defRPr sz="4000" b="1">
+                <a:solidFill>
+                  <a:schemeClr val="tx1"/>
+                </a:solidFill>
+                <a:latin typeface="Times New Roman" panose="02020603050405020304" pitchFamily="18" charset="0"/>
+              </a:defRPr>
+            </a:lvl9pPr>
+          </a:lstStyle>
+          <a:p>
+            <a:fld id="{FBF37EB1-3647-4A9C-A689-334649179ABF}" type="slidenum">
+              <a:rPr lang="sk-SK" sz="1400" b="0"/>
+              <a:pPr/>
+              <a:t>3</a:t>
+            </a:fld>
+            <a:endParaRPr lang="sk-SK" sz="1400" b="0"/>
+          </a:p>
+        </p:txBody>
+      </p:sp>
+    </p:spTree>
+    <p:extLst>
+      <p:ext uri="{BB962C8B-B14F-4D97-AF65-F5344CB8AC3E}">
+        <p14:creationId xmlns:p14="http://schemas.microsoft.com/office/powerpoint/2010/main" val="2345067092"/>
+      </p:ext>
+    </p:extLst>
+  </p:cSld>
+  <p:clrMapOvr>
+    <a:masterClrMapping/>
+  </p:clrMapOvr>
+</p:sld>
+</file>
+
+<file path=ppt/slides/slide30.xml><?xml version="1.0" encoding="utf-8"?>
 <p:sld xmlns:a="http://schemas.openxmlformats.org/drawingml/2006/main" xmlns:r="http://schemas.openxmlformats.org/officeDocument/2006/relationships" xmlns:p="http://schemas.openxmlformats.org/presentationml/2006/main">
   <p:cSld>
     <p:spTree>
@@ -12696,7 +13783,7 @@
             <a:fld id="{770FB737-E7B6-4711-A22C-CC3405C4E2F2}" type="slidenum">
               <a:rPr lang="sk-SK" sz="1400"/>
               <a:pPr/>
-              <a:t>27</a:t>
+              <a:t>30</a:t>
             </a:fld>
             <a:endParaRPr lang="sk-SK" sz="1400"/>
           </a:p>
@@ -12723,8 +13810,8 @@
           <a:lstStyle/>
           <a:p>
             <a:r>
-              <a:rPr lang="sk-SK" sz="3200"/>
-              <a:t>Asynchrónne zasielanie správ.</a:t>
+              <a:rPr lang="sk-SK" b="1" dirty="0"/>
+              <a:t>Asynchrónne zasielanie správ</a:t>
             </a:r>
           </a:p>
         </p:txBody>
@@ -13107,7 +14194,7 @@
 </p:sld>
 </file>
 
-<file path=ppt/slides/slide28.xml><?xml version="1.0" encoding="utf-8"?>
+<file path=ppt/slides/slide31.xml><?xml version="1.0" encoding="utf-8"?>
 <p:sld xmlns:a="http://schemas.openxmlformats.org/drawingml/2006/main" xmlns:r="http://schemas.openxmlformats.org/officeDocument/2006/relationships" xmlns:p="http://schemas.openxmlformats.org/presentationml/2006/main">
   <p:cSld>
     <p:spTree>
@@ -13265,7 +14352,7 @@
             <a:fld id="{7F7BA177-CA5D-48EA-8AF1-2D6D99151520}" type="slidenum">
               <a:rPr lang="sk-SK" sz="1400"/>
               <a:pPr/>
-              <a:t>28</a:t>
+              <a:t>31</a:t>
             </a:fld>
             <a:endParaRPr lang="sk-SK" sz="1400"/>
           </a:p>
@@ -13292,7 +14379,7 @@
           <a:lstStyle/>
           <a:p>
             <a:r>
-              <a:rPr lang="sk-SK" sz="3200"/>
+              <a:rPr lang="sk-SK" b="1" dirty="0"/>
               <a:t>Synchrónne zasielanie správ</a:t>
             </a:r>
           </a:p>
@@ -13675,7 +14762,7 @@
 </p:sld>
 </file>
 
-<file path=ppt/slides/slide29.xml><?xml version="1.0" encoding="utf-8"?>
+<file path=ppt/slides/slide32.xml><?xml version="1.0" encoding="utf-8"?>
 <p:sld xmlns:a="http://schemas.openxmlformats.org/drawingml/2006/main" xmlns:r="http://schemas.openxmlformats.org/officeDocument/2006/relationships" xmlns:p="http://schemas.openxmlformats.org/presentationml/2006/main">
   <p:cSld>
     <p:spTree>
@@ -13694,6 +14781,190 @@
       </p:grpSpPr>
       <p:sp>
         <p:nvSpPr>
+          <p:cNvPr id="30725" name="Rectangle 3"/>
+          <p:cNvSpPr>
+            <a:spLocks noGrp="1" noChangeArrowheads="1"/>
+          </p:cNvSpPr>
+          <p:nvPr>
+            <p:ph type="title"/>
+          </p:nvPr>
+        </p:nvSpPr>
+        <p:spPr>
+          <a:xfrm>
+            <a:off x="838200" y="136525"/>
+            <a:ext cx="10515600" cy="1325563"/>
+          </a:xfrm>
+        </p:spPr>
+        <p:txBody>
+          <a:bodyPr/>
+          <a:lstStyle/>
+          <a:p>
+            <a:r>
+              <a:rPr lang="sk-SK" dirty="0"/>
+              <a:t>Monitory - </a:t>
+            </a:r>
+            <a:r>
+              <a:rPr lang="sk-SK" dirty="0" err="1"/>
+              <a:t>synchr</a:t>
+            </a:r>
+            <a:r>
+              <a:rPr lang="sk-SK" dirty="0"/>
+              <a:t>. nástroje vyššej úrovne</a:t>
+            </a:r>
+          </a:p>
+        </p:txBody>
+      </p:sp>
+      <p:sp>
+        <p:nvSpPr>
+          <p:cNvPr id="3" name="Zástupný objekt pre obsah 2">
+            <a:extLst>
+              <a:ext uri="{FF2B5EF4-FFF2-40B4-BE49-F238E27FC236}">
+                <a16:creationId xmlns:a16="http://schemas.microsoft.com/office/drawing/2014/main" id="{C546CA57-7330-134E-82B3-A6C54F8156E0}"/>
+              </a:ext>
+            </a:extLst>
+          </p:cNvPr>
+          <p:cNvSpPr>
+            <a:spLocks noGrp="1"/>
+          </p:cNvSpPr>
+          <p:nvPr>
+            <p:ph idx="1"/>
+          </p:nvPr>
+        </p:nvSpPr>
+        <p:spPr>
+          <a:xfrm>
+            <a:off x="838200" y="1277257"/>
+            <a:ext cx="10515600" cy="5215618"/>
+          </a:xfrm>
+        </p:spPr>
+        <p:txBody>
+          <a:bodyPr>
+            <a:normAutofit fontScale="85000" lnSpcReduction="20000"/>
+          </a:bodyPr>
+          <a:lstStyle/>
+          <a:p>
+            <a:pPr marL="0" indent="0">
+              <a:buNone/>
+            </a:pPr>
+            <a:r>
+              <a:rPr lang="sk-SK" dirty="0"/>
+              <a:t>Monitor je synchronizačný nástroj vyššej úrovne, ktorý rieši vzájomné vylúčenie aj koordináciu procesov elegantnejšie než semafory či nízkoúrovňové algoritmy. Je to vlastne </a:t>
+            </a:r>
+            <a:r>
+              <a:rPr lang="sk-SK" b="1" dirty="0"/>
+              <a:t>obal</a:t>
+            </a:r>
+            <a:r>
+              <a:rPr lang="sk-SK" dirty="0"/>
+              <a:t>, ktorý spája zámok a podmienené premenné do jedného bezpečného mechanizmu.</a:t>
+            </a:r>
+          </a:p>
+          <a:p>
+            <a:pPr marL="0" indent="0">
+              <a:buNone/>
+            </a:pPr>
+            <a:r>
+              <a:rPr lang="sk-SK" b="1" dirty="0"/>
+              <a:t>Podstata monitoru</a:t>
+            </a:r>
+          </a:p>
+          <a:p>
+            <a:pPr marL="0" indent="0">
+              <a:buNone/>
+            </a:pPr>
+            <a:r>
+              <a:rPr lang="sk-SK" b="1" dirty="0"/>
+              <a:t>1. Iba jeden proces môže byť v monitore naraz</a:t>
+            </a:r>
+          </a:p>
+          <a:p>
+            <a:r>
+              <a:rPr lang="sk-SK" dirty="0"/>
+              <a:t>Monitor má </a:t>
+            </a:r>
+            <a:r>
+              <a:rPr lang="sk-SK" b="1" dirty="0"/>
+              <a:t>implicitný zámok</a:t>
+            </a:r>
+            <a:r>
+              <a:rPr lang="sk-SK" dirty="0"/>
+              <a:t>. Keď proces vstúpi do monitoru (volá jeho metódu), automaticky získava zámok. Kým je vo vnútri, žiadny iný proces sa tam nedostane.</a:t>
+            </a:r>
+          </a:p>
+          <a:p>
+            <a:r>
+              <a:rPr lang="sk-SK" dirty="0"/>
+              <a:t>To znamená, že monitor </a:t>
+            </a:r>
+            <a:r>
+              <a:rPr lang="sk-SK" b="1" dirty="0"/>
+              <a:t>automaticky zabezpečuje vzájomné vylúčenie</a:t>
+            </a:r>
+            <a:r>
+              <a:rPr lang="sk-SK" dirty="0"/>
+              <a:t>.</a:t>
+            </a:r>
+          </a:p>
+          <a:p>
+            <a:pPr marL="0" indent="0">
+              <a:buNone/>
+            </a:pPr>
+            <a:r>
+              <a:rPr lang="sk-SK" b="1" dirty="0"/>
+              <a:t>2. Monitor obsahuje podmienené premenné</a:t>
+            </a:r>
+          </a:p>
+          <a:p>
+            <a:r>
+              <a:rPr lang="sk-SK" dirty="0"/>
+              <a:t>Tie slúžia na čakanie na určitú podmienku. Majú dve operácie:</a:t>
+            </a:r>
+          </a:p>
+          <a:p>
+            <a:pPr lvl="1"/>
+            <a:r>
+              <a:rPr lang="sk-SK" dirty="0" err="1"/>
+              <a:t>wait</a:t>
+            </a:r>
+            <a:r>
+              <a:rPr lang="sk-SK" dirty="0"/>
+              <a:t>() – proces sa uspí a uvoľní zámok</a:t>
+            </a:r>
+          </a:p>
+          <a:p>
+            <a:pPr lvl="1"/>
+            <a:r>
+              <a:rPr lang="sk-SK" dirty="0" err="1"/>
+              <a:t>signal</a:t>
+            </a:r>
+            <a:r>
+              <a:rPr lang="sk-SK" dirty="0"/>
+              <a:t>() – prebudí jeden čakajúci proces</a:t>
+            </a:r>
+          </a:p>
+          <a:p>
+            <a:r>
+              <a:rPr lang="sk-SK" dirty="0"/>
+              <a:t>Tým monitor rieši aj </a:t>
+            </a:r>
+            <a:r>
+              <a:rPr lang="sk-SK" b="1" dirty="0"/>
+              <a:t>synchronizáciu poradia</a:t>
+            </a:r>
+            <a:r>
+              <a:rPr lang="sk-SK" dirty="0"/>
+              <a:t>.</a:t>
+            </a:r>
+          </a:p>
+          <a:p>
+            <a:pPr marL="0" indent="0">
+              <a:buNone/>
+            </a:pPr>
+            <a:endParaRPr lang="sk-SK" dirty="0"/>
+          </a:p>
+        </p:txBody>
+      </p:sp>
+      <p:sp>
+        <p:nvSpPr>
           <p:cNvPr id="30723" name="Zástupný symbol čísla snímky 3"/>
           <p:cNvSpPr>
             <a:spLocks noGrp="1"/>
@@ -13827,154 +15098,11 @@
           </a:lstStyle>
           <a:p>
             <a:fld id="{FC940E4F-28EF-402F-B471-F1CA2AAD0AD9}" type="slidenum">
-              <a:rPr lang="sk-SK" sz="1400"/>
+              <a:rPr lang="sk-SK"/>
               <a:pPr/>
-              <a:t>29</a:t>
+              <a:t>32</a:t>
             </a:fld>
-            <a:endParaRPr lang="sk-SK" sz="1400"/>
-          </a:p>
-        </p:txBody>
-      </p:sp>
-      <p:sp>
-        <p:nvSpPr>
-          <p:cNvPr id="30724" name="Rectangle 2"/>
-          <p:cNvSpPr>
-            <a:spLocks noGrp="1" noChangeArrowheads="1"/>
-          </p:cNvSpPr>
-          <p:nvPr>
-            <p:ph type="body" idx="4294967295"/>
-          </p:nvPr>
-        </p:nvSpPr>
-        <p:spPr/>
-        <p:txBody>
-          <a:bodyPr>
-            <a:normAutofit fontScale="92500"/>
-          </a:bodyPr>
-          <a:lstStyle/>
-          <a:p>
-            <a:r>
-              <a:rPr lang="sk-SK" dirty="0"/>
-              <a:t>prostriedok </a:t>
-            </a:r>
-            <a:r>
-              <a:rPr lang="sk-SK" dirty="0" err="1"/>
-              <a:t>prog</a:t>
-            </a:r>
-            <a:r>
-              <a:rPr lang="sk-SK" dirty="0"/>
-              <a:t>. jazyka so štruktúrou</a:t>
-            </a:r>
-          </a:p>
-          <a:p>
-            <a:pPr lvl="1"/>
-            <a:r>
-              <a:rPr lang="sk-SK" dirty="0" err="1"/>
-              <a:t>def</a:t>
-            </a:r>
-            <a:r>
-              <a:rPr lang="sk-SK" dirty="0"/>
-              <a:t>. spoločných premenných</a:t>
-            </a:r>
-          </a:p>
-          <a:p>
-            <a:pPr lvl="1"/>
-            <a:r>
-              <a:rPr lang="sk-SK" dirty="0"/>
-              <a:t>deklarácia procedúr</a:t>
-            </a:r>
-          </a:p>
-          <a:p>
-            <a:pPr lvl="1"/>
-            <a:r>
-              <a:rPr lang="sk-SK" dirty="0"/>
-              <a:t>inicializácia spoločných premenných</a:t>
-            </a:r>
-          </a:p>
-          <a:p>
-            <a:r>
-              <a:rPr lang="sk-SK" dirty="0"/>
-              <a:t>procedúry sú nedeliteľné kritické úseky</a:t>
-            </a:r>
-          </a:p>
-          <a:p>
-            <a:r>
-              <a:rPr lang="sk-SK" dirty="0"/>
-              <a:t>vzájomné vylúčenie </a:t>
-            </a:r>
-            <a:r>
-              <a:rPr lang="sk-SK" dirty="0" err="1"/>
-              <a:t>monit</a:t>
-            </a:r>
-            <a:r>
-              <a:rPr lang="sk-SK" dirty="0"/>
-              <a:t>. procedúr - nedeliteľné operácie pre vstup a výstup z monitora</a:t>
-            </a:r>
-          </a:p>
-          <a:p>
-            <a:r>
-              <a:rPr lang="sk-SK" dirty="0"/>
-              <a:t>charakteristické rysy monitora</a:t>
-            </a:r>
-          </a:p>
-          <a:p>
-            <a:pPr lvl="1"/>
-            <a:r>
-              <a:rPr lang="sk-SK" dirty="0"/>
-              <a:t>procedúry sú jediné operácie vykonávajúce procesy nad spoločnými premennými</a:t>
-            </a:r>
-          </a:p>
-          <a:p>
-            <a:pPr lvl="2"/>
-            <a:r>
-              <a:rPr lang="sk-SK" dirty="0"/>
-              <a:t>operácie </a:t>
-            </a:r>
-            <a:r>
-              <a:rPr lang="sk-SK" dirty="0" err="1"/>
-              <a:t>vrámci</a:t>
-            </a:r>
-            <a:r>
-              <a:rPr lang="sk-SK" dirty="0"/>
-              <a:t> monitora sa vzájomne vylučujú (</a:t>
-            </a:r>
-            <a:r>
-              <a:rPr lang="sk-SK" dirty="0" err="1"/>
-              <a:t>proc</a:t>
-            </a:r>
-            <a:r>
-              <a:rPr lang="sk-SK" dirty="0"/>
-              <a:t>. monitora vytvárajú združené kritické sekcie)</a:t>
-            </a:r>
-          </a:p>
-        </p:txBody>
-      </p:sp>
-      <p:sp>
-        <p:nvSpPr>
-          <p:cNvPr id="30725" name="Rectangle 3"/>
-          <p:cNvSpPr>
-            <a:spLocks noGrp="1" noChangeArrowheads="1"/>
-          </p:cNvSpPr>
-          <p:nvPr>
-            <p:ph type="title" idx="4294967295"/>
-          </p:nvPr>
-        </p:nvSpPr>
-        <p:spPr/>
-        <p:txBody>
-          <a:bodyPr/>
-          <a:lstStyle/>
-          <a:p>
-            <a:r>
-              <a:rPr lang="sk-SK"/>
-              <a:t>Monitory - </a:t>
-            </a:r>
-            <a:r>
-              <a:rPr lang="sk-SK" err="1"/>
-              <a:t>synchr</a:t>
-            </a:r>
-            <a:r>
-              <a:rPr lang="sk-SK"/>
-              <a:t>. nástroje vyššej úrovne</a:t>
-            </a:r>
+            <a:endParaRPr lang="sk-SK"/>
           </a:p>
         </p:txBody>
       </p:sp>
@@ -13991,370 +15119,7 @@
 </p:sld>
 </file>
 
-<file path=ppt/slides/slide3.xml><?xml version="1.0" encoding="utf-8"?>
-<p:sld xmlns:a="http://schemas.openxmlformats.org/drawingml/2006/main" xmlns:r="http://schemas.openxmlformats.org/officeDocument/2006/relationships" xmlns:p="http://schemas.openxmlformats.org/presentationml/2006/main">
-  <p:cSld>
-    <p:spTree>
-      <p:nvGrpSpPr>
-        <p:cNvPr id="1" name=""/>
-        <p:cNvGrpSpPr/>
-        <p:nvPr/>
-      </p:nvGrpSpPr>
-      <p:grpSpPr>
-        <a:xfrm>
-          <a:off x="0" y="0"/>
-          <a:ext cx="0" cy="0"/>
-          <a:chOff x="0" y="0"/>
-          <a:chExt cx="0" cy="0"/>
-        </a:xfrm>
-      </p:grpSpPr>
-      <p:sp>
-        <p:nvSpPr>
-          <p:cNvPr id="2" name="Nadpis 1">
-            <a:extLst>
-              <a:ext uri="{FF2B5EF4-FFF2-40B4-BE49-F238E27FC236}">
-                <a16:creationId xmlns:a16="http://schemas.microsoft.com/office/drawing/2014/main" id="{C835533E-FDA7-BF44-AD80-A6BF983E2BE6}"/>
-              </a:ext>
-            </a:extLst>
-          </p:cNvPr>
-          <p:cNvSpPr>
-            <a:spLocks noGrp="1"/>
-          </p:cNvSpPr>
-          <p:nvPr>
-            <p:ph type="title"/>
-          </p:nvPr>
-        </p:nvSpPr>
-        <p:spPr/>
-        <p:txBody>
-          <a:bodyPr/>
-          <a:lstStyle/>
-          <a:p>
-            <a:r>
-              <a:rPr lang="sk-SK" dirty="0"/>
-              <a:t>Jazykové prostriedky paralelizmu</a:t>
-            </a:r>
-          </a:p>
-        </p:txBody>
-      </p:sp>
-      <p:sp>
-        <p:nvSpPr>
-          <p:cNvPr id="3" name="Zástupný objekt pre obsah 2">
-            <a:extLst>
-              <a:ext uri="{FF2B5EF4-FFF2-40B4-BE49-F238E27FC236}">
-                <a16:creationId xmlns:a16="http://schemas.microsoft.com/office/drawing/2014/main" id="{695E7A34-BAD0-FD4B-88EE-A80002625D51}"/>
-              </a:ext>
-            </a:extLst>
-          </p:cNvPr>
-          <p:cNvSpPr>
-            <a:spLocks noGrp="1"/>
-          </p:cNvSpPr>
-          <p:nvPr>
-            <p:ph idx="1"/>
-          </p:nvPr>
-        </p:nvSpPr>
-        <p:spPr/>
-        <p:txBody>
-          <a:bodyPr>
-            <a:normAutofit fontScale="77500" lnSpcReduction="20000"/>
-          </a:bodyPr>
-          <a:lstStyle/>
-          <a:p>
-            <a:pPr>
-              <a:spcBef>
-                <a:spcPct val="50000"/>
-              </a:spcBef>
-            </a:pPr>
-            <a:r>
-              <a:rPr lang="sk-SK" sz="3200" dirty="0"/>
-              <a:t>Vývojový diagram paralelných procesov:</a:t>
-            </a:r>
-          </a:p>
-          <a:p>
-            <a:pPr>
-              <a:spcBef>
-                <a:spcPct val="50000"/>
-              </a:spcBef>
-            </a:pPr>
-            <a:r>
-              <a:rPr lang="sk-SK" dirty="0"/>
-              <a:t>FORK (vidlička) : vstupuje práve jedna spojnica, počet výstupných spojníc, ktoré znamenajú aktiváciu samostatného procesu, je neobmedzený</a:t>
-            </a:r>
-          </a:p>
-          <a:p>
-            <a:pPr>
-              <a:spcBef>
-                <a:spcPct val="50000"/>
-              </a:spcBef>
-            </a:pPr>
-            <a:r>
-              <a:rPr lang="sk-SK" dirty="0"/>
-              <a:t>JOIN (spojovací bod) : vystupuje práve jedna spojnica, počet vstupných spojníc je neobmedzený, no čaká sa na dokončenie všetkých procesov ktoré do neho vstupujú</a:t>
-            </a:r>
-          </a:p>
-          <a:p>
-            <a:pPr>
-              <a:spcBef>
-                <a:spcPct val="50000"/>
-              </a:spcBef>
-            </a:pPr>
-            <a:r>
-              <a:rPr lang="sk-SK" u="sng" dirty="0"/>
-              <a:t>Problém</a:t>
-            </a:r>
-            <a:r>
-              <a:rPr lang="sk-SK" dirty="0"/>
-              <a:t> - vývojový diagram nedokáže vyjadriť napr.: postupnosť príkazov v akej sa majú vykonávať, </a:t>
-            </a:r>
-            <a:r>
-              <a:rPr lang="sk-SK" dirty="0" err="1"/>
-              <a:t>t.z</a:t>
-            </a:r>
-            <a:r>
-              <a:rPr lang="sk-SK" dirty="0"/>
-              <a:t>. neumožňujú vytvoriť obecný prostriedok pre vyjadrenie všetkých podmienok pre </a:t>
-            </a:r>
-            <a:r>
-              <a:rPr lang="sk-SK" dirty="0" err="1"/>
-              <a:t>paral.procesy</a:t>
-            </a:r>
-            <a:r>
-              <a:rPr lang="sk-SK" dirty="0"/>
-              <a:t>, preto sa obmedzíme len na ich štruktúrované použitie </a:t>
-            </a:r>
-          </a:p>
-          <a:p>
-            <a:pPr>
-              <a:spcBef>
-                <a:spcPct val="50000"/>
-              </a:spcBef>
-            </a:pPr>
-            <a:r>
-              <a:rPr lang="sk-SK" sz="3200" dirty="0"/>
-              <a:t>Vyjadrenie </a:t>
-            </a:r>
-            <a:r>
-              <a:rPr lang="sk-SK" sz="3200" dirty="0" err="1"/>
-              <a:t>paral.procesov</a:t>
-            </a:r>
-            <a:r>
-              <a:rPr lang="sk-SK" sz="3200" dirty="0"/>
-              <a:t> v programovacom jazyku :</a:t>
-            </a:r>
-          </a:p>
-          <a:p>
-            <a:pPr marL="0" indent="0">
-              <a:spcBef>
-                <a:spcPct val="50000"/>
-              </a:spcBef>
-              <a:buNone/>
-            </a:pPr>
-            <a:r>
-              <a:rPr lang="sk-SK" dirty="0"/>
-              <a:t>	</a:t>
-            </a:r>
-            <a:r>
-              <a:rPr lang="sk-SK" dirty="0" err="1"/>
-              <a:t>cobegin</a:t>
-            </a:r>
-            <a:r>
-              <a:rPr lang="sk-SK" dirty="0"/>
-              <a:t> S1; S2; ... Sn; </a:t>
-            </a:r>
-            <a:r>
-              <a:rPr lang="sk-SK" dirty="0" err="1"/>
-              <a:t>coend</a:t>
-            </a:r>
-            <a:r>
-              <a:rPr lang="sk-SK" dirty="0"/>
-              <a:t>.   -</a:t>
-            </a:r>
-            <a:r>
-              <a:rPr lang="en-US" dirty="0"/>
-              <a:t>&gt;</a:t>
-            </a:r>
-            <a:r>
-              <a:rPr lang="sk-SK" dirty="0"/>
-              <a:t> paralelný príkaz</a:t>
-            </a:r>
-          </a:p>
-          <a:p>
-            <a:pPr>
-              <a:spcBef>
-                <a:spcPct val="50000"/>
-              </a:spcBef>
-            </a:pPr>
-            <a:r>
-              <a:rPr lang="sk-SK" dirty="0"/>
-              <a:t>proces v ktorom sa použil </a:t>
-            </a:r>
-            <a:r>
-              <a:rPr lang="sk-SK" dirty="0" err="1"/>
-              <a:t>paral.príkaz</a:t>
-            </a:r>
-            <a:r>
-              <a:rPr lang="sk-SK" dirty="0"/>
-              <a:t>  = rodičovský proces a príkazy S1,S2 ... Sn riadiace paralelne prebiehajúce procesy = potomkovia</a:t>
-            </a:r>
-          </a:p>
-        </p:txBody>
-      </p:sp>
-      <p:sp>
-        <p:nvSpPr>
-          <p:cNvPr id="8195" name="Zástupný symbol čísla snímky 3"/>
-          <p:cNvSpPr>
-            <a:spLocks noGrp="1"/>
-          </p:cNvSpPr>
-          <p:nvPr>
-            <p:ph type="sldNum" sz="quarter" idx="12"/>
-          </p:nvPr>
-        </p:nvSpPr>
-        <p:spPr>
-          <a:noFill/>
-          <a:ln/>
-          <a:extLst>
-            <a:ext uri="{909E8E84-426E-40DD-AFC4-6F175D3DCCD1}">
-              <a14:hiddenFill xmlns:a14="http://schemas.microsoft.com/office/drawing/2010/main">
-                <a:solidFill>
-                  <a:srgbClr val="FFFFFF"/>
-                </a:solidFill>
-              </a14:hiddenFill>
-            </a:ext>
-            <a:ext uri="{91240B29-F687-4F45-9708-019B960494DF}">
-              <a14:hiddenLine xmlns:a14="http://schemas.microsoft.com/office/drawing/2010/main" w="9525">
-                <a:solidFill>
-                  <a:srgbClr val="000000"/>
-                </a:solidFill>
-                <a:miter lim="800000"/>
-                <a:headEnd/>
-                <a:tailEnd/>
-              </a14:hiddenLine>
-            </a:ext>
-          </a:extLst>
-        </p:spPr>
-        <p:txBody>
-          <a:bodyPr/>
-          <a:lstStyle>
-            <a:lvl1pPr>
-              <a:defRPr sz="4000" b="1">
-                <a:solidFill>
-                  <a:schemeClr val="tx1"/>
-                </a:solidFill>
-                <a:latin typeface="Times New Roman" panose="02020603050405020304" pitchFamily="18" charset="0"/>
-              </a:defRPr>
-            </a:lvl1pPr>
-            <a:lvl2pPr marL="742950" indent="-285750">
-              <a:defRPr sz="4000" b="1">
-                <a:solidFill>
-                  <a:schemeClr val="tx1"/>
-                </a:solidFill>
-                <a:latin typeface="Times New Roman" panose="02020603050405020304" pitchFamily="18" charset="0"/>
-              </a:defRPr>
-            </a:lvl2pPr>
-            <a:lvl3pPr marL="1143000" indent="-228600">
-              <a:defRPr sz="4000" b="1">
-                <a:solidFill>
-                  <a:schemeClr val="tx1"/>
-                </a:solidFill>
-                <a:latin typeface="Times New Roman" panose="02020603050405020304" pitchFamily="18" charset="0"/>
-              </a:defRPr>
-            </a:lvl3pPr>
-            <a:lvl4pPr marL="1600200" indent="-228600">
-              <a:defRPr sz="4000" b="1">
-                <a:solidFill>
-                  <a:schemeClr val="tx1"/>
-                </a:solidFill>
-                <a:latin typeface="Times New Roman" panose="02020603050405020304" pitchFamily="18" charset="0"/>
-              </a:defRPr>
-            </a:lvl4pPr>
-            <a:lvl5pPr marL="2057400" indent="-228600">
-              <a:defRPr sz="4000" b="1">
-                <a:solidFill>
-                  <a:schemeClr val="tx1"/>
-                </a:solidFill>
-                <a:latin typeface="Times New Roman" panose="02020603050405020304" pitchFamily="18" charset="0"/>
-              </a:defRPr>
-            </a:lvl5pPr>
-            <a:lvl6pPr marL="2514600" indent="-228600" algn="ctr" eaLnBrk="0" fontAlgn="base" hangingPunct="0">
-              <a:spcBef>
-                <a:spcPct val="0"/>
-              </a:spcBef>
-              <a:spcAft>
-                <a:spcPct val="0"/>
-              </a:spcAft>
-              <a:defRPr sz="4000" b="1">
-                <a:solidFill>
-                  <a:schemeClr val="tx1"/>
-                </a:solidFill>
-                <a:latin typeface="Times New Roman" panose="02020603050405020304" pitchFamily="18" charset="0"/>
-              </a:defRPr>
-            </a:lvl6pPr>
-            <a:lvl7pPr marL="2971800" indent="-228600" algn="ctr" eaLnBrk="0" fontAlgn="base" hangingPunct="0">
-              <a:spcBef>
-                <a:spcPct val="0"/>
-              </a:spcBef>
-              <a:spcAft>
-                <a:spcPct val="0"/>
-              </a:spcAft>
-              <a:defRPr sz="4000" b="1">
-                <a:solidFill>
-                  <a:schemeClr val="tx1"/>
-                </a:solidFill>
-                <a:latin typeface="Times New Roman" panose="02020603050405020304" pitchFamily="18" charset="0"/>
-              </a:defRPr>
-            </a:lvl7pPr>
-            <a:lvl8pPr marL="3429000" indent="-228600" algn="ctr" eaLnBrk="0" fontAlgn="base" hangingPunct="0">
-              <a:spcBef>
-                <a:spcPct val="0"/>
-              </a:spcBef>
-              <a:spcAft>
-                <a:spcPct val="0"/>
-              </a:spcAft>
-              <a:defRPr sz="4000" b="1">
-                <a:solidFill>
-                  <a:schemeClr val="tx1"/>
-                </a:solidFill>
-                <a:latin typeface="Times New Roman" panose="02020603050405020304" pitchFamily="18" charset="0"/>
-              </a:defRPr>
-            </a:lvl8pPr>
-            <a:lvl9pPr marL="3886200" indent="-228600" algn="ctr" eaLnBrk="0" fontAlgn="base" hangingPunct="0">
-              <a:spcBef>
-                <a:spcPct val="0"/>
-              </a:spcBef>
-              <a:spcAft>
-                <a:spcPct val="0"/>
-              </a:spcAft>
-              <a:defRPr sz="4000" b="1">
-                <a:solidFill>
-                  <a:schemeClr val="tx1"/>
-                </a:solidFill>
-                <a:latin typeface="Times New Roman" panose="02020603050405020304" pitchFamily="18" charset="0"/>
-              </a:defRPr>
-            </a:lvl9pPr>
-          </a:lstStyle>
-          <a:p>
-            <a:fld id="{FBF37EB1-3647-4A9C-A689-334649179ABF}" type="slidenum">
-              <a:rPr lang="sk-SK" sz="1400" b="0"/>
-              <a:pPr/>
-              <a:t>3</a:t>
-            </a:fld>
-            <a:endParaRPr lang="sk-SK" sz="1400" b="0"/>
-          </a:p>
-        </p:txBody>
-      </p:sp>
-    </p:spTree>
-    <p:extLst>
-      <p:ext uri="{BB962C8B-B14F-4D97-AF65-F5344CB8AC3E}">
-        <p14:creationId xmlns:p14="http://schemas.microsoft.com/office/powerpoint/2010/main" val="2345067092"/>
-      </p:ext>
-    </p:extLst>
-  </p:cSld>
-  <p:clrMapOvr>
-    <a:masterClrMapping/>
-  </p:clrMapOvr>
-</p:sld>
-</file>
-
-<file path=ppt/slides/slide30.xml><?xml version="1.0" encoding="utf-8"?>
+<file path=ppt/slides/slide33.xml><?xml version="1.0" encoding="utf-8"?>
 <p:sld xmlns:a="http://schemas.openxmlformats.org/drawingml/2006/main" xmlns:r="http://schemas.openxmlformats.org/officeDocument/2006/relationships" xmlns:p="http://schemas.openxmlformats.org/presentationml/2006/main">
   <p:cSld>
     <p:spTree>
@@ -14508,7 +15273,7 @@
             <a:fld id="{4799A7DB-AC62-46E4-9215-AD7D88508BEF}" type="slidenum">
               <a:rPr lang="sk-SK" sz="1400"/>
               <a:pPr/>
-              <a:t>30</a:t>
+              <a:t>33</a:t>
             </a:fld>
             <a:endParaRPr lang="sk-SK" sz="1400"/>
           </a:p>
@@ -14529,24 +15294,38 @@
           <a:bodyPr/>
           <a:lstStyle/>
           <a:p>
-            <a:r>
-              <a:rPr lang="sk-SK" dirty="0"/>
-              <a:t>rešpektujú požiadavky štruktúrovanej stavby </a:t>
+            <a:pPr marL="0" indent="0">
+              <a:buNone/>
+            </a:pPr>
+            <a:r>
+              <a:rPr lang="sk-SK" b="1" dirty="0"/>
+              <a:t>3. Procesy nečakajú aktívne</a:t>
+            </a:r>
+          </a:p>
+          <a:p>
+            <a:r>
+              <a:rPr lang="sk-SK" dirty="0"/>
+              <a:t>Monitor používa </a:t>
+            </a:r>
+            <a:r>
+              <a:rPr lang="sk-SK" b="1" dirty="0"/>
+              <a:t>pasívne čakanie</a:t>
+            </a:r>
+            <a:r>
+              <a:rPr lang="sk-SK" dirty="0"/>
+              <a:t> – proces sa uspí a OS ho prebudí, keď môže pokračovať. Nevzniká plytvanie CPU ako pri </a:t>
             </a:r>
             <a:r>
               <a:rPr lang="sk-SK" dirty="0" err="1"/>
-              <a:t>PGMov</a:t>
-            </a:r>
-            <a:endParaRPr lang="sk-SK" dirty="0"/>
-          </a:p>
-          <a:p>
-            <a:r>
-              <a:rPr lang="sk-SK" dirty="0"/>
-              <a:t>semafory a monitory - rovnako silné prostriedky </a:t>
+              <a:t>busy</a:t>
+            </a:r>
+            <a:r>
+              <a:rPr lang="sk-SK" dirty="0"/>
+              <a:t> </a:t>
             </a:r>
             <a:r>
               <a:rPr lang="sk-SK" dirty="0" err="1"/>
-              <a:t>synchr</a:t>
+              <a:t>waiting</a:t>
             </a:r>
             <a:r>
               <a:rPr lang="sk-SK" dirty="0"/>
@@ -14554,25 +15333,22 @@
             </a:r>
           </a:p>
           <a:p>
-            <a:r>
-              <a:rPr lang="sk-SK" dirty="0"/>
-              <a:t>Monitory vyžadujú priamu implementáciu </a:t>
-            </a:r>
-            <a:r>
-              <a:rPr lang="sk-SK"/>
-              <a:t>v prekladačoch</a:t>
-            </a:r>
-          </a:p>
-          <a:p>
-            <a:pPr lvl="1"/>
-            <a:r>
-              <a:rPr lang="sk-SK"/>
-              <a:t>je </a:t>
-            </a:r>
-            <a:r>
-              <a:rPr lang="sk-SK" dirty="0"/>
-              <a:t>to ťažké a zriedkavé</a:t>
-            </a:r>
+            <a:pPr marL="0" indent="0">
+              <a:buNone/>
+            </a:pPr>
+            <a:r>
+              <a:rPr lang="sk-SK" b="1" dirty="0"/>
+              <a:t>4. Monitor je bezpečný a prehľadný</a:t>
+            </a:r>
+          </a:p>
+          <a:p>
+            <a:r>
+              <a:rPr lang="sk-SK" dirty="0"/>
+              <a:t>Všetky zdieľané premenné sú „schované“ vo vnútri monitoru. Procesy k nim pristupujú iba cez metódy monitoru, čo zabraňuje chybám.</a:t>
+            </a:r>
+            <a:endParaRPr lang="sk-SK" dirty="0">
+              <a:effectLst/>
+            </a:endParaRPr>
           </a:p>
         </p:txBody>
       </p:sp>
@@ -14611,7 +15387,7 @@
 </p:sld>
 </file>
 
-<file path=ppt/slides/slide31.xml><?xml version="1.0" encoding="utf-8"?>
+<file path=ppt/slides/slide34.xml><?xml version="1.0" encoding="utf-8"?>
 <p:sld xmlns:a="http://schemas.openxmlformats.org/drawingml/2006/main" xmlns:r="http://schemas.openxmlformats.org/officeDocument/2006/relationships" xmlns:p="http://schemas.openxmlformats.org/presentationml/2006/main">
   <p:cSld>
     <p:spTree>
@@ -14727,7 +15503,7 @@
           <a:p>
             <a:fld id="{5AB4CD34-DB5E-4606-AE4E-01019896DEAB}" type="slidenum">
               <a:rPr lang="sk-SK" smtClean="0"/>
-              <a:t>31</a:t>
+              <a:t>34</a:t>
             </a:fld>
             <a:endParaRPr lang="sk-SK"/>
           </a:p>
@@ -14746,7 +15522,7 @@
 </p:sld>
 </file>
 
-<file path=ppt/slides/slide32.xml><?xml version="1.0" encoding="utf-8"?>
+<file path=ppt/slides/slide35.xml><?xml version="1.0" encoding="utf-8"?>
 <p:sld xmlns:a="http://schemas.openxmlformats.org/drawingml/2006/main" xmlns:r="http://schemas.openxmlformats.org/officeDocument/2006/relationships" xmlns:p="http://schemas.openxmlformats.org/presentationml/2006/main">
   <p:cSld>
     <p:spTree>
@@ -14928,7 +15704,7 @@
           <a:p>
             <a:fld id="{5AB4CD34-DB5E-4606-AE4E-01019896DEAB}" type="slidenum">
               <a:rPr lang="sk-SK" smtClean="0"/>
-              <a:t>32</a:t>
+              <a:t>35</a:t>
             </a:fld>
             <a:endParaRPr lang="sk-SK"/>
           </a:p>
@@ -14947,215 +15723,7 @@
 </p:sld>
 </file>
 
-<file path=ppt/slides/slide33.xml><?xml version="1.0" encoding="utf-8"?>
-<p:sld xmlns:a="http://schemas.openxmlformats.org/drawingml/2006/main" xmlns:r="http://schemas.openxmlformats.org/officeDocument/2006/relationships" xmlns:p="http://schemas.openxmlformats.org/presentationml/2006/main">
-  <p:cSld>
-    <p:spTree>
-      <p:nvGrpSpPr>
-        <p:cNvPr id="1" name=""/>
-        <p:cNvGrpSpPr/>
-        <p:nvPr/>
-      </p:nvGrpSpPr>
-      <p:grpSpPr>
-        <a:xfrm>
-          <a:off x="0" y="0"/>
-          <a:ext cx="0" cy="0"/>
-          <a:chOff x="0" y="0"/>
-          <a:chExt cx="0" cy="0"/>
-        </a:xfrm>
-      </p:grpSpPr>
-      <p:sp>
-        <p:nvSpPr>
-          <p:cNvPr id="2" name="Title 1"/>
-          <p:cNvSpPr>
-            <a:spLocks noGrp="1"/>
-          </p:cNvSpPr>
-          <p:nvPr>
-            <p:ph type="title"/>
-          </p:nvPr>
-        </p:nvSpPr>
-        <p:spPr/>
-        <p:txBody>
-          <a:bodyPr/>
-          <a:lstStyle/>
-          <a:p>
-            <a:r>
-              <a:rPr lang="sk-SK" dirty="0"/>
-              <a:t>Synchronizácia</a:t>
-            </a:r>
-          </a:p>
-        </p:txBody>
-      </p:sp>
-      <p:sp>
-        <p:nvSpPr>
-          <p:cNvPr id="3" name="Content Placeholder 2"/>
-          <p:cNvSpPr>
-            <a:spLocks noGrp="1"/>
-          </p:cNvSpPr>
-          <p:nvPr>
-            <p:ph idx="1"/>
-          </p:nvPr>
-        </p:nvSpPr>
-        <p:spPr/>
-        <p:txBody>
-          <a:bodyPr/>
-          <a:lstStyle/>
-          <a:p>
-            <a:r>
-              <a:rPr lang="sk-SK" dirty="0"/>
-              <a:t>Maskovanie prerušenia, to je povolené len na jednoprocesorovom systéme (resp. s jedným </a:t>
-            </a:r>
-            <a:r>
-              <a:rPr lang="pl-PL" dirty="0"/>
-              <a:t>procesorom, </a:t>
-            </a:r>
-            <a:r>
-              <a:rPr lang="pl-PL" dirty="0" err="1"/>
-              <a:t>ktorý</a:t>
-            </a:r>
-            <a:r>
-              <a:rPr lang="pl-PL" dirty="0"/>
-              <a:t> </a:t>
-            </a:r>
-            <a:r>
-              <a:rPr lang="pl-PL" dirty="0" err="1"/>
-              <a:t>má</a:t>
-            </a:r>
-            <a:r>
-              <a:rPr lang="pl-PL" dirty="0"/>
-              <a:t> len jedno jadro),</a:t>
-            </a:r>
-          </a:p>
-          <a:p>
-            <a:endParaRPr lang="pl-PL" dirty="0"/>
-          </a:p>
-          <a:p>
-            <a:r>
-              <a:rPr lang="pl-PL" dirty="0" err="1"/>
-              <a:t>Otočný</a:t>
-            </a:r>
-            <a:r>
-              <a:rPr lang="pl-PL" dirty="0"/>
-              <a:t> </a:t>
-            </a:r>
-            <a:r>
-              <a:rPr lang="pl-PL" dirty="0" err="1"/>
-              <a:t>zámok</a:t>
-            </a:r>
-            <a:r>
-              <a:rPr lang="pl-PL" dirty="0"/>
-              <a:t> (</a:t>
-            </a:r>
-            <a:r>
-              <a:rPr lang="pl-PL" dirty="0" err="1"/>
-              <a:t>spinlock</a:t>
-            </a:r>
-            <a:r>
-              <a:rPr lang="pl-PL" dirty="0"/>
-              <a:t>), funguje i na </a:t>
-            </a:r>
-            <a:r>
-              <a:rPr lang="pl-PL" dirty="0" err="1"/>
-              <a:t>viaceprocesorových</a:t>
-            </a:r>
-            <a:r>
-              <a:rPr lang="pl-PL" dirty="0"/>
-              <a:t> </a:t>
-            </a:r>
-            <a:r>
-              <a:rPr lang="pl-PL" dirty="0" err="1"/>
-              <a:t>systémoch</a:t>
-            </a:r>
-            <a:r>
-              <a:rPr lang="pl-PL" dirty="0"/>
-              <a:t>,</a:t>
-            </a:r>
-          </a:p>
-          <a:p>
-            <a:endParaRPr lang="pl-PL" dirty="0"/>
-          </a:p>
-          <a:p>
-            <a:r>
-              <a:rPr lang="sk-SK" dirty="0" err="1"/>
-              <a:t>mutexy</a:t>
-            </a:r>
-            <a:r>
-              <a:rPr lang="sk-SK" dirty="0"/>
-              <a:t> a </a:t>
-            </a:r>
-            <a:r>
-              <a:rPr lang="sk-SK" dirty="0" err="1"/>
-              <a:t>semafóry</a:t>
-            </a:r>
-            <a:r>
-              <a:rPr lang="sk-SK" dirty="0"/>
-              <a:t> (súhrnne nazývané </a:t>
-            </a:r>
-            <a:r>
-              <a:rPr lang="sk-SK" dirty="0" err="1"/>
-              <a:t>dispatcher</a:t>
-            </a:r>
-            <a:r>
-              <a:rPr lang="sk-SK" dirty="0"/>
-              <a:t> </a:t>
-            </a:r>
-            <a:r>
-              <a:rPr lang="sk-SK" dirty="0" err="1"/>
-              <a:t>objects</a:t>
-            </a:r>
-            <a:r>
-              <a:rPr lang="sk-SK" dirty="0"/>
-              <a:t>),</a:t>
-            </a:r>
-          </a:p>
-          <a:p>
-            <a:endParaRPr lang="sk-SK" dirty="0"/>
-          </a:p>
-          <a:p>
-            <a:r>
-              <a:rPr lang="sk-SK" dirty="0"/>
-              <a:t>udalosti (podmienené premenné), atď.</a:t>
-            </a:r>
-          </a:p>
-        </p:txBody>
-      </p:sp>
-      <p:sp>
-        <p:nvSpPr>
-          <p:cNvPr id="4" name="Slide Number Placeholder 3"/>
-          <p:cNvSpPr>
-            <a:spLocks noGrp="1"/>
-          </p:cNvSpPr>
-          <p:nvPr>
-            <p:ph type="sldNum" sz="quarter" idx="12"/>
-          </p:nvPr>
-        </p:nvSpPr>
-        <p:spPr/>
-        <p:txBody>
-          <a:bodyPr/>
-          <a:lstStyle/>
-          <a:p>
-            <a:fld id="{5AB4CD34-DB5E-4606-AE4E-01019896DEAB}" type="slidenum">
-              <a:rPr lang="sk-SK" smtClean="0"/>
-              <a:t>33</a:t>
-            </a:fld>
-            <a:endParaRPr lang="sk-SK"/>
-          </a:p>
-        </p:txBody>
-      </p:sp>
-    </p:spTree>
-    <p:extLst>
-      <p:ext uri="{BB962C8B-B14F-4D97-AF65-F5344CB8AC3E}">
-        <p14:creationId xmlns:p14="http://schemas.microsoft.com/office/powerpoint/2010/main" val="3109471324"/>
-      </p:ext>
-    </p:extLst>
-  </p:cSld>
-  <p:clrMapOvr>
-    <a:masterClrMapping/>
-  </p:clrMapOvr>
-</p:sld>
-</file>
-
-<file path=ppt/slides/slide34.xml><?xml version="1.0" encoding="utf-8"?>
+<file path=ppt/slides/slide36.xml><?xml version="1.0" encoding="utf-8"?>
 <p:sld xmlns:a="http://schemas.openxmlformats.org/drawingml/2006/main" xmlns:r="http://schemas.openxmlformats.org/officeDocument/2006/relationships" xmlns:p="http://schemas.openxmlformats.org/presentationml/2006/main">
   <p:cSld>
     <p:spTree>
@@ -15309,7 +15877,7 @@
             <a:fld id="{DA5649DE-9A1E-438E-A4C7-8311246F4D5E}" type="slidenum">
               <a:rPr lang="sk-SK" sz="1400" b="0"/>
               <a:pPr/>
-              <a:t>34</a:t>
+              <a:t>36</a:t>
             </a:fld>
             <a:endParaRPr lang="sk-SK" sz="1400" b="0"/>
           </a:p>
@@ -15525,7 +16093,7 @@
 </p:sld>
 </file>
 
-<file path=ppt/slides/slide35.xml><?xml version="1.0" encoding="utf-8"?>
+<file path=ppt/slides/slide37.xml><?xml version="1.0" encoding="utf-8"?>
 <p:sld xmlns:a="http://schemas.openxmlformats.org/drawingml/2006/main" xmlns:r="http://schemas.openxmlformats.org/officeDocument/2006/relationships" xmlns:p="http://schemas.openxmlformats.org/presentationml/2006/main">
   <p:cSld>
     <p:spTree>
@@ -15830,7 +16398,7 @@
             <a:fld id="{4D496583-7A1C-49B6-B98E-07E55E5BA800}" type="slidenum">
               <a:rPr lang="sk-SK" sz="1400" b="0"/>
               <a:pPr/>
-              <a:t>35</a:t>
+              <a:t>37</a:t>
             </a:fld>
             <a:endParaRPr lang="sk-SK" sz="1400" b="0"/>
           </a:p>
@@ -16533,7 +17101,7 @@
 </p:sld>
 </file>
 
-<file path=ppt/slides/slide36.xml><?xml version="1.0" encoding="utf-8"?>
+<file path=ppt/slides/slide38.xml><?xml version="1.0" encoding="utf-8"?>
 <p:sld xmlns:a="http://schemas.openxmlformats.org/drawingml/2006/main" xmlns:r="http://schemas.openxmlformats.org/officeDocument/2006/relationships" xmlns:p="http://schemas.openxmlformats.org/presentationml/2006/main">
   <p:cSld>
     <p:spTree>
@@ -16687,7 +17255,7 @@
             <a:fld id="{94AC0568-A9C0-4981-B92F-44F7557A3C44}" type="slidenum">
               <a:rPr lang="sk-SK" sz="1400" b="0"/>
               <a:pPr/>
-              <a:t>36</a:t>
+              <a:t>38</a:t>
             </a:fld>
             <a:endParaRPr lang="sk-SK" sz="1400" b="0"/>
           </a:p>
@@ -16853,7 +17421,7 @@
 </p:sld>
 </file>
 
-<file path=ppt/slides/slide37.xml><?xml version="1.0" encoding="utf-8"?>
+<file path=ppt/slides/slide39.xml><?xml version="1.0" encoding="utf-8"?>
 <p:sld xmlns:a="http://schemas.openxmlformats.org/drawingml/2006/main" xmlns:r="http://schemas.openxmlformats.org/officeDocument/2006/relationships" xmlns:p="http://schemas.openxmlformats.org/presentationml/2006/main">
   <p:cSld>
     <p:spTree>
@@ -17124,7 +17692,7 @@
             <a:fld id="{0548029A-5D5C-46D3-8178-522770BD43F6}" type="slidenum">
               <a:rPr lang="sk-SK" sz="1400" b="0"/>
               <a:pPr/>
-              <a:t>37</a:t>
+              <a:t>39</a:t>
             </a:fld>
             <a:endParaRPr lang="sk-SK" sz="1400" b="0"/>
           </a:p>
@@ -17143,7 +17711,218 @@
 </p:sld>
 </file>
 
-<file path=ppt/slides/slide38.xml><?xml version="1.0" encoding="utf-8"?>
+<file path=ppt/slides/slide4.xml><?xml version="1.0" encoding="utf-8"?>
+<p:sld xmlns:a="http://schemas.openxmlformats.org/drawingml/2006/main" xmlns:r="http://schemas.openxmlformats.org/officeDocument/2006/relationships" xmlns:p="http://schemas.openxmlformats.org/presentationml/2006/main">
+  <p:cSld>
+    <p:spTree>
+      <p:nvGrpSpPr>
+        <p:cNvPr id="1" name=""/>
+        <p:cNvGrpSpPr/>
+        <p:nvPr/>
+      </p:nvGrpSpPr>
+      <p:grpSpPr>
+        <a:xfrm>
+          <a:off x="0" y="0"/>
+          <a:ext cx="0" cy="0"/>
+          <a:chOff x="0" y="0"/>
+          <a:chExt cx="0" cy="0"/>
+        </a:xfrm>
+      </p:grpSpPr>
+      <p:sp>
+        <p:nvSpPr>
+          <p:cNvPr id="2" name="Title 1"/>
+          <p:cNvSpPr>
+            <a:spLocks noGrp="1"/>
+          </p:cNvSpPr>
+          <p:nvPr>
+            <p:ph type="title"/>
+          </p:nvPr>
+        </p:nvSpPr>
+        <p:spPr/>
+        <p:txBody>
+          <a:bodyPr/>
+          <a:lstStyle/>
+          <a:p>
+            <a:r>
+              <a:rPr lang="sk-SK"/>
+              <a:t>Jazykové prostriedky paralelizmu</a:t>
+            </a:r>
+          </a:p>
+        </p:txBody>
+      </p:sp>
+      <p:pic>
+        <p:nvPicPr>
+          <p:cNvPr id="11" name="Picture 7" descr="5_4"/>
+          <p:cNvPicPr>
+            <a:picLocks noGrp="1" noChangeAspect="1" noChangeArrowheads="1"/>
+          </p:cNvPicPr>
+          <p:nvPr>
+            <p:ph idx="1"/>
+          </p:nvPr>
+        </p:nvPicPr>
+        <p:blipFill>
+          <a:blip r:embed="rId2">
+            <a:extLst>
+              <a:ext uri="{28A0092B-C50C-407E-A947-70E740481C1C}">
+                <a14:useLocalDpi xmlns:a14="http://schemas.microsoft.com/office/drawing/2010/main" val="0"/>
+              </a:ext>
+            </a:extLst>
+          </a:blip>
+          <a:stretch>
+            <a:fillRect/>
+          </a:stretch>
+        </p:blipFill>
+        <p:spPr bwMode="auto">
+          <a:xfrm>
+            <a:off x="1999970" y="1334426"/>
+            <a:ext cx="7112225" cy="3869230"/>
+          </a:xfrm>
+          <a:prstGeom prst="rect">
+            <a:avLst/>
+          </a:prstGeom>
+          <a:noFill/>
+          <a:ln>
+            <a:noFill/>
+          </a:ln>
+          <a:extLst>
+            <a:ext uri="{909E8E84-426E-40DD-AFC4-6F175D3DCCD1}">
+              <a14:hiddenFill xmlns:a14="http://schemas.microsoft.com/office/drawing/2010/main">
+                <a:solidFill>
+                  <a:srgbClr val="FFFFFF"/>
+                </a:solidFill>
+              </a14:hiddenFill>
+            </a:ext>
+            <a:ext uri="{91240B29-F687-4F45-9708-019B960494DF}">
+              <a14:hiddenLine xmlns:a14="http://schemas.microsoft.com/office/drawing/2010/main" w="9525">
+                <a:solidFill>
+                  <a:srgbClr val="000000"/>
+                </a:solidFill>
+                <a:miter lim="800000"/>
+                <a:headEnd/>
+                <a:tailEnd/>
+              </a14:hiddenLine>
+            </a:ext>
+          </a:extLst>
+        </p:spPr>
+      </p:pic>
+      <p:sp>
+        <p:nvSpPr>
+          <p:cNvPr id="3" name="BlokTextu 2">
+            <a:extLst>
+              <a:ext uri="{FF2B5EF4-FFF2-40B4-BE49-F238E27FC236}">
+                <a16:creationId xmlns:a16="http://schemas.microsoft.com/office/drawing/2014/main" id="{FD4062D0-D8A9-5393-FCF0-EE033298B0DD}"/>
+              </a:ext>
+            </a:extLst>
+          </p:cNvPr>
+          <p:cNvSpPr txBox="1"/>
+          <p:nvPr/>
+        </p:nvSpPr>
+        <p:spPr>
+          <a:xfrm>
+            <a:off x="1919009" y="5203656"/>
+            <a:ext cx="8567057" cy="1508105"/>
+          </a:xfrm>
+          <a:prstGeom prst="rect">
+            <a:avLst/>
+          </a:prstGeom>
+          <a:solidFill>
+            <a:schemeClr val="bg1"/>
+          </a:solidFill>
+        </p:spPr>
+        <p:txBody>
+          <a:bodyPr wrap="square" rtlCol="0">
+            <a:spAutoFit/>
+          </a:bodyPr>
+          <a:lstStyle/>
+          <a:p>
+            <a:pPr>
+              <a:spcBef>
+                <a:spcPct val="50000"/>
+              </a:spcBef>
+            </a:pPr>
+            <a:r>
+              <a:rPr lang="sk-SK" sz="2000" dirty="0"/>
+              <a:t>Vyjadrenie </a:t>
+            </a:r>
+            <a:r>
+              <a:rPr lang="sk-SK" sz="2000" dirty="0" err="1"/>
+              <a:t>paral.procesov</a:t>
+            </a:r>
+            <a:r>
+              <a:rPr lang="sk-SK" sz="2000" dirty="0"/>
+              <a:t> v programovacom jazyku :</a:t>
+            </a:r>
+          </a:p>
+          <a:p>
+            <a:pPr>
+              <a:spcBef>
+                <a:spcPct val="50000"/>
+              </a:spcBef>
+            </a:pPr>
+            <a:r>
+              <a:rPr lang="sk-SK" dirty="0"/>
+              <a:t>	</a:t>
+            </a:r>
+            <a:r>
+              <a:rPr lang="sk-SK" dirty="0" err="1"/>
+              <a:t>cobegin</a:t>
+            </a:r>
+            <a:r>
+              <a:rPr lang="sk-SK" dirty="0"/>
+              <a:t> S1; S2; ... Sn; </a:t>
+            </a:r>
+            <a:r>
+              <a:rPr lang="sk-SK" dirty="0" err="1"/>
+              <a:t>coend</a:t>
+            </a:r>
+            <a:r>
+              <a:rPr lang="sk-SK" dirty="0"/>
+              <a:t>.   -</a:t>
+            </a:r>
+            <a:r>
+              <a:rPr lang="en-US" dirty="0"/>
+              <a:t>&gt;</a:t>
+            </a:r>
+            <a:r>
+              <a:rPr lang="sk-SK" dirty="0"/>
+              <a:t> paralelný príkaz</a:t>
+            </a:r>
+          </a:p>
+          <a:p>
+            <a:pPr>
+              <a:spcBef>
+                <a:spcPct val="50000"/>
+              </a:spcBef>
+            </a:pPr>
+            <a:r>
+              <a:rPr lang="sk-SK" dirty="0"/>
+              <a:t>proces v ktorom sa použil </a:t>
+            </a:r>
+            <a:r>
+              <a:rPr lang="sk-SK" dirty="0" err="1"/>
+              <a:t>paral.príkaz</a:t>
+            </a:r>
+            <a:r>
+              <a:rPr lang="sk-SK" dirty="0"/>
+              <a:t>  = rodičovský proces a príkazy S1,S2 ... Sn riadiace paralelne prebiehajúce procesy = potomkovia</a:t>
+            </a:r>
+          </a:p>
+        </p:txBody>
+      </p:sp>
+    </p:spTree>
+    <p:extLst>
+      <p:ext uri="{BB962C8B-B14F-4D97-AF65-F5344CB8AC3E}">
+        <p14:creationId xmlns:p14="http://schemas.microsoft.com/office/powerpoint/2010/main" val="2830035912"/>
+      </p:ext>
+    </p:extLst>
+  </p:cSld>
+  <p:clrMapOvr>
+    <a:masterClrMapping/>
+  </p:clrMapOvr>
+</p:sld>
+</file>
+
+<file path=ppt/slides/slide40.xml><?xml version="1.0" encoding="utf-8"?>
 <p:sld xmlns:a="http://schemas.openxmlformats.org/drawingml/2006/main" xmlns:r="http://schemas.openxmlformats.org/officeDocument/2006/relationships" xmlns:p="http://schemas.openxmlformats.org/presentationml/2006/main">
   <p:cSld>
     <p:spTree>
@@ -17263,7 +18042,7 @@
           <a:p>
             <a:fld id="{5AB4CD34-DB5E-4606-AE4E-01019896DEAB}" type="slidenum">
               <a:rPr lang="sk-SK" smtClean="0"/>
-              <a:t>38</a:t>
+              <a:t>40</a:t>
             </a:fld>
             <a:endParaRPr lang="sk-SK"/>
           </a:p>
@@ -17282,7 +18061,7 @@
 </p:sld>
 </file>
 
-<file path=ppt/slides/slide39.xml><?xml version="1.0" encoding="utf-8"?>
+<file path=ppt/slides/slide41.xml><?xml version="1.0" encoding="utf-8"?>
 <p:sld xmlns:a="http://schemas.openxmlformats.org/drawingml/2006/main" xmlns:r="http://schemas.openxmlformats.org/officeDocument/2006/relationships" xmlns:p="http://schemas.openxmlformats.org/presentationml/2006/main">
   <p:cSld>
     <p:spTree>
@@ -17368,7 +18147,7 @@
           <a:p>
             <a:fld id="{5AB4CD34-DB5E-4606-AE4E-01019896DEAB}" type="slidenum">
               <a:rPr lang="sk-SK" smtClean="0"/>
-              <a:t>39</a:t>
+              <a:t>41</a:t>
             </a:fld>
             <a:endParaRPr lang="sk-SK"/>
           </a:p>
@@ -17387,429 +18166,7 @@
 </p:sld>
 </file>
 
-<file path=ppt/slides/slide4.xml><?xml version="1.0" encoding="utf-8"?>
-<p:sld xmlns:a="http://schemas.openxmlformats.org/drawingml/2006/main" xmlns:r="http://schemas.openxmlformats.org/officeDocument/2006/relationships" xmlns:p="http://schemas.openxmlformats.org/presentationml/2006/main">
-  <p:cSld>
-    <p:spTree>
-      <p:nvGrpSpPr>
-        <p:cNvPr id="1" name=""/>
-        <p:cNvGrpSpPr/>
-        <p:nvPr/>
-      </p:nvGrpSpPr>
-      <p:grpSpPr>
-        <a:xfrm>
-          <a:off x="0" y="0"/>
-          <a:ext cx="0" cy="0"/>
-          <a:chOff x="0" y="0"/>
-          <a:chExt cx="0" cy="0"/>
-        </a:xfrm>
-      </p:grpSpPr>
-      <p:sp>
-        <p:nvSpPr>
-          <p:cNvPr id="2" name="Title 1"/>
-          <p:cNvSpPr>
-            <a:spLocks noGrp="1"/>
-          </p:cNvSpPr>
-          <p:nvPr>
-            <p:ph type="title"/>
-          </p:nvPr>
-        </p:nvSpPr>
-        <p:spPr/>
-        <p:txBody>
-          <a:bodyPr/>
-          <a:lstStyle/>
-          <a:p>
-            <a:r>
-              <a:rPr lang="sk-SK"/>
-              <a:t>Jazykové prostriedky paralelizmu</a:t>
-            </a:r>
-          </a:p>
-        </p:txBody>
-      </p:sp>
-      <p:pic>
-        <p:nvPicPr>
-          <p:cNvPr id="11" name="Picture 7" descr="5_4"/>
-          <p:cNvPicPr>
-            <a:picLocks noGrp="1" noChangeAspect="1" noChangeArrowheads="1"/>
-          </p:cNvPicPr>
-          <p:nvPr>
-            <p:ph idx="1"/>
-          </p:nvPr>
-        </p:nvPicPr>
-        <p:blipFill>
-          <a:blip r:embed="rId2">
-            <a:extLst>
-              <a:ext uri="{28A0092B-C50C-407E-A947-70E740481C1C}">
-                <a14:useLocalDpi xmlns:a14="http://schemas.microsoft.com/office/drawing/2010/main" val="0"/>
-              </a:ext>
-            </a:extLst>
-          </a:blip>
-          <a:stretch>
-            <a:fillRect/>
-          </a:stretch>
-        </p:blipFill>
-        <p:spPr bwMode="auto">
-          <a:xfrm>
-            <a:off x="1593295" y="1551709"/>
-            <a:ext cx="9082605" cy="4941166"/>
-          </a:xfrm>
-          <a:prstGeom prst="rect">
-            <a:avLst/>
-          </a:prstGeom>
-          <a:noFill/>
-          <a:ln>
-            <a:noFill/>
-          </a:ln>
-          <a:extLst>
-            <a:ext uri="{909E8E84-426E-40DD-AFC4-6F175D3DCCD1}">
-              <a14:hiddenFill xmlns:a14="http://schemas.microsoft.com/office/drawing/2010/main">
-                <a:solidFill>
-                  <a:srgbClr val="FFFFFF"/>
-                </a:solidFill>
-              </a14:hiddenFill>
-            </a:ext>
-            <a:ext uri="{91240B29-F687-4F45-9708-019B960494DF}">
-              <a14:hiddenLine xmlns:a14="http://schemas.microsoft.com/office/drawing/2010/main" w="9525">
-                <a:solidFill>
-                  <a:srgbClr val="000000"/>
-                </a:solidFill>
-                <a:miter lim="800000"/>
-                <a:headEnd/>
-                <a:tailEnd/>
-              </a14:hiddenLine>
-            </a:ext>
-          </a:extLst>
-        </p:spPr>
-      </p:pic>
-    </p:spTree>
-    <p:extLst>
-      <p:ext uri="{BB962C8B-B14F-4D97-AF65-F5344CB8AC3E}">
-        <p14:creationId xmlns:p14="http://schemas.microsoft.com/office/powerpoint/2010/main" val="2830035912"/>
-      </p:ext>
-    </p:extLst>
-  </p:cSld>
-  <p:clrMapOvr>
-    <a:masterClrMapping/>
-  </p:clrMapOvr>
-</p:sld>
-</file>
-
-<file path=ppt/slides/slide40.xml><?xml version="1.0" encoding="utf-8"?>
-<p:sld xmlns:a="http://schemas.openxmlformats.org/drawingml/2006/main" xmlns:r="http://schemas.openxmlformats.org/officeDocument/2006/relationships" xmlns:p="http://schemas.openxmlformats.org/presentationml/2006/main" show="0">
-  <p:cSld>
-    <p:spTree>
-      <p:nvGrpSpPr>
-        <p:cNvPr id="1" name=""/>
-        <p:cNvGrpSpPr/>
-        <p:nvPr/>
-      </p:nvGrpSpPr>
-      <p:grpSpPr>
-        <a:xfrm>
-          <a:off x="0" y="0"/>
-          <a:ext cx="0" cy="0"/>
-          <a:chOff x="0" y="0"/>
-          <a:chExt cx="0" cy="0"/>
-        </a:xfrm>
-      </p:grpSpPr>
-      <p:sp>
-        <p:nvSpPr>
-          <p:cNvPr id="2" name="Title 1"/>
-          <p:cNvSpPr>
-            <a:spLocks noGrp="1"/>
-          </p:cNvSpPr>
-          <p:nvPr>
-            <p:ph type="title"/>
-          </p:nvPr>
-        </p:nvSpPr>
-        <p:spPr/>
-        <p:txBody>
-          <a:bodyPr/>
-          <a:lstStyle/>
-          <a:p>
-            <a:r>
-              <a:rPr lang="sk-SK" dirty="0" err="1"/>
-              <a:t>Petriho</a:t>
-            </a:r>
-            <a:r>
-              <a:rPr lang="sk-SK" dirty="0"/>
-              <a:t> siete pre diagram toku dát</a:t>
-            </a:r>
-          </a:p>
-        </p:txBody>
-      </p:sp>
-      <p:pic>
-        <p:nvPicPr>
-          <p:cNvPr id="5" name="Content Placeholder 4"/>
-          <p:cNvPicPr>
-            <a:picLocks noGrp="1" noChangeAspect="1"/>
-          </p:cNvPicPr>
-          <p:nvPr>
-            <p:ph idx="1"/>
-          </p:nvPr>
-        </p:nvPicPr>
-        <p:blipFill>
-          <a:blip r:embed="rId2"/>
-          <a:stretch>
-            <a:fillRect/>
-          </a:stretch>
-        </p:blipFill>
-        <p:spPr>
-          <a:xfrm>
-            <a:off x="3124200" y="2286794"/>
-            <a:ext cx="5943600" cy="3429000"/>
-          </a:xfrm>
-          <a:prstGeom prst="rect">
-            <a:avLst/>
-          </a:prstGeom>
-        </p:spPr>
-      </p:pic>
-      <p:sp>
-        <p:nvSpPr>
-          <p:cNvPr id="4" name="Slide Number Placeholder 3"/>
-          <p:cNvSpPr>
-            <a:spLocks noGrp="1"/>
-          </p:cNvSpPr>
-          <p:nvPr>
-            <p:ph type="sldNum" sz="quarter" idx="12"/>
-          </p:nvPr>
-        </p:nvSpPr>
-        <p:spPr/>
-        <p:txBody>
-          <a:bodyPr/>
-          <a:lstStyle/>
-          <a:p>
-            <a:fld id="{5AB4CD34-DB5E-4606-AE4E-01019896DEAB}" type="slidenum">
-              <a:rPr lang="sk-SK" smtClean="0"/>
-              <a:t>40</a:t>
-            </a:fld>
-            <a:endParaRPr lang="sk-SK"/>
-          </a:p>
-        </p:txBody>
-      </p:sp>
-    </p:spTree>
-    <p:extLst>
-      <p:ext uri="{BB962C8B-B14F-4D97-AF65-F5344CB8AC3E}">
-        <p14:creationId xmlns:p14="http://schemas.microsoft.com/office/powerpoint/2010/main" val="3274664270"/>
-      </p:ext>
-    </p:extLst>
-  </p:cSld>
-  <p:clrMapOvr>
-    <a:masterClrMapping/>
-  </p:clrMapOvr>
-</p:sld>
-</file>
-
-<file path=ppt/slides/slide41.xml><?xml version="1.0" encoding="utf-8"?>
-<p:sld xmlns:a="http://schemas.openxmlformats.org/drawingml/2006/main" xmlns:r="http://schemas.openxmlformats.org/officeDocument/2006/relationships" xmlns:p="http://schemas.openxmlformats.org/presentationml/2006/main" show="0">
-  <p:cSld>
-    <p:spTree>
-      <p:nvGrpSpPr>
-        <p:cNvPr id="1" name=""/>
-        <p:cNvGrpSpPr/>
-        <p:nvPr/>
-      </p:nvGrpSpPr>
-      <p:grpSpPr>
-        <a:xfrm>
-          <a:off x="0" y="0"/>
-          <a:ext cx="0" cy="0"/>
-          <a:chOff x="0" y="0"/>
-          <a:chExt cx="0" cy="0"/>
-        </a:xfrm>
-      </p:grpSpPr>
-      <p:sp>
-        <p:nvSpPr>
-          <p:cNvPr id="2" name="Title 1"/>
-          <p:cNvSpPr>
-            <a:spLocks noGrp="1"/>
-          </p:cNvSpPr>
-          <p:nvPr>
-            <p:ph type="title"/>
-          </p:nvPr>
-        </p:nvSpPr>
-        <p:spPr/>
-        <p:txBody>
-          <a:bodyPr/>
-          <a:lstStyle/>
-          <a:p>
-            <a:r>
-              <a:rPr lang="sk-SK" err="1"/>
-              <a:t>Petriho</a:t>
-            </a:r>
-            <a:r>
-              <a:rPr lang="sk-SK"/>
-              <a:t> siete znázorňujúce komunikačný protokol</a:t>
-            </a:r>
-          </a:p>
-        </p:txBody>
-      </p:sp>
-      <p:pic>
-        <p:nvPicPr>
-          <p:cNvPr id="5" name="Content Placeholder 4"/>
-          <p:cNvPicPr>
-            <a:picLocks noGrp="1" noChangeAspect="1"/>
-          </p:cNvPicPr>
-          <p:nvPr>
-            <p:ph idx="1"/>
-          </p:nvPr>
-        </p:nvPicPr>
-        <p:blipFill>
-          <a:blip r:embed="rId2"/>
-          <a:stretch>
-            <a:fillRect/>
-          </a:stretch>
-        </p:blipFill>
-        <p:spPr>
-          <a:xfrm>
-            <a:off x="3425670" y="1825625"/>
-            <a:ext cx="5340659" cy="4351338"/>
-          </a:xfrm>
-          <a:prstGeom prst="rect">
-            <a:avLst/>
-          </a:prstGeom>
-        </p:spPr>
-      </p:pic>
-      <p:sp>
-        <p:nvSpPr>
-          <p:cNvPr id="4" name="Slide Number Placeholder 3"/>
-          <p:cNvSpPr>
-            <a:spLocks noGrp="1"/>
-          </p:cNvSpPr>
-          <p:nvPr>
-            <p:ph type="sldNum" sz="quarter" idx="12"/>
-          </p:nvPr>
-        </p:nvSpPr>
-        <p:spPr/>
-        <p:txBody>
-          <a:bodyPr/>
-          <a:lstStyle/>
-          <a:p>
-            <a:fld id="{5AB4CD34-DB5E-4606-AE4E-01019896DEAB}" type="slidenum">
-              <a:rPr lang="sk-SK" smtClean="0"/>
-              <a:t>41</a:t>
-            </a:fld>
-            <a:endParaRPr lang="sk-SK"/>
-          </a:p>
-        </p:txBody>
-      </p:sp>
-    </p:spTree>
-    <p:extLst>
-      <p:ext uri="{BB962C8B-B14F-4D97-AF65-F5344CB8AC3E}">
-        <p14:creationId xmlns:p14="http://schemas.microsoft.com/office/powerpoint/2010/main" val="3836837614"/>
-      </p:ext>
-    </p:extLst>
-  </p:cSld>
-  <p:clrMapOvr>
-    <a:masterClrMapping/>
-  </p:clrMapOvr>
-</p:sld>
-</file>
-
 <file path=ppt/slides/slide42.xml><?xml version="1.0" encoding="utf-8"?>
-<p:sld xmlns:a="http://schemas.openxmlformats.org/drawingml/2006/main" xmlns:r="http://schemas.openxmlformats.org/officeDocument/2006/relationships" xmlns:p="http://schemas.openxmlformats.org/presentationml/2006/main" show="0">
-  <p:cSld>
-    <p:spTree>
-      <p:nvGrpSpPr>
-        <p:cNvPr id="1" name=""/>
-        <p:cNvGrpSpPr/>
-        <p:nvPr/>
-      </p:nvGrpSpPr>
-      <p:grpSpPr>
-        <a:xfrm>
-          <a:off x="0" y="0"/>
-          <a:ext cx="0" cy="0"/>
-          <a:chOff x="0" y="0"/>
-          <a:chExt cx="0" cy="0"/>
-        </a:xfrm>
-      </p:grpSpPr>
-      <p:sp>
-        <p:nvSpPr>
-          <p:cNvPr id="2" name="Title 1"/>
-          <p:cNvSpPr>
-            <a:spLocks noGrp="1"/>
-          </p:cNvSpPr>
-          <p:nvPr>
-            <p:ph type="title"/>
-          </p:nvPr>
-        </p:nvSpPr>
-        <p:spPr/>
-        <p:txBody>
-          <a:bodyPr/>
-          <a:lstStyle/>
-          <a:p>
-            <a:r>
-              <a:rPr lang="sk-SK" err="1"/>
-              <a:t>Petriho</a:t>
-            </a:r>
-            <a:r>
-              <a:rPr lang="sk-SK"/>
-              <a:t> siete a multiprocesorové systémy</a:t>
-            </a:r>
-          </a:p>
-        </p:txBody>
-      </p:sp>
-      <p:pic>
-        <p:nvPicPr>
-          <p:cNvPr id="5" name="Content Placeholder 4"/>
-          <p:cNvPicPr>
-            <a:picLocks noGrp="1" noChangeAspect="1"/>
-          </p:cNvPicPr>
-          <p:nvPr>
-            <p:ph idx="1"/>
-          </p:nvPr>
-        </p:nvPicPr>
-        <p:blipFill>
-          <a:blip r:embed="rId2"/>
-          <a:stretch>
-            <a:fillRect/>
-          </a:stretch>
-        </p:blipFill>
-        <p:spPr>
-          <a:xfrm>
-            <a:off x="3587120" y="1825625"/>
-            <a:ext cx="5017759" cy="4351338"/>
-          </a:xfrm>
-          <a:prstGeom prst="rect">
-            <a:avLst/>
-          </a:prstGeom>
-        </p:spPr>
-      </p:pic>
-      <p:sp>
-        <p:nvSpPr>
-          <p:cNvPr id="4" name="Slide Number Placeholder 3"/>
-          <p:cNvSpPr>
-            <a:spLocks noGrp="1"/>
-          </p:cNvSpPr>
-          <p:nvPr>
-            <p:ph type="sldNum" sz="quarter" idx="12"/>
-          </p:nvPr>
-        </p:nvSpPr>
-        <p:spPr/>
-        <p:txBody>
-          <a:bodyPr/>
-          <a:lstStyle/>
-          <a:p>
-            <a:fld id="{5AB4CD34-DB5E-4606-AE4E-01019896DEAB}" type="slidenum">
-              <a:rPr lang="sk-SK" smtClean="0"/>
-              <a:t>42</a:t>
-            </a:fld>
-            <a:endParaRPr lang="sk-SK"/>
-          </a:p>
-        </p:txBody>
-      </p:sp>
-    </p:spTree>
-    <p:extLst>
-      <p:ext uri="{BB962C8B-B14F-4D97-AF65-F5344CB8AC3E}">
-        <p14:creationId xmlns:p14="http://schemas.microsoft.com/office/powerpoint/2010/main" val="2443848241"/>
-      </p:ext>
-    </p:extLst>
-  </p:cSld>
-  <p:clrMapOvr>
-    <a:masterClrMapping/>
-  </p:clrMapOvr>
-</p:sld>
-</file>
-
-<file path=ppt/slides/slide43.xml><?xml version="1.0" encoding="utf-8"?>
 <p:sld xmlns:a="http://schemas.openxmlformats.org/drawingml/2006/main" xmlns:r="http://schemas.openxmlformats.org/officeDocument/2006/relationships" xmlns:p="http://schemas.openxmlformats.org/presentationml/2006/main">
   <p:cSld>
     <p:spTree>
@@ -18171,7 +18528,7 @@
             <a:fld id="{BCA3DEFF-E60B-4455-A3A6-068E01E2788E}" type="slidenum">
               <a:rPr lang="sk-SK" sz="1400" b="0"/>
               <a:pPr/>
-              <a:t>43</a:t>
+              <a:t>42</a:t>
             </a:fld>
             <a:endParaRPr lang="sk-SK" sz="1400" b="0"/>
           </a:p>
@@ -18190,7 +18547,7 @@
 </p:sld>
 </file>
 
-<file path=ppt/slides/slide44.xml><?xml version="1.0" encoding="utf-8"?>
+<file path=ppt/slides/slide43.xml><?xml version="1.0" encoding="utf-8"?>
 <p:sld xmlns:a="http://schemas.openxmlformats.org/drawingml/2006/main" xmlns:r="http://schemas.openxmlformats.org/officeDocument/2006/relationships" xmlns:p="http://schemas.openxmlformats.org/presentationml/2006/main">
   <p:cSld>
     <p:spTree>
@@ -18414,7 +18771,7 @@
             <a:fld id="{0B54D3DA-186A-4D53-B99F-AEC97B84A516}" type="slidenum">
               <a:rPr lang="sk-SK" sz="1400" b="0"/>
               <a:pPr/>
-              <a:t>44</a:t>
+              <a:t>43</a:t>
             </a:fld>
             <a:endParaRPr lang="sk-SK" sz="1400" b="0"/>
           </a:p>
@@ -18487,7 +18844,7 @@
 </p:sld>
 </file>
 
-<file path=ppt/slides/slide45.xml><?xml version="1.0" encoding="utf-8"?>
+<file path=ppt/slides/slide44.xml><?xml version="1.0" encoding="utf-8"?>
 <p:sld xmlns:a="http://schemas.openxmlformats.org/drawingml/2006/main" xmlns:r="http://schemas.openxmlformats.org/officeDocument/2006/relationships" xmlns:p="http://schemas.openxmlformats.org/presentationml/2006/main">
   <p:cSld>
     <p:spTree>
@@ -18669,7 +19026,7 @@
             <a:fld id="{395FAECE-8F4E-41A6-8D06-2EE47E25BD2A}" type="slidenum">
               <a:rPr lang="sk-SK" sz="1400" b="0"/>
               <a:pPr/>
-              <a:t>45</a:t>
+              <a:t>44</a:t>
             </a:fld>
             <a:endParaRPr lang="sk-SK" sz="1400" b="0"/>
           </a:p>
@@ -19144,7 +19501,7 @@
 </p:sld>
 </file>
 
-<file path=ppt/slides/slide46.xml><?xml version="1.0" encoding="utf-8"?>
+<file path=ppt/slides/slide45.xml><?xml version="1.0" encoding="utf-8"?>
 <p:sld xmlns:a="http://schemas.openxmlformats.org/drawingml/2006/main" xmlns:r="http://schemas.openxmlformats.org/officeDocument/2006/relationships" xmlns:p="http://schemas.openxmlformats.org/presentationml/2006/main">
   <p:cSld>
     <p:spTree>
@@ -19442,7 +19799,7 @@
             <a:fld id="{97D0FD29-EED9-410F-B9B5-B118F94C3B3F}" type="slidenum">
               <a:rPr lang="sk-SK" sz="1400" b="0"/>
               <a:pPr/>
-              <a:t>46</a:t>
+              <a:t>45</a:t>
             </a:fld>
             <a:endParaRPr lang="sk-SK" sz="1400" b="0"/>
           </a:p>
@@ -19461,7 +19818,7 @@
 </p:sld>
 </file>
 
-<file path=ppt/slides/slide47.xml><?xml version="1.0" encoding="utf-8"?>
+<file path=ppt/slides/slide46.xml><?xml version="1.0" encoding="utf-8"?>
 <p:sld xmlns:a="http://schemas.openxmlformats.org/drawingml/2006/main" xmlns:r="http://schemas.openxmlformats.org/officeDocument/2006/relationships" xmlns:p="http://schemas.openxmlformats.org/presentationml/2006/main">
   <p:cSld>
     <p:spTree>
@@ -19643,7 +20000,7 @@
             <a:fld id="{3979964D-9B5F-4FA5-A96F-E424B13A75DA}" type="slidenum">
               <a:rPr lang="sk-SK" sz="1400" b="0"/>
               <a:pPr/>
-              <a:t>47</a:t>
+              <a:t>46</a:t>
             </a:fld>
             <a:endParaRPr lang="sk-SK" sz="1400" b="0"/>
           </a:p>
@@ -19989,7 +20346,7 @@
 </p:sld>
 </file>
 
-<file path=ppt/slides/slide48.xml><?xml version="1.0" encoding="utf-8"?>
+<file path=ppt/slides/slide47.xml><?xml version="1.0" encoding="utf-8"?>
 <p:sld xmlns:a="http://schemas.openxmlformats.org/drawingml/2006/main" xmlns:r="http://schemas.openxmlformats.org/officeDocument/2006/relationships" xmlns:p="http://schemas.openxmlformats.org/presentationml/2006/main">
   <p:cSld>
     <p:spTree>
@@ -20276,7 +20633,7 @@
             <a:fld id="{B71D5EF7-2928-42D6-8178-DB12634710D8}" type="slidenum">
               <a:rPr lang="sk-SK" smtClean="0"/>
               <a:pPr/>
-              <a:t>48</a:t>
+              <a:t>47</a:t>
             </a:fld>
             <a:endParaRPr lang="sk-SK" dirty="0"/>
           </a:p>
@@ -20295,7 +20652,7 @@
 </p:sld>
 </file>
 
-<file path=ppt/slides/slide49.xml><?xml version="1.0" encoding="utf-8"?>
+<file path=ppt/slides/slide48.xml><?xml version="1.0" encoding="utf-8"?>
 <p:sld xmlns:a="http://schemas.openxmlformats.org/drawingml/2006/main" xmlns:r="http://schemas.openxmlformats.org/officeDocument/2006/relationships" xmlns:p="http://schemas.openxmlformats.org/presentationml/2006/main">
   <p:cSld>
     <p:spTree>
@@ -20449,7 +20806,7 @@
             <a:fld id="{27ACBB4B-1B2D-4674-893F-F3ED6B24E411}" type="slidenum">
               <a:rPr lang="sk-SK" sz="1400" b="0"/>
               <a:pPr/>
-              <a:t>49</a:t>
+              <a:t>48</a:t>
             </a:fld>
             <a:endParaRPr lang="sk-SK" sz="1400" b="0"/>
           </a:p>
@@ -21063,6 +21420,289 @@
 </p:sld>
 </file>
 
+<file path=ppt/slides/slide49.xml><?xml version="1.0" encoding="utf-8"?>
+<p:sld xmlns:a="http://schemas.openxmlformats.org/drawingml/2006/main" xmlns:r="http://schemas.openxmlformats.org/officeDocument/2006/relationships" xmlns:p="http://schemas.openxmlformats.org/presentationml/2006/main">
+  <p:cSld>
+    <p:spTree>
+      <p:nvGrpSpPr>
+        <p:cNvPr id="1" name=""/>
+        <p:cNvGrpSpPr/>
+        <p:nvPr/>
+      </p:nvGrpSpPr>
+      <p:grpSpPr>
+        <a:xfrm>
+          <a:off x="0" y="0"/>
+          <a:ext cx="0" cy="0"/>
+          <a:chOff x="0" y="0"/>
+          <a:chExt cx="0" cy="0"/>
+        </a:xfrm>
+      </p:grpSpPr>
+      <p:sp>
+        <p:nvSpPr>
+          <p:cNvPr id="2" name="Nadpis 1">
+            <a:extLst>
+              <a:ext uri="{FF2B5EF4-FFF2-40B4-BE49-F238E27FC236}">
+                <a16:creationId xmlns:a16="http://schemas.microsoft.com/office/drawing/2014/main" id="{156B7AE6-1A2D-6A47-A02A-38C6D94DF938}"/>
+              </a:ext>
+            </a:extLst>
+          </p:cNvPr>
+          <p:cNvSpPr>
+            <a:spLocks noGrp="1"/>
+          </p:cNvSpPr>
+          <p:nvPr>
+            <p:ph type="title"/>
+          </p:nvPr>
+        </p:nvSpPr>
+        <p:spPr/>
+        <p:txBody>
+          <a:bodyPr/>
+          <a:lstStyle/>
+          <a:p>
+            <a:r>
+              <a:rPr lang="sk-SK" dirty="0"/>
+              <a:t>Súbeh  (</a:t>
+            </a:r>
+            <a:r>
+              <a:rPr lang="sk-SK" dirty="0" err="1"/>
+              <a:t>rendez</a:t>
+            </a:r>
+            <a:r>
+              <a:rPr lang="sk-SK" dirty="0"/>
+              <a:t> - </a:t>
+            </a:r>
+            <a:r>
+              <a:rPr lang="sk-SK" dirty="0" err="1"/>
+              <a:t>vous</a:t>
+            </a:r>
+            <a:r>
+              <a:rPr lang="sk-SK" dirty="0"/>
+              <a:t>)</a:t>
+            </a:r>
+          </a:p>
+        </p:txBody>
+      </p:sp>
+      <p:sp>
+        <p:nvSpPr>
+          <p:cNvPr id="3" name="Zástupný objekt pre obsah 2">
+            <a:extLst>
+              <a:ext uri="{FF2B5EF4-FFF2-40B4-BE49-F238E27FC236}">
+                <a16:creationId xmlns:a16="http://schemas.microsoft.com/office/drawing/2014/main" id="{B2E2E4CF-5E07-BE4D-ACCA-506417D25406}"/>
+              </a:ext>
+            </a:extLst>
+          </p:cNvPr>
+          <p:cNvSpPr>
+            <a:spLocks noGrp="1"/>
+          </p:cNvSpPr>
+          <p:nvPr>
+            <p:ph idx="1"/>
+          </p:nvPr>
+        </p:nvSpPr>
+        <p:spPr/>
+        <p:txBody>
+          <a:bodyPr/>
+          <a:lstStyle/>
+          <a:p>
+            <a:pPr>
+              <a:spcBef>
+                <a:spcPct val="50000"/>
+              </a:spcBef>
+            </a:pPr>
+            <a:r>
+              <a:rPr lang="sk-SK" dirty="0"/>
+              <a:t>Súbeh - najčastejšie sa vyskytuje u </a:t>
+            </a:r>
+            <a:r>
+              <a:rPr lang="sk-SK" dirty="0" err="1"/>
+              <a:t>paral.procesoch</a:t>
+            </a:r>
+            <a:r>
+              <a:rPr lang="sk-SK" dirty="0"/>
+              <a:t>, ktoré prebiehajú v distribuovanom prostredí </a:t>
+            </a:r>
+          </a:p>
+          <a:p>
+            <a:pPr>
+              <a:spcBef>
+                <a:spcPct val="50000"/>
+              </a:spcBef>
+            </a:pPr>
+            <a:r>
+              <a:rPr lang="sk-SK" dirty="0"/>
+              <a:t>Princíp - spoločné prevedenie určitého úseku programu dvomi procesmi</a:t>
+            </a:r>
+          </a:p>
+          <a:p>
+            <a:pPr>
+              <a:spcBef>
+                <a:spcPct val="50000"/>
+              </a:spcBef>
+            </a:pPr>
+            <a:r>
+              <a:rPr lang="sk-SK" dirty="0"/>
+              <a:t>nastáva nutnosť synchronizovať procesy tak, aby pred spoločným úsekom počkal jeden proces na príchod druhého</a:t>
+            </a:r>
+          </a:p>
+          <a:p>
+            <a:endParaRPr lang="sk-SK" dirty="0"/>
+          </a:p>
+        </p:txBody>
+      </p:sp>
+      <p:sp>
+        <p:nvSpPr>
+          <p:cNvPr id="31747" name="Zástupný symbol čísla snímky 3"/>
+          <p:cNvSpPr>
+            <a:spLocks noGrp="1"/>
+          </p:cNvSpPr>
+          <p:nvPr>
+            <p:ph type="sldNum" sz="quarter" idx="12"/>
+          </p:nvPr>
+        </p:nvSpPr>
+        <p:spPr>
+          <a:noFill/>
+          <a:ln/>
+          <a:extLst>
+            <a:ext uri="{909E8E84-426E-40DD-AFC4-6F175D3DCCD1}">
+              <a14:hiddenFill xmlns:a14="http://schemas.microsoft.com/office/drawing/2010/main">
+                <a:solidFill>
+                  <a:srgbClr val="FFFFFF"/>
+                </a:solidFill>
+              </a14:hiddenFill>
+            </a:ext>
+            <a:ext uri="{91240B29-F687-4F45-9708-019B960494DF}">
+              <a14:hiddenLine xmlns:a14="http://schemas.microsoft.com/office/drawing/2010/main" w="9525">
+                <a:solidFill>
+                  <a:srgbClr val="000000"/>
+                </a:solidFill>
+                <a:miter lim="800000"/>
+                <a:headEnd/>
+                <a:tailEnd/>
+              </a14:hiddenLine>
+            </a:ext>
+          </a:extLst>
+        </p:spPr>
+        <p:txBody>
+          <a:bodyPr/>
+          <a:lstStyle>
+            <a:lvl1pPr>
+              <a:defRPr sz="4000" b="1">
+                <a:solidFill>
+                  <a:schemeClr val="tx1"/>
+                </a:solidFill>
+                <a:latin typeface="Times New Roman" panose="02020603050405020304" pitchFamily="18" charset="0"/>
+              </a:defRPr>
+            </a:lvl1pPr>
+            <a:lvl2pPr marL="742950" indent="-285750">
+              <a:defRPr sz="4000" b="1">
+                <a:solidFill>
+                  <a:schemeClr val="tx1"/>
+                </a:solidFill>
+                <a:latin typeface="Times New Roman" panose="02020603050405020304" pitchFamily="18" charset="0"/>
+              </a:defRPr>
+            </a:lvl2pPr>
+            <a:lvl3pPr marL="1143000" indent="-228600">
+              <a:defRPr sz="4000" b="1">
+                <a:solidFill>
+                  <a:schemeClr val="tx1"/>
+                </a:solidFill>
+                <a:latin typeface="Times New Roman" panose="02020603050405020304" pitchFamily="18" charset="0"/>
+              </a:defRPr>
+            </a:lvl3pPr>
+            <a:lvl4pPr marL="1600200" indent="-228600">
+              <a:defRPr sz="4000" b="1">
+                <a:solidFill>
+                  <a:schemeClr val="tx1"/>
+                </a:solidFill>
+                <a:latin typeface="Times New Roman" panose="02020603050405020304" pitchFamily="18" charset="0"/>
+              </a:defRPr>
+            </a:lvl4pPr>
+            <a:lvl5pPr marL="2057400" indent="-228600">
+              <a:defRPr sz="4000" b="1">
+                <a:solidFill>
+                  <a:schemeClr val="tx1"/>
+                </a:solidFill>
+                <a:latin typeface="Times New Roman" panose="02020603050405020304" pitchFamily="18" charset="0"/>
+              </a:defRPr>
+            </a:lvl5pPr>
+            <a:lvl6pPr marL="2514600" indent="-228600" algn="ctr" eaLnBrk="0" fontAlgn="base" hangingPunct="0">
+              <a:spcBef>
+                <a:spcPct val="0"/>
+              </a:spcBef>
+              <a:spcAft>
+                <a:spcPct val="0"/>
+              </a:spcAft>
+              <a:defRPr sz="4000" b="1">
+                <a:solidFill>
+                  <a:schemeClr val="tx1"/>
+                </a:solidFill>
+                <a:latin typeface="Times New Roman" panose="02020603050405020304" pitchFamily="18" charset="0"/>
+              </a:defRPr>
+            </a:lvl6pPr>
+            <a:lvl7pPr marL="2971800" indent="-228600" algn="ctr" eaLnBrk="0" fontAlgn="base" hangingPunct="0">
+              <a:spcBef>
+                <a:spcPct val="0"/>
+              </a:spcBef>
+              <a:spcAft>
+                <a:spcPct val="0"/>
+              </a:spcAft>
+              <a:defRPr sz="4000" b="1">
+                <a:solidFill>
+                  <a:schemeClr val="tx1"/>
+                </a:solidFill>
+                <a:latin typeface="Times New Roman" panose="02020603050405020304" pitchFamily="18" charset="0"/>
+              </a:defRPr>
+            </a:lvl7pPr>
+            <a:lvl8pPr marL="3429000" indent="-228600" algn="ctr" eaLnBrk="0" fontAlgn="base" hangingPunct="0">
+              <a:spcBef>
+                <a:spcPct val="0"/>
+              </a:spcBef>
+              <a:spcAft>
+                <a:spcPct val="0"/>
+              </a:spcAft>
+              <a:defRPr sz="4000" b="1">
+                <a:solidFill>
+                  <a:schemeClr val="tx1"/>
+                </a:solidFill>
+                <a:latin typeface="Times New Roman" panose="02020603050405020304" pitchFamily="18" charset="0"/>
+              </a:defRPr>
+            </a:lvl8pPr>
+            <a:lvl9pPr marL="3886200" indent="-228600" algn="ctr" eaLnBrk="0" fontAlgn="base" hangingPunct="0">
+              <a:spcBef>
+                <a:spcPct val="0"/>
+              </a:spcBef>
+              <a:spcAft>
+                <a:spcPct val="0"/>
+              </a:spcAft>
+              <a:defRPr sz="4000" b="1">
+                <a:solidFill>
+                  <a:schemeClr val="tx1"/>
+                </a:solidFill>
+                <a:latin typeface="Times New Roman" panose="02020603050405020304" pitchFamily="18" charset="0"/>
+              </a:defRPr>
+            </a:lvl9pPr>
+          </a:lstStyle>
+          <a:p>
+            <a:fld id="{0AA7EE5A-377A-4315-98FF-452E3B756F74}" type="slidenum">
+              <a:rPr lang="sk-SK" sz="1400" b="0"/>
+              <a:pPr/>
+              <a:t>49</a:t>
+            </a:fld>
+            <a:endParaRPr lang="sk-SK" sz="1400" b="0"/>
+          </a:p>
+        </p:txBody>
+      </p:sp>
+    </p:spTree>
+    <p:extLst>
+      <p:ext uri="{BB962C8B-B14F-4D97-AF65-F5344CB8AC3E}">
+        <p14:creationId xmlns:p14="http://schemas.microsoft.com/office/powerpoint/2010/main" val="729735244"/>
+      </p:ext>
+    </p:extLst>
+  </p:cSld>
+  <p:clrMapOvr>
+    <a:masterClrMapping/>
+  </p:clrMapOvr>
+</p:sld>
+</file>
+
 <file path=ppt/slides/slide5.xml><?xml version="1.0" encoding="utf-8"?>
 <p:sld xmlns:a="http://schemas.openxmlformats.org/drawingml/2006/main" xmlns:r="http://schemas.openxmlformats.org/officeDocument/2006/relationships" xmlns:p="http://schemas.openxmlformats.org/presentationml/2006/main">
   <p:cSld>
@@ -21452,289 +22092,6 @@
       </p:grpSpPr>
       <p:sp>
         <p:nvSpPr>
-          <p:cNvPr id="2" name="Nadpis 1">
-            <a:extLst>
-              <a:ext uri="{FF2B5EF4-FFF2-40B4-BE49-F238E27FC236}">
-                <a16:creationId xmlns:a16="http://schemas.microsoft.com/office/drawing/2014/main" id="{156B7AE6-1A2D-6A47-A02A-38C6D94DF938}"/>
-              </a:ext>
-            </a:extLst>
-          </p:cNvPr>
-          <p:cNvSpPr>
-            <a:spLocks noGrp="1"/>
-          </p:cNvSpPr>
-          <p:nvPr>
-            <p:ph type="title"/>
-          </p:nvPr>
-        </p:nvSpPr>
-        <p:spPr/>
-        <p:txBody>
-          <a:bodyPr/>
-          <a:lstStyle/>
-          <a:p>
-            <a:r>
-              <a:rPr lang="sk-SK" dirty="0"/>
-              <a:t>Súbeh  (</a:t>
-            </a:r>
-            <a:r>
-              <a:rPr lang="sk-SK" dirty="0" err="1"/>
-              <a:t>rendez</a:t>
-            </a:r>
-            <a:r>
-              <a:rPr lang="sk-SK" dirty="0"/>
-              <a:t> - </a:t>
-            </a:r>
-            <a:r>
-              <a:rPr lang="sk-SK" dirty="0" err="1"/>
-              <a:t>vous</a:t>
-            </a:r>
-            <a:r>
-              <a:rPr lang="sk-SK" dirty="0"/>
-              <a:t>)</a:t>
-            </a:r>
-          </a:p>
-        </p:txBody>
-      </p:sp>
-      <p:sp>
-        <p:nvSpPr>
-          <p:cNvPr id="3" name="Zástupný objekt pre obsah 2">
-            <a:extLst>
-              <a:ext uri="{FF2B5EF4-FFF2-40B4-BE49-F238E27FC236}">
-                <a16:creationId xmlns:a16="http://schemas.microsoft.com/office/drawing/2014/main" id="{B2E2E4CF-5E07-BE4D-ACCA-506417D25406}"/>
-              </a:ext>
-            </a:extLst>
-          </p:cNvPr>
-          <p:cNvSpPr>
-            <a:spLocks noGrp="1"/>
-          </p:cNvSpPr>
-          <p:nvPr>
-            <p:ph idx="1"/>
-          </p:nvPr>
-        </p:nvSpPr>
-        <p:spPr/>
-        <p:txBody>
-          <a:bodyPr/>
-          <a:lstStyle/>
-          <a:p>
-            <a:pPr>
-              <a:spcBef>
-                <a:spcPct val="50000"/>
-              </a:spcBef>
-            </a:pPr>
-            <a:r>
-              <a:rPr lang="sk-SK" dirty="0"/>
-              <a:t>Súbeh - najčastejšie sa vyskytuje u </a:t>
-            </a:r>
-            <a:r>
-              <a:rPr lang="sk-SK" dirty="0" err="1"/>
-              <a:t>paral.procesoch</a:t>
-            </a:r>
-            <a:r>
-              <a:rPr lang="sk-SK" dirty="0"/>
-              <a:t>, ktoré prebiehajú v distribuovanom prostredí </a:t>
-            </a:r>
-          </a:p>
-          <a:p>
-            <a:pPr>
-              <a:spcBef>
-                <a:spcPct val="50000"/>
-              </a:spcBef>
-            </a:pPr>
-            <a:r>
-              <a:rPr lang="sk-SK" dirty="0"/>
-              <a:t>Princíp - spoločné prevedenie určitého úseku programu dvomi procesmi</a:t>
-            </a:r>
-          </a:p>
-          <a:p>
-            <a:pPr>
-              <a:spcBef>
-                <a:spcPct val="50000"/>
-              </a:spcBef>
-            </a:pPr>
-            <a:r>
-              <a:rPr lang="sk-SK" dirty="0"/>
-              <a:t>nastáva nutnosť synchronizovať procesy tak, aby pred spoločným úsekom počkal jeden proces na príchod druhého</a:t>
-            </a:r>
-          </a:p>
-          <a:p>
-            <a:endParaRPr lang="sk-SK" dirty="0"/>
-          </a:p>
-        </p:txBody>
-      </p:sp>
-      <p:sp>
-        <p:nvSpPr>
-          <p:cNvPr id="31747" name="Zástupný symbol čísla snímky 3"/>
-          <p:cNvSpPr>
-            <a:spLocks noGrp="1"/>
-          </p:cNvSpPr>
-          <p:nvPr>
-            <p:ph type="sldNum" sz="quarter" idx="12"/>
-          </p:nvPr>
-        </p:nvSpPr>
-        <p:spPr>
-          <a:noFill/>
-          <a:ln/>
-          <a:extLst>
-            <a:ext uri="{909E8E84-426E-40DD-AFC4-6F175D3DCCD1}">
-              <a14:hiddenFill xmlns:a14="http://schemas.microsoft.com/office/drawing/2010/main">
-                <a:solidFill>
-                  <a:srgbClr val="FFFFFF"/>
-                </a:solidFill>
-              </a14:hiddenFill>
-            </a:ext>
-            <a:ext uri="{91240B29-F687-4F45-9708-019B960494DF}">
-              <a14:hiddenLine xmlns:a14="http://schemas.microsoft.com/office/drawing/2010/main" w="9525">
-                <a:solidFill>
-                  <a:srgbClr val="000000"/>
-                </a:solidFill>
-                <a:miter lim="800000"/>
-                <a:headEnd/>
-                <a:tailEnd/>
-              </a14:hiddenLine>
-            </a:ext>
-          </a:extLst>
-        </p:spPr>
-        <p:txBody>
-          <a:bodyPr/>
-          <a:lstStyle>
-            <a:lvl1pPr>
-              <a:defRPr sz="4000" b="1">
-                <a:solidFill>
-                  <a:schemeClr val="tx1"/>
-                </a:solidFill>
-                <a:latin typeface="Times New Roman" panose="02020603050405020304" pitchFamily="18" charset="0"/>
-              </a:defRPr>
-            </a:lvl1pPr>
-            <a:lvl2pPr marL="742950" indent="-285750">
-              <a:defRPr sz="4000" b="1">
-                <a:solidFill>
-                  <a:schemeClr val="tx1"/>
-                </a:solidFill>
-                <a:latin typeface="Times New Roman" panose="02020603050405020304" pitchFamily="18" charset="0"/>
-              </a:defRPr>
-            </a:lvl2pPr>
-            <a:lvl3pPr marL="1143000" indent="-228600">
-              <a:defRPr sz="4000" b="1">
-                <a:solidFill>
-                  <a:schemeClr val="tx1"/>
-                </a:solidFill>
-                <a:latin typeface="Times New Roman" panose="02020603050405020304" pitchFamily="18" charset="0"/>
-              </a:defRPr>
-            </a:lvl3pPr>
-            <a:lvl4pPr marL="1600200" indent="-228600">
-              <a:defRPr sz="4000" b="1">
-                <a:solidFill>
-                  <a:schemeClr val="tx1"/>
-                </a:solidFill>
-                <a:latin typeface="Times New Roman" panose="02020603050405020304" pitchFamily="18" charset="0"/>
-              </a:defRPr>
-            </a:lvl4pPr>
-            <a:lvl5pPr marL="2057400" indent="-228600">
-              <a:defRPr sz="4000" b="1">
-                <a:solidFill>
-                  <a:schemeClr val="tx1"/>
-                </a:solidFill>
-                <a:latin typeface="Times New Roman" panose="02020603050405020304" pitchFamily="18" charset="0"/>
-              </a:defRPr>
-            </a:lvl5pPr>
-            <a:lvl6pPr marL="2514600" indent="-228600" algn="ctr" eaLnBrk="0" fontAlgn="base" hangingPunct="0">
-              <a:spcBef>
-                <a:spcPct val="0"/>
-              </a:spcBef>
-              <a:spcAft>
-                <a:spcPct val="0"/>
-              </a:spcAft>
-              <a:defRPr sz="4000" b="1">
-                <a:solidFill>
-                  <a:schemeClr val="tx1"/>
-                </a:solidFill>
-                <a:latin typeface="Times New Roman" panose="02020603050405020304" pitchFamily="18" charset="0"/>
-              </a:defRPr>
-            </a:lvl6pPr>
-            <a:lvl7pPr marL="2971800" indent="-228600" algn="ctr" eaLnBrk="0" fontAlgn="base" hangingPunct="0">
-              <a:spcBef>
-                <a:spcPct val="0"/>
-              </a:spcBef>
-              <a:spcAft>
-                <a:spcPct val="0"/>
-              </a:spcAft>
-              <a:defRPr sz="4000" b="1">
-                <a:solidFill>
-                  <a:schemeClr val="tx1"/>
-                </a:solidFill>
-                <a:latin typeface="Times New Roman" panose="02020603050405020304" pitchFamily="18" charset="0"/>
-              </a:defRPr>
-            </a:lvl7pPr>
-            <a:lvl8pPr marL="3429000" indent="-228600" algn="ctr" eaLnBrk="0" fontAlgn="base" hangingPunct="0">
-              <a:spcBef>
-                <a:spcPct val="0"/>
-              </a:spcBef>
-              <a:spcAft>
-                <a:spcPct val="0"/>
-              </a:spcAft>
-              <a:defRPr sz="4000" b="1">
-                <a:solidFill>
-                  <a:schemeClr val="tx1"/>
-                </a:solidFill>
-                <a:latin typeface="Times New Roman" panose="02020603050405020304" pitchFamily="18" charset="0"/>
-              </a:defRPr>
-            </a:lvl8pPr>
-            <a:lvl9pPr marL="3886200" indent="-228600" algn="ctr" eaLnBrk="0" fontAlgn="base" hangingPunct="0">
-              <a:spcBef>
-                <a:spcPct val="0"/>
-              </a:spcBef>
-              <a:spcAft>
-                <a:spcPct val="0"/>
-              </a:spcAft>
-              <a:defRPr sz="4000" b="1">
-                <a:solidFill>
-                  <a:schemeClr val="tx1"/>
-                </a:solidFill>
-                <a:latin typeface="Times New Roman" panose="02020603050405020304" pitchFamily="18" charset="0"/>
-              </a:defRPr>
-            </a:lvl9pPr>
-          </a:lstStyle>
-          <a:p>
-            <a:fld id="{0AA7EE5A-377A-4315-98FF-452E3B756F74}" type="slidenum">
-              <a:rPr lang="sk-SK" sz="1400" b="0"/>
-              <a:pPr/>
-              <a:t>50</a:t>
-            </a:fld>
-            <a:endParaRPr lang="sk-SK" sz="1400" b="0"/>
-          </a:p>
-        </p:txBody>
-      </p:sp>
-    </p:spTree>
-    <p:extLst>
-      <p:ext uri="{BB962C8B-B14F-4D97-AF65-F5344CB8AC3E}">
-        <p14:creationId xmlns:p14="http://schemas.microsoft.com/office/powerpoint/2010/main" val="729735244"/>
-      </p:ext>
-    </p:extLst>
-  </p:cSld>
-  <p:clrMapOvr>
-    <a:masterClrMapping/>
-  </p:clrMapOvr>
-</p:sld>
-</file>
-
-<file path=ppt/slides/slide51.xml><?xml version="1.0" encoding="utf-8"?>
-<p:sld xmlns:a="http://schemas.openxmlformats.org/drawingml/2006/main" xmlns:r="http://schemas.openxmlformats.org/officeDocument/2006/relationships" xmlns:p="http://schemas.openxmlformats.org/presentationml/2006/main">
-  <p:cSld>
-    <p:spTree>
-      <p:nvGrpSpPr>
-        <p:cNvPr id="1" name=""/>
-        <p:cNvGrpSpPr/>
-        <p:nvPr/>
-      </p:nvGrpSpPr>
-      <p:grpSpPr>
-        <a:xfrm>
-          <a:off x="0" y="0"/>
-          <a:ext cx="0" cy="0"/>
-          <a:chOff x="0" y="0"/>
-          <a:chExt cx="0" cy="0"/>
-        </a:xfrm>
-      </p:grpSpPr>
-      <p:sp>
-        <p:nvSpPr>
           <p:cNvPr id="32771" name="Zástupný symbol čísla snímky 3"/>
           <p:cNvSpPr>
             <a:spLocks noGrp="1"/>
@@ -21870,7 +22227,7 @@
             <a:fld id="{783640A1-3A17-442E-8F52-D5CF8886BD6F}" type="slidenum">
               <a:rPr lang="sk-SK" sz="1400" b="0"/>
               <a:pPr/>
-              <a:t>51</a:t>
+              <a:t>50</a:t>
             </a:fld>
             <a:endParaRPr lang="sk-SK" sz="1400" b="0"/>
           </a:p>
@@ -22019,7 +22376,7 @@
 </p:sld>
 </file>
 
-<file path=ppt/slides/slide52.xml><?xml version="1.0" encoding="utf-8"?>
+<file path=ppt/slides/slide51.xml><?xml version="1.0" encoding="utf-8"?>
 <p:sld xmlns:a="http://schemas.openxmlformats.org/drawingml/2006/main" xmlns:r="http://schemas.openxmlformats.org/officeDocument/2006/relationships" xmlns:p="http://schemas.openxmlformats.org/presentationml/2006/main">
   <p:cSld>
     <p:spTree>
@@ -22268,7 +22625,7 @@
             <a:fld id="{E4102D23-89A9-4854-A21A-0C84771751CA}" type="slidenum">
               <a:rPr lang="sk-SK" sz="1400" b="0"/>
               <a:pPr/>
-              <a:t>52</a:t>
+              <a:t>51</a:t>
             </a:fld>
             <a:endParaRPr lang="sk-SK" sz="1400" b="0"/>
           </a:p>
@@ -22287,7 +22644,7 @@
 </p:sld>
 </file>
 
-<file path=ppt/slides/slide53.xml><?xml version="1.0" encoding="utf-8"?>
+<file path=ppt/slides/slide52.xml><?xml version="1.0" encoding="utf-8"?>
 <p:sld xmlns:a="http://schemas.openxmlformats.org/drawingml/2006/main" xmlns:r="http://schemas.openxmlformats.org/officeDocument/2006/relationships" xmlns:p="http://schemas.openxmlformats.org/presentationml/2006/main">
   <p:cSld>
     <p:spTree>
@@ -22343,7 +22700,7 @@
           <a:p>
             <a:fld id="{5AB4CD34-DB5E-4606-AE4E-01019896DEAB}" type="slidenum">
               <a:rPr lang="sk-SK" smtClean="0"/>
-              <a:t>53</a:t>
+              <a:t>52</a:t>
             </a:fld>
             <a:endParaRPr lang="sk-SK"/>
           </a:p>
@@ -22403,7 +22760,7 @@
 </p:sld>
 </file>
 
-<file path=ppt/slides/slide54.xml><?xml version="1.0" encoding="utf-8"?>
+<file path=ppt/slides/slide53.xml><?xml version="1.0" encoding="utf-8"?>
 <p:sld xmlns:a="http://schemas.openxmlformats.org/drawingml/2006/main" xmlns:r="http://schemas.openxmlformats.org/officeDocument/2006/relationships" xmlns:p="http://schemas.openxmlformats.org/presentationml/2006/main">
   <p:cSld>
     <p:spTree>
@@ -22557,7 +22914,7 @@
             <a:fld id="{90BAB154-F63B-4E0B-B944-C49ED6189001}" type="slidenum">
               <a:rPr lang="sk-SK" sz="1400" b="0"/>
               <a:pPr/>
-              <a:t>54</a:t>
+              <a:t>53</a:t>
             </a:fld>
             <a:endParaRPr lang="sk-SK" sz="1400" b="0"/>
           </a:p>
@@ -23378,8 +23735,8 @@
         </p:nvSpPr>
         <p:spPr bwMode="auto">
           <a:xfrm>
-            <a:off x="2057400" y="5943601"/>
-            <a:ext cx="8229600" cy="701675"/>
+            <a:off x="1304014" y="5943601"/>
+            <a:ext cx="9509760" cy="701675"/>
           </a:xfrm>
           <a:prstGeom prst="rect">
             <a:avLst/>
@@ -23409,7 +23766,7 @@
           </a:extLst>
         </p:spPr>
         <p:txBody>
-          <a:bodyPr>
+          <a:bodyPr wrap="square">
             <a:spAutoFit/>
           </a:bodyPr>
           <a:lstStyle>
@@ -24093,7 +24450,7 @@
             </a:r>
             <a:r>
               <a:rPr lang="sk-SK" b="1" dirty="0"/>
-              <a:t>odstrániť synchronizáciou procesov</a:t>
+              <a:t>odstrániť pomocou synchronizácie procesov</a:t>
             </a:r>
           </a:p>
         </p:txBody>

--- a/OS 2 Úvod do paralélnych procesov a synchronizácie.pptx
+++ b/OS 2 Úvod do paralélnych procesov a synchronizácie.pptx
@@ -191,7 +191,7 @@
   <pc:docChgLst>
     <pc:chgData name="Baráth, Július" userId="aebde9b9-dccc-4475-a9ac-c05e78323d7a" providerId="ADAL" clId="{4A0811C8-ED2F-505E-B787-C8270CED5046}"/>
     <pc:docChg chg="undo custSel addSld delSld modSld sldOrd">
-      <pc:chgData name="Baráth, Július" userId="aebde9b9-dccc-4475-a9ac-c05e78323d7a" providerId="ADAL" clId="{4A0811C8-ED2F-505E-B787-C8270CED5046}" dt="2026-02-03T11:50:35.132" v="568" actId="14100"/>
+      <pc:chgData name="Baráth, Július" userId="aebde9b9-dccc-4475-a9ac-c05e78323d7a" providerId="ADAL" clId="{4A0811C8-ED2F-505E-B787-C8270CED5046}" dt="2026-02-04T09:00:00.349" v="572" actId="1076"/>
       <pc:docMkLst>
         <pc:docMk/>
       </pc:docMkLst>
@@ -275,6 +275,29 @@
             <pc:docMk/>
             <pc:sldMk cId="3347599706" sldId="263"/>
             <ac:spMk id="3" creationId="{00000000-0000-0000-0000-000000000000}"/>
+          </ac:spMkLst>
+        </pc:spChg>
+      </pc:sldChg>
+      <pc:sldChg chg="modSp mod">
+        <pc:chgData name="Baráth, Július" userId="aebde9b9-dccc-4475-a9ac-c05e78323d7a" providerId="ADAL" clId="{4A0811C8-ED2F-505E-B787-C8270CED5046}" dt="2026-02-04T09:00:00.349" v="572" actId="1076"/>
+        <pc:sldMkLst>
+          <pc:docMk/>
+          <pc:sldMk cId="3215213909" sldId="281"/>
+        </pc:sldMkLst>
+        <pc:spChg chg="mod">
+          <ac:chgData name="Baráth, Július" userId="aebde9b9-dccc-4475-a9ac-c05e78323d7a" providerId="ADAL" clId="{4A0811C8-ED2F-505E-B787-C8270CED5046}" dt="2026-02-04T09:00:00.349" v="572" actId="1076"/>
+          <ac:spMkLst>
+            <pc:docMk/>
+            <pc:sldMk cId="3215213909" sldId="281"/>
+            <ac:spMk id="7" creationId="{90D99940-9123-4581-D9AC-BBE8F9D94D6C}"/>
+          </ac:spMkLst>
+        </pc:spChg>
+        <pc:spChg chg="mod">
+          <ac:chgData name="Baráth, Július" userId="aebde9b9-dccc-4475-a9ac-c05e78323d7a" providerId="ADAL" clId="{4A0811C8-ED2F-505E-B787-C8270CED5046}" dt="2026-02-04T08:59:57.082" v="571" actId="1076"/>
+          <ac:spMkLst>
+            <pc:docMk/>
+            <pc:sldMk cId="3215213909" sldId="281"/>
+            <ac:spMk id="8" creationId="{9C641B73-9397-2D5D-2C98-501BC496826F}"/>
           </ac:spMkLst>
         </pc:spChg>
       </pc:sldChg>
@@ -841,7 +864,7 @@
           <a:p>
             <a:fld id="{10DBA715-3931-4B12-8F65-0C023D0C889C}" type="datetimeFigureOut">
               <a:rPr lang="sk-SK" smtClean="0"/>
-              <a:t>3.2.2026</a:t>
+              <a:t>4.2.2026</a:t>
             </a:fld>
             <a:endParaRPr lang="sk-SK"/>
           </a:p>
@@ -1408,7 +1431,7 @@
           <a:p>
             <a:fld id="{FF409D81-0DDF-48BB-84A1-72E2E7B64FA8}" type="datetime1">
               <a:rPr lang="sk-SK" smtClean="0"/>
-              <a:t>3.2.2026</a:t>
+              <a:t>4.2.2026</a:t>
             </a:fld>
             <a:endParaRPr lang="sk-SK"/>
           </a:p>
@@ -1581,7 +1604,7 @@
           <a:p>
             <a:fld id="{A8BDDA65-704B-4A2E-88E9-9C89A9C7184F}" type="datetime1">
               <a:rPr lang="sk-SK" smtClean="0"/>
-              <a:t>3.2.2026</a:t>
+              <a:t>4.2.2026</a:t>
             </a:fld>
             <a:endParaRPr lang="sk-SK"/>
           </a:p>
@@ -1764,7 +1787,7 @@
           <a:p>
             <a:fld id="{C293AB0A-F26A-41CF-9202-51D7B560101E}" type="datetime1">
               <a:rPr lang="sk-SK" smtClean="0"/>
-              <a:t>3.2.2026</a:t>
+              <a:t>4.2.2026</a:t>
             </a:fld>
             <a:endParaRPr lang="sk-SK"/>
           </a:p>
@@ -2010,7 +2033,7 @@
             </a:pPr>
             <a:fld id="{D48FA258-C71C-40CD-814F-D5C504290866}" type="datetime1">
               <a:rPr lang="sk-SK" smtClean="0"/>
-              <a:t>3.2.2026</a:t>
+              <a:t>4.2.2026</a:t>
             </a:fld>
             <a:endParaRPr lang="sk-SK"/>
           </a:p>
@@ -2199,7 +2222,7 @@
           <a:p>
             <a:fld id="{E82BEFB5-8A8B-4407-8C61-8AE7B8D57719}" type="datetime1">
               <a:rPr lang="sk-SK" smtClean="0"/>
-              <a:t>3.2.2026</a:t>
+              <a:t>4.2.2026</a:t>
             </a:fld>
             <a:endParaRPr lang="sk-SK"/>
           </a:p>
@@ -2448,7 +2471,7 @@
           <a:p>
             <a:fld id="{502AAF14-A1CA-4E65-96DD-CCF66B07C433}" type="datetime1">
               <a:rPr lang="sk-SK" smtClean="0"/>
-              <a:t>3.2.2026</a:t>
+              <a:t>4.2.2026</a:t>
             </a:fld>
             <a:endParaRPr lang="sk-SK"/>
           </a:p>
@@ -2683,7 +2706,7 @@
           <a:p>
             <a:fld id="{8087A5FB-5486-48D2-95B9-9A8F76F73722}" type="datetime1">
               <a:rPr lang="sk-SK" smtClean="0"/>
-              <a:t>3.2.2026</a:t>
+              <a:t>4.2.2026</a:t>
             </a:fld>
             <a:endParaRPr lang="sk-SK"/>
           </a:p>
@@ -3053,7 +3076,7 @@
           <a:p>
             <a:fld id="{21BA8A66-795C-44EE-A6A1-16E491829098}" type="datetime1">
               <a:rPr lang="sk-SK" smtClean="0"/>
-              <a:t>3.2.2026</a:t>
+              <a:t>4.2.2026</a:t>
             </a:fld>
             <a:endParaRPr lang="sk-SK"/>
           </a:p>
@@ -3174,7 +3197,7 @@
           <a:p>
             <a:fld id="{3EF3BB14-32E4-4EBF-9407-66EF6DDF6C93}" type="datetime1">
               <a:rPr lang="sk-SK" smtClean="0"/>
-              <a:t>3.2.2026</a:t>
+              <a:t>4.2.2026</a:t>
             </a:fld>
             <a:endParaRPr lang="sk-SK"/>
           </a:p>
@@ -3272,7 +3295,7 @@
           <a:p>
             <a:fld id="{23DE504A-4A64-4A13-A20E-40EF1EDAF191}" type="datetime1">
               <a:rPr lang="sk-SK" smtClean="0"/>
-              <a:t>3.2.2026</a:t>
+              <a:t>4.2.2026</a:t>
             </a:fld>
             <a:endParaRPr lang="sk-SK"/>
           </a:p>
@@ -3552,7 +3575,7 @@
           <a:p>
             <a:fld id="{C5A1DF2D-F2EE-4C69-944D-FEF6D561633F}" type="datetime1">
               <a:rPr lang="sk-SK" smtClean="0"/>
-              <a:t>3.2.2026</a:t>
+              <a:t>4.2.2026</a:t>
             </a:fld>
             <a:endParaRPr lang="sk-SK"/>
           </a:p>
@@ -3808,7 +3831,7 @@
           <a:p>
             <a:fld id="{95D7758C-FDA2-483D-87E1-B45F5DFBD3FD}" type="datetime1">
               <a:rPr lang="sk-SK" smtClean="0"/>
-              <a:t>3.2.2026</a:t>
+              <a:t>4.2.2026</a:t>
             </a:fld>
             <a:endParaRPr lang="sk-SK"/>
           </a:p>
@@ -4024,7 +4047,7 @@
           <a:p>
             <a:fld id="{2605D2B5-92B7-4C8D-AC3A-18C18C239EE2}" type="datetime1">
               <a:rPr lang="sk-SK" smtClean="0"/>
-              <a:t>3.2.2026</a:t>
+              <a:t>4.2.2026</a:t>
             </a:fld>
             <a:endParaRPr lang="sk-SK"/>
           </a:p>
@@ -20272,7 +20295,7 @@
           </p:nvSpPr>
           <p:spPr>
             <a:xfrm>
-              <a:off x="4681169" y="3403850"/>
+              <a:off x="6262688" y="3332074"/>
               <a:ext cx="1144865" cy="369332"/>
             </a:xfrm>
             <a:prstGeom prst="rect">
@@ -20309,7 +20332,7 @@
           </p:nvSpPr>
           <p:spPr>
             <a:xfrm>
-              <a:off x="6184428" y="3403850"/>
+              <a:off x="4567645" y="3332074"/>
               <a:ext cx="1254959" cy="369332"/>
             </a:xfrm>
             <a:prstGeom prst="rect">

--- a/OS 2 Úvod do paralélnych procesov a synchronizácie.pptx
+++ b/OS 2 Úvod do paralélnych procesov a synchronizácie.pptx
@@ -181,7 +181,7 @@
 <file path=ppt/revisionInfo.xml><?xml version="1.0" encoding="utf-8"?>
 <p1510:revInfo xmlns:a="http://schemas.openxmlformats.org/drawingml/2006/main" xmlns:r="http://schemas.openxmlformats.org/officeDocument/2006/relationships" xmlns:p1510="http://schemas.microsoft.com/office/powerpoint/2015/10/main">
   <p1510:revLst>
-    <p1510:client id="{370BC3AC-5919-1247-B8AC-1DC04D9811EF}" v="56" dt="2026-02-03T11:50:35.132"/>
+    <p1510:client id="{84875499-5C2E-3745-A556-77DA84878953}" v="1" dt="2026-03-04T06:19:49.165"/>
   </p1510:revLst>
 </p1510:revInfo>
 </file>
@@ -191,7 +191,7 @@
   <pc:docChgLst>
     <pc:chgData name="Baráth, Július" userId="aebde9b9-dccc-4475-a9ac-c05e78323d7a" providerId="ADAL" clId="{4A0811C8-ED2F-505E-B787-C8270CED5046}"/>
     <pc:docChg chg="undo custSel addSld delSld modSld sldOrd">
-      <pc:chgData name="Baráth, Július" userId="aebde9b9-dccc-4475-a9ac-c05e78323d7a" providerId="ADAL" clId="{4A0811C8-ED2F-505E-B787-C8270CED5046}" dt="2026-02-04T09:00:00.349" v="572" actId="1076"/>
+      <pc:chgData name="Baráth, Július" userId="aebde9b9-dccc-4475-a9ac-c05e78323d7a" providerId="ADAL" clId="{4A0811C8-ED2F-505E-B787-C8270CED5046}" dt="2026-03-04T10:50:49.858" v="584" actId="1076"/>
       <pc:docMkLst>
         <pc:docMk/>
       </pc:docMkLst>
@@ -278,28 +278,44 @@
           </ac:spMkLst>
         </pc:spChg>
       </pc:sldChg>
-      <pc:sldChg chg="modSp mod">
-        <pc:chgData name="Baráth, Július" userId="aebde9b9-dccc-4475-a9ac-c05e78323d7a" providerId="ADAL" clId="{4A0811C8-ED2F-505E-B787-C8270CED5046}" dt="2026-02-04T09:00:00.349" v="572" actId="1076"/>
+      <pc:sldChg chg="addSp delSp modSp mod">
+        <pc:chgData name="Baráth, Július" userId="aebde9b9-dccc-4475-a9ac-c05e78323d7a" providerId="ADAL" clId="{4A0811C8-ED2F-505E-B787-C8270CED5046}" dt="2026-03-04T10:50:49.858" v="584" actId="1076"/>
         <pc:sldMkLst>
           <pc:docMk/>
           <pc:sldMk cId="3215213909" sldId="281"/>
         </pc:sldMkLst>
-        <pc:spChg chg="mod">
-          <ac:chgData name="Baráth, Július" userId="aebde9b9-dccc-4475-a9ac-c05e78323d7a" providerId="ADAL" clId="{4A0811C8-ED2F-505E-B787-C8270CED5046}" dt="2026-02-04T09:00:00.349" v="572" actId="1076"/>
-          <ac:spMkLst>
+        <pc:grpChg chg="del">
+          <ac:chgData name="Baráth, Július" userId="aebde9b9-dccc-4475-a9ac-c05e78323d7a" providerId="ADAL" clId="{4A0811C8-ED2F-505E-B787-C8270CED5046}" dt="2026-03-04T06:19:49.160" v="573" actId="478"/>
+          <ac:grpSpMkLst>
             <pc:docMk/>
             <pc:sldMk cId="3215213909" sldId="281"/>
-            <ac:spMk id="7" creationId="{90D99940-9123-4581-D9AC-BBE8F9D94D6C}"/>
-          </ac:spMkLst>
-        </pc:spChg>
-        <pc:spChg chg="mod">
-          <ac:chgData name="Baráth, Július" userId="aebde9b9-dccc-4475-a9ac-c05e78323d7a" providerId="ADAL" clId="{4A0811C8-ED2F-505E-B787-C8270CED5046}" dt="2026-02-04T08:59:57.082" v="571" actId="1076"/>
-          <ac:spMkLst>
+            <ac:grpSpMk id="9" creationId="{C10C6C14-C282-05BE-4E23-936782880D70}"/>
+          </ac:grpSpMkLst>
+        </pc:grpChg>
+        <pc:picChg chg="add del mod">
+          <ac:chgData name="Baráth, Július" userId="aebde9b9-dccc-4475-a9ac-c05e78323d7a" providerId="ADAL" clId="{4A0811C8-ED2F-505E-B787-C8270CED5046}" dt="2026-03-04T10:49:08.616" v="581" actId="478"/>
+          <ac:picMkLst>
             <pc:docMk/>
             <pc:sldMk cId="3215213909" sldId="281"/>
-            <ac:spMk id="8" creationId="{9C641B73-9397-2D5D-2C98-501BC496826F}"/>
-          </ac:spMkLst>
-        </pc:spChg>
+            <ac:picMk id="8" creationId="{9D1BF54F-33B1-D75C-5915-3C4DB635DCD9}"/>
+          </ac:picMkLst>
+        </pc:picChg>
+        <pc:picChg chg="add mod">
+          <ac:chgData name="Baráth, Július" userId="aebde9b9-dccc-4475-a9ac-c05e78323d7a" providerId="ADAL" clId="{4A0811C8-ED2F-505E-B787-C8270CED5046}" dt="2026-03-04T10:50:49.858" v="584" actId="1076"/>
+          <ac:picMkLst>
+            <pc:docMk/>
+            <pc:sldMk cId="3215213909" sldId="281"/>
+            <ac:picMk id="10" creationId="{96D286B6-A3A5-0A7B-AD6F-9934B9926655}"/>
+          </ac:picMkLst>
+        </pc:picChg>
+        <pc:picChg chg="add del mod">
+          <ac:chgData name="Baráth, Július" userId="aebde9b9-dccc-4475-a9ac-c05e78323d7a" providerId="ADAL" clId="{4A0811C8-ED2F-505E-B787-C8270CED5046}" dt="2026-03-04T10:48:43.996" v="579" actId="478"/>
+          <ac:picMkLst>
+            <pc:docMk/>
+            <pc:sldMk cId="3215213909" sldId="281"/>
+            <ac:picMk id="11" creationId="{8D265D07-AB68-461F-A2A8-23B1ED1CC8CE}"/>
+          </ac:picMkLst>
+        </pc:picChg>
       </pc:sldChg>
       <pc:sldChg chg="addSp delSp modSp mod">
         <pc:chgData name="Baráth, Július" userId="aebde9b9-dccc-4475-a9ac-c05e78323d7a" providerId="ADAL" clId="{4A0811C8-ED2F-505E-B787-C8270CED5046}" dt="2026-02-03T10:47:25.906" v="299" actId="20577"/>
@@ -313,22 +329,6 @@
             <pc:docMk/>
             <pc:sldMk cId="2459821752" sldId="288"/>
             <ac:spMk id="3" creationId="{00000000-0000-0000-0000-000000000000}"/>
-          </ac:spMkLst>
-        </pc:spChg>
-        <pc:spChg chg="add del mod">
-          <ac:chgData name="Baráth, Július" userId="aebde9b9-dccc-4475-a9ac-c05e78323d7a" providerId="ADAL" clId="{4A0811C8-ED2F-505E-B787-C8270CED5046}" dt="2026-02-03T10:29:09.731" v="116"/>
-          <ac:spMkLst>
-            <pc:docMk/>
-            <pc:sldMk cId="2459821752" sldId="288"/>
-            <ac:spMk id="5" creationId="{2C399BD9-9DEA-10E2-E161-5C889833B7C6}"/>
-          </ac:spMkLst>
-        </pc:spChg>
-        <pc:spChg chg="add mod">
-          <ac:chgData name="Baráth, Július" userId="aebde9b9-dccc-4475-a9ac-c05e78323d7a" providerId="ADAL" clId="{4A0811C8-ED2F-505E-B787-C8270CED5046}" dt="2026-02-03T10:28:59.728" v="113"/>
-          <ac:spMkLst>
-            <pc:docMk/>
-            <pc:sldMk cId="2459821752" sldId="288"/>
-            <ac:spMk id="6" creationId="{150CBCA0-5B40-FD02-4719-F8721FCDBF86}"/>
           </ac:spMkLst>
         </pc:spChg>
       </pc:sldChg>
@@ -405,14 +405,6 @@
             <pc:docMk/>
             <pc:sldMk cId="3256878633" sldId="297"/>
             <ac:spMk id="2" creationId="{22124CC1-E539-9D43-BE9F-145005443BEF}"/>
-          </ac:spMkLst>
-        </pc:spChg>
-        <pc:spChg chg="add">
-          <ac:chgData name="Baráth, Július" userId="aebde9b9-dccc-4475-a9ac-c05e78323d7a" providerId="ADAL" clId="{4A0811C8-ED2F-505E-B787-C8270CED5046}" dt="2026-02-03T11:04:32.051" v="425"/>
-          <ac:spMkLst>
-            <pc:docMk/>
-            <pc:sldMk cId="3256878633" sldId="297"/>
-            <ac:spMk id="3" creationId="{A9898511-FB6F-BCC4-00BC-B069AE8214A5}"/>
           </ac:spMkLst>
         </pc:spChg>
         <pc:spChg chg="mod">
@@ -500,14 +492,6 @@
           <pc:docMk/>
           <pc:sldMk cId="397644615" sldId="304"/>
         </pc:sldMkLst>
-        <pc:spChg chg="add del mod">
-          <ac:chgData name="Baráth, Július" userId="aebde9b9-dccc-4475-a9ac-c05e78323d7a" providerId="ADAL" clId="{4A0811C8-ED2F-505E-B787-C8270CED5046}" dt="2026-02-03T11:40:01.712" v="526" actId="6264"/>
-          <ac:spMkLst>
-            <pc:docMk/>
-            <pc:sldMk cId="397644615" sldId="304"/>
-            <ac:spMk id="2" creationId="{E67FB9C2-574E-1BCD-B2DE-A8F40A4E67A2}"/>
-          </ac:spMkLst>
-        </pc:spChg>
         <pc:spChg chg="add mod ord">
           <ac:chgData name="Baráth, Július" userId="aebde9b9-dccc-4475-a9ac-c05e78323d7a" providerId="ADAL" clId="{4A0811C8-ED2F-505E-B787-C8270CED5046}" dt="2026-02-03T11:42:23.968" v="549" actId="15"/>
           <ac:spMkLst>
@@ -522,14 +506,6 @@
             <pc:docMk/>
             <pc:sldMk cId="397644615" sldId="304"/>
             <ac:spMk id="30723" creationId="{00000000-0000-0000-0000-000000000000}"/>
-          </ac:spMkLst>
-        </pc:spChg>
-        <pc:spChg chg="del mod">
-          <ac:chgData name="Baráth, Július" userId="aebde9b9-dccc-4475-a9ac-c05e78323d7a" providerId="ADAL" clId="{4A0811C8-ED2F-505E-B787-C8270CED5046}" dt="2026-02-03T11:40:01.712" v="526" actId="6264"/>
-          <ac:spMkLst>
-            <pc:docMk/>
-            <pc:sldMk cId="397644615" sldId="304"/>
-            <ac:spMk id="30724" creationId="{00000000-0000-0000-0000-000000000000}"/>
           </ac:spMkLst>
         </pc:spChg>
         <pc:spChg chg="mod ord">
@@ -587,13 +563,6 @@
           </ac:spMkLst>
         </pc:spChg>
       </pc:sldChg>
-      <pc:sldChg chg="del">
-        <pc:chgData name="Baráth, Július" userId="aebde9b9-dccc-4475-a9ac-c05e78323d7a" providerId="ADAL" clId="{4A0811C8-ED2F-505E-B787-C8270CED5046}" dt="2026-02-03T11:43:55.098" v="550" actId="2696"/>
-        <pc:sldMkLst>
-          <pc:docMk/>
-          <pc:sldMk cId="3109471324" sldId="309"/>
-        </pc:sldMkLst>
-      </pc:sldChg>
       <pc:sldChg chg="modSp mod">
         <pc:chgData name="Baráth, Július" userId="aebde9b9-dccc-4475-a9ac-c05e78323d7a" providerId="ADAL" clId="{4A0811C8-ED2F-505E-B787-C8270CED5046}" dt="2026-02-03T11:37:18.778" v="517" actId="113"/>
         <pc:sldMkLst>
@@ -638,27 +607,6 @@
             <ac:spMk id="19460" creationId="{00000000-0000-0000-0000-000000000000}"/>
           </ac:spMkLst>
         </pc:spChg>
-      </pc:sldChg>
-      <pc:sldChg chg="del">
-        <pc:chgData name="Baráth, Július" userId="aebde9b9-dccc-4475-a9ac-c05e78323d7a" providerId="ADAL" clId="{4A0811C8-ED2F-505E-B787-C8270CED5046}" dt="2026-02-03T11:46:57.957" v="551" actId="2696"/>
-        <pc:sldMkLst>
-          <pc:docMk/>
-          <pc:sldMk cId="3274664270" sldId="318"/>
-        </pc:sldMkLst>
-      </pc:sldChg>
-      <pc:sldChg chg="del">
-        <pc:chgData name="Baráth, Július" userId="aebde9b9-dccc-4475-a9ac-c05e78323d7a" providerId="ADAL" clId="{4A0811C8-ED2F-505E-B787-C8270CED5046}" dt="2026-02-03T11:46:58.654" v="552" actId="2696"/>
-        <pc:sldMkLst>
-          <pc:docMk/>
-          <pc:sldMk cId="3836837614" sldId="319"/>
-        </pc:sldMkLst>
-      </pc:sldChg>
-      <pc:sldChg chg="del">
-        <pc:chgData name="Baráth, Július" userId="aebde9b9-dccc-4475-a9ac-c05e78323d7a" providerId="ADAL" clId="{4A0811C8-ED2F-505E-B787-C8270CED5046}" dt="2026-02-03T11:46:59.588" v="553" actId="2696"/>
-        <pc:sldMkLst>
-          <pc:docMk/>
-          <pc:sldMk cId="2443848241" sldId="320"/>
-        </pc:sldMkLst>
       </pc:sldChg>
       <pc:sldChg chg="modSp new mod ord">
         <pc:chgData name="Baráth, Július" userId="aebde9b9-dccc-4475-a9ac-c05e78323d7a" providerId="ADAL" clId="{4A0811C8-ED2F-505E-B787-C8270CED5046}" dt="2026-02-03T10:40:54.668" v="195" actId="20578"/>
@@ -728,22 +676,6 @@
           <pc:docMk/>
           <pc:sldMk cId="4236122441" sldId="325"/>
         </pc:sldMkLst>
-        <pc:spChg chg="del mod ord">
-          <ac:chgData name="Baráth, Július" userId="aebde9b9-dccc-4475-a9ac-c05e78323d7a" providerId="ADAL" clId="{4A0811C8-ED2F-505E-B787-C8270CED5046}" dt="2026-02-03T10:57:31.034" v="319" actId="700"/>
-          <ac:spMkLst>
-            <pc:docMk/>
-            <pc:sldMk cId="4236122441" sldId="325"/>
-            <ac:spMk id="2" creationId="{ECC91CC8-5995-BD6D-C584-B9BAA8B5F31E}"/>
-          </ac:spMkLst>
-        </pc:spChg>
-        <pc:spChg chg="del mod ord">
-          <ac:chgData name="Baráth, Július" userId="aebde9b9-dccc-4475-a9ac-c05e78323d7a" providerId="ADAL" clId="{4A0811C8-ED2F-505E-B787-C8270CED5046}" dt="2026-02-03T10:57:31.034" v="319" actId="700"/>
-          <ac:spMkLst>
-            <pc:docMk/>
-            <pc:sldMk cId="4236122441" sldId="325"/>
-            <ac:spMk id="3" creationId="{255D76F0-2E41-0292-C5C7-9F1D883F5D3F}"/>
-          </ac:spMkLst>
-        </pc:spChg>
         <pc:spChg chg="mod ord">
           <ac:chgData name="Baráth, Július" userId="aebde9b9-dccc-4475-a9ac-c05e78323d7a" providerId="ADAL" clId="{4A0811C8-ED2F-505E-B787-C8270CED5046}" dt="2026-02-03T10:57:31.034" v="319" actId="700"/>
           <ac:spMkLst>
@@ -864,7 +796,7 @@
           <a:p>
             <a:fld id="{10DBA715-3931-4B12-8F65-0C023D0C889C}" type="datetimeFigureOut">
               <a:rPr lang="sk-SK" smtClean="0"/>
-              <a:t>4.2.2026</a:t>
+              <a:t>4.3.2026</a:t>
             </a:fld>
             <a:endParaRPr lang="sk-SK"/>
           </a:p>
@@ -1431,7 +1363,7 @@
           <a:p>
             <a:fld id="{FF409D81-0DDF-48BB-84A1-72E2E7B64FA8}" type="datetime1">
               <a:rPr lang="sk-SK" smtClean="0"/>
-              <a:t>4.2.2026</a:t>
+              <a:t>4.3.2026</a:t>
             </a:fld>
             <a:endParaRPr lang="sk-SK"/>
           </a:p>
@@ -1604,7 +1536,7 @@
           <a:p>
             <a:fld id="{A8BDDA65-704B-4A2E-88E9-9C89A9C7184F}" type="datetime1">
               <a:rPr lang="sk-SK" smtClean="0"/>
-              <a:t>4.2.2026</a:t>
+              <a:t>4.3.2026</a:t>
             </a:fld>
             <a:endParaRPr lang="sk-SK"/>
           </a:p>
@@ -1787,7 +1719,7 @@
           <a:p>
             <a:fld id="{C293AB0A-F26A-41CF-9202-51D7B560101E}" type="datetime1">
               <a:rPr lang="sk-SK" smtClean="0"/>
-              <a:t>4.2.2026</a:t>
+              <a:t>4.3.2026</a:t>
             </a:fld>
             <a:endParaRPr lang="sk-SK"/>
           </a:p>
@@ -2033,7 +1965,7 @@
             </a:pPr>
             <a:fld id="{D48FA258-C71C-40CD-814F-D5C504290866}" type="datetime1">
               <a:rPr lang="sk-SK" smtClean="0"/>
-              <a:t>4.2.2026</a:t>
+              <a:t>4.3.2026</a:t>
             </a:fld>
             <a:endParaRPr lang="sk-SK"/>
           </a:p>
@@ -2222,7 +2154,7 @@
           <a:p>
             <a:fld id="{E82BEFB5-8A8B-4407-8C61-8AE7B8D57719}" type="datetime1">
               <a:rPr lang="sk-SK" smtClean="0"/>
-              <a:t>4.2.2026</a:t>
+              <a:t>4.3.2026</a:t>
             </a:fld>
             <a:endParaRPr lang="sk-SK"/>
           </a:p>
@@ -2471,7 +2403,7 @@
           <a:p>
             <a:fld id="{502AAF14-A1CA-4E65-96DD-CCF66B07C433}" type="datetime1">
               <a:rPr lang="sk-SK" smtClean="0"/>
-              <a:t>4.2.2026</a:t>
+              <a:t>4.3.2026</a:t>
             </a:fld>
             <a:endParaRPr lang="sk-SK"/>
           </a:p>
@@ -2706,7 +2638,7 @@
           <a:p>
             <a:fld id="{8087A5FB-5486-48D2-95B9-9A8F76F73722}" type="datetime1">
               <a:rPr lang="sk-SK" smtClean="0"/>
-              <a:t>4.2.2026</a:t>
+              <a:t>4.3.2026</a:t>
             </a:fld>
             <a:endParaRPr lang="sk-SK"/>
           </a:p>
@@ -3076,7 +3008,7 @@
           <a:p>
             <a:fld id="{21BA8A66-795C-44EE-A6A1-16E491829098}" type="datetime1">
               <a:rPr lang="sk-SK" smtClean="0"/>
-              <a:t>4.2.2026</a:t>
+              <a:t>4.3.2026</a:t>
             </a:fld>
             <a:endParaRPr lang="sk-SK"/>
           </a:p>
@@ -3197,7 +3129,7 @@
           <a:p>
             <a:fld id="{3EF3BB14-32E4-4EBF-9407-66EF6DDF6C93}" type="datetime1">
               <a:rPr lang="sk-SK" smtClean="0"/>
-              <a:t>4.2.2026</a:t>
+              <a:t>4.3.2026</a:t>
             </a:fld>
             <a:endParaRPr lang="sk-SK"/>
           </a:p>
@@ -3295,7 +3227,7 @@
           <a:p>
             <a:fld id="{23DE504A-4A64-4A13-A20E-40EF1EDAF191}" type="datetime1">
               <a:rPr lang="sk-SK" smtClean="0"/>
-              <a:t>4.2.2026</a:t>
+              <a:t>4.3.2026</a:t>
             </a:fld>
             <a:endParaRPr lang="sk-SK"/>
           </a:p>
@@ -3575,7 +3507,7 @@
           <a:p>
             <a:fld id="{C5A1DF2D-F2EE-4C69-944D-FEF6D561633F}" type="datetime1">
               <a:rPr lang="sk-SK" smtClean="0"/>
-              <a:t>4.2.2026</a:t>
+              <a:t>4.3.2026</a:t>
             </a:fld>
             <a:endParaRPr lang="sk-SK"/>
           </a:p>
@@ -3831,7 +3763,7 @@
           <a:p>
             <a:fld id="{95D7758C-FDA2-483D-87E1-B45F5DFBD3FD}" type="datetime1">
               <a:rPr lang="sk-SK" smtClean="0"/>
-              <a:t>4.2.2026</a:t>
+              <a:t>4.3.2026</a:t>
             </a:fld>
             <a:endParaRPr lang="sk-SK"/>
           </a:p>
@@ -4047,7 +3979,7 @@
           <a:p>
             <a:fld id="{2605D2B5-92B7-4C8D-AC3A-18C18C239EE2}" type="datetime1">
               <a:rPr lang="sk-SK" smtClean="0"/>
-              <a:t>4.2.2026</a:t>
+              <a:t>4.3.2026</a:t>
             </a:fld>
             <a:endParaRPr lang="sk-SK"/>
           </a:p>
@@ -20207,155 +20139,42 @@
           </a:p>
         </p:txBody>
       </p:sp>
-      <p:grpSp>
-        <p:nvGrpSpPr>
-          <p:cNvPr id="9" name="Skupina 8">
+      <p:pic>
+        <p:nvPicPr>
+          <p:cNvPr id="10" name="Grafický objekt 9">
             <a:extLst>
               <a:ext uri="{FF2B5EF4-FFF2-40B4-BE49-F238E27FC236}">
-                <a16:creationId xmlns:a16="http://schemas.microsoft.com/office/drawing/2014/main" id="{C10C6C14-C282-05BE-4E23-936782880D70}"/>
+                <a16:creationId xmlns:a16="http://schemas.microsoft.com/office/drawing/2014/main" id="{96D286B6-A3A5-0A7B-AD6F-9934B9926655}"/>
               </a:ext>
             </a:extLst>
           </p:cNvPr>
-          <p:cNvGrpSpPr/>
+          <p:cNvPicPr>
+            <a:picLocks noChangeAspect="1"/>
+          </p:cNvPicPr>
           <p:nvPr/>
-        </p:nvGrpSpPr>
-        <p:grpSpPr>
-          <a:xfrm>
-            <a:off x="2209801" y="1837113"/>
-            <a:ext cx="8105775" cy="4421188"/>
-            <a:chOff x="2209801" y="1837113"/>
-            <a:chExt cx="8105775" cy="4421188"/>
-          </a:xfrm>
-        </p:grpSpPr>
-        <p:pic>
-          <p:nvPicPr>
-            <p:cNvPr id="28677" name="Picture 9" descr="producent - konzument"/>
-            <p:cNvPicPr>
-              <a:picLocks noChangeAspect="1" noChangeArrowheads="1"/>
-            </p:cNvPicPr>
-            <p:nvPr/>
-          </p:nvPicPr>
-          <p:blipFill>
-            <a:blip r:embed="rId2">
-              <a:extLst>
-                <a:ext uri="{28A0092B-C50C-407E-A947-70E740481C1C}">
-                  <a14:useLocalDpi xmlns:a14="http://schemas.microsoft.com/office/drawing/2010/main" val="0"/>
-                </a:ext>
-              </a:extLst>
-            </a:blip>
-            <a:srcRect/>
-            <a:stretch>
-              <a:fillRect/>
-            </a:stretch>
-          </p:blipFill>
-          <p:spPr bwMode="auto">
-            <a:xfrm>
-              <a:off x="2209801" y="1837113"/>
-              <a:ext cx="8105775" cy="4421188"/>
-            </a:xfrm>
-            <a:prstGeom prst="rect">
-              <a:avLst/>
-            </a:prstGeom>
-            <a:noFill/>
-            <a:ln>
-              <a:noFill/>
-            </a:ln>
+        </p:nvPicPr>
+        <p:blipFill>
+          <a:blip r:embed="rId2">
             <a:extLst>
-              <a:ext uri="{909E8E84-426E-40DD-AFC4-6F175D3DCCD1}">
-                <a14:hiddenFill xmlns:a14="http://schemas.microsoft.com/office/drawing/2010/main">
-                  <a:solidFill>
-                    <a:srgbClr val="FFFFFF"/>
-                  </a:solidFill>
-                </a14:hiddenFill>
-              </a:ext>
-              <a:ext uri="{91240B29-F687-4F45-9708-019B960494DF}">
-                <a14:hiddenLine xmlns:a14="http://schemas.microsoft.com/office/drawing/2010/main" w="9525">
-                  <a:solidFill>
-                    <a:srgbClr val="000000"/>
-                  </a:solidFill>
-                  <a:miter lim="800000"/>
-                  <a:headEnd/>
-                  <a:tailEnd/>
-                </a14:hiddenLine>
+              <a:ext uri="{96DAC541-7B7A-43D3-8B79-37D633B846F1}">
+                <asvg:svgBlip xmlns:asvg="http://schemas.microsoft.com/office/drawing/2016/SVG/main" r:embed="rId3"/>
               </a:ext>
             </a:extLst>
-          </p:spPr>
-        </p:pic>
-        <p:sp>
-          <p:nvSpPr>
-            <p:cNvPr id="7" name="BlokTextu 6">
-              <a:extLst>
-                <a:ext uri="{FF2B5EF4-FFF2-40B4-BE49-F238E27FC236}">
-                  <a16:creationId xmlns:a16="http://schemas.microsoft.com/office/drawing/2014/main" id="{90D99940-9123-4581-D9AC-BBE8F9D94D6C}"/>
-                </a:ext>
-              </a:extLst>
-            </p:cNvPr>
-            <p:cNvSpPr txBox="1"/>
-            <p:nvPr/>
-          </p:nvSpPr>
-          <p:spPr>
-            <a:xfrm>
-              <a:off x="6262688" y="3332074"/>
-              <a:ext cx="1144865" cy="369332"/>
-            </a:xfrm>
-            <a:prstGeom prst="rect">
-              <a:avLst/>
-            </a:prstGeom>
-            <a:solidFill>
-              <a:schemeClr val="bg1"/>
-            </a:solidFill>
-          </p:spPr>
-          <p:txBody>
-            <a:bodyPr wrap="none" rtlCol="0">
-              <a:spAutoFit/>
-            </a:bodyPr>
-            <a:lstStyle/>
-            <a:p>
-              <a:r>
-                <a:rPr lang="sk-SK" dirty="0"/>
-                <a:t>Sklad plné</a:t>
-              </a:r>
-            </a:p>
-          </p:txBody>
-        </p:sp>
-        <p:sp>
-          <p:nvSpPr>
-            <p:cNvPr id="8" name="BlokTextu 7">
-              <a:extLst>
-                <a:ext uri="{FF2B5EF4-FFF2-40B4-BE49-F238E27FC236}">
-                  <a16:creationId xmlns:a16="http://schemas.microsoft.com/office/drawing/2014/main" id="{9C641B73-9397-2D5D-2C98-501BC496826F}"/>
-                </a:ext>
-              </a:extLst>
-            </p:cNvPr>
-            <p:cNvSpPr txBox="1"/>
-            <p:nvPr/>
-          </p:nvSpPr>
-          <p:spPr>
-            <a:xfrm>
-              <a:off x="4567645" y="3332074"/>
-              <a:ext cx="1254959" cy="369332"/>
-            </a:xfrm>
-            <a:prstGeom prst="rect">
-              <a:avLst/>
-            </a:prstGeom>
-            <a:solidFill>
-              <a:schemeClr val="bg1"/>
-            </a:solidFill>
-          </p:spPr>
-          <p:txBody>
-            <a:bodyPr wrap="none" rtlCol="0">
-              <a:spAutoFit/>
-            </a:bodyPr>
-            <a:lstStyle/>
-            <a:p>
-              <a:r>
-                <a:rPr lang="sk-SK" dirty="0"/>
-                <a:t>Sklad voľné</a:t>
-              </a:r>
-            </a:p>
-          </p:txBody>
-        </p:sp>
-      </p:grpSp>
+          </a:blip>
+          <a:stretch>
+            <a:fillRect/>
+          </a:stretch>
+        </p:blipFill>
+        <p:spPr>
+          <a:xfrm>
+            <a:off x="2036005" y="1628772"/>
+            <a:ext cx="7946195" cy="4080479"/>
+          </a:xfrm>
+          <a:prstGeom prst="rect">
+            <a:avLst/>
+          </a:prstGeom>
+        </p:spPr>
+      </p:pic>
     </p:spTree>
     <p:extLst>
       <p:ext uri="{BB962C8B-B14F-4D97-AF65-F5344CB8AC3E}">

--- a/OS 2 Úvod do paralélnych procesov a synchronizácie.pptx
+++ b/OS 2 Úvod do paralélnych procesov a synchronizácie.pptx
@@ -5,7 +5,7 @@
     <p:sldMasterId id="2147483648" r:id="rId1"/>
   </p:sldMasterIdLst>
   <p:notesMasterIdLst>
-    <p:notesMasterId r:id="rId55"/>
+    <p:notesMasterId r:id="rId56"/>
   </p:notesMasterIdLst>
   <p:sldIdLst>
     <p:sldId id="256" r:id="rId2"/>
@@ -35,32 +35,33 @@
     <p:sldId id="301" r:id="rId26"/>
     <p:sldId id="302" r:id="rId27"/>
     <p:sldId id="303" r:id="rId28"/>
-    <p:sldId id="307" r:id="rId29"/>
-    <p:sldId id="311" r:id="rId30"/>
-    <p:sldId id="312" r:id="rId31"/>
-    <p:sldId id="314" r:id="rId32"/>
-    <p:sldId id="304" r:id="rId33"/>
-    <p:sldId id="305" r:id="rId34"/>
-    <p:sldId id="308" r:id="rId35"/>
-    <p:sldId id="321" r:id="rId36"/>
-    <p:sldId id="266" r:id="rId37"/>
-    <p:sldId id="271" r:id="rId38"/>
-    <p:sldId id="272" r:id="rId39"/>
-    <p:sldId id="274" r:id="rId40"/>
-    <p:sldId id="316" r:id="rId41"/>
-    <p:sldId id="317" r:id="rId42"/>
-    <p:sldId id="275" r:id="rId43"/>
-    <p:sldId id="276" r:id="rId44"/>
-    <p:sldId id="277" r:id="rId45"/>
-    <p:sldId id="280" r:id="rId46"/>
-    <p:sldId id="281" r:id="rId47"/>
-    <p:sldId id="282" r:id="rId48"/>
-    <p:sldId id="283" r:id="rId49"/>
-    <p:sldId id="284" r:id="rId50"/>
-    <p:sldId id="285" r:id="rId51"/>
-    <p:sldId id="286" r:id="rId52"/>
-    <p:sldId id="322" r:id="rId53"/>
-    <p:sldId id="287" r:id="rId54"/>
+    <p:sldId id="326" r:id="rId29"/>
+    <p:sldId id="307" r:id="rId30"/>
+    <p:sldId id="311" r:id="rId31"/>
+    <p:sldId id="312" r:id="rId32"/>
+    <p:sldId id="314" r:id="rId33"/>
+    <p:sldId id="304" r:id="rId34"/>
+    <p:sldId id="305" r:id="rId35"/>
+    <p:sldId id="308" r:id="rId36"/>
+    <p:sldId id="321" r:id="rId37"/>
+    <p:sldId id="266" r:id="rId38"/>
+    <p:sldId id="271" r:id="rId39"/>
+    <p:sldId id="272" r:id="rId40"/>
+    <p:sldId id="274" r:id="rId41"/>
+    <p:sldId id="316" r:id="rId42"/>
+    <p:sldId id="317" r:id="rId43"/>
+    <p:sldId id="275" r:id="rId44"/>
+    <p:sldId id="276" r:id="rId45"/>
+    <p:sldId id="277" r:id="rId46"/>
+    <p:sldId id="280" r:id="rId47"/>
+    <p:sldId id="281" r:id="rId48"/>
+    <p:sldId id="282" r:id="rId49"/>
+    <p:sldId id="283" r:id="rId50"/>
+    <p:sldId id="284" r:id="rId51"/>
+    <p:sldId id="285" r:id="rId52"/>
+    <p:sldId id="286" r:id="rId53"/>
+    <p:sldId id="322" r:id="rId54"/>
+    <p:sldId id="287" r:id="rId55"/>
   </p:sldIdLst>
   <p:sldSz cx="12192000" cy="6858000"/>
   <p:notesSz cx="6858000" cy="9144000"/>
@@ -181,7 +182,7 @@
 <file path=ppt/revisionInfo.xml><?xml version="1.0" encoding="utf-8"?>
 <p1510:revInfo xmlns:a="http://schemas.openxmlformats.org/drawingml/2006/main" xmlns:r="http://schemas.openxmlformats.org/officeDocument/2006/relationships" xmlns:p1510="http://schemas.microsoft.com/office/powerpoint/2015/10/main">
   <p1510:revLst>
-    <p1510:client id="{84875499-5C2E-3745-A556-77DA84878953}" v="1" dt="2026-03-04T06:19:49.165"/>
+    <p1510:client id="{BBAD64DB-3C71-0448-8202-0F3788188611}" v="49" dt="2026-06-16T11:01:32.838"/>
   </p1510:revLst>
 </p1510:revInfo>
 </file>
@@ -191,521 +192,148 @@
   <pc:docChgLst>
     <pc:chgData name="Baráth, Július" userId="aebde9b9-dccc-4475-a9ac-c05e78323d7a" providerId="ADAL" clId="{4A0811C8-ED2F-505E-B787-C8270CED5046}"/>
     <pc:docChg chg="undo custSel addSld delSld modSld sldOrd">
-      <pc:chgData name="Baráth, Július" userId="aebde9b9-dccc-4475-a9ac-c05e78323d7a" providerId="ADAL" clId="{4A0811C8-ED2F-505E-B787-C8270CED5046}" dt="2026-03-04T10:50:49.858" v="584" actId="1076"/>
+      <pc:chgData name="Baráth, Július" userId="aebde9b9-dccc-4475-a9ac-c05e78323d7a" providerId="ADAL" clId="{4A0811C8-ED2F-505E-B787-C8270CED5046}" dt="2026-06-16T11:03:03.049" v="1120" actId="14100"/>
       <pc:docMkLst>
         <pc:docMk/>
       </pc:docMkLst>
       <pc:sldChg chg="modSp mod">
-        <pc:chgData name="Baráth, Július" userId="aebde9b9-dccc-4475-a9ac-c05e78323d7a" providerId="ADAL" clId="{4A0811C8-ED2F-505E-B787-C8270CED5046}" dt="2026-02-03T09:57:40.265" v="14" actId="15"/>
+        <pc:chgData name="Baráth, Július" userId="aebde9b9-dccc-4475-a9ac-c05e78323d7a" providerId="ADAL" clId="{4A0811C8-ED2F-505E-B787-C8270CED5046}" dt="2026-06-16T10:30:45.806" v="587" actId="113"/>
         <pc:sldMkLst>
           <pc:docMk/>
-          <pc:sldMk cId="2192710277" sldId="257"/>
+          <pc:sldMk cId="1024189591" sldId="301"/>
         </pc:sldMkLst>
         <pc:spChg chg="mod">
-          <ac:chgData name="Baráth, Július" userId="aebde9b9-dccc-4475-a9ac-c05e78323d7a" providerId="ADAL" clId="{4A0811C8-ED2F-505E-B787-C8270CED5046}" dt="2026-02-03T09:57:40.265" v="14" actId="15"/>
+          <ac:chgData name="Baráth, Július" userId="aebde9b9-dccc-4475-a9ac-c05e78323d7a" providerId="ADAL" clId="{4A0811C8-ED2F-505E-B787-C8270CED5046}" dt="2026-06-16T10:30:45.806" v="587" actId="113"/>
           <ac:spMkLst>
             <pc:docMk/>
-            <pc:sldMk cId="2192710277" sldId="257"/>
-            <ac:spMk id="3" creationId="{0FA40D0C-06A6-A049-A6A3-184E4622E874}"/>
+            <pc:sldMk cId="1024189591" sldId="301"/>
+            <ac:spMk id="2" creationId="{F1118B14-83BB-7A4D-9A9E-84A88C7E51E4}"/>
           </ac:spMkLst>
         </pc:spChg>
       </pc:sldChg>
       <pc:sldChg chg="modSp mod">
-        <pc:chgData name="Baráth, Július" userId="aebde9b9-dccc-4475-a9ac-c05e78323d7a" providerId="ADAL" clId="{4A0811C8-ED2F-505E-B787-C8270CED5046}" dt="2026-02-03T11:48:29.273" v="556" actId="27636"/>
+        <pc:chgData name="Baráth, Július" userId="aebde9b9-dccc-4475-a9ac-c05e78323d7a" providerId="ADAL" clId="{4A0811C8-ED2F-505E-B787-C8270CED5046}" dt="2026-06-16T10:46:46.621" v="987" actId="20577"/>
         <pc:sldMkLst>
           <pc:docMk/>
-          <pc:sldMk cId="2345067092" sldId="258"/>
+          <pc:sldMk cId="3507364383" sldId="303"/>
         </pc:sldMkLst>
         <pc:spChg chg="mod">
-          <ac:chgData name="Baráth, Július" userId="aebde9b9-dccc-4475-a9ac-c05e78323d7a" providerId="ADAL" clId="{4A0811C8-ED2F-505E-B787-C8270CED5046}" dt="2026-02-03T11:48:29.273" v="556" actId="27636"/>
+          <ac:chgData name="Baráth, Július" userId="aebde9b9-dccc-4475-a9ac-c05e78323d7a" providerId="ADAL" clId="{4A0811C8-ED2F-505E-B787-C8270CED5046}" dt="2026-06-16T10:46:46.621" v="987" actId="20577"/>
           <ac:spMkLst>
             <pc:docMk/>
-            <pc:sldMk cId="2345067092" sldId="258"/>
-            <ac:spMk id="3" creationId="{695E7A34-BAD0-FD4B-88EE-A80002625D51}"/>
-          </ac:spMkLst>
-        </pc:spChg>
-      </pc:sldChg>
-      <pc:sldChg chg="addSp modSp mod">
-        <pc:chgData name="Baráth, Július" userId="aebde9b9-dccc-4475-a9ac-c05e78323d7a" providerId="ADAL" clId="{4A0811C8-ED2F-505E-B787-C8270CED5046}" dt="2026-02-03T11:49:49.011" v="566" actId="1076"/>
-        <pc:sldMkLst>
-          <pc:docMk/>
-          <pc:sldMk cId="2830035912" sldId="259"/>
-        </pc:sldMkLst>
-        <pc:spChg chg="add mod">
-          <ac:chgData name="Baráth, Július" userId="aebde9b9-dccc-4475-a9ac-c05e78323d7a" providerId="ADAL" clId="{4A0811C8-ED2F-505E-B787-C8270CED5046}" dt="2026-02-03T11:49:41.447" v="563" actId="1076"/>
-          <ac:spMkLst>
-            <pc:docMk/>
-            <pc:sldMk cId="2830035912" sldId="259"/>
-            <ac:spMk id="3" creationId="{FD4062D0-D8A9-5393-FCF0-EE033298B0DD}"/>
-          </ac:spMkLst>
-        </pc:spChg>
-        <pc:picChg chg="mod">
-          <ac:chgData name="Baráth, Július" userId="aebde9b9-dccc-4475-a9ac-c05e78323d7a" providerId="ADAL" clId="{4A0811C8-ED2F-505E-B787-C8270CED5046}" dt="2026-02-03T11:49:49.011" v="566" actId="1076"/>
-          <ac:picMkLst>
-            <pc:docMk/>
-            <pc:sldMk cId="2830035912" sldId="259"/>
-            <ac:picMk id="11" creationId="{00000000-0000-0000-0000-000000000000}"/>
-          </ac:picMkLst>
-        </pc:picChg>
-      </pc:sldChg>
-      <pc:sldChg chg="modSp">
-        <pc:chgData name="Baráth, Július" userId="aebde9b9-dccc-4475-a9ac-c05e78323d7a" providerId="ADAL" clId="{4A0811C8-ED2F-505E-B787-C8270CED5046}" dt="2026-02-03T11:50:35.132" v="568" actId="14100"/>
-        <pc:sldMkLst>
-          <pc:docMk/>
-          <pc:sldMk cId="334612787" sldId="261"/>
-        </pc:sldMkLst>
-        <pc:spChg chg="mod">
-          <ac:chgData name="Baráth, Július" userId="aebde9b9-dccc-4475-a9ac-c05e78323d7a" providerId="ADAL" clId="{4A0811C8-ED2F-505E-B787-C8270CED5046}" dt="2026-02-03T11:50:35.132" v="568" actId="14100"/>
-          <ac:spMkLst>
-            <pc:docMk/>
-            <pc:sldMk cId="334612787" sldId="261"/>
-            <ac:spMk id="11272" creationId="{00000000-0000-0000-0000-000000000000}"/>
-          </ac:spMkLst>
-        </pc:spChg>
-      </pc:sldChg>
-      <pc:sldChg chg="modSp mod">
-        <pc:chgData name="Baráth, Július" userId="aebde9b9-dccc-4475-a9ac-c05e78323d7a" providerId="ADAL" clId="{4A0811C8-ED2F-505E-B787-C8270CED5046}" dt="2026-02-03T10:00:40.875" v="25" actId="20577"/>
-        <pc:sldMkLst>
-          <pc:docMk/>
-          <pc:sldMk cId="3347599706" sldId="263"/>
-        </pc:sldMkLst>
-        <pc:spChg chg="mod">
-          <ac:chgData name="Baráth, Július" userId="aebde9b9-dccc-4475-a9ac-c05e78323d7a" providerId="ADAL" clId="{4A0811C8-ED2F-505E-B787-C8270CED5046}" dt="2026-02-03T10:00:40.875" v="25" actId="20577"/>
-          <ac:spMkLst>
-            <pc:docMk/>
-            <pc:sldMk cId="3347599706" sldId="263"/>
-            <ac:spMk id="3" creationId="{00000000-0000-0000-0000-000000000000}"/>
-          </ac:spMkLst>
-        </pc:spChg>
-      </pc:sldChg>
-      <pc:sldChg chg="addSp delSp modSp mod">
-        <pc:chgData name="Baráth, Július" userId="aebde9b9-dccc-4475-a9ac-c05e78323d7a" providerId="ADAL" clId="{4A0811C8-ED2F-505E-B787-C8270CED5046}" dt="2026-03-04T10:50:49.858" v="584" actId="1076"/>
-        <pc:sldMkLst>
-          <pc:docMk/>
-          <pc:sldMk cId="3215213909" sldId="281"/>
-        </pc:sldMkLst>
-        <pc:grpChg chg="del">
-          <ac:chgData name="Baráth, Július" userId="aebde9b9-dccc-4475-a9ac-c05e78323d7a" providerId="ADAL" clId="{4A0811C8-ED2F-505E-B787-C8270CED5046}" dt="2026-03-04T06:19:49.160" v="573" actId="478"/>
-          <ac:grpSpMkLst>
-            <pc:docMk/>
-            <pc:sldMk cId="3215213909" sldId="281"/>
-            <ac:grpSpMk id="9" creationId="{C10C6C14-C282-05BE-4E23-936782880D70}"/>
-          </ac:grpSpMkLst>
-        </pc:grpChg>
-        <pc:picChg chg="add del mod">
-          <ac:chgData name="Baráth, Július" userId="aebde9b9-dccc-4475-a9ac-c05e78323d7a" providerId="ADAL" clId="{4A0811C8-ED2F-505E-B787-C8270CED5046}" dt="2026-03-04T10:49:08.616" v="581" actId="478"/>
-          <ac:picMkLst>
-            <pc:docMk/>
-            <pc:sldMk cId="3215213909" sldId="281"/>
-            <ac:picMk id="8" creationId="{9D1BF54F-33B1-D75C-5915-3C4DB635DCD9}"/>
-          </ac:picMkLst>
-        </pc:picChg>
-        <pc:picChg chg="add mod">
-          <ac:chgData name="Baráth, Július" userId="aebde9b9-dccc-4475-a9ac-c05e78323d7a" providerId="ADAL" clId="{4A0811C8-ED2F-505E-B787-C8270CED5046}" dt="2026-03-04T10:50:49.858" v="584" actId="1076"/>
-          <ac:picMkLst>
-            <pc:docMk/>
-            <pc:sldMk cId="3215213909" sldId="281"/>
-            <ac:picMk id="10" creationId="{96D286B6-A3A5-0A7B-AD6F-9934B9926655}"/>
-          </ac:picMkLst>
-        </pc:picChg>
-        <pc:picChg chg="add del mod">
-          <ac:chgData name="Baráth, Július" userId="aebde9b9-dccc-4475-a9ac-c05e78323d7a" providerId="ADAL" clId="{4A0811C8-ED2F-505E-B787-C8270CED5046}" dt="2026-03-04T10:48:43.996" v="579" actId="478"/>
-          <ac:picMkLst>
-            <pc:docMk/>
-            <pc:sldMk cId="3215213909" sldId="281"/>
-            <ac:picMk id="11" creationId="{8D265D07-AB68-461F-A2A8-23B1ED1CC8CE}"/>
-          </ac:picMkLst>
-        </pc:picChg>
-      </pc:sldChg>
-      <pc:sldChg chg="addSp delSp modSp mod">
-        <pc:chgData name="Baráth, Július" userId="aebde9b9-dccc-4475-a9ac-c05e78323d7a" providerId="ADAL" clId="{4A0811C8-ED2F-505E-B787-C8270CED5046}" dt="2026-02-03T10:47:25.906" v="299" actId="20577"/>
-        <pc:sldMkLst>
-          <pc:docMk/>
-          <pc:sldMk cId="2459821752" sldId="288"/>
-        </pc:sldMkLst>
-        <pc:spChg chg="mod">
-          <ac:chgData name="Baráth, Július" userId="aebde9b9-dccc-4475-a9ac-c05e78323d7a" providerId="ADAL" clId="{4A0811C8-ED2F-505E-B787-C8270CED5046}" dt="2026-02-03T10:47:25.906" v="299" actId="20577"/>
-          <ac:spMkLst>
-            <pc:docMk/>
-            <pc:sldMk cId="2459821752" sldId="288"/>
-            <ac:spMk id="3" creationId="{00000000-0000-0000-0000-000000000000}"/>
-          </ac:spMkLst>
-        </pc:spChg>
-      </pc:sldChg>
-      <pc:sldChg chg="modSp mod">
-        <pc:chgData name="Baráth, Július" userId="aebde9b9-dccc-4475-a9ac-c05e78323d7a" providerId="ADAL" clId="{4A0811C8-ED2F-505E-B787-C8270CED5046}" dt="2026-02-03T10:54:29.284" v="317" actId="20577"/>
-        <pc:sldMkLst>
-          <pc:docMk/>
-          <pc:sldMk cId="4088828821" sldId="290"/>
-        </pc:sldMkLst>
-        <pc:spChg chg="mod">
-          <ac:chgData name="Baráth, Július" userId="aebde9b9-dccc-4475-a9ac-c05e78323d7a" providerId="ADAL" clId="{4A0811C8-ED2F-505E-B787-C8270CED5046}" dt="2026-02-03T10:54:29.284" v="317" actId="20577"/>
-          <ac:spMkLst>
-            <pc:docMk/>
-            <pc:sldMk cId="4088828821" sldId="290"/>
-            <ac:spMk id="2" creationId="{77AC8B45-E5C5-E444-A45D-D2726973EBAD}"/>
-          </ac:spMkLst>
-        </pc:spChg>
-        <pc:spChg chg="mod">
-          <ac:chgData name="Baráth, Július" userId="aebde9b9-dccc-4475-a9ac-c05e78323d7a" providerId="ADAL" clId="{4A0811C8-ED2F-505E-B787-C8270CED5046}" dt="2026-02-03T10:54:20.945" v="313" actId="403"/>
-          <ac:spMkLst>
-            <pc:docMk/>
-            <pc:sldMk cId="4088828821" sldId="290"/>
-            <ac:spMk id="3" creationId="{59717443-41A9-56B0-C747-36FFC65F3CFE}"/>
-          </ac:spMkLst>
-        </pc:spChg>
-      </pc:sldChg>
-      <pc:sldChg chg="modSp mod">
-        <pc:chgData name="Baráth, Július" userId="aebde9b9-dccc-4475-a9ac-c05e78323d7a" providerId="ADAL" clId="{4A0811C8-ED2F-505E-B787-C8270CED5046}" dt="2026-02-03T10:03:51.624" v="27" actId="1076"/>
-        <pc:sldMkLst>
-          <pc:docMk/>
-          <pc:sldMk cId="2068648163" sldId="291"/>
-        </pc:sldMkLst>
-        <pc:spChg chg="mod">
-          <ac:chgData name="Baráth, Július" userId="aebde9b9-dccc-4475-a9ac-c05e78323d7a" providerId="ADAL" clId="{4A0811C8-ED2F-505E-B787-C8270CED5046}" dt="2026-02-03T10:03:51.624" v="27" actId="1076"/>
-          <ac:spMkLst>
-            <pc:docMk/>
-            <pc:sldMk cId="2068648163" sldId="291"/>
-            <ac:spMk id="3" creationId="{00000000-0000-0000-0000-000000000000}"/>
-          </ac:spMkLst>
-        </pc:spChg>
-      </pc:sldChg>
-      <pc:sldChg chg="modSp mod">
-        <pc:chgData name="Baráth, Július" userId="aebde9b9-dccc-4475-a9ac-c05e78323d7a" providerId="ADAL" clId="{4A0811C8-ED2F-505E-B787-C8270CED5046}" dt="2026-02-03T10:04:07.524" v="30" actId="27636"/>
-        <pc:sldMkLst>
-          <pc:docMk/>
-          <pc:sldMk cId="2176794767" sldId="292"/>
-        </pc:sldMkLst>
-        <pc:spChg chg="mod">
-          <ac:chgData name="Baráth, Július" userId="aebde9b9-dccc-4475-a9ac-c05e78323d7a" providerId="ADAL" clId="{4A0811C8-ED2F-505E-B787-C8270CED5046}" dt="2026-02-03T10:03:27.848" v="26" actId="113"/>
-          <ac:spMkLst>
-            <pc:docMk/>
-            <pc:sldMk cId="2176794767" sldId="292"/>
-            <ac:spMk id="2" creationId="{00000000-0000-0000-0000-000000000000}"/>
-          </ac:spMkLst>
-        </pc:spChg>
-        <pc:spChg chg="mod">
-          <ac:chgData name="Baráth, Július" userId="aebde9b9-dccc-4475-a9ac-c05e78323d7a" providerId="ADAL" clId="{4A0811C8-ED2F-505E-B787-C8270CED5046}" dt="2026-02-03T10:04:07.524" v="30" actId="27636"/>
-          <ac:spMkLst>
-            <pc:docMk/>
-            <pc:sldMk cId="2176794767" sldId="292"/>
-            <ac:spMk id="4" creationId="{00000000-0000-0000-0000-000000000000}"/>
-          </ac:spMkLst>
-        </pc:spChg>
-      </pc:sldChg>
-      <pc:sldChg chg="addSp modSp mod">
-        <pc:chgData name="Baráth, Július" userId="aebde9b9-dccc-4475-a9ac-c05e78323d7a" providerId="ADAL" clId="{4A0811C8-ED2F-505E-B787-C8270CED5046}" dt="2026-02-03T11:06:40.153" v="460" actId="368"/>
-        <pc:sldMkLst>
-          <pc:docMk/>
-          <pc:sldMk cId="3256878633" sldId="297"/>
-        </pc:sldMkLst>
-        <pc:spChg chg="mod">
-          <ac:chgData name="Baráth, Július" userId="aebde9b9-dccc-4475-a9ac-c05e78323d7a" providerId="ADAL" clId="{4A0811C8-ED2F-505E-B787-C8270CED5046}" dt="2026-02-03T11:06:31.575" v="459" actId="27636"/>
-          <ac:spMkLst>
-            <pc:docMk/>
-            <pc:sldMk cId="3256878633" sldId="297"/>
-            <ac:spMk id="2" creationId="{22124CC1-E539-9D43-BE9F-145005443BEF}"/>
-          </ac:spMkLst>
-        </pc:spChg>
-        <pc:spChg chg="mod">
-          <ac:chgData name="Baráth, Július" userId="aebde9b9-dccc-4475-a9ac-c05e78323d7a" providerId="ADAL" clId="{4A0811C8-ED2F-505E-B787-C8270CED5046}" dt="2026-02-03T11:06:40.153" v="460" actId="368"/>
-          <ac:spMkLst>
-            <pc:docMk/>
-            <pc:sldMk cId="3256878633" sldId="297"/>
-            <ac:spMk id="23556" creationId="{00000000-0000-0000-0000-000000000000}"/>
-          </ac:spMkLst>
-        </pc:spChg>
-      </pc:sldChg>
-      <pc:sldChg chg="addSp modSp mod">
-        <pc:chgData name="Baráth, Július" userId="aebde9b9-dccc-4475-a9ac-c05e78323d7a" providerId="ADAL" clId="{4A0811C8-ED2F-505E-B787-C8270CED5046}" dt="2026-02-03T11:03:02.785" v="415" actId="20577"/>
-        <pc:sldMkLst>
-          <pc:docMk/>
-          <pc:sldMk cId="887361340" sldId="298"/>
-        </pc:sldMkLst>
-        <pc:spChg chg="add mod">
-          <ac:chgData name="Baráth, Július" userId="aebde9b9-dccc-4475-a9ac-c05e78323d7a" providerId="ADAL" clId="{4A0811C8-ED2F-505E-B787-C8270CED5046}" dt="2026-02-03T11:03:02.785" v="415" actId="20577"/>
-          <ac:spMkLst>
-            <pc:docMk/>
-            <pc:sldMk cId="887361340" sldId="298"/>
-            <ac:spMk id="2" creationId="{22D9CFC9-7A34-A25D-84B6-792F17980B5F}"/>
-          </ac:spMkLst>
-        </pc:spChg>
-        <pc:spChg chg="mod">
-          <ac:chgData name="Baráth, Július" userId="aebde9b9-dccc-4475-a9ac-c05e78323d7a" providerId="ADAL" clId="{4A0811C8-ED2F-505E-B787-C8270CED5046}" dt="2026-02-03T11:02:06.716" v="408" actId="113"/>
-          <ac:spMkLst>
-            <pc:docMk/>
-            <pc:sldMk cId="887361340" sldId="298"/>
-            <ac:spMk id="4" creationId="{2E04A82A-6BA7-1244-8440-256F60A16143}"/>
-          </ac:spMkLst>
-        </pc:spChg>
-        <pc:spChg chg="mod">
-          <ac:chgData name="Baráth, Július" userId="aebde9b9-dccc-4475-a9ac-c05e78323d7a" providerId="ADAL" clId="{4A0811C8-ED2F-505E-B787-C8270CED5046}" dt="2026-02-03T11:02:13.713" v="409" actId="1076"/>
-          <ac:spMkLst>
-            <pc:docMk/>
-            <pc:sldMk cId="887361340" sldId="298"/>
-            <ac:spMk id="24580" creationId="{00000000-0000-0000-0000-000000000000}"/>
-          </ac:spMkLst>
-        </pc:spChg>
-      </pc:sldChg>
-      <pc:sldChg chg="addSp modSp mod modClrScheme chgLayout">
-        <pc:chgData name="Baráth, Július" userId="aebde9b9-dccc-4475-a9ac-c05e78323d7a" providerId="ADAL" clId="{4A0811C8-ED2F-505E-B787-C8270CED5046}" dt="2026-02-03T11:13:01.899" v="515" actId="12"/>
-        <pc:sldMkLst>
-          <pc:docMk/>
-          <pc:sldMk cId="4070380688" sldId="300"/>
-        </pc:sldMkLst>
-        <pc:spChg chg="add mod ord">
-          <ac:chgData name="Baráth, Július" userId="aebde9b9-dccc-4475-a9ac-c05e78323d7a" providerId="ADAL" clId="{4A0811C8-ED2F-505E-B787-C8270CED5046}" dt="2026-02-03T11:13:01.899" v="515" actId="12"/>
-          <ac:spMkLst>
-            <pc:docMk/>
-            <pc:sldMk cId="4070380688" sldId="300"/>
-            <ac:spMk id="2" creationId="{6795B5F3-D4C8-C27A-C4E5-445C8779B727}"/>
-          </ac:spMkLst>
-        </pc:spChg>
-        <pc:spChg chg="mod ord">
-          <ac:chgData name="Baráth, Július" userId="aebde9b9-dccc-4475-a9ac-c05e78323d7a" providerId="ADAL" clId="{4A0811C8-ED2F-505E-B787-C8270CED5046}" dt="2026-02-03T11:12:59.440" v="514" actId="12"/>
-          <ac:spMkLst>
-            <pc:docMk/>
-            <pc:sldMk cId="4070380688" sldId="300"/>
-            <ac:spMk id="5" creationId="{00000000-0000-0000-0000-000000000000}"/>
-          </ac:spMkLst>
-        </pc:spChg>
-        <pc:spChg chg="mod ord">
-          <ac:chgData name="Baráth, Július" userId="aebde9b9-dccc-4475-a9ac-c05e78323d7a" providerId="ADAL" clId="{4A0811C8-ED2F-505E-B787-C8270CED5046}" dt="2026-02-03T11:11:42.989" v="479" actId="700"/>
-          <ac:spMkLst>
-            <pc:docMk/>
-            <pc:sldMk cId="4070380688" sldId="300"/>
-            <ac:spMk id="26627" creationId="{00000000-0000-0000-0000-000000000000}"/>
-          </ac:spMkLst>
-        </pc:spChg>
-        <pc:spChg chg="mod ord">
-          <ac:chgData name="Baráth, Július" userId="aebde9b9-dccc-4475-a9ac-c05e78323d7a" providerId="ADAL" clId="{4A0811C8-ED2F-505E-B787-C8270CED5046}" dt="2026-02-03T11:12:01.886" v="493" actId="20577"/>
-          <ac:spMkLst>
-            <pc:docMk/>
-            <pc:sldMk cId="4070380688" sldId="300"/>
-            <ac:spMk id="26628" creationId="{00000000-0000-0000-0000-000000000000}"/>
-          </ac:spMkLst>
-        </pc:spChg>
-      </pc:sldChg>
-      <pc:sldChg chg="addSp delSp modSp mod modClrScheme chgLayout">
-        <pc:chgData name="Baráth, Július" userId="aebde9b9-dccc-4475-a9ac-c05e78323d7a" providerId="ADAL" clId="{4A0811C8-ED2F-505E-B787-C8270CED5046}" dt="2026-02-03T11:42:23.968" v="549" actId="15"/>
-        <pc:sldMkLst>
-          <pc:docMk/>
-          <pc:sldMk cId="397644615" sldId="304"/>
-        </pc:sldMkLst>
-        <pc:spChg chg="add mod ord">
-          <ac:chgData name="Baráth, Július" userId="aebde9b9-dccc-4475-a9ac-c05e78323d7a" providerId="ADAL" clId="{4A0811C8-ED2F-505E-B787-C8270CED5046}" dt="2026-02-03T11:42:23.968" v="549" actId="15"/>
-          <ac:spMkLst>
-            <pc:docMk/>
-            <pc:sldMk cId="397644615" sldId="304"/>
-            <ac:spMk id="3" creationId="{C546CA57-7330-134E-82B3-A6C54F8156E0}"/>
-          </ac:spMkLst>
-        </pc:spChg>
-        <pc:spChg chg="mod ord">
-          <ac:chgData name="Baráth, Július" userId="aebde9b9-dccc-4475-a9ac-c05e78323d7a" providerId="ADAL" clId="{4A0811C8-ED2F-505E-B787-C8270CED5046}" dt="2026-02-03T11:40:11.159" v="527" actId="700"/>
-          <ac:spMkLst>
-            <pc:docMk/>
-            <pc:sldMk cId="397644615" sldId="304"/>
-            <ac:spMk id="30723" creationId="{00000000-0000-0000-0000-000000000000}"/>
-          </ac:spMkLst>
-        </pc:spChg>
-        <pc:spChg chg="mod ord">
-          <ac:chgData name="Baráth, Július" userId="aebde9b9-dccc-4475-a9ac-c05e78323d7a" providerId="ADAL" clId="{4A0811C8-ED2F-505E-B787-C8270CED5046}" dt="2026-02-03T11:41:28.793" v="538" actId="1076"/>
-          <ac:spMkLst>
-            <pc:docMk/>
-            <pc:sldMk cId="397644615" sldId="304"/>
-            <ac:spMk id="30725" creationId="{00000000-0000-0000-0000-000000000000}"/>
-          </ac:spMkLst>
-        </pc:spChg>
-      </pc:sldChg>
-      <pc:sldChg chg="modSp mod">
-        <pc:chgData name="Baráth, Július" userId="aebde9b9-dccc-4475-a9ac-c05e78323d7a" providerId="ADAL" clId="{4A0811C8-ED2F-505E-B787-C8270CED5046}" dt="2026-02-03T11:41:58.392" v="541" actId="12"/>
-        <pc:sldMkLst>
-          <pc:docMk/>
-          <pc:sldMk cId="4133182652" sldId="305"/>
-        </pc:sldMkLst>
-        <pc:spChg chg="mod">
-          <ac:chgData name="Baráth, Július" userId="aebde9b9-dccc-4475-a9ac-c05e78323d7a" providerId="ADAL" clId="{4A0811C8-ED2F-505E-B787-C8270CED5046}" dt="2026-02-03T11:41:58.392" v="541" actId="12"/>
-          <ac:spMkLst>
-            <pc:docMk/>
-            <pc:sldMk cId="4133182652" sldId="305"/>
-            <ac:spMk id="31748" creationId="{00000000-0000-0000-0000-000000000000}"/>
-          </ac:spMkLst>
-        </pc:spChg>
-      </pc:sldChg>
-      <pc:sldChg chg="modSp mod">
-        <pc:chgData name="Baráth, Július" userId="aebde9b9-dccc-4475-a9ac-c05e78323d7a" providerId="ADAL" clId="{4A0811C8-ED2F-505E-B787-C8270CED5046}" dt="2026-02-03T10:24:22.594" v="89"/>
-        <pc:sldMkLst>
-          <pc:docMk/>
-          <pc:sldMk cId="3235063092" sldId="306"/>
-        </pc:sldMkLst>
-        <pc:spChg chg="mod">
-          <ac:chgData name="Baráth, Július" userId="aebde9b9-dccc-4475-a9ac-c05e78323d7a" providerId="ADAL" clId="{4A0811C8-ED2F-505E-B787-C8270CED5046}" dt="2026-02-03T10:15:00.675" v="68"/>
-          <ac:spMkLst>
-            <pc:docMk/>
-            <pc:sldMk cId="3235063092" sldId="306"/>
-            <ac:spMk id="2" creationId="{00000000-0000-0000-0000-000000000000}"/>
-          </ac:spMkLst>
-        </pc:spChg>
-        <pc:spChg chg="mod">
-          <ac:chgData name="Baráth, Július" userId="aebde9b9-dccc-4475-a9ac-c05e78323d7a" providerId="ADAL" clId="{4A0811C8-ED2F-505E-B787-C8270CED5046}" dt="2026-02-03T10:17:45.450" v="87" actId="27636"/>
-          <ac:spMkLst>
-            <pc:docMk/>
-            <pc:sldMk cId="3235063092" sldId="306"/>
-            <ac:spMk id="3" creationId="{00000000-0000-0000-0000-000000000000}"/>
-          </ac:spMkLst>
-        </pc:spChg>
-        <pc:spChg chg="mod">
-          <ac:chgData name="Baráth, Július" userId="aebde9b9-dccc-4475-a9ac-c05e78323d7a" providerId="ADAL" clId="{4A0811C8-ED2F-505E-B787-C8270CED5046}" dt="2026-02-03T10:24:22.594" v="89"/>
-          <ac:spMkLst>
-            <pc:docMk/>
-            <pc:sldMk cId="3235063092" sldId="306"/>
-            <ac:spMk id="6" creationId="{1996FD82-8067-2950-8203-05A0703821E7}"/>
-          </ac:spMkLst>
-        </pc:spChg>
-      </pc:sldChg>
-      <pc:sldChg chg="modSp mod">
-        <pc:chgData name="Baráth, Július" userId="aebde9b9-dccc-4475-a9ac-c05e78323d7a" providerId="ADAL" clId="{4A0811C8-ED2F-505E-B787-C8270CED5046}" dt="2026-02-03T11:37:18.778" v="517" actId="113"/>
-        <pc:sldMkLst>
-          <pc:docMk/>
-          <pc:sldMk cId="650989019" sldId="311"/>
-        </pc:sldMkLst>
-        <pc:spChg chg="mod">
-          <ac:chgData name="Baráth, Július" userId="aebde9b9-dccc-4475-a9ac-c05e78323d7a" providerId="ADAL" clId="{4A0811C8-ED2F-505E-B787-C8270CED5046}" dt="2026-02-03T11:37:18.778" v="517" actId="113"/>
-          <ac:spMkLst>
-            <pc:docMk/>
-            <pc:sldMk cId="650989019" sldId="311"/>
-            <ac:spMk id="16388" creationId="{00000000-0000-0000-0000-000000000000}"/>
-          </ac:spMkLst>
-        </pc:spChg>
-      </pc:sldChg>
-      <pc:sldChg chg="modSp mod">
-        <pc:chgData name="Baráth, Július" userId="aebde9b9-dccc-4475-a9ac-c05e78323d7a" providerId="ADAL" clId="{4A0811C8-ED2F-505E-B787-C8270CED5046}" dt="2026-02-03T11:37:38.454" v="520" actId="113"/>
-        <pc:sldMkLst>
-          <pc:docMk/>
-          <pc:sldMk cId="2953323799" sldId="312"/>
-        </pc:sldMkLst>
-        <pc:spChg chg="mod">
-          <ac:chgData name="Baráth, Július" userId="aebde9b9-dccc-4475-a9ac-c05e78323d7a" providerId="ADAL" clId="{4A0811C8-ED2F-505E-B787-C8270CED5046}" dt="2026-02-03T11:37:38.454" v="520" actId="113"/>
-          <ac:spMkLst>
-            <pc:docMk/>
-            <pc:sldMk cId="2953323799" sldId="312"/>
-            <ac:spMk id="17412" creationId="{00000000-0000-0000-0000-000000000000}"/>
-          </ac:spMkLst>
-        </pc:spChg>
-      </pc:sldChg>
-      <pc:sldChg chg="modSp mod">
-        <pc:chgData name="Baráth, Július" userId="aebde9b9-dccc-4475-a9ac-c05e78323d7a" providerId="ADAL" clId="{4A0811C8-ED2F-505E-B787-C8270CED5046}" dt="2026-02-03T11:37:55.318" v="522" actId="113"/>
-        <pc:sldMkLst>
-          <pc:docMk/>
-          <pc:sldMk cId="3914507190" sldId="314"/>
-        </pc:sldMkLst>
-        <pc:spChg chg="mod">
-          <ac:chgData name="Baráth, Július" userId="aebde9b9-dccc-4475-a9ac-c05e78323d7a" providerId="ADAL" clId="{4A0811C8-ED2F-505E-B787-C8270CED5046}" dt="2026-02-03T11:37:55.318" v="522" actId="113"/>
-          <ac:spMkLst>
-            <pc:docMk/>
-            <pc:sldMk cId="3914507190" sldId="314"/>
-            <ac:spMk id="19460" creationId="{00000000-0000-0000-0000-000000000000}"/>
-          </ac:spMkLst>
-        </pc:spChg>
-      </pc:sldChg>
-      <pc:sldChg chg="modSp new mod ord">
-        <pc:chgData name="Baráth, Július" userId="aebde9b9-dccc-4475-a9ac-c05e78323d7a" providerId="ADAL" clId="{4A0811C8-ED2F-505E-B787-C8270CED5046}" dt="2026-02-03T10:40:54.668" v="195" actId="20578"/>
-        <pc:sldMkLst>
-          <pc:docMk/>
-          <pc:sldMk cId="4143176927" sldId="323"/>
-        </pc:sldMkLst>
-        <pc:spChg chg="mod">
-          <ac:chgData name="Baráth, Július" userId="aebde9b9-dccc-4475-a9ac-c05e78323d7a" providerId="ADAL" clId="{4A0811C8-ED2F-505E-B787-C8270CED5046}" dt="2026-02-03T10:38:01.469" v="194" actId="1076"/>
-          <ac:spMkLst>
-            <pc:docMk/>
-            <pc:sldMk cId="4143176927" sldId="323"/>
-            <ac:spMk id="2" creationId="{389F8CB0-B231-AE94-1A65-7BE6252F199D}"/>
-          </ac:spMkLst>
-        </pc:spChg>
-        <pc:spChg chg="mod">
-          <ac:chgData name="Baráth, Július" userId="aebde9b9-dccc-4475-a9ac-c05e78323d7a" providerId="ADAL" clId="{4A0811C8-ED2F-505E-B787-C8270CED5046}" dt="2026-02-03T10:37:53.345" v="193" actId="115"/>
-          <ac:spMkLst>
-            <pc:docMk/>
-            <pc:sldMk cId="4143176927" sldId="323"/>
-            <ac:spMk id="3" creationId="{A0AC6075-5FE4-5CEE-4243-455D47306D1A}"/>
-          </ac:spMkLst>
-        </pc:spChg>
-      </pc:sldChg>
-      <pc:sldChg chg="addSp modSp new mod modClrScheme chgLayout">
-        <pc:chgData name="Baráth, Július" userId="aebde9b9-dccc-4475-a9ac-c05e78323d7a" providerId="ADAL" clId="{4A0811C8-ED2F-505E-B787-C8270CED5046}" dt="2026-02-03T11:08:56.324" v="478" actId="27636"/>
-        <pc:sldMkLst>
-          <pc:docMk/>
-          <pc:sldMk cId="3071328026" sldId="324"/>
-        </pc:sldMkLst>
-        <pc:spChg chg="mod ord">
-          <ac:chgData name="Baráth, Július" userId="aebde9b9-dccc-4475-a9ac-c05e78323d7a" providerId="ADAL" clId="{4A0811C8-ED2F-505E-B787-C8270CED5046}" dt="2026-02-03T10:41:33.717" v="245" actId="700"/>
-          <ac:spMkLst>
-            <pc:docMk/>
-            <pc:sldMk cId="3071328026" sldId="324"/>
-            <ac:spMk id="2" creationId="{DEBD3764-4E11-D5ED-FCCE-24E6AD3F37E7}"/>
-          </ac:spMkLst>
-        </pc:spChg>
-        <pc:spChg chg="mod ord">
-          <ac:chgData name="Baráth, Július" userId="aebde9b9-dccc-4475-a9ac-c05e78323d7a" providerId="ADAL" clId="{4A0811C8-ED2F-505E-B787-C8270CED5046}" dt="2026-02-03T11:08:56.324" v="478" actId="27636"/>
-          <ac:spMkLst>
-            <pc:docMk/>
-            <pc:sldMk cId="3071328026" sldId="324"/>
-            <ac:spMk id="3" creationId="{DFF2BF87-46ED-5D64-7969-73B7C32A64F3}"/>
-          </ac:spMkLst>
-        </pc:spChg>
-        <pc:spChg chg="mod ord">
-          <ac:chgData name="Baráth, Július" userId="aebde9b9-dccc-4475-a9ac-c05e78323d7a" providerId="ADAL" clId="{4A0811C8-ED2F-505E-B787-C8270CED5046}" dt="2026-02-03T10:41:33.717" v="245" actId="700"/>
-          <ac:spMkLst>
-            <pc:docMk/>
-            <pc:sldMk cId="3071328026" sldId="324"/>
-            <ac:spMk id="4" creationId="{BF0FC116-C928-BEA6-584A-5ED4CCC30D64}"/>
-          </ac:spMkLst>
-        </pc:spChg>
-        <pc:spChg chg="add mod ord">
-          <ac:chgData name="Baráth, Július" userId="aebde9b9-dccc-4475-a9ac-c05e78323d7a" providerId="ADAL" clId="{4A0811C8-ED2F-505E-B787-C8270CED5046}" dt="2026-02-03T11:08:49.896" v="477" actId="27636"/>
-          <ac:spMkLst>
-            <pc:docMk/>
-            <pc:sldMk cId="3071328026" sldId="324"/>
-            <ac:spMk id="5" creationId="{A7B87D77-693F-0A51-7BF4-4BD37C814524}"/>
+            <pc:sldMk cId="3507364383" sldId="303"/>
+            <ac:spMk id="29700" creationId="{00000000-0000-0000-0000-000000000000}"/>
           </ac:spMkLst>
         </pc:spChg>
       </pc:sldChg>
       <pc:sldChg chg="addSp delSp modSp new mod modClrScheme chgLayout">
-        <pc:chgData name="Baráth, Július" userId="aebde9b9-dccc-4475-a9ac-c05e78323d7a" providerId="ADAL" clId="{4A0811C8-ED2F-505E-B787-C8270CED5046}" dt="2026-02-03T11:00:25.374" v="390" actId="27636"/>
+        <pc:chgData name="Baráth, Július" userId="aebde9b9-dccc-4475-a9ac-c05e78323d7a" providerId="ADAL" clId="{4A0811C8-ED2F-505E-B787-C8270CED5046}" dt="2026-06-16T11:03:03.049" v="1120" actId="14100"/>
         <pc:sldMkLst>
           <pc:docMk/>
-          <pc:sldMk cId="4236122441" sldId="325"/>
+          <pc:sldMk cId="2875282902" sldId="326"/>
         </pc:sldMkLst>
         <pc:spChg chg="mod ord">
-          <ac:chgData name="Baráth, Július" userId="aebde9b9-dccc-4475-a9ac-c05e78323d7a" providerId="ADAL" clId="{4A0811C8-ED2F-505E-B787-C8270CED5046}" dt="2026-02-03T10:57:31.034" v="319" actId="700"/>
+          <ac:chgData name="Baráth, Július" userId="aebde9b9-dccc-4475-a9ac-c05e78323d7a" providerId="ADAL" clId="{4A0811C8-ED2F-505E-B787-C8270CED5046}" dt="2026-06-16T10:49:44.407" v="1026" actId="6264"/>
           <ac:spMkLst>
             <pc:docMk/>
-            <pc:sldMk cId="4236122441" sldId="325"/>
-            <ac:spMk id="4" creationId="{391AF846-30F8-3112-C22A-91BAFF7E7F1D}"/>
+            <pc:sldMk cId="2875282902" sldId="326"/>
+            <ac:spMk id="2" creationId="{C77FE44E-D85F-E22E-5A9A-9F4D2B22507F}"/>
+          </ac:spMkLst>
+        </pc:spChg>
+        <pc:spChg chg="add del mod ord">
+          <ac:chgData name="Baráth, Július" userId="aebde9b9-dccc-4475-a9ac-c05e78323d7a" providerId="ADAL" clId="{4A0811C8-ED2F-505E-B787-C8270CED5046}" dt="2026-06-16T10:31:43.269" v="590" actId="700"/>
+          <ac:spMkLst>
+            <pc:docMk/>
+            <pc:sldMk cId="2875282902" sldId="326"/>
+            <ac:spMk id="3" creationId="{95030553-F48D-1357-C7FD-0846EE1A9CB7}"/>
+          </ac:spMkLst>
+        </pc:spChg>
+        <pc:spChg chg="add del mod ord">
+          <ac:chgData name="Baráth, Július" userId="aebde9b9-dccc-4475-a9ac-c05e78323d7a" providerId="ADAL" clId="{4A0811C8-ED2F-505E-B787-C8270CED5046}" dt="2026-06-16T10:31:43.269" v="590" actId="700"/>
+          <ac:spMkLst>
+            <pc:docMk/>
+            <pc:sldMk cId="2875282902" sldId="326"/>
+            <ac:spMk id="4" creationId="{4B0C2D42-3F20-EF0D-97C5-085F48D5A4A7}"/>
+          </ac:spMkLst>
+        </pc:spChg>
+        <pc:spChg chg="add del mod ord">
+          <ac:chgData name="Baráth, Július" userId="aebde9b9-dccc-4475-a9ac-c05e78323d7a" providerId="ADAL" clId="{4A0811C8-ED2F-505E-B787-C8270CED5046}" dt="2026-06-16T10:31:43.269" v="590" actId="700"/>
+          <ac:spMkLst>
+            <pc:docMk/>
+            <pc:sldMk cId="2875282902" sldId="326"/>
+            <ac:spMk id="5" creationId="{EAD505B7-CD9B-9174-0696-FFE7E6867DEC}"/>
+          </ac:spMkLst>
+        </pc:spChg>
+        <pc:spChg chg="add del mod ord">
+          <ac:chgData name="Baráth, Július" userId="aebde9b9-dccc-4475-a9ac-c05e78323d7a" providerId="ADAL" clId="{4A0811C8-ED2F-505E-B787-C8270CED5046}" dt="2026-06-16T10:31:43.269" v="590" actId="700"/>
+          <ac:spMkLst>
+            <pc:docMk/>
+            <pc:sldMk cId="2875282902" sldId="326"/>
+            <ac:spMk id="6" creationId="{65928184-69D7-39A5-AD72-6D01D6BA5F39}"/>
+          </ac:spMkLst>
+        </pc:spChg>
+        <pc:spChg chg="add del mod ord">
+          <ac:chgData name="Baráth, Július" userId="aebde9b9-dccc-4475-a9ac-c05e78323d7a" providerId="ADAL" clId="{4A0811C8-ED2F-505E-B787-C8270CED5046}" dt="2026-06-16T10:31:43.269" v="590" actId="700"/>
+          <ac:spMkLst>
+            <pc:docMk/>
+            <pc:sldMk cId="2875282902" sldId="326"/>
+            <ac:spMk id="7" creationId="{05CC1915-3658-DA9A-BE93-9F0F060F7196}"/>
           </ac:spMkLst>
         </pc:spChg>
         <pc:spChg chg="add mod ord">
-          <ac:chgData name="Baráth, Július" userId="aebde9b9-dccc-4475-a9ac-c05e78323d7a" providerId="ADAL" clId="{4A0811C8-ED2F-505E-B787-C8270CED5046}" dt="2026-02-03T10:59:10.024" v="380" actId="20577"/>
+          <ac:chgData name="Baráth, Július" userId="aebde9b9-dccc-4475-a9ac-c05e78323d7a" providerId="ADAL" clId="{4A0811C8-ED2F-505E-B787-C8270CED5046}" dt="2026-06-16T11:03:03.049" v="1120" actId="14100"/>
           <ac:spMkLst>
             <pc:docMk/>
-            <pc:sldMk cId="4236122441" sldId="325"/>
-            <ac:spMk id="5" creationId="{008B4378-E2CA-1AF3-D6D9-5772F1653F42}"/>
+            <pc:sldMk cId="2875282902" sldId="326"/>
+            <ac:spMk id="8" creationId="{263FCA88-87F8-9C2A-216E-17BD91D06B45}"/>
           </ac:spMkLst>
         </pc:spChg>
         <pc:spChg chg="add mod ord">
-          <ac:chgData name="Baráth, Július" userId="aebde9b9-dccc-4475-a9ac-c05e78323d7a" providerId="ADAL" clId="{4A0811C8-ED2F-505E-B787-C8270CED5046}" dt="2026-02-03T11:00:25.374" v="390" actId="27636"/>
+          <ac:chgData name="Baráth, Július" userId="aebde9b9-dccc-4475-a9ac-c05e78323d7a" providerId="ADAL" clId="{4A0811C8-ED2F-505E-B787-C8270CED5046}" dt="2026-06-16T10:59:49.544" v="1095" actId="27636"/>
           <ac:spMkLst>
             <pc:docMk/>
-            <pc:sldMk cId="4236122441" sldId="325"/>
-            <ac:spMk id="6" creationId="{4FAE959A-2B3C-6D10-B76E-78E2ACE4B104}"/>
+            <pc:sldMk cId="2875282902" sldId="326"/>
+            <ac:spMk id="9" creationId="{7F878555-C125-7B67-5AE0-0A828C1DF979}"/>
           </ac:spMkLst>
         </pc:spChg>
         <pc:spChg chg="add mod ord">
-          <ac:chgData name="Baráth, Július" userId="aebde9b9-dccc-4475-a9ac-c05e78323d7a" providerId="ADAL" clId="{4A0811C8-ED2F-505E-B787-C8270CED5046}" dt="2026-02-03T11:00:25.371" v="389" actId="27636"/>
+          <ac:chgData name="Baráth, Július" userId="aebde9b9-dccc-4475-a9ac-c05e78323d7a" providerId="ADAL" clId="{4A0811C8-ED2F-505E-B787-C8270CED5046}" dt="2026-06-16T11:01:42.657" v="1117" actId="20577"/>
           <ac:spMkLst>
             <pc:docMk/>
-            <pc:sldMk cId="4236122441" sldId="325"/>
-            <ac:spMk id="7" creationId="{2000FB27-96C3-2D21-4DE5-59E0FD7E06DC}"/>
+            <pc:sldMk cId="2875282902" sldId="326"/>
+            <ac:spMk id="10" creationId="{76F6431B-264D-3751-7F23-33B7C5C9D174}"/>
+          </ac:spMkLst>
+        </pc:spChg>
+        <pc:spChg chg="add del mod">
+          <ac:chgData name="Baráth, Július" userId="aebde9b9-dccc-4475-a9ac-c05e78323d7a" providerId="ADAL" clId="{4A0811C8-ED2F-505E-B787-C8270CED5046}" dt="2026-06-16T10:49:44.407" v="1026" actId="6264"/>
+          <ac:spMkLst>
+            <pc:docMk/>
+            <pc:sldMk cId="2875282902" sldId="326"/>
+            <ac:spMk id="11" creationId="{D6DEDC5F-7249-1C51-5D18-58CDC0E0D06D}"/>
+          </ac:spMkLst>
+        </pc:spChg>
+        <pc:spChg chg="add del mod">
+          <ac:chgData name="Baráth, Július" userId="aebde9b9-dccc-4475-a9ac-c05e78323d7a" providerId="ADAL" clId="{4A0811C8-ED2F-505E-B787-C8270CED5046}" dt="2026-06-16T10:49:44.407" v="1026" actId="6264"/>
+          <ac:spMkLst>
+            <pc:docMk/>
+            <pc:sldMk cId="2875282902" sldId="326"/>
+            <ac:spMk id="12" creationId="{64E36D59-AFAA-98E6-7CA1-3EA8074CEFCE}"/>
+          </ac:spMkLst>
+        </pc:spChg>
+        <pc:spChg chg="add del mod">
+          <ac:chgData name="Baráth, Július" userId="aebde9b9-dccc-4475-a9ac-c05e78323d7a" providerId="ADAL" clId="{4A0811C8-ED2F-505E-B787-C8270CED5046}" dt="2026-06-16T10:49:44.407" v="1026" actId="6264"/>
+          <ac:spMkLst>
+            <pc:docMk/>
+            <pc:sldMk cId="2875282902" sldId="326"/>
+            <ac:spMk id="13" creationId="{FED84E0F-8E58-20DA-E2D6-B876374D21C2}"/>
+          </ac:spMkLst>
+        </pc:spChg>
+        <pc:spChg chg="add del mod">
+          <ac:chgData name="Baráth, Július" userId="aebde9b9-dccc-4475-a9ac-c05e78323d7a" providerId="ADAL" clId="{4A0811C8-ED2F-505E-B787-C8270CED5046}" dt="2026-06-16T10:49:44.407" v="1026" actId="6264"/>
+          <ac:spMkLst>
+            <pc:docMk/>
+            <pc:sldMk cId="2875282902" sldId="326"/>
+            <ac:spMk id="14" creationId="{2BD8E5A6-9AA9-E961-4E90-24027616DB7B}"/>
           </ac:spMkLst>
         </pc:spChg>
       </pc:sldChg>
@@ -796,7 +424,7 @@
           <a:p>
             <a:fld id="{10DBA715-3931-4B12-8F65-0C023D0C889C}" type="datetimeFigureOut">
               <a:rPr lang="sk-SK" smtClean="0"/>
-              <a:t>4.3.2026</a:t>
+              <a:t>16.6.2026</a:t>
             </a:fld>
             <a:endParaRPr lang="sk-SK"/>
           </a:p>
@@ -1213,7 +841,7 @@
           <a:p>
             <a:fld id="{9DDEF68B-993A-41A5-AE02-BF81499BEBFF}" type="slidenum">
               <a:rPr lang="sk-SK" smtClean="0"/>
-              <a:t>31</a:t>
+              <a:t>32</a:t>
             </a:fld>
             <a:endParaRPr lang="sk-SK"/>
           </a:p>
@@ -1363,7 +991,7 @@
           <a:p>
             <a:fld id="{FF409D81-0DDF-48BB-84A1-72E2E7B64FA8}" type="datetime1">
               <a:rPr lang="sk-SK" smtClean="0"/>
-              <a:t>4.3.2026</a:t>
+              <a:t>16.6.2026</a:t>
             </a:fld>
             <a:endParaRPr lang="sk-SK"/>
           </a:p>
@@ -1536,7 +1164,7 @@
           <a:p>
             <a:fld id="{A8BDDA65-704B-4A2E-88E9-9C89A9C7184F}" type="datetime1">
               <a:rPr lang="sk-SK" smtClean="0"/>
-              <a:t>4.3.2026</a:t>
+              <a:t>16.6.2026</a:t>
             </a:fld>
             <a:endParaRPr lang="sk-SK"/>
           </a:p>
@@ -1719,7 +1347,7 @@
           <a:p>
             <a:fld id="{C293AB0A-F26A-41CF-9202-51D7B560101E}" type="datetime1">
               <a:rPr lang="sk-SK" smtClean="0"/>
-              <a:t>4.3.2026</a:t>
+              <a:t>16.6.2026</a:t>
             </a:fld>
             <a:endParaRPr lang="sk-SK"/>
           </a:p>
@@ -1965,7 +1593,7 @@
             </a:pPr>
             <a:fld id="{D48FA258-C71C-40CD-814F-D5C504290866}" type="datetime1">
               <a:rPr lang="sk-SK" smtClean="0"/>
-              <a:t>4.3.2026</a:t>
+              <a:t>16.6.2026</a:t>
             </a:fld>
             <a:endParaRPr lang="sk-SK"/>
           </a:p>
@@ -2154,7 +1782,7 @@
           <a:p>
             <a:fld id="{E82BEFB5-8A8B-4407-8C61-8AE7B8D57719}" type="datetime1">
               <a:rPr lang="sk-SK" smtClean="0"/>
-              <a:t>4.3.2026</a:t>
+              <a:t>16.6.2026</a:t>
             </a:fld>
             <a:endParaRPr lang="sk-SK"/>
           </a:p>
@@ -2403,7 +2031,7 @@
           <a:p>
             <a:fld id="{502AAF14-A1CA-4E65-96DD-CCF66B07C433}" type="datetime1">
               <a:rPr lang="sk-SK" smtClean="0"/>
-              <a:t>4.3.2026</a:t>
+              <a:t>16.6.2026</a:t>
             </a:fld>
             <a:endParaRPr lang="sk-SK"/>
           </a:p>
@@ -2638,7 +2266,7 @@
           <a:p>
             <a:fld id="{8087A5FB-5486-48D2-95B9-9A8F76F73722}" type="datetime1">
               <a:rPr lang="sk-SK" smtClean="0"/>
-              <a:t>4.3.2026</a:t>
+              <a:t>16.6.2026</a:t>
             </a:fld>
             <a:endParaRPr lang="sk-SK"/>
           </a:p>
@@ -3008,7 +2636,7 @@
           <a:p>
             <a:fld id="{21BA8A66-795C-44EE-A6A1-16E491829098}" type="datetime1">
               <a:rPr lang="sk-SK" smtClean="0"/>
-              <a:t>4.3.2026</a:t>
+              <a:t>16.6.2026</a:t>
             </a:fld>
             <a:endParaRPr lang="sk-SK"/>
           </a:p>
@@ -3129,7 +2757,7 @@
           <a:p>
             <a:fld id="{3EF3BB14-32E4-4EBF-9407-66EF6DDF6C93}" type="datetime1">
               <a:rPr lang="sk-SK" smtClean="0"/>
-              <a:t>4.3.2026</a:t>
+              <a:t>16.6.2026</a:t>
             </a:fld>
             <a:endParaRPr lang="sk-SK"/>
           </a:p>
@@ -3227,7 +2855,7 @@
           <a:p>
             <a:fld id="{23DE504A-4A64-4A13-A20E-40EF1EDAF191}" type="datetime1">
               <a:rPr lang="sk-SK" smtClean="0"/>
-              <a:t>4.3.2026</a:t>
+              <a:t>16.6.2026</a:t>
             </a:fld>
             <a:endParaRPr lang="sk-SK"/>
           </a:p>
@@ -3507,7 +3135,7 @@
           <a:p>
             <a:fld id="{C5A1DF2D-F2EE-4C69-944D-FEF6D561633F}" type="datetime1">
               <a:rPr lang="sk-SK" smtClean="0"/>
-              <a:t>4.3.2026</a:t>
+              <a:t>16.6.2026</a:t>
             </a:fld>
             <a:endParaRPr lang="sk-SK"/>
           </a:p>
@@ -3763,7 +3391,7 @@
           <a:p>
             <a:fld id="{95D7758C-FDA2-483D-87E1-B45F5DFBD3FD}" type="datetime1">
               <a:rPr lang="sk-SK" smtClean="0"/>
-              <a:t>4.3.2026</a:t>
+              <a:t>16.6.2026</a:t>
             </a:fld>
             <a:endParaRPr lang="sk-SK"/>
           </a:p>
@@ -3979,7 +3607,7 @@
           <a:p>
             <a:fld id="{2605D2B5-92B7-4C8D-AC3A-18C18C239EE2}" type="datetime1">
               <a:rPr lang="sk-SK" smtClean="0"/>
-              <a:t>4.3.2026</a:t>
+              <a:t>16.6.2026</a:t>
             </a:fld>
             <a:endParaRPr lang="sk-SK"/>
           </a:p>
@@ -11277,7 +10905,11 @@
             </a:pPr>
             <a:r>
               <a:rPr lang="sk-SK" sz="3200" dirty="0"/>
-              <a:t>E. W. DIJKSTRA - dátový typ semafor ako synchronizačný nástroj</a:t>
+              <a:t>E. W. DIJKSTRA </a:t>
+            </a:r>
+            <a:r>
+              <a:rPr lang="sk-SK" sz="3200" b="1" dirty="0"/>
+              <a:t>- dátový typ semafor ako synchronizačný nástroj</a:t>
             </a:r>
           </a:p>
           <a:p>
@@ -11337,7 +10969,19 @@
           <a:p>
             <a:r>
               <a:rPr lang="sk-SK" sz="3200" dirty="0"/>
-              <a:t>Pre typ SEMAPHORE sú definované tri operácie: SEND (V), WAIT (P) a počiatočné nastavenie INIT_SEM</a:t>
+              <a:t>Pre typ SEMAPHORE sú definované tri operácie: </a:t>
+            </a:r>
+            <a:r>
+              <a:rPr lang="sk-SK" sz="3200" b="1" dirty="0"/>
+              <a:t>SEND (V), WAIT (P)</a:t>
+            </a:r>
+            <a:r>
+              <a:rPr lang="sk-SK" sz="3200" dirty="0"/>
+              <a:t> a počiatočné nastavenie </a:t>
+            </a:r>
+            <a:r>
+              <a:rPr lang="sk-SK" sz="3200" b="1" dirty="0"/>
+              <a:t>INIT_SEM</a:t>
             </a:r>
           </a:p>
           <a:p>
@@ -12272,7 +11916,7 @@
         <p:spPr bwMode="auto">
           <a:xfrm>
             <a:off x="2590800" y="152401"/>
-            <a:ext cx="5530850" cy="6492875"/>
+            <a:ext cx="5583580" cy="6863417"/>
           </a:xfrm>
           <a:prstGeom prst="rect">
             <a:avLst/>
@@ -12405,38 +12049,44 @@
           </a:lstStyle>
           <a:p>
             <a:r>
-              <a:rPr lang="sk-SK" sz="2000" err="1"/>
+              <a:rPr lang="sk-SK" sz="2000" dirty="0" err="1"/>
               <a:t>begin</a:t>
             </a:r>
             <a:r>
-              <a:rPr lang="sk-SK" sz="2000"/>
-              <a:t> INIT_SEM(OBSADENÉ,0);</a:t>
-            </a:r>
-          </a:p>
-          <a:p>
-            <a:r>
-              <a:rPr lang="sk-SK" sz="2000"/>
-              <a:t>          INIT_SEM(VOĽNÉ, MAX_POLOŽIEK);</a:t>
-            </a:r>
-          </a:p>
-          <a:p>
-            <a:r>
-              <a:rPr lang="sk-SK" sz="2000"/>
+              <a:rPr lang="sk-SK" sz="2000" dirty="0"/>
+              <a:t> </a:t>
+            </a:r>
+          </a:p>
+          <a:p>
+            <a:r>
+              <a:rPr lang="sk-SK" sz="2000" dirty="0"/>
+              <a:t>VOĽNÉ = INIT_SEM(MAX_POLOŽIEK-1,0);</a:t>
+            </a:r>
+          </a:p>
+          <a:p>
+            <a:r>
+              <a:rPr lang="sk-SK" sz="2000" dirty="0"/>
+              <a:t>OBSADENÉ = INIT_SEM(0,0);</a:t>
+            </a:r>
+          </a:p>
+          <a:p>
+            <a:r>
+              <a:rPr lang="sk-SK" sz="2000" dirty="0"/>
               <a:t>    </a:t>
             </a:r>
             <a:r>
-              <a:rPr lang="sk-SK" sz="2000" err="1"/>
+              <a:rPr lang="sk-SK" sz="2000" dirty="0" err="1"/>
               <a:t>cobegin</a:t>
             </a:r>
-            <a:endParaRPr lang="sk-SK" sz="2000"/>
-          </a:p>
-          <a:p>
-            <a:r>
-              <a:rPr lang="sk-SK" sz="2000"/>
+            <a:endParaRPr lang="sk-SK" sz="2000" dirty="0"/>
+          </a:p>
+          <a:p>
+            <a:r>
+              <a:rPr lang="sk-SK" sz="2000" dirty="0"/>
               <a:t>         </a:t>
             </a:r>
             <a:r>
-              <a:rPr lang="sk-SK" sz="2000">
+              <a:rPr lang="sk-SK" sz="2000" dirty="0">
                 <a:solidFill>
                   <a:srgbClr val="FF0000"/>
                 </a:solidFill>
@@ -12446,73 +12096,73 @@
           </a:p>
           <a:p>
             <a:r>
-              <a:rPr lang="sk-SK" sz="2000"/>
+              <a:rPr lang="sk-SK" sz="2000" dirty="0"/>
               <a:t>            </a:t>
             </a:r>
             <a:r>
-              <a:rPr lang="sk-SK" sz="2000" err="1"/>
+              <a:rPr lang="sk-SK" sz="2000" dirty="0" err="1"/>
               <a:t>loop</a:t>
             </a:r>
             <a:r>
-              <a:rPr lang="sk-SK" sz="2000"/>
+              <a:rPr lang="sk-SK" sz="2000" dirty="0"/>
               <a:t> {produkuj položku ÚDAJ};</a:t>
             </a:r>
           </a:p>
           <a:p>
             <a:r>
-              <a:rPr lang="sk-SK" sz="2000"/>
+              <a:rPr lang="sk-SK" sz="2000" dirty="0"/>
               <a:t>                    WAIT(VOĽNÉ);</a:t>
             </a:r>
           </a:p>
           <a:p>
             <a:r>
-              <a:rPr lang="sk-SK" sz="2000"/>
+              <a:rPr lang="sk-SK" sz="2000" dirty="0"/>
               <a:t>                    – zapíš:</a:t>
             </a:r>
           </a:p>
           <a:p>
             <a:r>
-              <a:rPr lang="sk-SK" sz="2000"/>
+              <a:rPr lang="sk-SK" sz="2000" dirty="0"/>
               <a:t>                       BUF(J) := ÚDAJ;</a:t>
             </a:r>
           </a:p>
           <a:p>
             <a:r>
-              <a:rPr lang="sk-SK" sz="2000"/>
+              <a:rPr lang="sk-SK" sz="2000" dirty="0"/>
               <a:t>                       J := (J+1) </a:t>
             </a:r>
             <a:r>
-              <a:rPr lang="sk-SK" sz="2000" err="1"/>
+              <a:rPr lang="sk-SK" sz="2000" dirty="0" err="1"/>
               <a:t>mod</a:t>
             </a:r>
             <a:r>
-              <a:rPr lang="sk-SK" sz="2000"/>
+              <a:rPr lang="sk-SK" sz="2000" dirty="0"/>
               <a:t> MAXPOLOŽIEK;</a:t>
             </a:r>
           </a:p>
           <a:p>
             <a:r>
-              <a:rPr lang="sk-SK" sz="2000"/>
+              <a:rPr lang="sk-SK" sz="2000" dirty="0"/>
               <a:t>                    SEND(OBSADENÉ);</a:t>
             </a:r>
           </a:p>
           <a:p>
             <a:r>
-              <a:rPr lang="sk-SK" sz="2000"/>
+              <a:rPr lang="sk-SK" sz="2000" dirty="0"/>
               <a:t>             end </a:t>
             </a:r>
             <a:r>
-              <a:rPr lang="sk-SK" sz="2000" err="1"/>
+              <a:rPr lang="sk-SK" sz="2000" dirty="0" err="1"/>
               <a:t>loop</a:t>
             </a:r>
             <a:r>
-              <a:rPr lang="sk-SK" sz="2000"/>
+              <a:rPr lang="sk-SK" sz="2000" dirty="0"/>
               <a:t>;</a:t>
             </a:r>
           </a:p>
           <a:p>
             <a:r>
-              <a:rPr lang="sk-SK" sz="2000">
+              <a:rPr lang="sk-SK" sz="2000" dirty="0">
                 <a:solidFill>
                   <a:srgbClr val="FF0000"/>
                 </a:solidFill>
@@ -12522,87 +12172,87 @@
           </a:p>
           <a:p>
             <a:r>
-              <a:rPr lang="sk-SK" sz="2000"/>
+              <a:rPr lang="sk-SK" sz="2000" dirty="0"/>
               <a:t>            </a:t>
             </a:r>
             <a:r>
-              <a:rPr lang="sk-SK" sz="2000" err="1"/>
+              <a:rPr lang="sk-SK" sz="2000" dirty="0" err="1"/>
               <a:t>loop</a:t>
             </a:r>
             <a:r>
-              <a:rPr lang="sk-SK" sz="2000"/>
+              <a:rPr lang="sk-SK" sz="2000" dirty="0"/>
               <a:t> WAIT (OBSADENÉ);</a:t>
             </a:r>
           </a:p>
           <a:p>
             <a:r>
-              <a:rPr lang="sk-SK" sz="2000"/>
+              <a:rPr lang="sk-SK" sz="2000" dirty="0"/>
               <a:t>                     – čítaj:</a:t>
             </a:r>
           </a:p>
           <a:p>
             <a:r>
-              <a:rPr lang="sk-SK" sz="2000"/>
+              <a:rPr lang="sk-SK" sz="2000" dirty="0"/>
               <a:t>                        VÝST_ÚDAJ := BUF(K);</a:t>
             </a:r>
           </a:p>
           <a:p>
             <a:r>
-              <a:rPr lang="sk-SK" sz="2000"/>
+              <a:rPr lang="sk-SK" sz="2000" dirty="0"/>
               <a:t>                         K := (K + 1) </a:t>
             </a:r>
             <a:r>
-              <a:rPr lang="sk-SK" sz="2000" err="1"/>
+              <a:rPr lang="sk-SK" sz="2000" dirty="0" err="1"/>
               <a:t>mod</a:t>
             </a:r>
             <a:r>
-              <a:rPr lang="sk-SK" sz="2000"/>
+              <a:rPr lang="sk-SK" sz="2000" dirty="0"/>
               <a:t> MAXPOLOŽIEK;</a:t>
             </a:r>
           </a:p>
           <a:p>
             <a:r>
-              <a:rPr lang="sk-SK" sz="2000"/>
+              <a:rPr lang="sk-SK" sz="2000" dirty="0"/>
               <a:t>                     SEND(VOĽNÉ);</a:t>
             </a:r>
           </a:p>
           <a:p>
             <a:r>
-              <a:rPr lang="sk-SK" sz="2000"/>
+              <a:rPr lang="sk-SK" sz="2000" dirty="0"/>
               <a:t>                     {spotrebuj položku VÝST_ÚDAJ};</a:t>
             </a:r>
           </a:p>
           <a:p>
             <a:r>
-              <a:rPr lang="sk-SK" sz="2000"/>
+              <a:rPr lang="sk-SK" sz="2000" dirty="0"/>
               <a:t>             end </a:t>
             </a:r>
             <a:r>
-              <a:rPr lang="sk-SK" sz="2000" err="1"/>
+              <a:rPr lang="sk-SK" sz="2000" dirty="0" err="1"/>
               <a:t>loop</a:t>
             </a:r>
             <a:r>
-              <a:rPr lang="sk-SK" sz="2000"/>
+              <a:rPr lang="sk-SK" sz="2000" dirty="0"/>
               <a:t>;</a:t>
             </a:r>
           </a:p>
           <a:p>
             <a:r>
-              <a:rPr lang="sk-SK" sz="2000"/>
+              <a:rPr lang="sk-SK" sz="2000" dirty="0"/>
               <a:t>    </a:t>
             </a:r>
             <a:r>
-              <a:rPr lang="sk-SK" sz="2000" err="1"/>
+              <a:rPr lang="sk-SK" sz="2000" dirty="0" err="1"/>
               <a:t>coend</a:t>
             </a:r>
             <a:r>
-              <a:rPr lang="sk-SK" sz="2000"/>
+              <a:rPr lang="sk-SK" sz="2000" dirty="0"/>
               <a:t>;</a:t>
             </a:r>
           </a:p>
           <a:p>
             <a:r>
-              <a:rPr lang="sk-SK" sz="2000"/>
+              <a:rPr lang="sk-SK" sz="2000" dirty="0"/>
               <a:t>end;  </a:t>
             </a:r>
           </a:p>
@@ -12640,7 +12290,13 @@
       </p:grpSpPr>
       <p:sp>
         <p:nvSpPr>
-          <p:cNvPr id="2" name="Title 1"/>
+          <p:cNvPr id="8" name="Nadpis 7">
+            <a:extLst>
+              <a:ext uri="{FF2B5EF4-FFF2-40B4-BE49-F238E27FC236}">
+                <a16:creationId xmlns:a16="http://schemas.microsoft.com/office/drawing/2014/main" id="{263FCA88-87F8-9C2A-216E-17BD91D06B45}"/>
+              </a:ext>
+            </a:extLst>
+          </p:cNvPr>
           <p:cNvSpPr>
             <a:spLocks noGrp="1"/>
           </p:cNvSpPr>
@@ -12648,160 +12304,313 @@
             <p:ph type="title"/>
           </p:nvPr>
         </p:nvSpPr>
-        <p:spPr/>
+        <p:spPr>
+          <a:xfrm>
+            <a:off x="553250" y="365125"/>
+            <a:ext cx="10800550" cy="1325563"/>
+          </a:xfrm>
+        </p:spPr>
         <p:txBody>
           <a:bodyPr/>
           <a:lstStyle/>
           <a:p>
             <a:r>
-              <a:rPr lang="sk-SK"/>
-              <a:t>Posielanie správ</a:t>
+              <a:rPr lang="sk-SK" dirty="0"/>
+              <a:t>Stavy semaforov Producent – konzument </a:t>
+            </a:r>
+            <a:r>
+              <a:rPr lang="sk-SK" dirty="0" err="1"/>
+              <a:t>buff</a:t>
+            </a:r>
+            <a:r>
+              <a:rPr lang="sk-SK" dirty="0"/>
+              <a:t> 2</a:t>
             </a:r>
           </a:p>
         </p:txBody>
       </p:sp>
       <p:sp>
         <p:nvSpPr>
-          <p:cNvPr id="3" name="Content Placeholder 2"/>
+          <p:cNvPr id="9" name="Zástupný objekt pre obsah 8">
+            <a:extLst>
+              <a:ext uri="{FF2B5EF4-FFF2-40B4-BE49-F238E27FC236}">
+                <a16:creationId xmlns:a16="http://schemas.microsoft.com/office/drawing/2014/main" id="{7F878555-C125-7B67-5AE0-0A828C1DF979}"/>
+              </a:ext>
+            </a:extLst>
+          </p:cNvPr>
           <p:cNvSpPr>
             <a:spLocks noGrp="1"/>
           </p:cNvSpPr>
           <p:nvPr>
-            <p:ph idx="1"/>
+            <p:ph sz="half" idx="1"/>
           </p:nvPr>
         </p:nvSpPr>
         <p:spPr>
           <a:xfrm>
-            <a:off x="838200" y="1299882"/>
-            <a:ext cx="10515600" cy="3119718"/>
+            <a:off x="153681" y="1825625"/>
+            <a:ext cx="5866119" cy="4351338"/>
           </a:xfrm>
         </p:spPr>
         <p:txBody>
           <a:bodyPr>
-            <a:normAutofit fontScale="85000" lnSpcReduction="20000"/>
+            <a:normAutofit fontScale="77500" lnSpcReduction="20000"/>
           </a:bodyPr>
           <a:lstStyle/>
           <a:p>
             <a:r>
-              <a:rPr lang="sk-SK" b="1" dirty="0"/>
-              <a:t>Priame posielanie správ </a:t>
-            </a:r>
-            <a:r>
-              <a:rPr lang="sk-SK" dirty="0"/>
-              <a:t>– procesy komunikujú priamo medzi sebou, pričom každá správa má explicitne určeného adresáta.</a:t>
-            </a:r>
-          </a:p>
-          <a:p>
-            <a:r>
-              <a:rPr lang="sk-SK" b="1" dirty="0"/>
-              <a:t>Nepriama komunikácia </a:t>
-            </a:r>
-            <a:r>
-              <a:rPr lang="sk-SK" dirty="0"/>
-              <a:t>– Procesy komunikujú nepriamo cez zdieľané </a:t>
-            </a:r>
+              <a:rPr lang="sk-SK" dirty="0"/>
+              <a:t>VOĽNÉ=INIT_SEM(2,0);</a:t>
+            </a:r>
+          </a:p>
+          <a:p>
+            <a:r>
+              <a:rPr lang="sk-SK" dirty="0"/>
+              <a:t>OBSADENÉ =INIT_SEM(0,0);</a:t>
+            </a:r>
+          </a:p>
+          <a:p>
+            <a:endParaRPr lang="sk-SK" dirty="0"/>
+          </a:p>
+          <a:p>
             <a:r>
               <a:rPr lang="sk-SK" dirty="0" err="1"/>
-              <a:t>mailboxy</a:t>
-            </a:r>
-            <a:r>
-              <a:rPr lang="sk-SK" dirty="0"/>
-              <a:t> (schránky) alebo fronty správ.</a:t>
-            </a:r>
-          </a:p>
-          <a:p>
-            <a:r>
-              <a:rPr lang="sk-SK" b="1" dirty="0"/>
-              <a:t>Posielanie správ </a:t>
-            </a:r>
-            <a:r>
-              <a:rPr lang="sk-SK" dirty="0"/>
-              <a:t>v operačnom systéme </a:t>
-            </a:r>
-            <a:r>
-              <a:rPr lang="sk-SK" b="1" dirty="0"/>
-              <a:t>pomocou </a:t>
-            </a:r>
-            <a:r>
-              <a:rPr lang="sk-SK" b="1" dirty="0" err="1"/>
-              <a:t>soketov</a:t>
-            </a:r>
-            <a:r>
-              <a:rPr lang="sk-SK" b="1" dirty="0"/>
-              <a:t> </a:t>
-            </a:r>
-            <a:r>
-              <a:rPr lang="sk-SK" dirty="0"/>
-              <a:t>je základný spôsob komunikácie medzi procesmi alebo medzi klientom a serverom cez sieť.</a:t>
-            </a:r>
-          </a:p>
-          <a:p>
-            <a:pPr lvl="1"/>
+              <a:t>Wait</a:t>
+            </a:r>
+            <a:r>
+              <a:rPr lang="sk-SK" dirty="0"/>
+              <a:t>(VOĽNÉ)		// VOĽNÉ(1,0) ide 1</a:t>
+            </a:r>
+          </a:p>
+          <a:p>
             <a:r>
               <a:rPr lang="sk-SK" dirty="0" err="1"/>
-              <a:t>Soket</a:t>
-            </a:r>
-            <a:r>
-              <a:rPr lang="sk-SK" dirty="0"/>
-              <a:t> je rozhranie pre komunikáciu medzi dvomi entitami, ako sú procesy alebo zariadenia, prostredníctvom počítačovej siete. V kontexte siete a operačných systémov je </a:t>
-            </a:r>
+              <a:t>Wait</a:t>
+            </a:r>
+            <a:r>
+              <a:rPr lang="sk-SK" dirty="0"/>
+              <a:t>(VOĽNÉ)		// VOĽNÉ(0,0) ide 2</a:t>
+            </a:r>
+          </a:p>
+          <a:p>
             <a:r>
               <a:rPr lang="sk-SK" dirty="0" err="1"/>
-              <a:t>soket</a:t>
-            </a:r>
-            <a:r>
-              <a:rPr lang="sk-SK" dirty="0"/>
-              <a:t> koncovým bodom dvojstranného komunikačného kanála medzi dvomi programami.</a:t>
-            </a:r>
-          </a:p>
-          <a:p>
-            <a:pPr lvl="1"/>
+              <a:t>Wait</a:t>
+            </a:r>
+            <a:r>
+              <a:rPr lang="sk-SK" dirty="0"/>
+              <a:t>(VOĽNÉ)		// VOĽNÉ(0,1) čaká 1</a:t>
+            </a:r>
+          </a:p>
+          <a:p>
             <a:r>
               <a:rPr lang="sk-SK" dirty="0" err="1"/>
-              <a:t>Sokety</a:t>
-            </a:r>
-            <a:r>
-              <a:rPr lang="sk-SK" dirty="0"/>
-              <a:t> využívajú </a:t>
-            </a:r>
-            <a:r>
-              <a:rPr lang="sk-SK" b="1" dirty="0"/>
-              <a:t>kombináciu IP adresy a čísla portu </a:t>
-            </a:r>
-            <a:r>
-              <a:rPr lang="sk-SK" dirty="0"/>
-              <a:t>na identifikáciu koncového bodu komunikácie.</a:t>
-            </a:r>
+              <a:t>Wait</a:t>
+            </a:r>
+            <a:r>
+              <a:rPr lang="sk-SK" dirty="0"/>
+              <a:t>(VOĽNÉ)		// VOĽNÉ(0,2) čaká 2</a:t>
+            </a:r>
+          </a:p>
+          <a:p>
+            <a:r>
+              <a:rPr lang="sk-SK" dirty="0" err="1">
+                <a:solidFill>
+                  <a:schemeClr val="accent1">
+                    <a:lumMod val="75000"/>
+                  </a:schemeClr>
+                </a:solidFill>
+              </a:rPr>
+              <a:t>Wait</a:t>
+            </a:r>
+            <a:r>
+              <a:rPr lang="sk-SK" dirty="0">
+                <a:solidFill>
+                  <a:schemeClr val="accent1">
+                    <a:lumMod val="75000"/>
+                  </a:schemeClr>
+                </a:solidFill>
+              </a:rPr>
+              <a:t>(OBSADENÉ)	// OBSADENÉ(0,1) čaká 1</a:t>
+            </a:r>
+          </a:p>
+          <a:p>
+            <a:r>
+              <a:rPr lang="sk-SK" dirty="0" err="1"/>
+              <a:t>Send</a:t>
+            </a:r>
+            <a:r>
+              <a:rPr lang="sk-SK" dirty="0"/>
+              <a:t>(VOĽNÉ) 		// VOĽNÉ(0,1) čaká 1</a:t>
+            </a:r>
+          </a:p>
+          <a:p>
+            <a:r>
+              <a:rPr lang="sk-SK" dirty="0" err="1"/>
+              <a:t>Send</a:t>
+            </a:r>
+            <a:r>
+              <a:rPr lang="sk-SK" dirty="0"/>
+              <a:t>(VOĽNÉ) 		// VOĽNÉ(0,0) </a:t>
+            </a:r>
+          </a:p>
+          <a:p>
+            <a:r>
+              <a:rPr lang="sk-SK" dirty="0" err="1"/>
+              <a:t>Send</a:t>
+            </a:r>
+            <a:r>
+              <a:rPr lang="sk-SK" dirty="0"/>
+              <a:t>(VOĽNÉ) 		// VOĽNÉ(1,0)</a:t>
+            </a:r>
+          </a:p>
+          <a:p>
+            <a:endParaRPr lang="sk-SK" dirty="0"/>
+          </a:p>
+          <a:p>
+            <a:endParaRPr lang="sk-SK" dirty="0"/>
+          </a:p>
+          <a:p>
+            <a:endParaRPr lang="sk-SK" dirty="0"/>
+          </a:p>
+          <a:p>
+            <a:endParaRPr lang="sk-SK" dirty="0"/>
+          </a:p>
+          <a:p>
+            <a:endParaRPr lang="sk-SK" dirty="0"/>
+          </a:p>
+          <a:p>
+            <a:endParaRPr lang="sk-SK" dirty="0"/>
+          </a:p>
+          <a:p>
+            <a:endParaRPr lang="sk-SK" dirty="0"/>
+          </a:p>
+          <a:p>
+            <a:endParaRPr lang="sk-SK" dirty="0"/>
           </a:p>
         </p:txBody>
       </p:sp>
-      <p:pic>
-        <p:nvPicPr>
-          <p:cNvPr id="4" name="Picture 3"/>
-          <p:cNvPicPr>
-            <a:picLocks noChangeAspect="1"/>
-          </p:cNvPicPr>
-          <p:nvPr/>
-        </p:nvPicPr>
-        <p:blipFill>
-          <a:blip r:embed="rId2"/>
-          <a:stretch>
-            <a:fillRect/>
-          </a:stretch>
-        </p:blipFill>
+      <p:sp>
+        <p:nvSpPr>
+          <p:cNvPr id="10" name="Zástupný objekt pre obsah 9">
+            <a:extLst>
+              <a:ext uri="{FF2B5EF4-FFF2-40B4-BE49-F238E27FC236}">
+                <a16:creationId xmlns:a16="http://schemas.microsoft.com/office/drawing/2014/main" id="{76F6431B-264D-3751-7F23-33B7C5C9D174}"/>
+              </a:ext>
+            </a:extLst>
+          </p:cNvPr>
+          <p:cNvSpPr>
+            <a:spLocks noGrp="1"/>
+          </p:cNvSpPr>
+          <p:nvPr>
+            <p:ph sz="half" idx="2"/>
+          </p:nvPr>
+        </p:nvSpPr>
         <p:spPr>
           <a:xfrm>
-            <a:off x="2008388" y="4302090"/>
-            <a:ext cx="7973812" cy="2190785"/>
+            <a:off x="6172199" y="1825625"/>
+            <a:ext cx="5866119" cy="4351338"/>
           </a:xfrm>
-          <a:prstGeom prst="rect">
-            <a:avLst/>
-          </a:prstGeom>
         </p:spPr>
-      </p:pic>
-      <p:sp>
-        <p:nvSpPr>
-          <p:cNvPr id="5" name="Slide Number Placeholder 4"/>
+        <p:txBody>
+          <a:bodyPr>
+            <a:normAutofit fontScale="77500" lnSpcReduction="20000"/>
+          </a:bodyPr>
+          <a:lstStyle/>
+          <a:p>
+            <a:r>
+              <a:rPr lang="sk-SK" dirty="0" err="1">
+                <a:solidFill>
+                  <a:schemeClr val="accent1">
+                    <a:lumMod val="75000"/>
+                  </a:schemeClr>
+                </a:solidFill>
+              </a:rPr>
+              <a:t>Wait</a:t>
+            </a:r>
+            <a:r>
+              <a:rPr lang="sk-SK" dirty="0">
+                <a:solidFill>
+                  <a:schemeClr val="accent1">
+                    <a:lumMod val="75000"/>
+                  </a:schemeClr>
+                </a:solidFill>
+              </a:rPr>
+              <a:t>(OBSADENÉ)	// OBSADENÉ(0,2) čaká 2</a:t>
+            </a:r>
+          </a:p>
+          <a:p>
+            <a:r>
+              <a:rPr lang="sk-SK" dirty="0" err="1">
+                <a:solidFill>
+                  <a:schemeClr val="accent1">
+                    <a:lumMod val="75000"/>
+                  </a:schemeClr>
+                </a:solidFill>
+              </a:rPr>
+              <a:t>Send</a:t>
+            </a:r>
+            <a:r>
+              <a:rPr lang="sk-SK" dirty="0">
+                <a:solidFill>
+                  <a:schemeClr val="accent1">
+                    <a:lumMod val="75000"/>
+                  </a:schemeClr>
+                </a:solidFill>
+              </a:rPr>
+              <a:t>(OBSADENÉ)	// OBSADENÉ(0,1) čaká 1</a:t>
+            </a:r>
+          </a:p>
+          <a:p>
+            <a:r>
+              <a:rPr lang="sk-SK" dirty="0" err="1">
+                <a:solidFill>
+                  <a:schemeClr val="accent1">
+                    <a:lumMod val="75000"/>
+                  </a:schemeClr>
+                </a:solidFill>
+              </a:rPr>
+              <a:t>Send</a:t>
+            </a:r>
+            <a:r>
+              <a:rPr lang="sk-SK" dirty="0">
+                <a:solidFill>
+                  <a:schemeClr val="accent1">
+                    <a:lumMod val="75000"/>
+                  </a:schemeClr>
+                </a:solidFill>
+              </a:rPr>
+              <a:t>(OBSADENÉ)	// OBSADENÉ(0,0)</a:t>
+            </a:r>
+          </a:p>
+          <a:p>
+            <a:endParaRPr lang="sk-SK" dirty="0">
+              <a:solidFill>
+                <a:schemeClr val="accent1">
+                  <a:lumMod val="75000"/>
+                </a:schemeClr>
+              </a:solidFill>
+            </a:endParaRPr>
+          </a:p>
+          <a:p>
+            <a:r>
+              <a:rPr lang="sk-SK" dirty="0"/>
+              <a:t>...</a:t>
+            </a:r>
+          </a:p>
+          <a:p>
+            <a:endParaRPr lang="sk-SK" dirty="0"/>
+          </a:p>
+        </p:txBody>
+      </p:sp>
+      <p:sp>
+        <p:nvSpPr>
+          <p:cNvPr id="2" name="Zástupný objekt pre číslo snímky 1">
+            <a:extLst>
+              <a:ext uri="{FF2B5EF4-FFF2-40B4-BE49-F238E27FC236}">
+                <a16:creationId xmlns:a16="http://schemas.microsoft.com/office/drawing/2014/main" id="{C77FE44E-D85F-E22E-5A9A-9F4D2B22507F}"/>
+              </a:ext>
+            </a:extLst>
+          </p:cNvPr>
           <p:cNvSpPr>
             <a:spLocks noGrp="1"/>
           </p:cNvSpPr>
@@ -12809,13 +12618,19 @@
             <p:ph type="sldNum" sz="quarter" idx="12"/>
           </p:nvPr>
         </p:nvSpPr>
-        <p:spPr/>
+        <p:spPr>
+          <a:xfrm>
+            <a:off x="8610600" y="6356350"/>
+            <a:ext cx="2743200" cy="365125"/>
+          </a:xfrm>
+        </p:spPr>
         <p:txBody>
           <a:bodyPr/>
           <a:lstStyle/>
           <a:p>
             <a:fld id="{5AB4CD34-DB5E-4606-AE4E-01019896DEAB}" type="slidenum">
               <a:rPr lang="sk-SK" smtClean="0"/>
+              <a:pPr/>
               <a:t>28</a:t>
             </a:fld>
             <a:endParaRPr lang="sk-SK"/>
@@ -12825,7 +12640,7 @@
     </p:spTree>
     <p:extLst>
       <p:ext uri="{BB962C8B-B14F-4D97-AF65-F5344CB8AC3E}">
-        <p14:creationId xmlns:p14="http://schemas.microsoft.com/office/powerpoint/2010/main" val="2533591585"/>
+        <p14:creationId xmlns:p14="http://schemas.microsoft.com/office/powerpoint/2010/main" val="2875282902"/>
       </p:ext>
     </p:extLst>
   </p:cSld>
@@ -12854,9 +12669,9 @@
       </p:grpSpPr>
       <p:sp>
         <p:nvSpPr>
-          <p:cNvPr id="16388" name="Rectangle 2"/>
+          <p:cNvPr id="2" name="Title 1"/>
           <p:cNvSpPr>
-            <a:spLocks noGrp="1" noChangeArrowheads="1"/>
+            <a:spLocks noGrp="1"/>
           </p:cNvSpPr>
           <p:nvPr>
             <p:ph type="title"/>
@@ -12868,7 +12683,7 @@
           <a:lstStyle/>
           <a:p>
             <a:r>
-              <a:rPr lang="sk-SK" b="1" dirty="0"/>
+              <a:rPr lang="sk-SK"/>
               <a:t>Posielanie správ</a:t>
             </a:r>
           </a:p>
@@ -12876,7 +12691,7 @@
       </p:sp>
       <p:sp>
         <p:nvSpPr>
-          <p:cNvPr id="2" name="Content Placeholder 1"/>
+          <p:cNvPr id="3" name="Content Placeholder 2"/>
           <p:cNvSpPr>
             <a:spLocks noGrp="1"/>
           </p:cNvSpPr>
@@ -12884,116 +12699,138 @@
             <p:ph idx="1"/>
           </p:nvPr>
         </p:nvSpPr>
-        <p:spPr/>
+        <p:spPr>
+          <a:xfrm>
+            <a:off x="838200" y="1299882"/>
+            <a:ext cx="10515600" cy="3119718"/>
+          </a:xfrm>
+        </p:spPr>
         <p:txBody>
           <a:bodyPr>
-            <a:normAutofit fontScale="92500" lnSpcReduction="20000"/>
+            <a:normAutofit fontScale="85000" lnSpcReduction="20000"/>
           </a:bodyPr>
           <a:lstStyle/>
           <a:p>
-            <a:pPr>
-              <a:spcBef>
-                <a:spcPct val="50000"/>
-              </a:spcBef>
-            </a:pPr>
-            <a:r>
-              <a:rPr lang="sk-SK" dirty="0"/>
-              <a:t>konkrétne synchronizačné nástroje pre zasielanie správ sa odlišujú spôsobom akým je určený druhý proces, s ktorým komunikácia prebieha tzv. </a:t>
-            </a:r>
             <a:r>
               <a:rPr lang="sk-SK" b="1" dirty="0"/>
-              <a:t>adresovanie</a:t>
-            </a:r>
-            <a:endParaRPr lang="sk-SK" dirty="0"/>
-          </a:p>
-          <a:p>
-            <a:pPr marL="0" indent="0">
-              <a:spcBef>
-                <a:spcPct val="50000"/>
-              </a:spcBef>
-              <a:buNone/>
-            </a:pPr>
-            <a:r>
-              <a:rPr lang="sk-SK" dirty="0"/>
-              <a:t>Typy adresovania</a:t>
-            </a:r>
-          </a:p>
-          <a:p>
-            <a:pPr>
-              <a:spcBef>
-                <a:spcPct val="50000"/>
-              </a:spcBef>
-              <a:buFontTx/>
-              <a:buChar char="•"/>
-            </a:pPr>
-            <a:r>
-              <a:rPr lang="sk-SK" dirty="0"/>
+              <a:t>Priame posielanie správ </a:t>
+            </a:r>
+            <a:r>
+              <a:rPr lang="sk-SK" dirty="0"/>
+              <a:t>– procesy komunikujú priamo medzi sebou, pričom každá správa má explicitne určeného adresáta.</a:t>
+            </a:r>
+          </a:p>
+          <a:p>
+            <a:r>
+              <a:rPr lang="sk-SK" b="1" dirty="0"/>
+              <a:t>Nepriama komunikácia </a:t>
+            </a:r>
+            <a:r>
+              <a:rPr lang="sk-SK" dirty="0"/>
+              <a:t>– Procesy komunikujú nepriamo cez zdieľané </a:t>
+            </a:r>
+            <a:r>
+              <a:rPr lang="sk-SK" dirty="0" err="1"/>
+              <a:t>mailboxy</a:t>
+            </a:r>
+            <a:r>
+              <a:rPr lang="sk-SK" dirty="0"/>
+              <a:t> (schránky) alebo fronty správ.</a:t>
+            </a:r>
+          </a:p>
+          <a:p>
+            <a:r>
+              <a:rPr lang="sk-SK" b="1" dirty="0"/>
+              <a:t>Posielanie správ </a:t>
+            </a:r>
+            <a:r>
+              <a:rPr lang="sk-SK" dirty="0"/>
+              <a:t>v operačnom systéme </a:t>
+            </a:r>
+            <a:r>
+              <a:rPr lang="sk-SK" b="1" dirty="0"/>
+              <a:t>pomocou </a:t>
+            </a:r>
+            <a:r>
+              <a:rPr lang="sk-SK" b="1" dirty="0" err="1"/>
+              <a:t>soketov</a:t>
+            </a:r>
+            <a:r>
+              <a:rPr lang="sk-SK" b="1" dirty="0"/>
               <a:t> </a:t>
             </a:r>
             <a:r>
+              <a:rPr lang="sk-SK" dirty="0"/>
+              <a:t>je základný spôsob komunikácie medzi procesmi alebo medzi klientom a serverom cez sieť.</a:t>
+            </a:r>
+          </a:p>
+          <a:p>
+            <a:pPr lvl="1"/>
+            <a:r>
+              <a:rPr lang="sk-SK" dirty="0" err="1"/>
+              <a:t>Soket</a:t>
+            </a:r>
+            <a:r>
+              <a:rPr lang="sk-SK" dirty="0"/>
+              <a:t> je rozhranie pre komunikáciu medzi dvomi entitami, ako sú procesy alebo zariadenia, prostredníctvom počítačovej siete. V kontexte siete a operačných systémov je </a:t>
+            </a:r>
+            <a:r>
+              <a:rPr lang="sk-SK" dirty="0" err="1"/>
+              <a:t>soket</a:t>
+            </a:r>
+            <a:r>
+              <a:rPr lang="sk-SK" dirty="0"/>
+              <a:t> koncovým bodom dvojstranného komunikačného kanála medzi dvomi programami.</a:t>
+            </a:r>
+          </a:p>
+          <a:p>
+            <a:pPr lvl="1"/>
+            <a:r>
+              <a:rPr lang="sk-SK" dirty="0" err="1"/>
+              <a:t>Sokety</a:t>
+            </a:r>
+            <a:r>
+              <a:rPr lang="sk-SK" dirty="0"/>
+              <a:t> využívajú </a:t>
+            </a:r>
+            <a:r>
               <a:rPr lang="sk-SK" b="1" dirty="0"/>
-              <a:t>Symetrické adresovanie - </a:t>
-            </a:r>
-            <a:r>
-              <a:rPr lang="sk-SK" dirty="0"/>
-              <a:t>v </a:t>
-            </a:r>
-            <a:r>
-              <a:rPr lang="sk-SK" dirty="0" err="1"/>
-              <a:t>synchron</a:t>
-            </a:r>
-            <a:r>
-              <a:rPr lang="sk-SK" dirty="0"/>
-              <a:t>. operáciách sa uvádza meno prijímacieho a vysielacieho procesu, prijímací proces musí vedieť od koho má správu prijať</a:t>
-            </a:r>
-          </a:p>
-          <a:p>
-            <a:pPr>
-              <a:spcBef>
-                <a:spcPct val="50000"/>
-              </a:spcBef>
-              <a:buFontTx/>
-              <a:buChar char="•"/>
-            </a:pPr>
-            <a:r>
-              <a:rPr lang="sk-SK" b="1" dirty="0"/>
-              <a:t> Asymetrické adresovanie - </a:t>
-            </a:r>
-            <a:r>
-              <a:rPr lang="sk-SK" dirty="0"/>
-              <a:t>uvádza sa len meno prijímacieho procesu, meno vysielacieho procesu sa určí až po prijatí správy (výstupným parametrom operácie)</a:t>
-            </a:r>
-          </a:p>
-          <a:p>
-            <a:pPr>
-              <a:spcBef>
-                <a:spcPct val="50000"/>
-              </a:spcBef>
-              <a:buFontTx/>
-              <a:buChar char="•"/>
-            </a:pPr>
-            <a:r>
-              <a:rPr lang="sk-SK" b="1" dirty="0"/>
-              <a:t> Nepriame adresovanie - </a:t>
-            </a:r>
-            <a:r>
-              <a:rPr lang="sk-SK" dirty="0"/>
-              <a:t>v </a:t>
-            </a:r>
-            <a:r>
-              <a:rPr lang="sk-SK" dirty="0" err="1"/>
-              <a:t>synchron</a:t>
-            </a:r>
-            <a:r>
-              <a:rPr lang="sk-SK" dirty="0"/>
-              <a:t>. operáciách sa uvedie meno použitej vyrovnávacej pamäti alebo komunikačného kanálu</a:t>
+              <a:t>kombináciu IP adresy a čísla portu </a:t>
+            </a:r>
+            <a:r>
+              <a:rPr lang="sk-SK" dirty="0"/>
+              <a:t>na identifikáciu koncového bodu komunikácie.</a:t>
             </a:r>
           </a:p>
         </p:txBody>
       </p:sp>
-      <p:sp>
-        <p:nvSpPr>
-          <p:cNvPr id="16387" name="Zástupný symbol čísla snímky 4"/>
+      <p:pic>
+        <p:nvPicPr>
+          <p:cNvPr id="4" name="Picture 3"/>
+          <p:cNvPicPr>
+            <a:picLocks noChangeAspect="1"/>
+          </p:cNvPicPr>
+          <p:nvPr/>
+        </p:nvPicPr>
+        <p:blipFill>
+          <a:blip r:embed="rId2"/>
+          <a:stretch>
+            <a:fillRect/>
+          </a:stretch>
+        </p:blipFill>
+        <p:spPr>
+          <a:xfrm>
+            <a:off x="2008388" y="4302090"/>
+            <a:ext cx="7973812" cy="2190785"/>
+          </a:xfrm>
+          <a:prstGeom prst="rect">
+            <a:avLst/>
+          </a:prstGeom>
+        </p:spPr>
+      </p:pic>
+      <p:sp>
+        <p:nvSpPr>
+          <p:cNvPr id="5" name="Slide Number Placeholder 4"/>
           <p:cNvSpPr>
             <a:spLocks noGrp="1"/>
           </p:cNvSpPr>
@@ -13001,290 +12838,23 @@
             <p:ph type="sldNum" sz="quarter" idx="12"/>
           </p:nvPr>
         </p:nvSpPr>
-        <p:spPr>
-          <a:noFill/>
-          <a:ln/>
-          <a:extLst>
-            <a:ext uri="{909E8E84-426E-40DD-AFC4-6F175D3DCCD1}">
-              <a14:hiddenFill xmlns:a14="http://schemas.microsoft.com/office/drawing/2010/main">
-                <a:solidFill>
-                  <a:srgbClr val="FFFFFF"/>
-                </a:solidFill>
-              </a14:hiddenFill>
-            </a:ext>
-            <a:ext uri="{91240B29-F687-4F45-9708-019B960494DF}">
-              <a14:hiddenLine xmlns:a14="http://schemas.microsoft.com/office/drawing/2010/main" w="9525">
-                <a:solidFill>
-                  <a:srgbClr val="000000"/>
-                </a:solidFill>
-                <a:miter lim="800000"/>
-                <a:headEnd/>
-                <a:tailEnd/>
-              </a14:hiddenLine>
-            </a:ext>
-          </a:extLst>
-        </p:spPr>
+        <p:spPr/>
         <p:txBody>
           <a:bodyPr/>
-          <a:lstStyle>
-            <a:lvl1pPr>
-              <a:defRPr sz="2400">
-                <a:solidFill>
-                  <a:schemeClr val="tx1"/>
-                </a:solidFill>
-                <a:latin typeface="Times New Roman" panose="02020603050405020304" pitchFamily="18" charset="0"/>
-              </a:defRPr>
-            </a:lvl1pPr>
-            <a:lvl2pPr marL="742950" indent="-285750">
-              <a:defRPr sz="2400">
-                <a:solidFill>
-                  <a:schemeClr val="tx1"/>
-                </a:solidFill>
-                <a:latin typeface="Times New Roman" panose="02020603050405020304" pitchFamily="18" charset="0"/>
-              </a:defRPr>
-            </a:lvl2pPr>
-            <a:lvl3pPr marL="1143000" indent="-228600">
-              <a:defRPr sz="2400">
-                <a:solidFill>
-                  <a:schemeClr val="tx1"/>
-                </a:solidFill>
-                <a:latin typeface="Times New Roman" panose="02020603050405020304" pitchFamily="18" charset="0"/>
-              </a:defRPr>
-            </a:lvl3pPr>
-            <a:lvl4pPr marL="1600200" indent="-228600">
-              <a:defRPr sz="2400">
-                <a:solidFill>
-                  <a:schemeClr val="tx1"/>
-                </a:solidFill>
-                <a:latin typeface="Times New Roman" panose="02020603050405020304" pitchFamily="18" charset="0"/>
-              </a:defRPr>
-            </a:lvl4pPr>
-            <a:lvl5pPr marL="2057400" indent="-228600">
-              <a:defRPr sz="2400">
-                <a:solidFill>
-                  <a:schemeClr val="tx1"/>
-                </a:solidFill>
-                <a:latin typeface="Times New Roman" panose="02020603050405020304" pitchFamily="18" charset="0"/>
-              </a:defRPr>
-            </a:lvl5pPr>
-            <a:lvl6pPr marL="2514600" indent="-228600" eaLnBrk="0" fontAlgn="base" hangingPunct="0">
-              <a:spcBef>
-                <a:spcPct val="0"/>
-              </a:spcBef>
-              <a:spcAft>
-                <a:spcPct val="0"/>
-              </a:spcAft>
-              <a:defRPr sz="2400">
-                <a:solidFill>
-                  <a:schemeClr val="tx1"/>
-                </a:solidFill>
-                <a:latin typeface="Times New Roman" panose="02020603050405020304" pitchFamily="18" charset="0"/>
-              </a:defRPr>
-            </a:lvl6pPr>
-            <a:lvl7pPr marL="2971800" indent="-228600" eaLnBrk="0" fontAlgn="base" hangingPunct="0">
-              <a:spcBef>
-                <a:spcPct val="0"/>
-              </a:spcBef>
-              <a:spcAft>
-                <a:spcPct val="0"/>
-              </a:spcAft>
-              <a:defRPr sz="2400">
-                <a:solidFill>
-                  <a:schemeClr val="tx1"/>
-                </a:solidFill>
-                <a:latin typeface="Times New Roman" panose="02020603050405020304" pitchFamily="18" charset="0"/>
-              </a:defRPr>
-            </a:lvl7pPr>
-            <a:lvl8pPr marL="3429000" indent="-228600" eaLnBrk="0" fontAlgn="base" hangingPunct="0">
-              <a:spcBef>
-                <a:spcPct val="0"/>
-              </a:spcBef>
-              <a:spcAft>
-                <a:spcPct val="0"/>
-              </a:spcAft>
-              <a:defRPr sz="2400">
-                <a:solidFill>
-                  <a:schemeClr val="tx1"/>
-                </a:solidFill>
-                <a:latin typeface="Times New Roman" panose="02020603050405020304" pitchFamily="18" charset="0"/>
-              </a:defRPr>
-            </a:lvl8pPr>
-            <a:lvl9pPr marL="3886200" indent="-228600" eaLnBrk="0" fontAlgn="base" hangingPunct="0">
-              <a:spcBef>
-                <a:spcPct val="0"/>
-              </a:spcBef>
-              <a:spcAft>
-                <a:spcPct val="0"/>
-              </a:spcAft>
-              <a:defRPr sz="2400">
-                <a:solidFill>
-                  <a:schemeClr val="tx1"/>
-                </a:solidFill>
-                <a:latin typeface="Times New Roman" panose="02020603050405020304" pitchFamily="18" charset="0"/>
-              </a:defRPr>
-            </a:lvl9pPr>
-          </a:lstStyle>
-          <a:p>
-            <a:fld id="{BCE4B957-8578-4DD1-85E1-8AF0B1F936CC}" type="slidenum">
-              <a:rPr lang="sk-SK" sz="1400"/>
-              <a:pPr/>
+          <a:lstStyle/>
+          <a:p>
+            <a:fld id="{5AB4CD34-DB5E-4606-AE4E-01019896DEAB}" type="slidenum">
+              <a:rPr lang="sk-SK" smtClean="0"/>
               <a:t>29</a:t>
             </a:fld>
-            <a:endParaRPr lang="sk-SK" sz="1400"/>
-          </a:p>
-        </p:txBody>
-      </p:sp>
-      <p:sp>
-        <p:nvSpPr>
-          <p:cNvPr id="16389" name="Text Box 3"/>
-          <p:cNvSpPr txBox="1">
-            <a:spLocks noChangeArrowheads="1"/>
-          </p:cNvSpPr>
-          <p:nvPr/>
-        </p:nvSpPr>
-        <p:spPr bwMode="auto">
-          <a:xfrm>
-            <a:off x="2651126" y="1565275"/>
-            <a:ext cx="1616075" cy="457200"/>
-          </a:xfrm>
-          <a:prstGeom prst="rect">
-            <a:avLst/>
-          </a:prstGeom>
-          <a:noFill/>
-          <a:ln>
-            <a:noFill/>
-          </a:ln>
-          <a:extLst>
-            <a:ext uri="{909E8E84-426E-40DD-AFC4-6F175D3DCCD1}">
-              <a14:hiddenFill xmlns:a14="http://schemas.microsoft.com/office/drawing/2010/main">
-                <a:solidFill>
-                  <a:srgbClr val="FFFFFF"/>
-                </a:solidFill>
-              </a14:hiddenFill>
-            </a:ext>
-            <a:ext uri="{91240B29-F687-4F45-9708-019B960494DF}">
-              <a14:hiddenLine xmlns:a14="http://schemas.microsoft.com/office/drawing/2010/main" w="9525">
-                <a:solidFill>
-                  <a:srgbClr val="000000"/>
-                </a:solidFill>
-                <a:miter lim="800000"/>
-                <a:headEnd/>
-                <a:tailEnd/>
-              </a14:hiddenLine>
-            </a:ext>
-          </a:extLst>
-        </p:spPr>
-        <p:txBody>
-          <a:bodyPr>
-            <a:spAutoFit/>
-          </a:bodyPr>
-          <a:lstStyle>
-            <a:lvl1pPr>
-              <a:defRPr sz="2400">
-                <a:solidFill>
-                  <a:schemeClr val="tx1"/>
-                </a:solidFill>
-                <a:latin typeface="Times New Roman" panose="02020603050405020304" pitchFamily="18" charset="0"/>
-              </a:defRPr>
-            </a:lvl1pPr>
-            <a:lvl2pPr marL="742950" indent="-285750">
-              <a:defRPr sz="2400">
-                <a:solidFill>
-                  <a:schemeClr val="tx1"/>
-                </a:solidFill>
-                <a:latin typeface="Times New Roman" panose="02020603050405020304" pitchFamily="18" charset="0"/>
-              </a:defRPr>
-            </a:lvl2pPr>
-            <a:lvl3pPr marL="1143000" indent="-228600">
-              <a:defRPr sz="2400">
-                <a:solidFill>
-                  <a:schemeClr val="tx1"/>
-                </a:solidFill>
-                <a:latin typeface="Times New Roman" panose="02020603050405020304" pitchFamily="18" charset="0"/>
-              </a:defRPr>
-            </a:lvl3pPr>
-            <a:lvl4pPr marL="1600200" indent="-228600">
-              <a:defRPr sz="2400">
-                <a:solidFill>
-                  <a:schemeClr val="tx1"/>
-                </a:solidFill>
-                <a:latin typeface="Times New Roman" panose="02020603050405020304" pitchFamily="18" charset="0"/>
-              </a:defRPr>
-            </a:lvl4pPr>
-            <a:lvl5pPr marL="2057400" indent="-228600">
-              <a:defRPr sz="2400">
-                <a:solidFill>
-                  <a:schemeClr val="tx1"/>
-                </a:solidFill>
-                <a:latin typeface="Times New Roman" panose="02020603050405020304" pitchFamily="18" charset="0"/>
-              </a:defRPr>
-            </a:lvl5pPr>
-            <a:lvl6pPr marL="2514600" indent="-228600" eaLnBrk="0" fontAlgn="base" hangingPunct="0">
-              <a:spcBef>
-                <a:spcPct val="0"/>
-              </a:spcBef>
-              <a:spcAft>
-                <a:spcPct val="0"/>
-              </a:spcAft>
-              <a:defRPr sz="2400">
-                <a:solidFill>
-                  <a:schemeClr val="tx1"/>
-                </a:solidFill>
-                <a:latin typeface="Times New Roman" panose="02020603050405020304" pitchFamily="18" charset="0"/>
-              </a:defRPr>
-            </a:lvl6pPr>
-            <a:lvl7pPr marL="2971800" indent="-228600" eaLnBrk="0" fontAlgn="base" hangingPunct="0">
-              <a:spcBef>
-                <a:spcPct val="0"/>
-              </a:spcBef>
-              <a:spcAft>
-                <a:spcPct val="0"/>
-              </a:spcAft>
-              <a:defRPr sz="2400">
-                <a:solidFill>
-                  <a:schemeClr val="tx1"/>
-                </a:solidFill>
-                <a:latin typeface="Times New Roman" panose="02020603050405020304" pitchFamily="18" charset="0"/>
-              </a:defRPr>
-            </a:lvl7pPr>
-            <a:lvl8pPr marL="3429000" indent="-228600" eaLnBrk="0" fontAlgn="base" hangingPunct="0">
-              <a:spcBef>
-                <a:spcPct val="0"/>
-              </a:spcBef>
-              <a:spcAft>
-                <a:spcPct val="0"/>
-              </a:spcAft>
-              <a:defRPr sz="2400">
-                <a:solidFill>
-                  <a:schemeClr val="tx1"/>
-                </a:solidFill>
-                <a:latin typeface="Times New Roman" panose="02020603050405020304" pitchFamily="18" charset="0"/>
-              </a:defRPr>
-            </a:lvl8pPr>
-            <a:lvl9pPr marL="3886200" indent="-228600" eaLnBrk="0" fontAlgn="base" hangingPunct="0">
-              <a:spcBef>
-                <a:spcPct val="0"/>
-              </a:spcBef>
-              <a:spcAft>
-                <a:spcPct val="0"/>
-              </a:spcAft>
-              <a:defRPr sz="2400">
-                <a:solidFill>
-                  <a:schemeClr val="tx1"/>
-                </a:solidFill>
-                <a:latin typeface="Times New Roman" panose="02020603050405020304" pitchFamily="18" charset="0"/>
-              </a:defRPr>
-            </a:lvl9pPr>
-          </a:lstStyle>
-          <a:p>
-            <a:endParaRPr lang="cs-CZ"/>
+            <a:endParaRPr lang="sk-SK"/>
           </a:p>
         </p:txBody>
       </p:sp>
     </p:spTree>
     <p:extLst>
       <p:ext uri="{BB962C8B-B14F-4D97-AF65-F5344CB8AC3E}">
-        <p14:creationId xmlns:p14="http://schemas.microsoft.com/office/powerpoint/2010/main" val="650989019"/>
+        <p14:creationId xmlns:p14="http://schemas.microsoft.com/office/powerpoint/2010/main" val="2533591585"/>
       </p:ext>
     </p:extLst>
   </p:cSld>
@@ -13603,7 +13173,146 @@
       </p:grpSpPr>
       <p:sp>
         <p:nvSpPr>
-          <p:cNvPr id="17411" name="Zástupný symbol čísla snímky 4"/>
+          <p:cNvPr id="16388" name="Rectangle 2"/>
+          <p:cNvSpPr>
+            <a:spLocks noGrp="1" noChangeArrowheads="1"/>
+          </p:cNvSpPr>
+          <p:nvPr>
+            <p:ph type="title"/>
+          </p:nvPr>
+        </p:nvSpPr>
+        <p:spPr/>
+        <p:txBody>
+          <a:bodyPr/>
+          <a:lstStyle/>
+          <a:p>
+            <a:r>
+              <a:rPr lang="sk-SK" b="1" dirty="0"/>
+              <a:t>Posielanie správ</a:t>
+            </a:r>
+          </a:p>
+        </p:txBody>
+      </p:sp>
+      <p:sp>
+        <p:nvSpPr>
+          <p:cNvPr id="2" name="Content Placeholder 1"/>
+          <p:cNvSpPr>
+            <a:spLocks noGrp="1"/>
+          </p:cNvSpPr>
+          <p:nvPr>
+            <p:ph idx="1"/>
+          </p:nvPr>
+        </p:nvSpPr>
+        <p:spPr/>
+        <p:txBody>
+          <a:bodyPr>
+            <a:normAutofit fontScale="92500" lnSpcReduction="20000"/>
+          </a:bodyPr>
+          <a:lstStyle/>
+          <a:p>
+            <a:pPr>
+              <a:spcBef>
+                <a:spcPct val="50000"/>
+              </a:spcBef>
+            </a:pPr>
+            <a:r>
+              <a:rPr lang="sk-SK" dirty="0"/>
+              <a:t>konkrétne synchronizačné nástroje pre zasielanie správ sa odlišujú spôsobom akým je určený druhý proces, s ktorým komunikácia prebieha tzv. </a:t>
+            </a:r>
+            <a:r>
+              <a:rPr lang="sk-SK" b="1" dirty="0"/>
+              <a:t>adresovanie</a:t>
+            </a:r>
+            <a:endParaRPr lang="sk-SK" dirty="0"/>
+          </a:p>
+          <a:p>
+            <a:pPr marL="0" indent="0">
+              <a:spcBef>
+                <a:spcPct val="50000"/>
+              </a:spcBef>
+              <a:buNone/>
+            </a:pPr>
+            <a:r>
+              <a:rPr lang="sk-SK" dirty="0"/>
+              <a:t>Typy adresovania</a:t>
+            </a:r>
+          </a:p>
+          <a:p>
+            <a:pPr>
+              <a:spcBef>
+                <a:spcPct val="50000"/>
+              </a:spcBef>
+              <a:buFontTx/>
+              <a:buChar char="•"/>
+            </a:pPr>
+            <a:r>
+              <a:rPr lang="sk-SK" dirty="0"/>
+              <a:t> </a:t>
+            </a:r>
+            <a:r>
+              <a:rPr lang="sk-SK" b="1" dirty="0"/>
+              <a:t>Symetrické adresovanie - </a:t>
+            </a:r>
+            <a:r>
+              <a:rPr lang="sk-SK" dirty="0"/>
+              <a:t>v </a:t>
+            </a:r>
+            <a:r>
+              <a:rPr lang="sk-SK" dirty="0" err="1"/>
+              <a:t>synchron</a:t>
+            </a:r>
+            <a:r>
+              <a:rPr lang="sk-SK" dirty="0"/>
+              <a:t>. operáciách sa uvádza meno prijímacieho a vysielacieho procesu, prijímací proces musí vedieť od koho má správu prijať</a:t>
+            </a:r>
+          </a:p>
+          <a:p>
+            <a:pPr>
+              <a:spcBef>
+                <a:spcPct val="50000"/>
+              </a:spcBef>
+              <a:buFontTx/>
+              <a:buChar char="•"/>
+            </a:pPr>
+            <a:r>
+              <a:rPr lang="sk-SK" b="1" dirty="0"/>
+              <a:t> Asymetrické adresovanie - </a:t>
+            </a:r>
+            <a:r>
+              <a:rPr lang="sk-SK" dirty="0"/>
+              <a:t>uvádza sa len meno prijímacieho procesu, meno vysielacieho procesu sa určí až po prijatí správy (výstupným parametrom operácie)</a:t>
+            </a:r>
+          </a:p>
+          <a:p>
+            <a:pPr>
+              <a:spcBef>
+                <a:spcPct val="50000"/>
+              </a:spcBef>
+              <a:buFontTx/>
+              <a:buChar char="•"/>
+            </a:pPr>
+            <a:r>
+              <a:rPr lang="sk-SK" b="1" dirty="0"/>
+              <a:t> Nepriame adresovanie - </a:t>
+            </a:r>
+            <a:r>
+              <a:rPr lang="sk-SK" dirty="0"/>
+              <a:t>v </a:t>
+            </a:r>
+            <a:r>
+              <a:rPr lang="sk-SK" dirty="0" err="1"/>
+              <a:t>synchron</a:t>
+            </a:r>
+            <a:r>
+              <a:rPr lang="sk-SK" dirty="0"/>
+              <a:t>. operáciách sa uvedie meno použitej vyrovnávacej pamäti alebo komunikačného kanálu</a:t>
+            </a:r>
+          </a:p>
+        </p:txBody>
+      </p:sp>
+      <p:sp>
+        <p:nvSpPr>
+          <p:cNvPr id="16387" name="Zástupný symbol čísla snímky 4"/>
           <p:cNvSpPr>
             <a:spLocks noGrp="1"/>
           </p:cNvSpPr>
@@ -13735,10 +13444,330 @@
             </a:lvl9pPr>
           </a:lstStyle>
           <a:p>
+            <a:fld id="{BCE4B957-8578-4DD1-85E1-8AF0B1F936CC}" type="slidenum">
+              <a:rPr lang="sk-SK" sz="1400"/>
+              <a:pPr/>
+              <a:t>30</a:t>
+            </a:fld>
+            <a:endParaRPr lang="sk-SK" sz="1400"/>
+          </a:p>
+        </p:txBody>
+      </p:sp>
+      <p:sp>
+        <p:nvSpPr>
+          <p:cNvPr id="16389" name="Text Box 3"/>
+          <p:cNvSpPr txBox="1">
+            <a:spLocks noChangeArrowheads="1"/>
+          </p:cNvSpPr>
+          <p:nvPr/>
+        </p:nvSpPr>
+        <p:spPr bwMode="auto">
+          <a:xfrm>
+            <a:off x="2651126" y="1565275"/>
+            <a:ext cx="1616075" cy="457200"/>
+          </a:xfrm>
+          <a:prstGeom prst="rect">
+            <a:avLst/>
+          </a:prstGeom>
+          <a:noFill/>
+          <a:ln>
+            <a:noFill/>
+          </a:ln>
+          <a:extLst>
+            <a:ext uri="{909E8E84-426E-40DD-AFC4-6F175D3DCCD1}">
+              <a14:hiddenFill xmlns:a14="http://schemas.microsoft.com/office/drawing/2010/main">
+                <a:solidFill>
+                  <a:srgbClr val="FFFFFF"/>
+                </a:solidFill>
+              </a14:hiddenFill>
+            </a:ext>
+            <a:ext uri="{91240B29-F687-4F45-9708-019B960494DF}">
+              <a14:hiddenLine xmlns:a14="http://schemas.microsoft.com/office/drawing/2010/main" w="9525">
+                <a:solidFill>
+                  <a:srgbClr val="000000"/>
+                </a:solidFill>
+                <a:miter lim="800000"/>
+                <a:headEnd/>
+                <a:tailEnd/>
+              </a14:hiddenLine>
+            </a:ext>
+          </a:extLst>
+        </p:spPr>
+        <p:txBody>
+          <a:bodyPr>
+            <a:spAutoFit/>
+          </a:bodyPr>
+          <a:lstStyle>
+            <a:lvl1pPr>
+              <a:defRPr sz="2400">
+                <a:solidFill>
+                  <a:schemeClr val="tx1"/>
+                </a:solidFill>
+                <a:latin typeface="Times New Roman" panose="02020603050405020304" pitchFamily="18" charset="0"/>
+              </a:defRPr>
+            </a:lvl1pPr>
+            <a:lvl2pPr marL="742950" indent="-285750">
+              <a:defRPr sz="2400">
+                <a:solidFill>
+                  <a:schemeClr val="tx1"/>
+                </a:solidFill>
+                <a:latin typeface="Times New Roman" panose="02020603050405020304" pitchFamily="18" charset="0"/>
+              </a:defRPr>
+            </a:lvl2pPr>
+            <a:lvl3pPr marL="1143000" indent="-228600">
+              <a:defRPr sz="2400">
+                <a:solidFill>
+                  <a:schemeClr val="tx1"/>
+                </a:solidFill>
+                <a:latin typeface="Times New Roman" panose="02020603050405020304" pitchFamily="18" charset="0"/>
+              </a:defRPr>
+            </a:lvl3pPr>
+            <a:lvl4pPr marL="1600200" indent="-228600">
+              <a:defRPr sz="2400">
+                <a:solidFill>
+                  <a:schemeClr val="tx1"/>
+                </a:solidFill>
+                <a:latin typeface="Times New Roman" panose="02020603050405020304" pitchFamily="18" charset="0"/>
+              </a:defRPr>
+            </a:lvl4pPr>
+            <a:lvl5pPr marL="2057400" indent="-228600">
+              <a:defRPr sz="2400">
+                <a:solidFill>
+                  <a:schemeClr val="tx1"/>
+                </a:solidFill>
+                <a:latin typeface="Times New Roman" panose="02020603050405020304" pitchFamily="18" charset="0"/>
+              </a:defRPr>
+            </a:lvl5pPr>
+            <a:lvl6pPr marL="2514600" indent="-228600" eaLnBrk="0" fontAlgn="base" hangingPunct="0">
+              <a:spcBef>
+                <a:spcPct val="0"/>
+              </a:spcBef>
+              <a:spcAft>
+                <a:spcPct val="0"/>
+              </a:spcAft>
+              <a:defRPr sz="2400">
+                <a:solidFill>
+                  <a:schemeClr val="tx1"/>
+                </a:solidFill>
+                <a:latin typeface="Times New Roman" panose="02020603050405020304" pitchFamily="18" charset="0"/>
+              </a:defRPr>
+            </a:lvl6pPr>
+            <a:lvl7pPr marL="2971800" indent="-228600" eaLnBrk="0" fontAlgn="base" hangingPunct="0">
+              <a:spcBef>
+                <a:spcPct val="0"/>
+              </a:spcBef>
+              <a:spcAft>
+                <a:spcPct val="0"/>
+              </a:spcAft>
+              <a:defRPr sz="2400">
+                <a:solidFill>
+                  <a:schemeClr val="tx1"/>
+                </a:solidFill>
+                <a:latin typeface="Times New Roman" panose="02020603050405020304" pitchFamily="18" charset="0"/>
+              </a:defRPr>
+            </a:lvl7pPr>
+            <a:lvl8pPr marL="3429000" indent="-228600" eaLnBrk="0" fontAlgn="base" hangingPunct="0">
+              <a:spcBef>
+                <a:spcPct val="0"/>
+              </a:spcBef>
+              <a:spcAft>
+                <a:spcPct val="0"/>
+              </a:spcAft>
+              <a:defRPr sz="2400">
+                <a:solidFill>
+                  <a:schemeClr val="tx1"/>
+                </a:solidFill>
+                <a:latin typeface="Times New Roman" panose="02020603050405020304" pitchFamily="18" charset="0"/>
+              </a:defRPr>
+            </a:lvl8pPr>
+            <a:lvl9pPr marL="3886200" indent="-228600" eaLnBrk="0" fontAlgn="base" hangingPunct="0">
+              <a:spcBef>
+                <a:spcPct val="0"/>
+              </a:spcBef>
+              <a:spcAft>
+                <a:spcPct val="0"/>
+              </a:spcAft>
+              <a:defRPr sz="2400">
+                <a:solidFill>
+                  <a:schemeClr val="tx1"/>
+                </a:solidFill>
+                <a:latin typeface="Times New Roman" panose="02020603050405020304" pitchFamily="18" charset="0"/>
+              </a:defRPr>
+            </a:lvl9pPr>
+          </a:lstStyle>
+          <a:p>
+            <a:endParaRPr lang="cs-CZ"/>
+          </a:p>
+        </p:txBody>
+      </p:sp>
+    </p:spTree>
+    <p:extLst>
+      <p:ext uri="{BB962C8B-B14F-4D97-AF65-F5344CB8AC3E}">
+        <p14:creationId xmlns:p14="http://schemas.microsoft.com/office/powerpoint/2010/main" val="650989019"/>
+      </p:ext>
+    </p:extLst>
+  </p:cSld>
+  <p:clrMapOvr>
+    <a:masterClrMapping/>
+  </p:clrMapOvr>
+</p:sld>
+</file>
+
+<file path=ppt/slides/slide31.xml><?xml version="1.0" encoding="utf-8"?>
+<p:sld xmlns:a="http://schemas.openxmlformats.org/drawingml/2006/main" xmlns:r="http://schemas.openxmlformats.org/officeDocument/2006/relationships" xmlns:p="http://schemas.openxmlformats.org/presentationml/2006/main">
+  <p:cSld>
+    <p:spTree>
+      <p:nvGrpSpPr>
+        <p:cNvPr id="1" name=""/>
+        <p:cNvGrpSpPr/>
+        <p:nvPr/>
+      </p:nvGrpSpPr>
+      <p:grpSpPr>
+        <a:xfrm>
+          <a:off x="0" y="0"/>
+          <a:ext cx="0" cy="0"/>
+          <a:chOff x="0" y="0"/>
+          <a:chExt cx="0" cy="0"/>
+        </a:xfrm>
+      </p:grpSpPr>
+      <p:sp>
+        <p:nvSpPr>
+          <p:cNvPr id="17411" name="Zástupný symbol čísla snímky 4"/>
+          <p:cNvSpPr>
+            <a:spLocks noGrp="1"/>
+          </p:cNvSpPr>
+          <p:nvPr>
+            <p:ph type="sldNum" sz="quarter" idx="12"/>
+          </p:nvPr>
+        </p:nvSpPr>
+        <p:spPr>
+          <a:noFill/>
+          <a:ln/>
+          <a:extLst>
+            <a:ext uri="{909E8E84-426E-40DD-AFC4-6F175D3DCCD1}">
+              <a14:hiddenFill xmlns:a14="http://schemas.microsoft.com/office/drawing/2010/main">
+                <a:solidFill>
+                  <a:srgbClr val="FFFFFF"/>
+                </a:solidFill>
+              </a14:hiddenFill>
+            </a:ext>
+            <a:ext uri="{91240B29-F687-4F45-9708-019B960494DF}">
+              <a14:hiddenLine xmlns:a14="http://schemas.microsoft.com/office/drawing/2010/main" w="9525">
+                <a:solidFill>
+                  <a:srgbClr val="000000"/>
+                </a:solidFill>
+                <a:miter lim="800000"/>
+                <a:headEnd/>
+                <a:tailEnd/>
+              </a14:hiddenLine>
+            </a:ext>
+          </a:extLst>
+        </p:spPr>
+        <p:txBody>
+          <a:bodyPr/>
+          <a:lstStyle>
+            <a:lvl1pPr>
+              <a:defRPr sz="2400">
+                <a:solidFill>
+                  <a:schemeClr val="tx1"/>
+                </a:solidFill>
+                <a:latin typeface="Times New Roman" panose="02020603050405020304" pitchFamily="18" charset="0"/>
+              </a:defRPr>
+            </a:lvl1pPr>
+            <a:lvl2pPr marL="742950" indent="-285750">
+              <a:defRPr sz="2400">
+                <a:solidFill>
+                  <a:schemeClr val="tx1"/>
+                </a:solidFill>
+                <a:latin typeface="Times New Roman" panose="02020603050405020304" pitchFamily="18" charset="0"/>
+              </a:defRPr>
+            </a:lvl2pPr>
+            <a:lvl3pPr marL="1143000" indent="-228600">
+              <a:defRPr sz="2400">
+                <a:solidFill>
+                  <a:schemeClr val="tx1"/>
+                </a:solidFill>
+                <a:latin typeface="Times New Roman" panose="02020603050405020304" pitchFamily="18" charset="0"/>
+              </a:defRPr>
+            </a:lvl3pPr>
+            <a:lvl4pPr marL="1600200" indent="-228600">
+              <a:defRPr sz="2400">
+                <a:solidFill>
+                  <a:schemeClr val="tx1"/>
+                </a:solidFill>
+                <a:latin typeface="Times New Roman" panose="02020603050405020304" pitchFamily="18" charset="0"/>
+              </a:defRPr>
+            </a:lvl4pPr>
+            <a:lvl5pPr marL="2057400" indent="-228600">
+              <a:defRPr sz="2400">
+                <a:solidFill>
+                  <a:schemeClr val="tx1"/>
+                </a:solidFill>
+                <a:latin typeface="Times New Roman" panose="02020603050405020304" pitchFamily="18" charset="0"/>
+              </a:defRPr>
+            </a:lvl5pPr>
+            <a:lvl6pPr marL="2514600" indent="-228600" eaLnBrk="0" fontAlgn="base" hangingPunct="0">
+              <a:spcBef>
+                <a:spcPct val="0"/>
+              </a:spcBef>
+              <a:spcAft>
+                <a:spcPct val="0"/>
+              </a:spcAft>
+              <a:defRPr sz="2400">
+                <a:solidFill>
+                  <a:schemeClr val="tx1"/>
+                </a:solidFill>
+                <a:latin typeface="Times New Roman" panose="02020603050405020304" pitchFamily="18" charset="0"/>
+              </a:defRPr>
+            </a:lvl6pPr>
+            <a:lvl7pPr marL="2971800" indent="-228600" eaLnBrk="0" fontAlgn="base" hangingPunct="0">
+              <a:spcBef>
+                <a:spcPct val="0"/>
+              </a:spcBef>
+              <a:spcAft>
+                <a:spcPct val="0"/>
+              </a:spcAft>
+              <a:defRPr sz="2400">
+                <a:solidFill>
+                  <a:schemeClr val="tx1"/>
+                </a:solidFill>
+                <a:latin typeface="Times New Roman" panose="02020603050405020304" pitchFamily="18" charset="0"/>
+              </a:defRPr>
+            </a:lvl7pPr>
+            <a:lvl8pPr marL="3429000" indent="-228600" eaLnBrk="0" fontAlgn="base" hangingPunct="0">
+              <a:spcBef>
+                <a:spcPct val="0"/>
+              </a:spcBef>
+              <a:spcAft>
+                <a:spcPct val="0"/>
+              </a:spcAft>
+              <a:defRPr sz="2400">
+                <a:solidFill>
+                  <a:schemeClr val="tx1"/>
+                </a:solidFill>
+                <a:latin typeface="Times New Roman" panose="02020603050405020304" pitchFamily="18" charset="0"/>
+              </a:defRPr>
+            </a:lvl8pPr>
+            <a:lvl9pPr marL="3886200" indent="-228600" eaLnBrk="0" fontAlgn="base" hangingPunct="0">
+              <a:spcBef>
+                <a:spcPct val="0"/>
+              </a:spcBef>
+              <a:spcAft>
+                <a:spcPct val="0"/>
+              </a:spcAft>
+              <a:defRPr sz="2400">
+                <a:solidFill>
+                  <a:schemeClr val="tx1"/>
+                </a:solidFill>
+                <a:latin typeface="Times New Roman" panose="02020603050405020304" pitchFamily="18" charset="0"/>
+              </a:defRPr>
+            </a:lvl9pPr>
+          </a:lstStyle>
+          <a:p>
             <a:fld id="{770FB737-E7B6-4711-A22C-CC3405C4E2F2}" type="slidenum">
               <a:rPr lang="sk-SK" sz="1400"/>
               <a:pPr/>
-              <a:t>30</a:t>
+              <a:t>31</a:t>
             </a:fld>
             <a:endParaRPr lang="sk-SK" sz="1400"/>
           </a:p>
@@ -14149,7 +14178,7 @@
 </p:sld>
 </file>
 
-<file path=ppt/slides/slide31.xml><?xml version="1.0" encoding="utf-8"?>
+<file path=ppt/slides/slide32.xml><?xml version="1.0" encoding="utf-8"?>
 <p:sld xmlns:a="http://schemas.openxmlformats.org/drawingml/2006/main" xmlns:r="http://schemas.openxmlformats.org/officeDocument/2006/relationships" xmlns:p="http://schemas.openxmlformats.org/presentationml/2006/main">
   <p:cSld>
     <p:spTree>
@@ -14307,7 +14336,7 @@
             <a:fld id="{7F7BA177-CA5D-48EA-8AF1-2D6D99151520}" type="slidenum">
               <a:rPr lang="sk-SK" sz="1400"/>
               <a:pPr/>
-              <a:t>31</a:t>
+              <a:t>32</a:t>
             </a:fld>
             <a:endParaRPr lang="sk-SK" sz="1400"/>
           </a:p>
@@ -14717,363 +14746,6 @@
 </p:sld>
 </file>
 
-<file path=ppt/slides/slide32.xml><?xml version="1.0" encoding="utf-8"?>
-<p:sld xmlns:a="http://schemas.openxmlformats.org/drawingml/2006/main" xmlns:r="http://schemas.openxmlformats.org/officeDocument/2006/relationships" xmlns:p="http://schemas.openxmlformats.org/presentationml/2006/main">
-  <p:cSld>
-    <p:spTree>
-      <p:nvGrpSpPr>
-        <p:cNvPr id="1" name=""/>
-        <p:cNvGrpSpPr/>
-        <p:nvPr/>
-      </p:nvGrpSpPr>
-      <p:grpSpPr>
-        <a:xfrm>
-          <a:off x="0" y="0"/>
-          <a:ext cx="0" cy="0"/>
-          <a:chOff x="0" y="0"/>
-          <a:chExt cx="0" cy="0"/>
-        </a:xfrm>
-      </p:grpSpPr>
-      <p:sp>
-        <p:nvSpPr>
-          <p:cNvPr id="30725" name="Rectangle 3"/>
-          <p:cNvSpPr>
-            <a:spLocks noGrp="1" noChangeArrowheads="1"/>
-          </p:cNvSpPr>
-          <p:nvPr>
-            <p:ph type="title"/>
-          </p:nvPr>
-        </p:nvSpPr>
-        <p:spPr>
-          <a:xfrm>
-            <a:off x="838200" y="136525"/>
-            <a:ext cx="10515600" cy="1325563"/>
-          </a:xfrm>
-        </p:spPr>
-        <p:txBody>
-          <a:bodyPr/>
-          <a:lstStyle/>
-          <a:p>
-            <a:r>
-              <a:rPr lang="sk-SK" dirty="0"/>
-              <a:t>Monitory - </a:t>
-            </a:r>
-            <a:r>
-              <a:rPr lang="sk-SK" dirty="0" err="1"/>
-              <a:t>synchr</a:t>
-            </a:r>
-            <a:r>
-              <a:rPr lang="sk-SK" dirty="0"/>
-              <a:t>. nástroje vyššej úrovne</a:t>
-            </a:r>
-          </a:p>
-        </p:txBody>
-      </p:sp>
-      <p:sp>
-        <p:nvSpPr>
-          <p:cNvPr id="3" name="Zástupný objekt pre obsah 2">
-            <a:extLst>
-              <a:ext uri="{FF2B5EF4-FFF2-40B4-BE49-F238E27FC236}">
-                <a16:creationId xmlns:a16="http://schemas.microsoft.com/office/drawing/2014/main" id="{C546CA57-7330-134E-82B3-A6C54F8156E0}"/>
-              </a:ext>
-            </a:extLst>
-          </p:cNvPr>
-          <p:cNvSpPr>
-            <a:spLocks noGrp="1"/>
-          </p:cNvSpPr>
-          <p:nvPr>
-            <p:ph idx="1"/>
-          </p:nvPr>
-        </p:nvSpPr>
-        <p:spPr>
-          <a:xfrm>
-            <a:off x="838200" y="1277257"/>
-            <a:ext cx="10515600" cy="5215618"/>
-          </a:xfrm>
-        </p:spPr>
-        <p:txBody>
-          <a:bodyPr>
-            <a:normAutofit fontScale="85000" lnSpcReduction="20000"/>
-          </a:bodyPr>
-          <a:lstStyle/>
-          <a:p>
-            <a:pPr marL="0" indent="0">
-              <a:buNone/>
-            </a:pPr>
-            <a:r>
-              <a:rPr lang="sk-SK" dirty="0"/>
-              <a:t>Monitor je synchronizačný nástroj vyššej úrovne, ktorý rieši vzájomné vylúčenie aj koordináciu procesov elegantnejšie než semafory či nízkoúrovňové algoritmy. Je to vlastne </a:t>
-            </a:r>
-            <a:r>
-              <a:rPr lang="sk-SK" b="1" dirty="0"/>
-              <a:t>obal</a:t>
-            </a:r>
-            <a:r>
-              <a:rPr lang="sk-SK" dirty="0"/>
-              <a:t>, ktorý spája zámok a podmienené premenné do jedného bezpečného mechanizmu.</a:t>
-            </a:r>
-          </a:p>
-          <a:p>
-            <a:pPr marL="0" indent="0">
-              <a:buNone/>
-            </a:pPr>
-            <a:r>
-              <a:rPr lang="sk-SK" b="1" dirty="0"/>
-              <a:t>Podstata monitoru</a:t>
-            </a:r>
-          </a:p>
-          <a:p>
-            <a:pPr marL="0" indent="0">
-              <a:buNone/>
-            </a:pPr>
-            <a:r>
-              <a:rPr lang="sk-SK" b="1" dirty="0"/>
-              <a:t>1. Iba jeden proces môže byť v monitore naraz</a:t>
-            </a:r>
-          </a:p>
-          <a:p>
-            <a:r>
-              <a:rPr lang="sk-SK" dirty="0"/>
-              <a:t>Monitor má </a:t>
-            </a:r>
-            <a:r>
-              <a:rPr lang="sk-SK" b="1" dirty="0"/>
-              <a:t>implicitný zámok</a:t>
-            </a:r>
-            <a:r>
-              <a:rPr lang="sk-SK" dirty="0"/>
-              <a:t>. Keď proces vstúpi do monitoru (volá jeho metódu), automaticky získava zámok. Kým je vo vnútri, žiadny iný proces sa tam nedostane.</a:t>
-            </a:r>
-          </a:p>
-          <a:p>
-            <a:r>
-              <a:rPr lang="sk-SK" dirty="0"/>
-              <a:t>To znamená, že monitor </a:t>
-            </a:r>
-            <a:r>
-              <a:rPr lang="sk-SK" b="1" dirty="0"/>
-              <a:t>automaticky zabezpečuje vzájomné vylúčenie</a:t>
-            </a:r>
-            <a:r>
-              <a:rPr lang="sk-SK" dirty="0"/>
-              <a:t>.</a:t>
-            </a:r>
-          </a:p>
-          <a:p>
-            <a:pPr marL="0" indent="0">
-              <a:buNone/>
-            </a:pPr>
-            <a:r>
-              <a:rPr lang="sk-SK" b="1" dirty="0"/>
-              <a:t>2. Monitor obsahuje podmienené premenné</a:t>
-            </a:r>
-          </a:p>
-          <a:p>
-            <a:r>
-              <a:rPr lang="sk-SK" dirty="0"/>
-              <a:t>Tie slúžia na čakanie na určitú podmienku. Majú dve operácie:</a:t>
-            </a:r>
-          </a:p>
-          <a:p>
-            <a:pPr lvl="1"/>
-            <a:r>
-              <a:rPr lang="sk-SK" dirty="0" err="1"/>
-              <a:t>wait</a:t>
-            </a:r>
-            <a:r>
-              <a:rPr lang="sk-SK" dirty="0"/>
-              <a:t>() – proces sa uspí a uvoľní zámok</a:t>
-            </a:r>
-          </a:p>
-          <a:p>
-            <a:pPr lvl="1"/>
-            <a:r>
-              <a:rPr lang="sk-SK" dirty="0" err="1"/>
-              <a:t>signal</a:t>
-            </a:r>
-            <a:r>
-              <a:rPr lang="sk-SK" dirty="0"/>
-              <a:t>() – prebudí jeden čakajúci proces</a:t>
-            </a:r>
-          </a:p>
-          <a:p>
-            <a:r>
-              <a:rPr lang="sk-SK" dirty="0"/>
-              <a:t>Tým monitor rieši aj </a:t>
-            </a:r>
-            <a:r>
-              <a:rPr lang="sk-SK" b="1" dirty="0"/>
-              <a:t>synchronizáciu poradia</a:t>
-            </a:r>
-            <a:r>
-              <a:rPr lang="sk-SK" dirty="0"/>
-              <a:t>.</a:t>
-            </a:r>
-          </a:p>
-          <a:p>
-            <a:pPr marL="0" indent="0">
-              <a:buNone/>
-            </a:pPr>
-            <a:endParaRPr lang="sk-SK" dirty="0"/>
-          </a:p>
-        </p:txBody>
-      </p:sp>
-      <p:sp>
-        <p:nvSpPr>
-          <p:cNvPr id="30723" name="Zástupný symbol čísla snímky 3"/>
-          <p:cNvSpPr>
-            <a:spLocks noGrp="1"/>
-          </p:cNvSpPr>
-          <p:nvPr>
-            <p:ph type="sldNum" sz="quarter" idx="12"/>
-          </p:nvPr>
-        </p:nvSpPr>
-        <p:spPr>
-          <a:noFill/>
-          <a:ln/>
-          <a:extLst>
-            <a:ext uri="{909E8E84-426E-40DD-AFC4-6F175D3DCCD1}">
-              <a14:hiddenFill xmlns:a14="http://schemas.microsoft.com/office/drawing/2010/main">
-                <a:solidFill>
-                  <a:srgbClr val="FFFFFF"/>
-                </a:solidFill>
-              </a14:hiddenFill>
-            </a:ext>
-            <a:ext uri="{91240B29-F687-4F45-9708-019B960494DF}">
-              <a14:hiddenLine xmlns:a14="http://schemas.microsoft.com/office/drawing/2010/main" w="9525">
-                <a:solidFill>
-                  <a:srgbClr val="000000"/>
-                </a:solidFill>
-                <a:miter lim="800000"/>
-                <a:headEnd/>
-                <a:tailEnd/>
-              </a14:hiddenLine>
-            </a:ext>
-          </a:extLst>
-        </p:spPr>
-        <p:txBody>
-          <a:bodyPr/>
-          <a:lstStyle>
-            <a:lvl1pPr>
-              <a:defRPr sz="2400">
-                <a:solidFill>
-                  <a:schemeClr val="tx1"/>
-                </a:solidFill>
-                <a:latin typeface="Times New Roman" panose="02020603050405020304" pitchFamily="18" charset="0"/>
-              </a:defRPr>
-            </a:lvl1pPr>
-            <a:lvl2pPr marL="742950" indent="-285750">
-              <a:defRPr sz="2400">
-                <a:solidFill>
-                  <a:schemeClr val="tx1"/>
-                </a:solidFill>
-                <a:latin typeface="Times New Roman" panose="02020603050405020304" pitchFamily="18" charset="0"/>
-              </a:defRPr>
-            </a:lvl2pPr>
-            <a:lvl3pPr marL="1143000" indent="-228600">
-              <a:defRPr sz="2400">
-                <a:solidFill>
-                  <a:schemeClr val="tx1"/>
-                </a:solidFill>
-                <a:latin typeface="Times New Roman" panose="02020603050405020304" pitchFamily="18" charset="0"/>
-              </a:defRPr>
-            </a:lvl3pPr>
-            <a:lvl4pPr marL="1600200" indent="-228600">
-              <a:defRPr sz="2400">
-                <a:solidFill>
-                  <a:schemeClr val="tx1"/>
-                </a:solidFill>
-                <a:latin typeface="Times New Roman" panose="02020603050405020304" pitchFamily="18" charset="0"/>
-              </a:defRPr>
-            </a:lvl4pPr>
-            <a:lvl5pPr marL="2057400" indent="-228600">
-              <a:defRPr sz="2400">
-                <a:solidFill>
-                  <a:schemeClr val="tx1"/>
-                </a:solidFill>
-                <a:latin typeface="Times New Roman" panose="02020603050405020304" pitchFamily="18" charset="0"/>
-              </a:defRPr>
-            </a:lvl5pPr>
-            <a:lvl6pPr marL="2514600" indent="-228600" eaLnBrk="0" fontAlgn="base" hangingPunct="0">
-              <a:spcBef>
-                <a:spcPct val="0"/>
-              </a:spcBef>
-              <a:spcAft>
-                <a:spcPct val="0"/>
-              </a:spcAft>
-              <a:defRPr sz="2400">
-                <a:solidFill>
-                  <a:schemeClr val="tx1"/>
-                </a:solidFill>
-                <a:latin typeface="Times New Roman" panose="02020603050405020304" pitchFamily="18" charset="0"/>
-              </a:defRPr>
-            </a:lvl6pPr>
-            <a:lvl7pPr marL="2971800" indent="-228600" eaLnBrk="0" fontAlgn="base" hangingPunct="0">
-              <a:spcBef>
-                <a:spcPct val="0"/>
-              </a:spcBef>
-              <a:spcAft>
-                <a:spcPct val="0"/>
-              </a:spcAft>
-              <a:defRPr sz="2400">
-                <a:solidFill>
-                  <a:schemeClr val="tx1"/>
-                </a:solidFill>
-                <a:latin typeface="Times New Roman" panose="02020603050405020304" pitchFamily="18" charset="0"/>
-              </a:defRPr>
-            </a:lvl7pPr>
-            <a:lvl8pPr marL="3429000" indent="-228600" eaLnBrk="0" fontAlgn="base" hangingPunct="0">
-              <a:spcBef>
-                <a:spcPct val="0"/>
-              </a:spcBef>
-              <a:spcAft>
-                <a:spcPct val="0"/>
-              </a:spcAft>
-              <a:defRPr sz="2400">
-                <a:solidFill>
-                  <a:schemeClr val="tx1"/>
-                </a:solidFill>
-                <a:latin typeface="Times New Roman" panose="02020603050405020304" pitchFamily="18" charset="0"/>
-              </a:defRPr>
-            </a:lvl8pPr>
-            <a:lvl9pPr marL="3886200" indent="-228600" eaLnBrk="0" fontAlgn="base" hangingPunct="0">
-              <a:spcBef>
-                <a:spcPct val="0"/>
-              </a:spcBef>
-              <a:spcAft>
-                <a:spcPct val="0"/>
-              </a:spcAft>
-              <a:defRPr sz="2400">
-                <a:solidFill>
-                  <a:schemeClr val="tx1"/>
-                </a:solidFill>
-                <a:latin typeface="Times New Roman" panose="02020603050405020304" pitchFamily="18" charset="0"/>
-              </a:defRPr>
-            </a:lvl9pPr>
-          </a:lstStyle>
-          <a:p>
-            <a:fld id="{FC940E4F-28EF-402F-B471-F1CA2AAD0AD9}" type="slidenum">
-              <a:rPr lang="sk-SK"/>
-              <a:pPr/>
-              <a:t>32</a:t>
-            </a:fld>
-            <a:endParaRPr lang="sk-SK"/>
-          </a:p>
-        </p:txBody>
-      </p:sp>
-    </p:spTree>
-    <p:extLst>
-      <p:ext uri="{BB962C8B-B14F-4D97-AF65-F5344CB8AC3E}">
-        <p14:creationId xmlns:p14="http://schemas.microsoft.com/office/powerpoint/2010/main" val="397644615"/>
-      </p:ext>
-    </p:extLst>
-  </p:cSld>
-  <p:clrMapOvr>
-    <a:masterClrMapping/>
-  </p:clrMapOvr>
-</p:sld>
-</file>
-
 <file path=ppt/slides/slide33.xml><?xml version="1.0" encoding="utf-8"?>
 <p:sld xmlns:a="http://schemas.openxmlformats.org/drawingml/2006/main" xmlns:r="http://schemas.openxmlformats.org/officeDocument/2006/relationships" xmlns:p="http://schemas.openxmlformats.org/presentationml/2006/main">
   <p:cSld>
@@ -15093,7 +14765,191 @@
       </p:grpSpPr>
       <p:sp>
         <p:nvSpPr>
-          <p:cNvPr id="31747" name="Zástupný symbol čísla snímky 3"/>
+          <p:cNvPr id="30725" name="Rectangle 3"/>
+          <p:cNvSpPr>
+            <a:spLocks noGrp="1" noChangeArrowheads="1"/>
+          </p:cNvSpPr>
+          <p:nvPr>
+            <p:ph type="title"/>
+          </p:nvPr>
+        </p:nvSpPr>
+        <p:spPr>
+          <a:xfrm>
+            <a:off x="838200" y="136525"/>
+            <a:ext cx="10515600" cy="1325563"/>
+          </a:xfrm>
+        </p:spPr>
+        <p:txBody>
+          <a:bodyPr/>
+          <a:lstStyle/>
+          <a:p>
+            <a:r>
+              <a:rPr lang="sk-SK" dirty="0"/>
+              <a:t>Monitory - </a:t>
+            </a:r>
+            <a:r>
+              <a:rPr lang="sk-SK" dirty="0" err="1"/>
+              <a:t>synchr</a:t>
+            </a:r>
+            <a:r>
+              <a:rPr lang="sk-SK" dirty="0"/>
+              <a:t>. nástroje vyššej úrovne</a:t>
+            </a:r>
+          </a:p>
+        </p:txBody>
+      </p:sp>
+      <p:sp>
+        <p:nvSpPr>
+          <p:cNvPr id="3" name="Zástupný objekt pre obsah 2">
+            <a:extLst>
+              <a:ext uri="{FF2B5EF4-FFF2-40B4-BE49-F238E27FC236}">
+                <a16:creationId xmlns:a16="http://schemas.microsoft.com/office/drawing/2014/main" id="{C546CA57-7330-134E-82B3-A6C54F8156E0}"/>
+              </a:ext>
+            </a:extLst>
+          </p:cNvPr>
+          <p:cNvSpPr>
+            <a:spLocks noGrp="1"/>
+          </p:cNvSpPr>
+          <p:nvPr>
+            <p:ph idx="1"/>
+          </p:nvPr>
+        </p:nvSpPr>
+        <p:spPr>
+          <a:xfrm>
+            <a:off x="838200" y="1277257"/>
+            <a:ext cx="10515600" cy="5215618"/>
+          </a:xfrm>
+        </p:spPr>
+        <p:txBody>
+          <a:bodyPr>
+            <a:normAutofit fontScale="85000" lnSpcReduction="20000"/>
+          </a:bodyPr>
+          <a:lstStyle/>
+          <a:p>
+            <a:pPr marL="0" indent="0">
+              <a:buNone/>
+            </a:pPr>
+            <a:r>
+              <a:rPr lang="sk-SK" dirty="0"/>
+              <a:t>Monitor je synchronizačný nástroj vyššej úrovne, ktorý rieši vzájomné vylúčenie aj koordináciu procesov elegantnejšie než semafory či nízkoúrovňové algoritmy. Je to vlastne </a:t>
+            </a:r>
+            <a:r>
+              <a:rPr lang="sk-SK" b="1" dirty="0"/>
+              <a:t>obal</a:t>
+            </a:r>
+            <a:r>
+              <a:rPr lang="sk-SK" dirty="0"/>
+              <a:t>, ktorý spája zámok a podmienené premenné do jedného bezpečného mechanizmu.</a:t>
+            </a:r>
+          </a:p>
+          <a:p>
+            <a:pPr marL="0" indent="0">
+              <a:buNone/>
+            </a:pPr>
+            <a:r>
+              <a:rPr lang="sk-SK" b="1" dirty="0"/>
+              <a:t>Podstata monitoru</a:t>
+            </a:r>
+          </a:p>
+          <a:p>
+            <a:pPr marL="0" indent="0">
+              <a:buNone/>
+            </a:pPr>
+            <a:r>
+              <a:rPr lang="sk-SK" b="1" dirty="0"/>
+              <a:t>1. Iba jeden proces môže byť v monitore naraz</a:t>
+            </a:r>
+          </a:p>
+          <a:p>
+            <a:r>
+              <a:rPr lang="sk-SK" dirty="0"/>
+              <a:t>Monitor má </a:t>
+            </a:r>
+            <a:r>
+              <a:rPr lang="sk-SK" b="1" dirty="0"/>
+              <a:t>implicitný zámok</a:t>
+            </a:r>
+            <a:r>
+              <a:rPr lang="sk-SK" dirty="0"/>
+              <a:t>. Keď proces vstúpi do monitoru (volá jeho metódu), automaticky získava zámok. Kým je vo vnútri, žiadny iný proces sa tam nedostane.</a:t>
+            </a:r>
+          </a:p>
+          <a:p>
+            <a:r>
+              <a:rPr lang="sk-SK" dirty="0"/>
+              <a:t>To znamená, že monitor </a:t>
+            </a:r>
+            <a:r>
+              <a:rPr lang="sk-SK" b="1" dirty="0"/>
+              <a:t>automaticky zabezpečuje vzájomné vylúčenie</a:t>
+            </a:r>
+            <a:r>
+              <a:rPr lang="sk-SK" dirty="0"/>
+              <a:t>.</a:t>
+            </a:r>
+          </a:p>
+          <a:p>
+            <a:pPr marL="0" indent="0">
+              <a:buNone/>
+            </a:pPr>
+            <a:r>
+              <a:rPr lang="sk-SK" b="1" dirty="0"/>
+              <a:t>2. Monitor obsahuje podmienené premenné</a:t>
+            </a:r>
+          </a:p>
+          <a:p>
+            <a:r>
+              <a:rPr lang="sk-SK" dirty="0"/>
+              <a:t>Tie slúžia na čakanie na určitú podmienku. Majú dve operácie:</a:t>
+            </a:r>
+          </a:p>
+          <a:p>
+            <a:pPr lvl="1"/>
+            <a:r>
+              <a:rPr lang="sk-SK" dirty="0" err="1"/>
+              <a:t>wait</a:t>
+            </a:r>
+            <a:r>
+              <a:rPr lang="sk-SK" dirty="0"/>
+              <a:t>() – proces sa uspí a uvoľní zámok</a:t>
+            </a:r>
+          </a:p>
+          <a:p>
+            <a:pPr lvl="1"/>
+            <a:r>
+              <a:rPr lang="sk-SK" dirty="0" err="1"/>
+              <a:t>signal</a:t>
+            </a:r>
+            <a:r>
+              <a:rPr lang="sk-SK" dirty="0"/>
+              <a:t>() – prebudí jeden čakajúci proces</a:t>
+            </a:r>
+          </a:p>
+          <a:p>
+            <a:r>
+              <a:rPr lang="sk-SK" dirty="0"/>
+              <a:t>Tým monitor rieši aj </a:t>
+            </a:r>
+            <a:r>
+              <a:rPr lang="sk-SK" b="1" dirty="0"/>
+              <a:t>synchronizáciu poradia</a:t>
+            </a:r>
+            <a:r>
+              <a:rPr lang="sk-SK" dirty="0"/>
+              <a:t>.</a:t>
+            </a:r>
+          </a:p>
+          <a:p>
+            <a:pPr marL="0" indent="0">
+              <a:buNone/>
+            </a:pPr>
+            <a:endParaRPr lang="sk-SK" dirty="0"/>
+          </a:p>
+        </p:txBody>
+      </p:sp>
+      <p:sp>
+        <p:nvSpPr>
+          <p:cNvPr id="30723" name="Zástupný symbol čísla snímky 3"/>
           <p:cNvSpPr>
             <a:spLocks noGrp="1"/>
           </p:cNvSpPr>
@@ -15225,114 +15081,19 @@
             </a:lvl9pPr>
           </a:lstStyle>
           <a:p>
-            <a:fld id="{4799A7DB-AC62-46E4-9215-AD7D88508BEF}" type="slidenum">
-              <a:rPr lang="sk-SK" sz="1400"/>
+            <a:fld id="{FC940E4F-28EF-402F-B471-F1CA2AAD0AD9}" type="slidenum">
+              <a:rPr lang="sk-SK"/>
               <a:pPr/>
               <a:t>33</a:t>
             </a:fld>
-            <a:endParaRPr lang="sk-SK" sz="1400"/>
-          </a:p>
-        </p:txBody>
-      </p:sp>
-      <p:sp>
-        <p:nvSpPr>
-          <p:cNvPr id="31748" name="Rectangle 2"/>
-          <p:cNvSpPr>
-            <a:spLocks noGrp="1" noChangeArrowheads="1"/>
-          </p:cNvSpPr>
-          <p:nvPr>
-            <p:ph type="body" idx="4294967295"/>
-          </p:nvPr>
-        </p:nvSpPr>
-        <p:spPr/>
-        <p:txBody>
-          <a:bodyPr/>
-          <a:lstStyle/>
-          <a:p>
-            <a:pPr marL="0" indent="0">
-              <a:buNone/>
-            </a:pPr>
-            <a:r>
-              <a:rPr lang="sk-SK" b="1" dirty="0"/>
-              <a:t>3. Procesy nečakajú aktívne</a:t>
-            </a:r>
-          </a:p>
-          <a:p>
-            <a:r>
-              <a:rPr lang="sk-SK" dirty="0"/>
-              <a:t>Monitor používa </a:t>
-            </a:r>
-            <a:r>
-              <a:rPr lang="sk-SK" b="1" dirty="0"/>
-              <a:t>pasívne čakanie</a:t>
-            </a:r>
-            <a:r>
-              <a:rPr lang="sk-SK" dirty="0"/>
-              <a:t> – proces sa uspí a OS ho prebudí, keď môže pokračovať. Nevzniká plytvanie CPU ako pri </a:t>
-            </a:r>
-            <a:r>
-              <a:rPr lang="sk-SK" dirty="0" err="1"/>
-              <a:t>busy</a:t>
-            </a:r>
-            <a:r>
-              <a:rPr lang="sk-SK" dirty="0"/>
-              <a:t> </a:t>
-            </a:r>
-            <a:r>
-              <a:rPr lang="sk-SK" dirty="0" err="1"/>
-              <a:t>waiting</a:t>
-            </a:r>
-            <a:r>
-              <a:rPr lang="sk-SK" dirty="0"/>
-              <a:t>.</a:t>
-            </a:r>
-          </a:p>
-          <a:p>
-            <a:pPr marL="0" indent="0">
-              <a:buNone/>
-            </a:pPr>
-            <a:r>
-              <a:rPr lang="sk-SK" b="1" dirty="0"/>
-              <a:t>4. Monitor je bezpečný a prehľadný</a:t>
-            </a:r>
-          </a:p>
-          <a:p>
-            <a:r>
-              <a:rPr lang="sk-SK" dirty="0"/>
-              <a:t>Všetky zdieľané premenné sú „schované“ vo vnútri monitoru. Procesy k nim pristupujú iba cez metódy monitoru, čo zabraňuje chybám.</a:t>
-            </a:r>
-            <a:endParaRPr lang="sk-SK" dirty="0">
-              <a:effectLst/>
-            </a:endParaRPr>
-          </a:p>
-        </p:txBody>
-      </p:sp>
-      <p:sp>
-        <p:nvSpPr>
-          <p:cNvPr id="31749" name="Rectangle 3"/>
-          <p:cNvSpPr>
-            <a:spLocks noGrp="1" noChangeArrowheads="1"/>
-          </p:cNvSpPr>
-          <p:nvPr>
-            <p:ph type="title" idx="4294967295"/>
-          </p:nvPr>
-        </p:nvSpPr>
-        <p:spPr/>
-        <p:txBody>
-          <a:bodyPr/>
-          <a:lstStyle/>
-          <a:p>
-            <a:r>
-              <a:rPr lang="sk-SK"/>
-              <a:t>Monitory</a:t>
-            </a:r>
+            <a:endParaRPr lang="sk-SK"/>
           </a:p>
         </p:txBody>
       </p:sp>
     </p:spTree>
     <p:extLst>
       <p:ext uri="{BB962C8B-B14F-4D97-AF65-F5344CB8AC3E}">
-        <p14:creationId xmlns:p14="http://schemas.microsoft.com/office/powerpoint/2010/main" val="4133182652"/>
+        <p14:creationId xmlns:p14="http://schemas.microsoft.com/office/powerpoint/2010/main" val="397644615"/>
       </p:ext>
     </p:extLst>
   </p:cSld>
@@ -15361,89 +15122,7 @@
       </p:grpSpPr>
       <p:sp>
         <p:nvSpPr>
-          <p:cNvPr id="2" name="Title 1"/>
-          <p:cNvSpPr>
-            <a:spLocks noGrp="1"/>
-          </p:cNvSpPr>
-          <p:nvPr>
-            <p:ph type="title"/>
-          </p:nvPr>
-        </p:nvSpPr>
-        <p:spPr/>
-        <p:txBody>
-          <a:bodyPr/>
-          <a:lstStyle/>
-          <a:p>
-            <a:r>
-              <a:rPr lang="sk-SK"/>
-              <a:t>RPC – </a:t>
-            </a:r>
-            <a:r>
-              <a:rPr lang="sk-SK" err="1"/>
-              <a:t>remote</a:t>
-            </a:r>
-            <a:r>
-              <a:rPr lang="sk-SK"/>
-              <a:t> </a:t>
-            </a:r>
-            <a:r>
-              <a:rPr lang="sk-SK" err="1"/>
-              <a:t>procedure</a:t>
-            </a:r>
-            <a:r>
-              <a:rPr lang="sk-SK"/>
-              <a:t> </a:t>
-            </a:r>
-            <a:r>
-              <a:rPr lang="sk-SK" err="1"/>
-              <a:t>call</a:t>
-            </a:r>
-            <a:endParaRPr lang="sk-SK"/>
-          </a:p>
-        </p:txBody>
-      </p:sp>
-      <p:sp>
-        <p:nvSpPr>
-          <p:cNvPr id="3" name="Content Placeholder 2"/>
-          <p:cNvSpPr>
-            <a:spLocks noGrp="1"/>
-          </p:cNvSpPr>
-          <p:nvPr>
-            <p:ph idx="1"/>
-          </p:nvPr>
-        </p:nvSpPr>
-        <p:spPr/>
-        <p:txBody>
-          <a:bodyPr>
-            <a:normAutofit fontScale="92500" lnSpcReduction="10000"/>
-          </a:bodyPr>
-          <a:lstStyle/>
-          <a:p>
-            <a:r>
-              <a:rPr lang="sk-SK" dirty="0"/>
-              <a:t>RPC - Vzdialené volanie procedúr je softvérový komunikačný protokol, ktorý môže jeden program použiť na vyžiadanie služby od programu umiestneného v inom počítači v sieti bez toho, aby musel rozumieť detailom siete. RPC sa používa na volanie iných procesov vo vzdialených systémoch ako miestny systém. Volanie procedúry sa niekedy nazýva aj volanie funkcie alebo volanie podprogramu.</a:t>
-            </a:r>
-          </a:p>
-          <a:p>
-            <a:r>
-              <a:rPr lang="sk-SK" dirty="0"/>
-              <a:t>RPC používa model klient-server.</a:t>
-            </a:r>
-          </a:p>
-          <a:p>
-            <a:endParaRPr lang="sk-SK" dirty="0"/>
-          </a:p>
-          <a:p>
-            <a:r>
-              <a:rPr lang="sk-SK" dirty="0"/>
-              <a:t>RPC sa obvykle realizuje pomocou synchrónnych správ, kedy žiadajúci proces pošle procesu ktorý je vlastníkom dotyčnej procedúry správu obsahujúcu tiež prípadné skutočné parametre pre danú procedúru a čaká na odpoveď.</a:t>
-            </a:r>
-          </a:p>
-        </p:txBody>
-      </p:sp>
-      <p:sp>
-        <p:nvSpPr>
-          <p:cNvPr id="4" name="Slide Number Placeholder 3"/>
+          <p:cNvPr id="31747" name="Zástupný symbol čísla snímky 3"/>
           <p:cNvSpPr>
             <a:spLocks noGrp="1"/>
           </p:cNvSpPr>
@@ -15451,23 +15130,238 @@
             <p:ph type="sldNum" sz="quarter" idx="12"/>
           </p:nvPr>
         </p:nvSpPr>
+        <p:spPr>
+          <a:noFill/>
+          <a:ln/>
+          <a:extLst>
+            <a:ext uri="{909E8E84-426E-40DD-AFC4-6F175D3DCCD1}">
+              <a14:hiddenFill xmlns:a14="http://schemas.microsoft.com/office/drawing/2010/main">
+                <a:solidFill>
+                  <a:srgbClr val="FFFFFF"/>
+                </a:solidFill>
+              </a14:hiddenFill>
+            </a:ext>
+            <a:ext uri="{91240B29-F687-4F45-9708-019B960494DF}">
+              <a14:hiddenLine xmlns:a14="http://schemas.microsoft.com/office/drawing/2010/main" w="9525">
+                <a:solidFill>
+                  <a:srgbClr val="000000"/>
+                </a:solidFill>
+                <a:miter lim="800000"/>
+                <a:headEnd/>
+                <a:tailEnd/>
+              </a14:hiddenLine>
+            </a:ext>
+          </a:extLst>
+        </p:spPr>
+        <p:txBody>
+          <a:bodyPr/>
+          <a:lstStyle>
+            <a:lvl1pPr>
+              <a:defRPr sz="2400">
+                <a:solidFill>
+                  <a:schemeClr val="tx1"/>
+                </a:solidFill>
+                <a:latin typeface="Times New Roman" panose="02020603050405020304" pitchFamily="18" charset="0"/>
+              </a:defRPr>
+            </a:lvl1pPr>
+            <a:lvl2pPr marL="742950" indent="-285750">
+              <a:defRPr sz="2400">
+                <a:solidFill>
+                  <a:schemeClr val="tx1"/>
+                </a:solidFill>
+                <a:latin typeface="Times New Roman" panose="02020603050405020304" pitchFamily="18" charset="0"/>
+              </a:defRPr>
+            </a:lvl2pPr>
+            <a:lvl3pPr marL="1143000" indent="-228600">
+              <a:defRPr sz="2400">
+                <a:solidFill>
+                  <a:schemeClr val="tx1"/>
+                </a:solidFill>
+                <a:latin typeface="Times New Roman" panose="02020603050405020304" pitchFamily="18" charset="0"/>
+              </a:defRPr>
+            </a:lvl3pPr>
+            <a:lvl4pPr marL="1600200" indent="-228600">
+              <a:defRPr sz="2400">
+                <a:solidFill>
+                  <a:schemeClr val="tx1"/>
+                </a:solidFill>
+                <a:latin typeface="Times New Roman" panose="02020603050405020304" pitchFamily="18" charset="0"/>
+              </a:defRPr>
+            </a:lvl4pPr>
+            <a:lvl5pPr marL="2057400" indent="-228600">
+              <a:defRPr sz="2400">
+                <a:solidFill>
+                  <a:schemeClr val="tx1"/>
+                </a:solidFill>
+                <a:latin typeface="Times New Roman" panose="02020603050405020304" pitchFamily="18" charset="0"/>
+              </a:defRPr>
+            </a:lvl5pPr>
+            <a:lvl6pPr marL="2514600" indent="-228600" eaLnBrk="0" fontAlgn="base" hangingPunct="0">
+              <a:spcBef>
+                <a:spcPct val="0"/>
+              </a:spcBef>
+              <a:spcAft>
+                <a:spcPct val="0"/>
+              </a:spcAft>
+              <a:defRPr sz="2400">
+                <a:solidFill>
+                  <a:schemeClr val="tx1"/>
+                </a:solidFill>
+                <a:latin typeface="Times New Roman" panose="02020603050405020304" pitchFamily="18" charset="0"/>
+              </a:defRPr>
+            </a:lvl6pPr>
+            <a:lvl7pPr marL="2971800" indent="-228600" eaLnBrk="0" fontAlgn="base" hangingPunct="0">
+              <a:spcBef>
+                <a:spcPct val="0"/>
+              </a:spcBef>
+              <a:spcAft>
+                <a:spcPct val="0"/>
+              </a:spcAft>
+              <a:defRPr sz="2400">
+                <a:solidFill>
+                  <a:schemeClr val="tx1"/>
+                </a:solidFill>
+                <a:latin typeface="Times New Roman" panose="02020603050405020304" pitchFamily="18" charset="0"/>
+              </a:defRPr>
+            </a:lvl7pPr>
+            <a:lvl8pPr marL="3429000" indent="-228600" eaLnBrk="0" fontAlgn="base" hangingPunct="0">
+              <a:spcBef>
+                <a:spcPct val="0"/>
+              </a:spcBef>
+              <a:spcAft>
+                <a:spcPct val="0"/>
+              </a:spcAft>
+              <a:defRPr sz="2400">
+                <a:solidFill>
+                  <a:schemeClr val="tx1"/>
+                </a:solidFill>
+                <a:latin typeface="Times New Roman" panose="02020603050405020304" pitchFamily="18" charset="0"/>
+              </a:defRPr>
+            </a:lvl8pPr>
+            <a:lvl9pPr marL="3886200" indent="-228600" eaLnBrk="0" fontAlgn="base" hangingPunct="0">
+              <a:spcBef>
+                <a:spcPct val="0"/>
+              </a:spcBef>
+              <a:spcAft>
+                <a:spcPct val="0"/>
+              </a:spcAft>
+              <a:defRPr sz="2400">
+                <a:solidFill>
+                  <a:schemeClr val="tx1"/>
+                </a:solidFill>
+                <a:latin typeface="Times New Roman" panose="02020603050405020304" pitchFamily="18" charset="0"/>
+              </a:defRPr>
+            </a:lvl9pPr>
+          </a:lstStyle>
+          <a:p>
+            <a:fld id="{4799A7DB-AC62-46E4-9215-AD7D88508BEF}" type="slidenum">
+              <a:rPr lang="sk-SK" sz="1400"/>
+              <a:pPr/>
+              <a:t>34</a:t>
+            </a:fld>
+            <a:endParaRPr lang="sk-SK" sz="1400"/>
+          </a:p>
+        </p:txBody>
+      </p:sp>
+      <p:sp>
+        <p:nvSpPr>
+          <p:cNvPr id="31748" name="Rectangle 2"/>
+          <p:cNvSpPr>
+            <a:spLocks noGrp="1" noChangeArrowheads="1"/>
+          </p:cNvSpPr>
+          <p:nvPr>
+            <p:ph type="body" idx="4294967295"/>
+          </p:nvPr>
+        </p:nvSpPr>
         <p:spPr/>
         <p:txBody>
           <a:bodyPr/>
           <a:lstStyle/>
           <a:p>
-            <a:fld id="{5AB4CD34-DB5E-4606-AE4E-01019896DEAB}" type="slidenum">
-              <a:rPr lang="sk-SK" smtClean="0"/>
-              <a:t>34</a:t>
-            </a:fld>
-            <a:endParaRPr lang="sk-SK"/>
+            <a:pPr marL="0" indent="0">
+              <a:buNone/>
+            </a:pPr>
+            <a:r>
+              <a:rPr lang="sk-SK" b="1" dirty="0"/>
+              <a:t>3. Procesy nečakajú aktívne</a:t>
+            </a:r>
+          </a:p>
+          <a:p>
+            <a:r>
+              <a:rPr lang="sk-SK" dirty="0"/>
+              <a:t>Monitor používa </a:t>
+            </a:r>
+            <a:r>
+              <a:rPr lang="sk-SK" b="1" dirty="0"/>
+              <a:t>pasívne čakanie</a:t>
+            </a:r>
+            <a:r>
+              <a:rPr lang="sk-SK" dirty="0"/>
+              <a:t> – proces sa uspí a OS ho prebudí, keď môže pokračovať. Nevzniká plytvanie CPU ako pri </a:t>
+            </a:r>
+            <a:r>
+              <a:rPr lang="sk-SK" dirty="0" err="1"/>
+              <a:t>busy</a:t>
+            </a:r>
+            <a:r>
+              <a:rPr lang="sk-SK" dirty="0"/>
+              <a:t> </a:t>
+            </a:r>
+            <a:r>
+              <a:rPr lang="sk-SK" dirty="0" err="1"/>
+              <a:t>waiting</a:t>
+            </a:r>
+            <a:r>
+              <a:rPr lang="sk-SK" dirty="0"/>
+              <a:t>.</a:t>
+            </a:r>
+          </a:p>
+          <a:p>
+            <a:pPr marL="0" indent="0">
+              <a:buNone/>
+            </a:pPr>
+            <a:r>
+              <a:rPr lang="sk-SK" b="1" dirty="0"/>
+              <a:t>4. Monitor je bezpečný a prehľadný</a:t>
+            </a:r>
+          </a:p>
+          <a:p>
+            <a:r>
+              <a:rPr lang="sk-SK" dirty="0"/>
+              <a:t>Všetky zdieľané premenné sú „schované“ vo vnútri monitoru. Procesy k nim pristupujú iba cez metódy monitoru, čo zabraňuje chybám.</a:t>
+            </a:r>
+            <a:endParaRPr lang="sk-SK" dirty="0">
+              <a:effectLst/>
+            </a:endParaRPr>
+          </a:p>
+        </p:txBody>
+      </p:sp>
+      <p:sp>
+        <p:nvSpPr>
+          <p:cNvPr id="31749" name="Rectangle 3"/>
+          <p:cNvSpPr>
+            <a:spLocks noGrp="1" noChangeArrowheads="1"/>
+          </p:cNvSpPr>
+          <p:nvPr>
+            <p:ph type="title" idx="4294967295"/>
+          </p:nvPr>
+        </p:nvSpPr>
+        <p:spPr/>
+        <p:txBody>
+          <a:bodyPr/>
+          <a:lstStyle/>
+          <a:p>
+            <a:r>
+              <a:rPr lang="sk-SK"/>
+              <a:t>Monitory</a:t>
+            </a:r>
           </a:p>
         </p:txBody>
       </p:sp>
     </p:spTree>
     <p:extLst>
       <p:ext uri="{BB962C8B-B14F-4D97-AF65-F5344CB8AC3E}">
-        <p14:creationId xmlns:p14="http://schemas.microsoft.com/office/powerpoint/2010/main" val="3030418756"/>
+        <p14:creationId xmlns:p14="http://schemas.microsoft.com/office/powerpoint/2010/main" val="4133182652"/>
       </p:ext>
     </p:extLst>
   </p:cSld>
@@ -15496,7 +15390,7 @@
       </p:grpSpPr>
       <p:sp>
         <p:nvSpPr>
-          <p:cNvPr id="2" name="Nadpis 1"/>
+          <p:cNvPr id="2" name="Title 1"/>
           <p:cNvSpPr>
             <a:spLocks noGrp="1"/>
           </p:cNvSpPr>
@@ -15510,16 +15404,36 @@
           <a:lstStyle/>
           <a:p>
             <a:r>
-              <a:rPr lang="sk-SK" dirty="0" err="1"/>
-              <a:t>Mutex</a:t>
-            </a:r>
-            <a:endParaRPr lang="sk-SK" dirty="0"/>
+              <a:rPr lang="sk-SK"/>
+              <a:t>RPC – </a:t>
+            </a:r>
+            <a:r>
+              <a:rPr lang="sk-SK" err="1"/>
+              <a:t>remote</a:t>
+            </a:r>
+            <a:r>
+              <a:rPr lang="sk-SK"/>
+              <a:t> </a:t>
+            </a:r>
+            <a:r>
+              <a:rPr lang="sk-SK" err="1"/>
+              <a:t>procedure</a:t>
+            </a:r>
+            <a:r>
+              <a:rPr lang="sk-SK"/>
+              <a:t> </a:t>
+            </a:r>
+            <a:r>
+              <a:rPr lang="sk-SK" err="1"/>
+              <a:t>call</a:t>
+            </a:r>
+            <a:endParaRPr lang="sk-SK"/>
           </a:p>
         </p:txBody>
       </p:sp>
       <p:sp>
         <p:nvSpPr>
-          <p:cNvPr id="3" name="Zástupný symbol obsahu 2"/>
+          <p:cNvPr id="3" name="Content Placeholder 2"/>
           <p:cNvSpPr>
             <a:spLocks noGrp="1"/>
           </p:cNvSpPr>
@@ -15535,92 +15449,14 @@
           <a:lstStyle/>
           <a:p>
             <a:r>
-              <a:rPr lang="sk-SK" b="1" dirty="0"/>
-              <a:t> (</a:t>
-            </a:r>
-            <a:r>
-              <a:rPr lang="sk-SK" b="1" dirty="0" err="1"/>
-              <a:t>mutual</a:t>
-            </a:r>
-            <a:r>
-              <a:rPr lang="sk-SK" b="1" dirty="0"/>
-              <a:t> </a:t>
-            </a:r>
-            <a:r>
-              <a:rPr lang="sk-SK" b="1" dirty="0" err="1"/>
-              <a:t>exclusion</a:t>
-            </a:r>
-            <a:r>
-              <a:rPr lang="sk-SK" b="1" dirty="0"/>
-              <a:t>, vzájomné vylúčenie). </a:t>
-            </a:r>
-            <a:r>
-              <a:rPr lang="sk-SK" dirty="0"/>
-              <a:t>Slovo "</a:t>
-            </a:r>
-            <a:r>
-              <a:rPr lang="sk-SK" dirty="0" err="1"/>
-              <a:t>mutex</a:t>
-            </a:r>
-            <a:r>
-              <a:rPr lang="sk-SK" dirty="0"/>
-              <a:t>" znamená objekt, ktorý zabezpečuje vzájomné vylúčenie medzi vláknami. </a:t>
-            </a:r>
-            <a:r>
-              <a:rPr lang="sk-SK" dirty="0" err="1"/>
-              <a:t>Mutex</a:t>
-            </a:r>
-            <a:r>
-              <a:rPr lang="sk-SK" dirty="0"/>
-              <a:t> zabezpečuje, že iba jedno vlákno má prístup ku kritickej sekcii alebo údajom pomocou operácií, ako je uzamknutie a odomknutie. Vlákno, ktoré má zámok </a:t>
-            </a:r>
-            <a:r>
-              <a:rPr lang="sk-SK" dirty="0" err="1"/>
-              <a:t>mutexu</a:t>
-            </a:r>
-            <a:r>
-              <a:rPr lang="sk-SK" dirty="0"/>
-              <a:t>, môže používať kritickú sekciu, zatiaľ čo ostatné vlákna musia čakať, kým sa zámok uvoľní.)</a:t>
-            </a:r>
-          </a:p>
-          <a:p>
-            <a:r>
-              <a:rPr lang="sk-SK" dirty="0"/>
-              <a:t>Operácie – </a:t>
-            </a:r>
-            <a:r>
-              <a:rPr lang="sk-SK" dirty="0" err="1"/>
-              <a:t>CreateMutex</a:t>
-            </a:r>
-            <a:r>
-              <a:rPr lang="sk-SK" dirty="0"/>
-              <a:t>(), </a:t>
-            </a:r>
-            <a:r>
-              <a:rPr lang="sk-SK" dirty="0" err="1"/>
-              <a:t>OpenMutex</a:t>
-            </a:r>
-            <a:r>
-              <a:rPr lang="sk-SK" dirty="0"/>
-              <a:t>(), </a:t>
-            </a:r>
-            <a:r>
-              <a:rPr lang="sk-SK" dirty="0" err="1"/>
-              <a:t>ReleaseMutex</a:t>
-            </a:r>
-            <a:r>
-              <a:rPr lang="sk-SK" dirty="0"/>
-              <a:t>()</a:t>
-            </a:r>
-          </a:p>
-          <a:p>
-            <a:r>
-              <a:rPr lang="sk-SK" dirty="0" err="1"/>
-              <a:t>Mutex</a:t>
-            </a:r>
-            <a:r>
-              <a:rPr lang="sk-SK" dirty="0"/>
-              <a:t> je špeciálny binárny semafor, ktorý synchronizuje prístup k zdieľaným zdrojom, ako je pamäť alebo I/O. Je to uzamykací mechanizmus.</a:t>
+              <a:rPr lang="sk-SK" dirty="0"/>
+              <a:t>RPC - Vzdialené volanie procedúr je softvérový komunikačný protokol, ktorý môže jeden program použiť na vyžiadanie služby od programu umiestneného v inom počítači v sieti bez toho, aby musel rozumieť detailom siete. RPC sa používa na volanie iných procesov vo vzdialených systémoch ako miestny systém. Volanie procedúry sa niekedy nazýva aj volanie funkcie alebo volanie podprogramu.</a:t>
+            </a:r>
+          </a:p>
+          <a:p>
+            <a:r>
+              <a:rPr lang="sk-SK" dirty="0"/>
+              <a:t>RPC používa model klient-server.</a:t>
             </a:r>
           </a:p>
           <a:p>
@@ -15628,23 +15464,15 @@
           </a:p>
           <a:p>
             <a:r>
-              <a:rPr lang="sk-SK" sz="2800" dirty="0"/>
-              <a:t>Semafor je zovšeobecnený </a:t>
-            </a:r>
-            <a:r>
-              <a:rPr lang="sk-SK" sz="2800" dirty="0" err="1"/>
-              <a:t>mutex</a:t>
-            </a:r>
-            <a:r>
-              <a:rPr lang="sk-SK" sz="2800" dirty="0"/>
-              <a:t>.</a:t>
+              <a:rPr lang="sk-SK" dirty="0"/>
+              <a:t>RPC sa obvykle realizuje pomocou synchrónnych správ, kedy žiadajúci proces pošle procesu ktorý je vlastníkom dotyčnej procedúry správu obsahujúcu tiež prípadné skutočné parametre pre danú procedúru a čaká na odpoveď.</a:t>
             </a:r>
           </a:p>
         </p:txBody>
       </p:sp>
       <p:sp>
         <p:nvSpPr>
-          <p:cNvPr id="4" name="Zástupný symbol čísla snímky 3"/>
+          <p:cNvPr id="4" name="Slide Number Placeholder 3"/>
           <p:cNvSpPr>
             <a:spLocks noGrp="1"/>
           </p:cNvSpPr>
@@ -15668,7 +15496,7 @@
     </p:spTree>
     <p:extLst>
       <p:ext uri="{BB962C8B-B14F-4D97-AF65-F5344CB8AC3E}">
-        <p14:creationId xmlns:p14="http://schemas.microsoft.com/office/powerpoint/2010/main" val="474640484"/>
+        <p14:creationId xmlns:p14="http://schemas.microsoft.com/office/powerpoint/2010/main" val="3030418756"/>
       </p:ext>
     </p:extLst>
   </p:cSld>
@@ -15697,6 +15525,207 @@
       </p:grpSpPr>
       <p:sp>
         <p:nvSpPr>
+          <p:cNvPr id="2" name="Nadpis 1"/>
+          <p:cNvSpPr>
+            <a:spLocks noGrp="1"/>
+          </p:cNvSpPr>
+          <p:nvPr>
+            <p:ph type="title"/>
+          </p:nvPr>
+        </p:nvSpPr>
+        <p:spPr/>
+        <p:txBody>
+          <a:bodyPr/>
+          <a:lstStyle/>
+          <a:p>
+            <a:r>
+              <a:rPr lang="sk-SK" dirty="0" err="1"/>
+              <a:t>Mutex</a:t>
+            </a:r>
+            <a:endParaRPr lang="sk-SK" dirty="0"/>
+          </a:p>
+        </p:txBody>
+      </p:sp>
+      <p:sp>
+        <p:nvSpPr>
+          <p:cNvPr id="3" name="Zástupný symbol obsahu 2"/>
+          <p:cNvSpPr>
+            <a:spLocks noGrp="1"/>
+          </p:cNvSpPr>
+          <p:nvPr>
+            <p:ph idx="1"/>
+          </p:nvPr>
+        </p:nvSpPr>
+        <p:spPr/>
+        <p:txBody>
+          <a:bodyPr>
+            <a:normAutofit fontScale="92500" lnSpcReduction="10000"/>
+          </a:bodyPr>
+          <a:lstStyle/>
+          <a:p>
+            <a:r>
+              <a:rPr lang="sk-SK" b="1" dirty="0"/>
+              <a:t> (</a:t>
+            </a:r>
+            <a:r>
+              <a:rPr lang="sk-SK" b="1" dirty="0" err="1"/>
+              <a:t>mutual</a:t>
+            </a:r>
+            <a:r>
+              <a:rPr lang="sk-SK" b="1" dirty="0"/>
+              <a:t> </a:t>
+            </a:r>
+            <a:r>
+              <a:rPr lang="sk-SK" b="1" dirty="0" err="1"/>
+              <a:t>exclusion</a:t>
+            </a:r>
+            <a:r>
+              <a:rPr lang="sk-SK" b="1" dirty="0"/>
+              <a:t>, vzájomné vylúčenie). </a:t>
+            </a:r>
+            <a:r>
+              <a:rPr lang="sk-SK" dirty="0"/>
+              <a:t>Slovo "</a:t>
+            </a:r>
+            <a:r>
+              <a:rPr lang="sk-SK" dirty="0" err="1"/>
+              <a:t>mutex</a:t>
+            </a:r>
+            <a:r>
+              <a:rPr lang="sk-SK" dirty="0"/>
+              <a:t>" znamená objekt, ktorý zabezpečuje vzájomné vylúčenie medzi vláknami. </a:t>
+            </a:r>
+            <a:r>
+              <a:rPr lang="sk-SK" dirty="0" err="1"/>
+              <a:t>Mutex</a:t>
+            </a:r>
+            <a:r>
+              <a:rPr lang="sk-SK" dirty="0"/>
+              <a:t> zabezpečuje, že iba jedno vlákno má prístup ku kritickej sekcii alebo údajom pomocou operácií, ako je uzamknutie a odomknutie. Vlákno, ktoré má zámok </a:t>
+            </a:r>
+            <a:r>
+              <a:rPr lang="sk-SK" dirty="0" err="1"/>
+              <a:t>mutexu</a:t>
+            </a:r>
+            <a:r>
+              <a:rPr lang="sk-SK" dirty="0"/>
+              <a:t>, môže používať kritickú sekciu, zatiaľ čo ostatné vlákna musia čakať, kým sa zámok uvoľní.)</a:t>
+            </a:r>
+          </a:p>
+          <a:p>
+            <a:r>
+              <a:rPr lang="sk-SK" dirty="0"/>
+              <a:t>Operácie – </a:t>
+            </a:r>
+            <a:r>
+              <a:rPr lang="sk-SK" dirty="0" err="1"/>
+              <a:t>CreateMutex</a:t>
+            </a:r>
+            <a:r>
+              <a:rPr lang="sk-SK" dirty="0"/>
+              <a:t>(), </a:t>
+            </a:r>
+            <a:r>
+              <a:rPr lang="sk-SK" dirty="0" err="1"/>
+              <a:t>OpenMutex</a:t>
+            </a:r>
+            <a:r>
+              <a:rPr lang="sk-SK" dirty="0"/>
+              <a:t>(), </a:t>
+            </a:r>
+            <a:r>
+              <a:rPr lang="sk-SK" dirty="0" err="1"/>
+              <a:t>ReleaseMutex</a:t>
+            </a:r>
+            <a:r>
+              <a:rPr lang="sk-SK" dirty="0"/>
+              <a:t>()</a:t>
+            </a:r>
+          </a:p>
+          <a:p>
+            <a:r>
+              <a:rPr lang="sk-SK" dirty="0" err="1"/>
+              <a:t>Mutex</a:t>
+            </a:r>
+            <a:r>
+              <a:rPr lang="sk-SK" dirty="0"/>
+              <a:t> je špeciálny binárny semafor, ktorý synchronizuje prístup k zdieľaným zdrojom, ako je pamäť alebo I/O. Je to uzamykací mechanizmus.</a:t>
+            </a:r>
+          </a:p>
+          <a:p>
+            <a:endParaRPr lang="sk-SK" dirty="0"/>
+          </a:p>
+          <a:p>
+            <a:r>
+              <a:rPr lang="sk-SK" sz="2800" dirty="0"/>
+              <a:t>Semafor je zovšeobecnený </a:t>
+            </a:r>
+            <a:r>
+              <a:rPr lang="sk-SK" sz="2800" dirty="0" err="1"/>
+              <a:t>mutex</a:t>
+            </a:r>
+            <a:r>
+              <a:rPr lang="sk-SK" sz="2800" dirty="0"/>
+              <a:t>.</a:t>
+            </a:r>
+          </a:p>
+        </p:txBody>
+      </p:sp>
+      <p:sp>
+        <p:nvSpPr>
+          <p:cNvPr id="4" name="Zástupný symbol čísla snímky 3"/>
+          <p:cNvSpPr>
+            <a:spLocks noGrp="1"/>
+          </p:cNvSpPr>
+          <p:nvPr>
+            <p:ph type="sldNum" sz="quarter" idx="12"/>
+          </p:nvPr>
+        </p:nvSpPr>
+        <p:spPr/>
+        <p:txBody>
+          <a:bodyPr/>
+          <a:lstStyle/>
+          <a:p>
+            <a:fld id="{5AB4CD34-DB5E-4606-AE4E-01019896DEAB}" type="slidenum">
+              <a:rPr lang="sk-SK" smtClean="0"/>
+              <a:t>36</a:t>
+            </a:fld>
+            <a:endParaRPr lang="sk-SK"/>
+          </a:p>
+        </p:txBody>
+      </p:sp>
+    </p:spTree>
+    <p:extLst>
+      <p:ext uri="{BB962C8B-B14F-4D97-AF65-F5344CB8AC3E}">
+        <p14:creationId xmlns:p14="http://schemas.microsoft.com/office/powerpoint/2010/main" val="474640484"/>
+      </p:ext>
+    </p:extLst>
+  </p:cSld>
+  <p:clrMapOvr>
+    <a:masterClrMapping/>
+  </p:clrMapOvr>
+</p:sld>
+</file>
+
+<file path=ppt/slides/slide37.xml><?xml version="1.0" encoding="utf-8"?>
+<p:sld xmlns:a="http://schemas.openxmlformats.org/drawingml/2006/main" xmlns:r="http://schemas.openxmlformats.org/officeDocument/2006/relationships" xmlns:p="http://schemas.openxmlformats.org/presentationml/2006/main">
+  <p:cSld>
+    <p:spTree>
+      <p:nvGrpSpPr>
+        <p:cNvPr id="1" name=""/>
+        <p:cNvGrpSpPr/>
+        <p:nvPr/>
+      </p:nvGrpSpPr>
+      <p:grpSpPr>
+        <a:xfrm>
+          <a:off x="0" y="0"/>
+          <a:ext cx="0" cy="0"/>
+          <a:chOff x="0" y="0"/>
+          <a:chExt cx="0" cy="0"/>
+        </a:xfrm>
+      </p:grpSpPr>
+      <p:sp>
+        <p:nvSpPr>
           <p:cNvPr id="16387" name="Zástupný symbol čísla snímky 6"/>
           <p:cNvSpPr>
             <a:spLocks noGrp="1"/>
@@ -15832,7 +15861,7 @@
             <a:fld id="{DA5649DE-9A1E-438E-A4C7-8311246F4D5E}" type="slidenum">
               <a:rPr lang="sk-SK" sz="1400" b="0"/>
               <a:pPr/>
-              <a:t>36</a:t>
+              <a:t>37</a:t>
             </a:fld>
             <a:endParaRPr lang="sk-SK" sz="1400" b="0"/>
           </a:p>
@@ -16048,7 +16077,7 @@
 </p:sld>
 </file>
 
-<file path=ppt/slides/slide37.xml><?xml version="1.0" encoding="utf-8"?>
+<file path=ppt/slides/slide38.xml><?xml version="1.0" encoding="utf-8"?>
 <p:sld xmlns:a="http://schemas.openxmlformats.org/drawingml/2006/main" xmlns:r="http://schemas.openxmlformats.org/officeDocument/2006/relationships" xmlns:p="http://schemas.openxmlformats.org/presentationml/2006/main">
   <p:cSld>
     <p:spTree>
@@ -16353,7 +16382,7 @@
             <a:fld id="{4D496583-7A1C-49B6-B98E-07E55E5BA800}" type="slidenum">
               <a:rPr lang="sk-SK" sz="1400" b="0"/>
               <a:pPr/>
-              <a:t>37</a:t>
+              <a:t>38</a:t>
             </a:fld>
             <a:endParaRPr lang="sk-SK" sz="1400" b="0"/>
           </a:p>
@@ -17056,326 +17085,6 @@
 </p:sld>
 </file>
 
-<file path=ppt/slides/slide38.xml><?xml version="1.0" encoding="utf-8"?>
-<p:sld xmlns:a="http://schemas.openxmlformats.org/drawingml/2006/main" xmlns:r="http://schemas.openxmlformats.org/officeDocument/2006/relationships" xmlns:p="http://schemas.openxmlformats.org/presentationml/2006/main">
-  <p:cSld>
-    <p:spTree>
-      <p:nvGrpSpPr>
-        <p:cNvPr id="1" name=""/>
-        <p:cNvGrpSpPr/>
-        <p:nvPr/>
-      </p:nvGrpSpPr>
-      <p:grpSpPr>
-        <a:xfrm>
-          <a:off x="0" y="0"/>
-          <a:ext cx="0" cy="0"/>
-          <a:chOff x="0" y="0"/>
-          <a:chExt cx="0" cy="0"/>
-        </a:xfrm>
-      </p:grpSpPr>
-      <p:sp>
-        <p:nvSpPr>
-          <p:cNvPr id="21507" name="Zástupný symbol čísla snímky 3"/>
-          <p:cNvSpPr>
-            <a:spLocks noGrp="1"/>
-          </p:cNvSpPr>
-          <p:nvPr>
-            <p:ph type="sldNum" sz="quarter" idx="12"/>
-          </p:nvPr>
-        </p:nvSpPr>
-        <p:spPr>
-          <a:noFill/>
-          <a:ln/>
-          <a:extLst>
-            <a:ext uri="{909E8E84-426E-40DD-AFC4-6F175D3DCCD1}">
-              <a14:hiddenFill xmlns:a14="http://schemas.microsoft.com/office/drawing/2010/main">
-                <a:solidFill>
-                  <a:srgbClr val="FFFFFF"/>
-                </a:solidFill>
-              </a14:hiddenFill>
-            </a:ext>
-            <a:ext uri="{91240B29-F687-4F45-9708-019B960494DF}">
-              <a14:hiddenLine xmlns:a14="http://schemas.microsoft.com/office/drawing/2010/main" w="9525">
-                <a:solidFill>
-                  <a:srgbClr val="000000"/>
-                </a:solidFill>
-                <a:miter lim="800000"/>
-                <a:headEnd/>
-                <a:tailEnd/>
-              </a14:hiddenLine>
-            </a:ext>
-          </a:extLst>
-        </p:spPr>
-        <p:txBody>
-          <a:bodyPr/>
-          <a:lstStyle>
-            <a:lvl1pPr>
-              <a:defRPr sz="4000" b="1">
-                <a:solidFill>
-                  <a:schemeClr val="tx1"/>
-                </a:solidFill>
-                <a:latin typeface="Times New Roman" panose="02020603050405020304" pitchFamily="18" charset="0"/>
-              </a:defRPr>
-            </a:lvl1pPr>
-            <a:lvl2pPr marL="742950" indent="-285750">
-              <a:defRPr sz="4000" b="1">
-                <a:solidFill>
-                  <a:schemeClr val="tx1"/>
-                </a:solidFill>
-                <a:latin typeface="Times New Roman" panose="02020603050405020304" pitchFamily="18" charset="0"/>
-              </a:defRPr>
-            </a:lvl2pPr>
-            <a:lvl3pPr marL="1143000" indent="-228600">
-              <a:defRPr sz="4000" b="1">
-                <a:solidFill>
-                  <a:schemeClr val="tx1"/>
-                </a:solidFill>
-                <a:latin typeface="Times New Roman" panose="02020603050405020304" pitchFamily="18" charset="0"/>
-              </a:defRPr>
-            </a:lvl3pPr>
-            <a:lvl4pPr marL="1600200" indent="-228600">
-              <a:defRPr sz="4000" b="1">
-                <a:solidFill>
-                  <a:schemeClr val="tx1"/>
-                </a:solidFill>
-                <a:latin typeface="Times New Roman" panose="02020603050405020304" pitchFamily="18" charset="0"/>
-              </a:defRPr>
-            </a:lvl4pPr>
-            <a:lvl5pPr marL="2057400" indent="-228600">
-              <a:defRPr sz="4000" b="1">
-                <a:solidFill>
-                  <a:schemeClr val="tx1"/>
-                </a:solidFill>
-                <a:latin typeface="Times New Roman" panose="02020603050405020304" pitchFamily="18" charset="0"/>
-              </a:defRPr>
-            </a:lvl5pPr>
-            <a:lvl6pPr marL="2514600" indent="-228600" algn="ctr" eaLnBrk="0" fontAlgn="base" hangingPunct="0">
-              <a:spcBef>
-                <a:spcPct val="0"/>
-              </a:spcBef>
-              <a:spcAft>
-                <a:spcPct val="0"/>
-              </a:spcAft>
-              <a:defRPr sz="4000" b="1">
-                <a:solidFill>
-                  <a:schemeClr val="tx1"/>
-                </a:solidFill>
-                <a:latin typeface="Times New Roman" panose="02020603050405020304" pitchFamily="18" charset="0"/>
-              </a:defRPr>
-            </a:lvl6pPr>
-            <a:lvl7pPr marL="2971800" indent="-228600" algn="ctr" eaLnBrk="0" fontAlgn="base" hangingPunct="0">
-              <a:spcBef>
-                <a:spcPct val="0"/>
-              </a:spcBef>
-              <a:spcAft>
-                <a:spcPct val="0"/>
-              </a:spcAft>
-              <a:defRPr sz="4000" b="1">
-                <a:solidFill>
-                  <a:schemeClr val="tx1"/>
-                </a:solidFill>
-                <a:latin typeface="Times New Roman" panose="02020603050405020304" pitchFamily="18" charset="0"/>
-              </a:defRPr>
-            </a:lvl7pPr>
-            <a:lvl8pPr marL="3429000" indent="-228600" algn="ctr" eaLnBrk="0" fontAlgn="base" hangingPunct="0">
-              <a:spcBef>
-                <a:spcPct val="0"/>
-              </a:spcBef>
-              <a:spcAft>
-                <a:spcPct val="0"/>
-              </a:spcAft>
-              <a:defRPr sz="4000" b="1">
-                <a:solidFill>
-                  <a:schemeClr val="tx1"/>
-                </a:solidFill>
-                <a:latin typeface="Times New Roman" panose="02020603050405020304" pitchFamily="18" charset="0"/>
-              </a:defRPr>
-            </a:lvl8pPr>
-            <a:lvl9pPr marL="3886200" indent="-228600" algn="ctr" eaLnBrk="0" fontAlgn="base" hangingPunct="0">
-              <a:spcBef>
-                <a:spcPct val="0"/>
-              </a:spcBef>
-              <a:spcAft>
-                <a:spcPct val="0"/>
-              </a:spcAft>
-              <a:defRPr sz="4000" b="1">
-                <a:solidFill>
-                  <a:schemeClr val="tx1"/>
-                </a:solidFill>
-                <a:latin typeface="Times New Roman" panose="02020603050405020304" pitchFamily="18" charset="0"/>
-              </a:defRPr>
-            </a:lvl9pPr>
-          </a:lstStyle>
-          <a:p>
-            <a:fld id="{94AC0568-A9C0-4981-B92F-44F7557A3C44}" type="slidenum">
-              <a:rPr lang="sk-SK" sz="1400" b="0"/>
-              <a:pPr/>
-              <a:t>38</a:t>
-            </a:fld>
-            <a:endParaRPr lang="sk-SK" sz="1400" b="0"/>
-          </a:p>
-        </p:txBody>
-      </p:sp>
-      <p:sp>
-        <p:nvSpPr>
-          <p:cNvPr id="21508" name="Rectangle 2"/>
-          <p:cNvSpPr>
-            <a:spLocks noGrp="1" noChangeArrowheads="1"/>
-          </p:cNvSpPr>
-          <p:nvPr>
-            <p:ph type="title" idx="4294967295"/>
-          </p:nvPr>
-        </p:nvSpPr>
-        <p:spPr/>
-        <p:txBody>
-          <a:bodyPr/>
-          <a:lstStyle/>
-          <a:p>
-            <a:r>
-              <a:rPr lang="sk-SK" dirty="0" err="1"/>
-              <a:t>Petriho</a:t>
-            </a:r>
-            <a:r>
-              <a:rPr lang="sk-SK" dirty="0"/>
-              <a:t> sieť.</a:t>
-            </a:r>
-          </a:p>
-        </p:txBody>
-      </p:sp>
-      <p:sp>
-        <p:nvSpPr>
-          <p:cNvPr id="21509" name="Rectangle 3"/>
-          <p:cNvSpPr>
-            <a:spLocks noGrp="1" noChangeArrowheads="1"/>
-          </p:cNvSpPr>
-          <p:nvPr>
-            <p:ph type="body" idx="4294967295"/>
-          </p:nvPr>
-        </p:nvSpPr>
-        <p:spPr/>
-        <p:txBody>
-          <a:bodyPr>
-            <a:normAutofit fontScale="92500" lnSpcReduction="10000"/>
-          </a:bodyPr>
-          <a:lstStyle/>
-          <a:p>
-            <a:pPr>
-              <a:lnSpc>
-                <a:spcPct val="90000"/>
-              </a:lnSpc>
-            </a:pPr>
-            <a:r>
-              <a:rPr lang="sk-SK" b="1" dirty="0"/>
-              <a:t>Vlastnosti PS </a:t>
-            </a:r>
-            <a:r>
-              <a:rPr lang="sk-SK" dirty="0"/>
-              <a:t>sú vyjadrené pohybom značiek v sieti</a:t>
-            </a:r>
-          </a:p>
-          <a:p>
-            <a:pPr>
-              <a:lnSpc>
-                <a:spcPct val="90000"/>
-              </a:lnSpc>
-            </a:pPr>
-            <a:r>
-              <a:rPr lang="sk-SK" dirty="0"/>
-              <a:t>PS so značkami - </a:t>
-            </a:r>
-            <a:r>
-              <a:rPr lang="sk-SK" b="1" dirty="0"/>
-              <a:t>označená PS</a:t>
-            </a:r>
-          </a:p>
-          <a:p>
-            <a:pPr>
-              <a:lnSpc>
-                <a:spcPct val="90000"/>
-              </a:lnSpc>
-            </a:pPr>
-            <a:r>
-              <a:rPr lang="sk-SK" b="1" dirty="0"/>
-              <a:t>stav PS </a:t>
-            </a:r>
-            <a:r>
-              <a:rPr lang="sk-SK" dirty="0"/>
-              <a:t>- rozmiestnením značiek</a:t>
-            </a:r>
-          </a:p>
-          <a:p>
-            <a:r>
-              <a:rPr lang="sk-SK" b="1" dirty="0"/>
-              <a:t>Pravidlá </a:t>
-            </a:r>
-            <a:r>
-              <a:rPr lang="sk-SK" b="1" dirty="0" err="1"/>
-              <a:t>Petriho</a:t>
-            </a:r>
-            <a:r>
-              <a:rPr lang="sk-SK" b="1" dirty="0"/>
-              <a:t> siete:</a:t>
-            </a:r>
-          </a:p>
-          <a:p>
-            <a:pPr lvl="1"/>
-            <a:r>
-              <a:rPr lang="sk-SK" dirty="0"/>
-              <a:t>Prechod môže "nastúpiť" (</a:t>
-            </a:r>
-            <a:r>
-              <a:rPr lang="sk-SK" dirty="0" err="1"/>
-              <a:t>fire</a:t>
-            </a:r>
-            <a:r>
-              <a:rPr lang="sk-SK" dirty="0"/>
-              <a:t>) len vtedy, keď všetky jeho vstupné miesta obsahujú dostatočný počet značiek.</a:t>
-            </a:r>
-          </a:p>
-          <a:p>
-            <a:pPr lvl="1"/>
-            <a:r>
-              <a:rPr lang="sk-SK" dirty="0"/>
-              <a:t>Keď prechod nastúpi, odstráni značky zo svojich vstupných miest a pridá značky do svojich výstupných miest.</a:t>
-            </a:r>
-          </a:p>
-          <a:p>
-            <a:pPr>
-              <a:lnSpc>
-                <a:spcPct val="90000"/>
-              </a:lnSpc>
-            </a:pPr>
-            <a:r>
-              <a:rPr lang="sk-SK" dirty="0"/>
-              <a:t>Vlastnosti určujúce kvalitu siete:</a:t>
-            </a:r>
-          </a:p>
-          <a:p>
-            <a:pPr lvl="1">
-              <a:lnSpc>
-                <a:spcPct val="90000"/>
-              </a:lnSpc>
-            </a:pPr>
-            <a:r>
-              <a:rPr lang="sk-SK" dirty="0"/>
-              <a:t>živosť, regulárnosť, obmedzenosť, bezpečnosť, konzervatívnosť, konzervatívnosť vzhľadom ku váhovému vektoru</a:t>
-            </a:r>
-          </a:p>
-        </p:txBody>
-      </p:sp>
-    </p:spTree>
-    <p:extLst>
-      <p:ext uri="{BB962C8B-B14F-4D97-AF65-F5344CB8AC3E}">
-        <p14:creationId xmlns:p14="http://schemas.microsoft.com/office/powerpoint/2010/main" val="836338946"/>
-      </p:ext>
-    </p:extLst>
-  </p:cSld>
-  <p:clrMapOvr>
-    <a:masterClrMapping/>
-  </p:clrMapOvr>
-</p:sld>
-</file>
-
 <file path=ppt/slides/slide39.xml><?xml version="1.0" encoding="utf-8"?>
 <p:sld xmlns:a="http://schemas.openxmlformats.org/drawingml/2006/main" xmlns:r="http://schemas.openxmlformats.org/officeDocument/2006/relationships" xmlns:p="http://schemas.openxmlformats.org/presentationml/2006/main">
   <p:cSld>
@@ -17395,124 +17104,7 @@
       </p:grpSpPr>
       <p:sp>
         <p:nvSpPr>
-          <p:cNvPr id="3077" name="Rectangle 2"/>
-          <p:cNvSpPr>
-            <a:spLocks noGrp="1" noChangeArrowheads="1"/>
-          </p:cNvSpPr>
-          <p:nvPr>
-            <p:ph type="title"/>
-          </p:nvPr>
-        </p:nvSpPr>
-        <p:spPr/>
-        <p:txBody>
-          <a:bodyPr/>
-          <a:lstStyle/>
-          <a:p>
-            <a:r>
-              <a:rPr lang="sk-SK" b="1" dirty="0"/>
-              <a:t>Využitie </a:t>
-            </a:r>
-            <a:r>
-              <a:rPr lang="sk-SK" b="1" dirty="0" err="1"/>
-              <a:t>Petriho</a:t>
-            </a:r>
-            <a:r>
-              <a:rPr lang="sk-SK" b="1" dirty="0"/>
-              <a:t> sietí</a:t>
-            </a:r>
-          </a:p>
-        </p:txBody>
-      </p:sp>
-      <p:sp>
-        <p:nvSpPr>
-          <p:cNvPr id="3" name="Zástupný objekt pre obsah 2">
-            <a:extLst>
-              <a:ext uri="{FF2B5EF4-FFF2-40B4-BE49-F238E27FC236}">
-                <a16:creationId xmlns:a16="http://schemas.microsoft.com/office/drawing/2014/main" id="{53832DD1-125B-6997-C57B-E946D64247F7}"/>
-              </a:ext>
-            </a:extLst>
-          </p:cNvPr>
-          <p:cNvSpPr>
-            <a:spLocks noGrp="1"/>
-          </p:cNvSpPr>
-          <p:nvPr>
-            <p:ph idx="1"/>
-          </p:nvPr>
-        </p:nvSpPr>
-        <p:spPr/>
-        <p:txBody>
-          <a:bodyPr/>
-          <a:lstStyle/>
-          <a:p>
-            <a:pPr>
-              <a:buFont typeface="Arial" panose="020B0604020202020204" pitchFamily="34" charset="0"/>
-              <a:buChar char="•"/>
-            </a:pPr>
-            <a:r>
-              <a:rPr lang="sk-SK" b="1" dirty="0"/>
-              <a:t>Modelovanie procesov</a:t>
-            </a:r>
-            <a:r>
-              <a:rPr lang="sk-SK" dirty="0"/>
-              <a:t>: </a:t>
-            </a:r>
-            <a:r>
-              <a:rPr lang="sk-SK" dirty="0" err="1"/>
-              <a:t>Petriho</a:t>
-            </a:r>
-            <a:r>
-              <a:rPr lang="sk-SK" dirty="0"/>
-              <a:t> siete sú užitočné pri modelovaní a analýze obchodných procesov, </a:t>
-            </a:r>
-            <a:r>
-              <a:rPr lang="sk-SK" dirty="0" err="1"/>
-              <a:t>výrobnych</a:t>
-            </a:r>
-            <a:r>
-              <a:rPr lang="sk-SK" dirty="0"/>
-              <a:t> systémov, komunikačných protokolov a iných dynamických systémov.</a:t>
-            </a:r>
-          </a:p>
-          <a:p>
-            <a:pPr>
-              <a:buFont typeface="Arial" panose="020B0604020202020204" pitchFamily="34" charset="0"/>
-              <a:buChar char="•"/>
-            </a:pPr>
-            <a:r>
-              <a:rPr lang="sk-SK" b="1" dirty="0"/>
-              <a:t>Analýza vlastností systému</a:t>
-            </a:r>
-            <a:r>
-              <a:rPr lang="sk-SK" dirty="0"/>
-              <a:t>: Pomáhajú analyzovať vlastnosti, ako je dosiahnuteľnosť, </a:t>
-            </a:r>
-            <a:r>
-              <a:rPr lang="sk-SK" dirty="0" err="1"/>
-              <a:t>bezkonfliktnosť</a:t>
-            </a:r>
-            <a:r>
-              <a:rPr lang="sk-SK" dirty="0"/>
-              <a:t>, bezpečnosť a efektívnosť systémov.</a:t>
-            </a:r>
-          </a:p>
-          <a:p>
-            <a:r>
-              <a:rPr lang="sk-SK" dirty="0" err="1"/>
-              <a:t>Petriho</a:t>
-            </a:r>
-            <a:r>
-              <a:rPr lang="sk-SK" dirty="0"/>
-              <a:t> siete poskytujú formálny a vizuálny spôsob reprezentácie a štúdia súbežných systémov, čo je ich hlavnou výhodou.</a:t>
-            </a:r>
-          </a:p>
-          <a:p>
-            <a:endParaRPr lang="sk-SK" dirty="0"/>
-          </a:p>
-        </p:txBody>
-      </p:sp>
-      <p:sp>
-        <p:nvSpPr>
-          <p:cNvPr id="3076" name="Zástupný symbol čísla snímky 3"/>
+          <p:cNvPr id="21507" name="Zástupný symbol čísla snímky 3"/>
           <p:cNvSpPr>
             <a:spLocks noGrp="1"/>
           </p:cNvSpPr>
@@ -17644,7 +17236,7 @@
             </a:lvl9pPr>
           </a:lstStyle>
           <a:p>
-            <a:fld id="{0548029A-5D5C-46D3-8178-522770BD43F6}" type="slidenum">
+            <a:fld id="{94AC0568-A9C0-4981-B92F-44F7557A3C44}" type="slidenum">
               <a:rPr lang="sk-SK" sz="1400" b="0"/>
               <a:pPr/>
               <a:t>39</a:t>
@@ -17653,10 +17245,157 @@
           </a:p>
         </p:txBody>
       </p:sp>
+      <p:sp>
+        <p:nvSpPr>
+          <p:cNvPr id="21508" name="Rectangle 2"/>
+          <p:cNvSpPr>
+            <a:spLocks noGrp="1" noChangeArrowheads="1"/>
+          </p:cNvSpPr>
+          <p:nvPr>
+            <p:ph type="title" idx="4294967295"/>
+          </p:nvPr>
+        </p:nvSpPr>
+        <p:spPr/>
+        <p:txBody>
+          <a:bodyPr/>
+          <a:lstStyle/>
+          <a:p>
+            <a:r>
+              <a:rPr lang="sk-SK" dirty="0" err="1"/>
+              <a:t>Petriho</a:t>
+            </a:r>
+            <a:r>
+              <a:rPr lang="sk-SK" dirty="0"/>
+              <a:t> sieť.</a:t>
+            </a:r>
+          </a:p>
+        </p:txBody>
+      </p:sp>
+      <p:sp>
+        <p:nvSpPr>
+          <p:cNvPr id="21509" name="Rectangle 3"/>
+          <p:cNvSpPr>
+            <a:spLocks noGrp="1" noChangeArrowheads="1"/>
+          </p:cNvSpPr>
+          <p:nvPr>
+            <p:ph type="body" idx="4294967295"/>
+          </p:nvPr>
+        </p:nvSpPr>
+        <p:spPr/>
+        <p:txBody>
+          <a:bodyPr>
+            <a:normAutofit fontScale="92500" lnSpcReduction="10000"/>
+          </a:bodyPr>
+          <a:lstStyle/>
+          <a:p>
+            <a:pPr>
+              <a:lnSpc>
+                <a:spcPct val="90000"/>
+              </a:lnSpc>
+            </a:pPr>
+            <a:r>
+              <a:rPr lang="sk-SK" b="1" dirty="0"/>
+              <a:t>Vlastnosti PS </a:t>
+            </a:r>
+            <a:r>
+              <a:rPr lang="sk-SK" dirty="0"/>
+              <a:t>sú vyjadrené pohybom značiek v sieti</a:t>
+            </a:r>
+          </a:p>
+          <a:p>
+            <a:pPr>
+              <a:lnSpc>
+                <a:spcPct val="90000"/>
+              </a:lnSpc>
+            </a:pPr>
+            <a:r>
+              <a:rPr lang="sk-SK" dirty="0"/>
+              <a:t>PS so značkami - </a:t>
+            </a:r>
+            <a:r>
+              <a:rPr lang="sk-SK" b="1" dirty="0"/>
+              <a:t>označená PS</a:t>
+            </a:r>
+          </a:p>
+          <a:p>
+            <a:pPr>
+              <a:lnSpc>
+                <a:spcPct val="90000"/>
+              </a:lnSpc>
+            </a:pPr>
+            <a:r>
+              <a:rPr lang="sk-SK" b="1" dirty="0"/>
+              <a:t>stav PS </a:t>
+            </a:r>
+            <a:r>
+              <a:rPr lang="sk-SK" dirty="0"/>
+              <a:t>- rozmiestnením značiek</a:t>
+            </a:r>
+          </a:p>
+          <a:p>
+            <a:r>
+              <a:rPr lang="sk-SK" b="1" dirty="0"/>
+              <a:t>Pravidlá </a:t>
+            </a:r>
+            <a:r>
+              <a:rPr lang="sk-SK" b="1" dirty="0" err="1"/>
+              <a:t>Petriho</a:t>
+            </a:r>
+            <a:r>
+              <a:rPr lang="sk-SK" b="1" dirty="0"/>
+              <a:t> siete:</a:t>
+            </a:r>
+          </a:p>
+          <a:p>
+            <a:pPr lvl="1"/>
+            <a:r>
+              <a:rPr lang="sk-SK" dirty="0"/>
+              <a:t>Prechod môže "nastúpiť" (</a:t>
+            </a:r>
+            <a:r>
+              <a:rPr lang="sk-SK" dirty="0" err="1"/>
+              <a:t>fire</a:t>
+            </a:r>
+            <a:r>
+              <a:rPr lang="sk-SK" dirty="0"/>
+              <a:t>) len vtedy, keď všetky jeho vstupné miesta obsahujú dostatočný počet značiek.</a:t>
+            </a:r>
+          </a:p>
+          <a:p>
+            <a:pPr lvl="1"/>
+            <a:r>
+              <a:rPr lang="sk-SK" dirty="0"/>
+              <a:t>Keď prechod nastúpi, odstráni značky zo svojich vstupných miest a pridá značky do svojich výstupných miest.</a:t>
+            </a:r>
+          </a:p>
+          <a:p>
+            <a:pPr>
+              <a:lnSpc>
+                <a:spcPct val="90000"/>
+              </a:lnSpc>
+            </a:pPr>
+            <a:r>
+              <a:rPr lang="sk-SK" dirty="0"/>
+              <a:t>Vlastnosti určujúce kvalitu siete:</a:t>
+            </a:r>
+          </a:p>
+          <a:p>
+            <a:pPr lvl="1">
+              <a:lnSpc>
+                <a:spcPct val="90000"/>
+              </a:lnSpc>
+            </a:pPr>
+            <a:r>
+              <a:rPr lang="sk-SK" dirty="0"/>
+              <a:t>živosť, regulárnosť, obmedzenosť, bezpečnosť, konzervatívnosť, konzervatívnosť vzhľadom ku váhovému vektoru</a:t>
+            </a:r>
+          </a:p>
+        </p:txBody>
+      </p:sp>
     </p:spTree>
     <p:extLst>
       <p:ext uri="{BB962C8B-B14F-4D97-AF65-F5344CB8AC3E}">
-        <p14:creationId xmlns:p14="http://schemas.microsoft.com/office/powerpoint/2010/main" val="32605011"/>
+        <p14:creationId xmlns:p14="http://schemas.microsoft.com/office/powerpoint/2010/main" val="836338946"/>
       </p:ext>
     </p:extLst>
   </p:cSld>
@@ -17896,6 +17635,296 @@
       </p:grpSpPr>
       <p:sp>
         <p:nvSpPr>
+          <p:cNvPr id="3077" name="Rectangle 2"/>
+          <p:cNvSpPr>
+            <a:spLocks noGrp="1" noChangeArrowheads="1"/>
+          </p:cNvSpPr>
+          <p:nvPr>
+            <p:ph type="title"/>
+          </p:nvPr>
+        </p:nvSpPr>
+        <p:spPr/>
+        <p:txBody>
+          <a:bodyPr/>
+          <a:lstStyle/>
+          <a:p>
+            <a:r>
+              <a:rPr lang="sk-SK" b="1" dirty="0"/>
+              <a:t>Využitie </a:t>
+            </a:r>
+            <a:r>
+              <a:rPr lang="sk-SK" b="1" dirty="0" err="1"/>
+              <a:t>Petriho</a:t>
+            </a:r>
+            <a:r>
+              <a:rPr lang="sk-SK" b="1" dirty="0"/>
+              <a:t> sietí</a:t>
+            </a:r>
+          </a:p>
+        </p:txBody>
+      </p:sp>
+      <p:sp>
+        <p:nvSpPr>
+          <p:cNvPr id="3" name="Zástupný objekt pre obsah 2">
+            <a:extLst>
+              <a:ext uri="{FF2B5EF4-FFF2-40B4-BE49-F238E27FC236}">
+                <a16:creationId xmlns:a16="http://schemas.microsoft.com/office/drawing/2014/main" id="{53832DD1-125B-6997-C57B-E946D64247F7}"/>
+              </a:ext>
+            </a:extLst>
+          </p:cNvPr>
+          <p:cNvSpPr>
+            <a:spLocks noGrp="1"/>
+          </p:cNvSpPr>
+          <p:nvPr>
+            <p:ph idx="1"/>
+          </p:nvPr>
+        </p:nvSpPr>
+        <p:spPr/>
+        <p:txBody>
+          <a:bodyPr/>
+          <a:lstStyle/>
+          <a:p>
+            <a:pPr>
+              <a:buFont typeface="Arial" panose="020B0604020202020204" pitchFamily="34" charset="0"/>
+              <a:buChar char="•"/>
+            </a:pPr>
+            <a:r>
+              <a:rPr lang="sk-SK" b="1" dirty="0"/>
+              <a:t>Modelovanie procesov</a:t>
+            </a:r>
+            <a:r>
+              <a:rPr lang="sk-SK" dirty="0"/>
+              <a:t>: </a:t>
+            </a:r>
+            <a:r>
+              <a:rPr lang="sk-SK" dirty="0" err="1"/>
+              <a:t>Petriho</a:t>
+            </a:r>
+            <a:r>
+              <a:rPr lang="sk-SK" dirty="0"/>
+              <a:t> siete sú užitočné pri modelovaní a analýze obchodných procesov, </a:t>
+            </a:r>
+            <a:r>
+              <a:rPr lang="sk-SK" dirty="0" err="1"/>
+              <a:t>výrobnych</a:t>
+            </a:r>
+            <a:r>
+              <a:rPr lang="sk-SK" dirty="0"/>
+              <a:t> systémov, komunikačných protokolov a iných dynamických systémov.</a:t>
+            </a:r>
+          </a:p>
+          <a:p>
+            <a:pPr>
+              <a:buFont typeface="Arial" panose="020B0604020202020204" pitchFamily="34" charset="0"/>
+              <a:buChar char="•"/>
+            </a:pPr>
+            <a:r>
+              <a:rPr lang="sk-SK" b="1" dirty="0"/>
+              <a:t>Analýza vlastností systému</a:t>
+            </a:r>
+            <a:r>
+              <a:rPr lang="sk-SK" dirty="0"/>
+              <a:t>: Pomáhajú analyzovať vlastnosti, ako je dosiahnuteľnosť, </a:t>
+            </a:r>
+            <a:r>
+              <a:rPr lang="sk-SK" dirty="0" err="1"/>
+              <a:t>bezkonfliktnosť</a:t>
+            </a:r>
+            <a:r>
+              <a:rPr lang="sk-SK" dirty="0"/>
+              <a:t>, bezpečnosť a efektívnosť systémov.</a:t>
+            </a:r>
+          </a:p>
+          <a:p>
+            <a:r>
+              <a:rPr lang="sk-SK" dirty="0" err="1"/>
+              <a:t>Petriho</a:t>
+            </a:r>
+            <a:r>
+              <a:rPr lang="sk-SK" dirty="0"/>
+              <a:t> siete poskytujú formálny a vizuálny spôsob reprezentácie a štúdia súbežných systémov, čo je ich hlavnou výhodou.</a:t>
+            </a:r>
+          </a:p>
+          <a:p>
+            <a:endParaRPr lang="sk-SK" dirty="0"/>
+          </a:p>
+        </p:txBody>
+      </p:sp>
+      <p:sp>
+        <p:nvSpPr>
+          <p:cNvPr id="3076" name="Zástupný symbol čísla snímky 3"/>
+          <p:cNvSpPr>
+            <a:spLocks noGrp="1"/>
+          </p:cNvSpPr>
+          <p:nvPr>
+            <p:ph type="sldNum" sz="quarter" idx="12"/>
+          </p:nvPr>
+        </p:nvSpPr>
+        <p:spPr>
+          <a:noFill/>
+          <a:ln/>
+          <a:extLst>
+            <a:ext uri="{909E8E84-426E-40DD-AFC4-6F175D3DCCD1}">
+              <a14:hiddenFill xmlns:a14="http://schemas.microsoft.com/office/drawing/2010/main">
+                <a:solidFill>
+                  <a:srgbClr val="FFFFFF"/>
+                </a:solidFill>
+              </a14:hiddenFill>
+            </a:ext>
+            <a:ext uri="{91240B29-F687-4F45-9708-019B960494DF}">
+              <a14:hiddenLine xmlns:a14="http://schemas.microsoft.com/office/drawing/2010/main" w="9525">
+                <a:solidFill>
+                  <a:srgbClr val="000000"/>
+                </a:solidFill>
+                <a:miter lim="800000"/>
+                <a:headEnd/>
+                <a:tailEnd/>
+              </a14:hiddenLine>
+            </a:ext>
+          </a:extLst>
+        </p:spPr>
+        <p:txBody>
+          <a:bodyPr/>
+          <a:lstStyle>
+            <a:lvl1pPr>
+              <a:defRPr sz="4000" b="1">
+                <a:solidFill>
+                  <a:schemeClr val="tx1"/>
+                </a:solidFill>
+                <a:latin typeface="Times New Roman" panose="02020603050405020304" pitchFamily="18" charset="0"/>
+              </a:defRPr>
+            </a:lvl1pPr>
+            <a:lvl2pPr marL="742950" indent="-285750">
+              <a:defRPr sz="4000" b="1">
+                <a:solidFill>
+                  <a:schemeClr val="tx1"/>
+                </a:solidFill>
+                <a:latin typeface="Times New Roman" panose="02020603050405020304" pitchFamily="18" charset="0"/>
+              </a:defRPr>
+            </a:lvl2pPr>
+            <a:lvl3pPr marL="1143000" indent="-228600">
+              <a:defRPr sz="4000" b="1">
+                <a:solidFill>
+                  <a:schemeClr val="tx1"/>
+                </a:solidFill>
+                <a:latin typeface="Times New Roman" panose="02020603050405020304" pitchFamily="18" charset="0"/>
+              </a:defRPr>
+            </a:lvl3pPr>
+            <a:lvl4pPr marL="1600200" indent="-228600">
+              <a:defRPr sz="4000" b="1">
+                <a:solidFill>
+                  <a:schemeClr val="tx1"/>
+                </a:solidFill>
+                <a:latin typeface="Times New Roman" panose="02020603050405020304" pitchFamily="18" charset="0"/>
+              </a:defRPr>
+            </a:lvl4pPr>
+            <a:lvl5pPr marL="2057400" indent="-228600">
+              <a:defRPr sz="4000" b="1">
+                <a:solidFill>
+                  <a:schemeClr val="tx1"/>
+                </a:solidFill>
+                <a:latin typeface="Times New Roman" panose="02020603050405020304" pitchFamily="18" charset="0"/>
+              </a:defRPr>
+            </a:lvl5pPr>
+            <a:lvl6pPr marL="2514600" indent="-228600" algn="ctr" eaLnBrk="0" fontAlgn="base" hangingPunct="0">
+              <a:spcBef>
+                <a:spcPct val="0"/>
+              </a:spcBef>
+              <a:spcAft>
+                <a:spcPct val="0"/>
+              </a:spcAft>
+              <a:defRPr sz="4000" b="1">
+                <a:solidFill>
+                  <a:schemeClr val="tx1"/>
+                </a:solidFill>
+                <a:latin typeface="Times New Roman" panose="02020603050405020304" pitchFamily="18" charset="0"/>
+              </a:defRPr>
+            </a:lvl6pPr>
+            <a:lvl7pPr marL="2971800" indent="-228600" algn="ctr" eaLnBrk="0" fontAlgn="base" hangingPunct="0">
+              <a:spcBef>
+                <a:spcPct val="0"/>
+              </a:spcBef>
+              <a:spcAft>
+                <a:spcPct val="0"/>
+              </a:spcAft>
+              <a:defRPr sz="4000" b="1">
+                <a:solidFill>
+                  <a:schemeClr val="tx1"/>
+                </a:solidFill>
+                <a:latin typeface="Times New Roman" panose="02020603050405020304" pitchFamily="18" charset="0"/>
+              </a:defRPr>
+            </a:lvl7pPr>
+            <a:lvl8pPr marL="3429000" indent="-228600" algn="ctr" eaLnBrk="0" fontAlgn="base" hangingPunct="0">
+              <a:spcBef>
+                <a:spcPct val="0"/>
+              </a:spcBef>
+              <a:spcAft>
+                <a:spcPct val="0"/>
+              </a:spcAft>
+              <a:defRPr sz="4000" b="1">
+                <a:solidFill>
+                  <a:schemeClr val="tx1"/>
+                </a:solidFill>
+                <a:latin typeface="Times New Roman" panose="02020603050405020304" pitchFamily="18" charset="0"/>
+              </a:defRPr>
+            </a:lvl8pPr>
+            <a:lvl9pPr marL="3886200" indent="-228600" algn="ctr" eaLnBrk="0" fontAlgn="base" hangingPunct="0">
+              <a:spcBef>
+                <a:spcPct val="0"/>
+              </a:spcBef>
+              <a:spcAft>
+                <a:spcPct val="0"/>
+              </a:spcAft>
+              <a:defRPr sz="4000" b="1">
+                <a:solidFill>
+                  <a:schemeClr val="tx1"/>
+                </a:solidFill>
+                <a:latin typeface="Times New Roman" panose="02020603050405020304" pitchFamily="18" charset="0"/>
+              </a:defRPr>
+            </a:lvl9pPr>
+          </a:lstStyle>
+          <a:p>
+            <a:fld id="{0548029A-5D5C-46D3-8178-522770BD43F6}" type="slidenum">
+              <a:rPr lang="sk-SK" sz="1400" b="0"/>
+              <a:pPr/>
+              <a:t>40</a:t>
+            </a:fld>
+            <a:endParaRPr lang="sk-SK" sz="1400" b="0"/>
+          </a:p>
+        </p:txBody>
+      </p:sp>
+    </p:spTree>
+    <p:extLst>
+      <p:ext uri="{BB962C8B-B14F-4D97-AF65-F5344CB8AC3E}">
+        <p14:creationId xmlns:p14="http://schemas.microsoft.com/office/powerpoint/2010/main" val="32605011"/>
+      </p:ext>
+    </p:extLst>
+  </p:cSld>
+  <p:clrMapOvr>
+    <a:masterClrMapping/>
+  </p:clrMapOvr>
+</p:sld>
+</file>
+
+<file path=ppt/slides/slide41.xml><?xml version="1.0" encoding="utf-8"?>
+<p:sld xmlns:a="http://schemas.openxmlformats.org/drawingml/2006/main" xmlns:r="http://schemas.openxmlformats.org/officeDocument/2006/relationships" xmlns:p="http://schemas.openxmlformats.org/presentationml/2006/main">
+  <p:cSld>
+    <p:spTree>
+      <p:nvGrpSpPr>
+        <p:cNvPr id="1" name=""/>
+        <p:cNvGrpSpPr/>
+        <p:nvPr/>
+      </p:nvGrpSpPr>
+      <p:grpSpPr>
+        <a:xfrm>
+          <a:off x="0" y="0"/>
+          <a:ext cx="0" cy="0"/>
+          <a:chOff x="0" y="0"/>
+          <a:chExt cx="0" cy="0"/>
+        </a:xfrm>
+      </p:grpSpPr>
+      <p:sp>
+        <p:nvSpPr>
           <p:cNvPr id="3" name="Title 2"/>
           <p:cNvSpPr>
             <a:spLocks noGrp="1"/>
@@ -17997,7 +18026,7 @@
           <a:p>
             <a:fld id="{5AB4CD34-DB5E-4606-AE4E-01019896DEAB}" type="slidenum">
               <a:rPr lang="sk-SK" smtClean="0"/>
-              <a:t>40</a:t>
+              <a:t>41</a:t>
             </a:fld>
             <a:endParaRPr lang="sk-SK"/>
           </a:p>
@@ -18016,7 +18045,7 @@
 </p:sld>
 </file>
 
-<file path=ppt/slides/slide41.xml><?xml version="1.0" encoding="utf-8"?>
+<file path=ppt/slides/slide42.xml><?xml version="1.0" encoding="utf-8"?>
 <p:sld xmlns:a="http://schemas.openxmlformats.org/drawingml/2006/main" xmlns:r="http://schemas.openxmlformats.org/officeDocument/2006/relationships" xmlns:p="http://schemas.openxmlformats.org/presentationml/2006/main">
   <p:cSld>
     <p:spTree>
@@ -18102,7 +18131,7 @@
           <a:p>
             <a:fld id="{5AB4CD34-DB5E-4606-AE4E-01019896DEAB}" type="slidenum">
               <a:rPr lang="sk-SK" smtClean="0"/>
-              <a:t>41</a:t>
+              <a:t>42</a:t>
             </a:fld>
             <a:endParaRPr lang="sk-SK"/>
           </a:p>
@@ -18121,7 +18150,7 @@
 </p:sld>
 </file>
 
-<file path=ppt/slides/slide42.xml><?xml version="1.0" encoding="utf-8"?>
+<file path=ppt/slides/slide43.xml><?xml version="1.0" encoding="utf-8"?>
 <p:sld xmlns:a="http://schemas.openxmlformats.org/drawingml/2006/main" xmlns:r="http://schemas.openxmlformats.org/officeDocument/2006/relationships" xmlns:p="http://schemas.openxmlformats.org/presentationml/2006/main">
   <p:cSld>
     <p:spTree>
@@ -18483,7 +18512,7 @@
             <a:fld id="{BCA3DEFF-E60B-4455-A3A6-068E01E2788E}" type="slidenum">
               <a:rPr lang="sk-SK" sz="1400" b="0"/>
               <a:pPr/>
-              <a:t>42</a:t>
+              <a:t>43</a:t>
             </a:fld>
             <a:endParaRPr lang="sk-SK" sz="1400" b="0"/>
           </a:p>
@@ -18502,7 +18531,7 @@
 </p:sld>
 </file>
 
-<file path=ppt/slides/slide43.xml><?xml version="1.0" encoding="utf-8"?>
+<file path=ppt/slides/slide44.xml><?xml version="1.0" encoding="utf-8"?>
 <p:sld xmlns:a="http://schemas.openxmlformats.org/drawingml/2006/main" xmlns:r="http://schemas.openxmlformats.org/officeDocument/2006/relationships" xmlns:p="http://schemas.openxmlformats.org/presentationml/2006/main">
   <p:cSld>
     <p:spTree>
@@ -18726,7 +18755,7 @@
             <a:fld id="{0B54D3DA-186A-4D53-B99F-AEC97B84A516}" type="slidenum">
               <a:rPr lang="sk-SK" sz="1400" b="0"/>
               <a:pPr/>
-              <a:t>43</a:t>
+              <a:t>44</a:t>
             </a:fld>
             <a:endParaRPr lang="sk-SK" sz="1400" b="0"/>
           </a:p>
@@ -18799,7 +18828,7 @@
 </p:sld>
 </file>
 
-<file path=ppt/slides/slide44.xml><?xml version="1.0" encoding="utf-8"?>
+<file path=ppt/slides/slide45.xml><?xml version="1.0" encoding="utf-8"?>
 <p:sld xmlns:a="http://schemas.openxmlformats.org/drawingml/2006/main" xmlns:r="http://schemas.openxmlformats.org/officeDocument/2006/relationships" xmlns:p="http://schemas.openxmlformats.org/presentationml/2006/main">
   <p:cSld>
     <p:spTree>
@@ -18981,7 +19010,7 @@
             <a:fld id="{395FAECE-8F4E-41A6-8D06-2EE47E25BD2A}" type="slidenum">
               <a:rPr lang="sk-SK" sz="1400" b="0"/>
               <a:pPr/>
-              <a:t>44</a:t>
+              <a:t>45</a:t>
             </a:fld>
             <a:endParaRPr lang="sk-SK" sz="1400" b="0"/>
           </a:p>
@@ -19456,323 +19485,6 @@
 </p:sld>
 </file>
 
-<file path=ppt/slides/slide45.xml><?xml version="1.0" encoding="utf-8"?>
-<p:sld xmlns:a="http://schemas.openxmlformats.org/drawingml/2006/main" xmlns:r="http://schemas.openxmlformats.org/officeDocument/2006/relationships" xmlns:p="http://schemas.openxmlformats.org/presentationml/2006/main">
-  <p:cSld>
-    <p:spTree>
-      <p:nvGrpSpPr>
-        <p:cNvPr id="1" name=""/>
-        <p:cNvGrpSpPr/>
-        <p:nvPr/>
-      </p:nvGrpSpPr>
-      <p:grpSpPr>
-        <a:xfrm>
-          <a:off x="0" y="0"/>
-          <a:ext cx="0" cy="0"/>
-          <a:chOff x="0" y="0"/>
-          <a:chExt cx="0" cy="0"/>
-        </a:xfrm>
-      </p:grpSpPr>
-      <p:sp>
-        <p:nvSpPr>
-          <p:cNvPr id="2" name="Nadpis 1">
-            <a:extLst>
-              <a:ext uri="{FF2B5EF4-FFF2-40B4-BE49-F238E27FC236}">
-                <a16:creationId xmlns:a16="http://schemas.microsoft.com/office/drawing/2014/main" id="{ABC7D077-EEE0-0346-8402-1729FA27CD98}"/>
-              </a:ext>
-            </a:extLst>
-          </p:cNvPr>
-          <p:cNvSpPr>
-            <a:spLocks noGrp="1"/>
-          </p:cNvSpPr>
-          <p:nvPr>
-            <p:ph type="title"/>
-          </p:nvPr>
-        </p:nvSpPr>
-        <p:spPr/>
-        <p:txBody>
-          <a:bodyPr/>
-          <a:lstStyle/>
-          <a:p>
-            <a:r>
-              <a:rPr lang="sk-SK" dirty="0"/>
-              <a:t>Producent - konzument</a:t>
-            </a:r>
-          </a:p>
-        </p:txBody>
-      </p:sp>
-      <p:sp>
-        <p:nvSpPr>
-          <p:cNvPr id="3" name="Zástupný objekt pre obsah 2">
-            <a:extLst>
-              <a:ext uri="{FF2B5EF4-FFF2-40B4-BE49-F238E27FC236}">
-                <a16:creationId xmlns:a16="http://schemas.microsoft.com/office/drawing/2014/main" id="{0373D6C1-4A90-D94F-8CB3-5009EB0055C7}"/>
-              </a:ext>
-            </a:extLst>
-          </p:cNvPr>
-          <p:cNvSpPr>
-            <a:spLocks noGrp="1"/>
-          </p:cNvSpPr>
-          <p:nvPr>
-            <p:ph idx="1"/>
-          </p:nvPr>
-        </p:nvSpPr>
-        <p:spPr/>
-        <p:txBody>
-          <a:bodyPr>
-            <a:normAutofit fontScale="85000" lnSpcReduction="20000"/>
-          </a:bodyPr>
-          <a:lstStyle/>
-          <a:p>
-            <a:pPr>
-              <a:spcBef>
-                <a:spcPct val="50000"/>
-              </a:spcBef>
-            </a:pPr>
-            <a:r>
-              <a:rPr lang="sk-SK" dirty="0"/>
-              <a:t>Producent - konzument - asynchrónna komunikácia procesov pomocou </a:t>
-            </a:r>
-            <a:r>
-              <a:rPr lang="sk-SK" b="1" dirty="0"/>
-              <a:t>spoločnej vyrovnávacej pamäte </a:t>
-            </a:r>
-          </a:p>
-          <a:p>
-            <a:pPr marL="0" indent="0">
-              <a:spcBef>
-                <a:spcPct val="50000"/>
-              </a:spcBef>
-              <a:buNone/>
-            </a:pPr>
-            <a:endParaRPr lang="sk-SK" dirty="0"/>
-          </a:p>
-          <a:p>
-            <a:pPr>
-              <a:spcBef>
-                <a:spcPct val="50000"/>
-              </a:spcBef>
-            </a:pPr>
-            <a:r>
-              <a:rPr lang="sk-SK" dirty="0"/>
-              <a:t>Princíp </a:t>
-            </a:r>
-            <a:r>
-              <a:rPr lang="sk-SK" dirty="0" err="1"/>
-              <a:t>synchroniz</a:t>
-            </a:r>
-            <a:r>
-              <a:rPr lang="sk-SK" dirty="0"/>
-              <a:t>. úlohy P-K pomocou </a:t>
-            </a:r>
-            <a:r>
-              <a:rPr lang="sk-SK" dirty="0" err="1"/>
-              <a:t>Petriho</a:t>
-            </a:r>
-            <a:r>
-              <a:rPr lang="sk-SK" dirty="0"/>
-              <a:t> siete - dva pomocné miesta VOLNÉ a OBSADENÉ (počet bodiek=počet voľných (obsadených) miest pamäte)</a:t>
-            </a:r>
-          </a:p>
-          <a:p>
-            <a:pPr>
-              <a:spcBef>
-                <a:spcPct val="50000"/>
-              </a:spcBef>
-            </a:pPr>
-            <a:r>
-              <a:rPr lang="sk-SK" dirty="0"/>
-              <a:t>proces Producent odoberie jednu bodku z oblasti VOLNÉ (vyrovnávacia pamäť) pred zápisom (alebo čaká) a po zápise ju dá do OBSADENÉ</a:t>
-            </a:r>
-          </a:p>
-          <a:p>
-            <a:pPr>
-              <a:spcBef>
-                <a:spcPct val="50000"/>
-              </a:spcBef>
-            </a:pPr>
-            <a:r>
-              <a:rPr lang="sk-SK" dirty="0"/>
-              <a:t>proces Konzument odoberie jednu bodku z oblasti OBSADENÉ (vyrovnávacia pamäť) pred čítaním (alebo čaká) a po čítaní ju dá do VOLNÉ</a:t>
-            </a:r>
-          </a:p>
-          <a:p>
-            <a:pPr>
-              <a:spcBef>
-                <a:spcPct val="50000"/>
-              </a:spcBef>
-            </a:pPr>
-            <a:endParaRPr lang="sk-SK" dirty="0"/>
-          </a:p>
-          <a:p>
-            <a:pPr>
-              <a:spcBef>
-                <a:spcPct val="50000"/>
-              </a:spcBef>
-            </a:pPr>
-            <a:r>
-              <a:rPr lang="sk-SK" dirty="0"/>
-              <a:t>Úloha P-K je podstatou každej asynchrónnej komunikácie procesov</a:t>
-            </a:r>
-          </a:p>
-        </p:txBody>
-      </p:sp>
-      <p:sp>
-        <p:nvSpPr>
-          <p:cNvPr id="27651" name="Zástupný symbol čísla snímky 3"/>
-          <p:cNvSpPr>
-            <a:spLocks noGrp="1"/>
-          </p:cNvSpPr>
-          <p:nvPr>
-            <p:ph type="sldNum" sz="quarter" idx="12"/>
-          </p:nvPr>
-        </p:nvSpPr>
-        <p:spPr>
-          <a:noFill/>
-          <a:ln/>
-          <a:extLst>
-            <a:ext uri="{909E8E84-426E-40DD-AFC4-6F175D3DCCD1}">
-              <a14:hiddenFill xmlns:a14="http://schemas.microsoft.com/office/drawing/2010/main">
-                <a:solidFill>
-                  <a:srgbClr val="FFFFFF"/>
-                </a:solidFill>
-              </a14:hiddenFill>
-            </a:ext>
-            <a:ext uri="{91240B29-F687-4F45-9708-019B960494DF}">
-              <a14:hiddenLine xmlns:a14="http://schemas.microsoft.com/office/drawing/2010/main" w="9525">
-                <a:solidFill>
-                  <a:srgbClr val="000000"/>
-                </a:solidFill>
-                <a:miter lim="800000"/>
-                <a:headEnd/>
-                <a:tailEnd/>
-              </a14:hiddenLine>
-            </a:ext>
-          </a:extLst>
-        </p:spPr>
-        <p:txBody>
-          <a:bodyPr/>
-          <a:lstStyle>
-            <a:lvl1pPr>
-              <a:defRPr sz="4000" b="1">
-                <a:solidFill>
-                  <a:schemeClr val="tx1"/>
-                </a:solidFill>
-                <a:latin typeface="Times New Roman" panose="02020603050405020304" pitchFamily="18" charset="0"/>
-              </a:defRPr>
-            </a:lvl1pPr>
-            <a:lvl2pPr marL="742950" indent="-285750">
-              <a:defRPr sz="4000" b="1">
-                <a:solidFill>
-                  <a:schemeClr val="tx1"/>
-                </a:solidFill>
-                <a:latin typeface="Times New Roman" panose="02020603050405020304" pitchFamily="18" charset="0"/>
-              </a:defRPr>
-            </a:lvl2pPr>
-            <a:lvl3pPr marL="1143000" indent="-228600">
-              <a:defRPr sz="4000" b="1">
-                <a:solidFill>
-                  <a:schemeClr val="tx1"/>
-                </a:solidFill>
-                <a:latin typeface="Times New Roman" panose="02020603050405020304" pitchFamily="18" charset="0"/>
-              </a:defRPr>
-            </a:lvl3pPr>
-            <a:lvl4pPr marL="1600200" indent="-228600">
-              <a:defRPr sz="4000" b="1">
-                <a:solidFill>
-                  <a:schemeClr val="tx1"/>
-                </a:solidFill>
-                <a:latin typeface="Times New Roman" panose="02020603050405020304" pitchFamily="18" charset="0"/>
-              </a:defRPr>
-            </a:lvl4pPr>
-            <a:lvl5pPr marL="2057400" indent="-228600">
-              <a:defRPr sz="4000" b="1">
-                <a:solidFill>
-                  <a:schemeClr val="tx1"/>
-                </a:solidFill>
-                <a:latin typeface="Times New Roman" panose="02020603050405020304" pitchFamily="18" charset="0"/>
-              </a:defRPr>
-            </a:lvl5pPr>
-            <a:lvl6pPr marL="2514600" indent="-228600" algn="ctr" eaLnBrk="0" fontAlgn="base" hangingPunct="0">
-              <a:spcBef>
-                <a:spcPct val="0"/>
-              </a:spcBef>
-              <a:spcAft>
-                <a:spcPct val="0"/>
-              </a:spcAft>
-              <a:defRPr sz="4000" b="1">
-                <a:solidFill>
-                  <a:schemeClr val="tx1"/>
-                </a:solidFill>
-                <a:latin typeface="Times New Roman" panose="02020603050405020304" pitchFamily="18" charset="0"/>
-              </a:defRPr>
-            </a:lvl6pPr>
-            <a:lvl7pPr marL="2971800" indent="-228600" algn="ctr" eaLnBrk="0" fontAlgn="base" hangingPunct="0">
-              <a:spcBef>
-                <a:spcPct val="0"/>
-              </a:spcBef>
-              <a:spcAft>
-                <a:spcPct val="0"/>
-              </a:spcAft>
-              <a:defRPr sz="4000" b="1">
-                <a:solidFill>
-                  <a:schemeClr val="tx1"/>
-                </a:solidFill>
-                <a:latin typeface="Times New Roman" panose="02020603050405020304" pitchFamily="18" charset="0"/>
-              </a:defRPr>
-            </a:lvl7pPr>
-            <a:lvl8pPr marL="3429000" indent="-228600" algn="ctr" eaLnBrk="0" fontAlgn="base" hangingPunct="0">
-              <a:spcBef>
-                <a:spcPct val="0"/>
-              </a:spcBef>
-              <a:spcAft>
-                <a:spcPct val="0"/>
-              </a:spcAft>
-              <a:defRPr sz="4000" b="1">
-                <a:solidFill>
-                  <a:schemeClr val="tx1"/>
-                </a:solidFill>
-                <a:latin typeface="Times New Roman" panose="02020603050405020304" pitchFamily="18" charset="0"/>
-              </a:defRPr>
-            </a:lvl8pPr>
-            <a:lvl9pPr marL="3886200" indent="-228600" algn="ctr" eaLnBrk="0" fontAlgn="base" hangingPunct="0">
-              <a:spcBef>
-                <a:spcPct val="0"/>
-              </a:spcBef>
-              <a:spcAft>
-                <a:spcPct val="0"/>
-              </a:spcAft>
-              <a:defRPr sz="4000" b="1">
-                <a:solidFill>
-                  <a:schemeClr val="tx1"/>
-                </a:solidFill>
-                <a:latin typeface="Times New Roman" panose="02020603050405020304" pitchFamily="18" charset="0"/>
-              </a:defRPr>
-            </a:lvl9pPr>
-          </a:lstStyle>
-          <a:p>
-            <a:fld id="{97D0FD29-EED9-410F-B9B5-B118F94C3B3F}" type="slidenum">
-              <a:rPr lang="sk-SK" sz="1400" b="0"/>
-              <a:pPr/>
-              <a:t>45</a:t>
-            </a:fld>
-            <a:endParaRPr lang="sk-SK" sz="1400" b="0"/>
-          </a:p>
-        </p:txBody>
-      </p:sp>
-    </p:spTree>
-    <p:extLst>
-      <p:ext uri="{BB962C8B-B14F-4D97-AF65-F5344CB8AC3E}">
-        <p14:creationId xmlns:p14="http://schemas.microsoft.com/office/powerpoint/2010/main" val="2893083369"/>
-      </p:ext>
-    </p:extLst>
-  </p:cSld>
-  <p:clrMapOvr>
-    <a:masterClrMapping/>
-  </p:clrMapOvr>
-</p:sld>
-</file>
-
 <file path=ppt/slides/slide46.xml><?xml version="1.0" encoding="utf-8"?>
 <p:sld xmlns:a="http://schemas.openxmlformats.org/drawingml/2006/main" xmlns:r="http://schemas.openxmlformats.org/officeDocument/2006/relationships" xmlns:p="http://schemas.openxmlformats.org/presentationml/2006/main">
   <p:cSld>
@@ -19795,7 +19507,7 @@
           <p:cNvPr id="2" name="Nadpis 1">
             <a:extLst>
               <a:ext uri="{FF2B5EF4-FFF2-40B4-BE49-F238E27FC236}">
-                <a16:creationId xmlns:a16="http://schemas.microsoft.com/office/drawing/2014/main" id="{3EF5A898-FE9B-7A4E-AB00-A60A2FF30AE8}"/>
+                <a16:creationId xmlns:a16="http://schemas.microsoft.com/office/drawing/2014/main" id="{ABC7D077-EEE0-0346-8402-1729FA27CD98}"/>
               </a:ext>
             </a:extLst>
           </p:cNvPr>
@@ -19820,7 +19532,123 @@
       </p:sp>
       <p:sp>
         <p:nvSpPr>
-          <p:cNvPr id="28675" name="Zástupný symbol čísla snímky 3"/>
+          <p:cNvPr id="3" name="Zástupný objekt pre obsah 2">
+            <a:extLst>
+              <a:ext uri="{FF2B5EF4-FFF2-40B4-BE49-F238E27FC236}">
+                <a16:creationId xmlns:a16="http://schemas.microsoft.com/office/drawing/2014/main" id="{0373D6C1-4A90-D94F-8CB3-5009EB0055C7}"/>
+              </a:ext>
+            </a:extLst>
+          </p:cNvPr>
+          <p:cNvSpPr>
+            <a:spLocks noGrp="1"/>
+          </p:cNvSpPr>
+          <p:nvPr>
+            <p:ph idx="1"/>
+          </p:nvPr>
+        </p:nvSpPr>
+        <p:spPr/>
+        <p:txBody>
+          <a:bodyPr>
+            <a:normAutofit fontScale="85000" lnSpcReduction="20000"/>
+          </a:bodyPr>
+          <a:lstStyle/>
+          <a:p>
+            <a:pPr>
+              <a:spcBef>
+                <a:spcPct val="50000"/>
+              </a:spcBef>
+            </a:pPr>
+            <a:r>
+              <a:rPr lang="sk-SK" dirty="0"/>
+              <a:t>Producent - konzument - asynchrónna komunikácia procesov pomocou </a:t>
+            </a:r>
+            <a:r>
+              <a:rPr lang="sk-SK" b="1" dirty="0"/>
+              <a:t>spoločnej vyrovnávacej pamäte </a:t>
+            </a:r>
+          </a:p>
+          <a:p>
+            <a:pPr marL="0" indent="0">
+              <a:spcBef>
+                <a:spcPct val="50000"/>
+              </a:spcBef>
+              <a:buNone/>
+            </a:pPr>
+            <a:endParaRPr lang="sk-SK" dirty="0"/>
+          </a:p>
+          <a:p>
+            <a:pPr>
+              <a:spcBef>
+                <a:spcPct val="50000"/>
+              </a:spcBef>
+            </a:pPr>
+            <a:r>
+              <a:rPr lang="sk-SK" dirty="0"/>
+              <a:t>Princíp </a:t>
+            </a:r>
+            <a:r>
+              <a:rPr lang="sk-SK" dirty="0" err="1"/>
+              <a:t>synchroniz</a:t>
+            </a:r>
+            <a:r>
+              <a:rPr lang="sk-SK" dirty="0"/>
+              <a:t>. úlohy P-K pomocou </a:t>
+            </a:r>
+            <a:r>
+              <a:rPr lang="sk-SK" dirty="0" err="1"/>
+              <a:t>Petriho</a:t>
+            </a:r>
+            <a:r>
+              <a:rPr lang="sk-SK" dirty="0"/>
+              <a:t> siete - dva pomocné miesta VOLNÉ a OBSADENÉ (počet bodiek=počet voľných (obsadených) miest pamäte)</a:t>
+            </a:r>
+          </a:p>
+          <a:p>
+            <a:pPr>
+              <a:spcBef>
+                <a:spcPct val="50000"/>
+              </a:spcBef>
+            </a:pPr>
+            <a:r>
+              <a:rPr lang="sk-SK" dirty="0"/>
+              <a:t>proces Producent odoberie jednu bodku z oblasti VOLNÉ (vyrovnávacia pamäť) pred zápisom (alebo čaká) a po zápise ju dá do OBSADENÉ</a:t>
+            </a:r>
+          </a:p>
+          <a:p>
+            <a:pPr>
+              <a:spcBef>
+                <a:spcPct val="50000"/>
+              </a:spcBef>
+            </a:pPr>
+            <a:r>
+              <a:rPr lang="sk-SK" dirty="0"/>
+              <a:t>proces Konzument odoberie jednu bodku z oblasti OBSADENÉ (vyrovnávacia pamäť) pred čítaním (alebo čaká) a po čítaní ju dá do VOLNÉ</a:t>
+            </a:r>
+          </a:p>
+          <a:p>
+            <a:pPr>
+              <a:spcBef>
+                <a:spcPct val="50000"/>
+              </a:spcBef>
+            </a:pPr>
+            <a:endParaRPr lang="sk-SK" dirty="0"/>
+          </a:p>
+          <a:p>
+            <a:pPr>
+              <a:spcBef>
+                <a:spcPct val="50000"/>
+              </a:spcBef>
+            </a:pPr>
+            <a:r>
+              <a:rPr lang="sk-SK" dirty="0"/>
+              <a:t>Úloha P-K je podstatou každej asynchrónnej komunikácie procesov</a:t>
+            </a:r>
+          </a:p>
+        </p:txBody>
+      </p:sp>
+      <p:sp>
+        <p:nvSpPr>
+          <p:cNvPr id="27651" name="Zástupný symbol čísla snímky 3"/>
           <p:cNvSpPr>
             <a:spLocks noGrp="1"/>
           </p:cNvSpPr>
@@ -19952,10 +19780,211 @@
             </a:lvl9pPr>
           </a:lstStyle>
           <a:p>
+            <a:fld id="{97D0FD29-EED9-410F-B9B5-B118F94C3B3F}" type="slidenum">
+              <a:rPr lang="sk-SK" sz="1400" b="0"/>
+              <a:pPr/>
+              <a:t>46</a:t>
+            </a:fld>
+            <a:endParaRPr lang="sk-SK" sz="1400" b="0"/>
+          </a:p>
+        </p:txBody>
+      </p:sp>
+    </p:spTree>
+    <p:extLst>
+      <p:ext uri="{BB962C8B-B14F-4D97-AF65-F5344CB8AC3E}">
+        <p14:creationId xmlns:p14="http://schemas.microsoft.com/office/powerpoint/2010/main" val="2893083369"/>
+      </p:ext>
+    </p:extLst>
+  </p:cSld>
+  <p:clrMapOvr>
+    <a:masterClrMapping/>
+  </p:clrMapOvr>
+</p:sld>
+</file>
+
+<file path=ppt/slides/slide47.xml><?xml version="1.0" encoding="utf-8"?>
+<p:sld xmlns:a="http://schemas.openxmlformats.org/drawingml/2006/main" xmlns:r="http://schemas.openxmlformats.org/officeDocument/2006/relationships" xmlns:p="http://schemas.openxmlformats.org/presentationml/2006/main">
+  <p:cSld>
+    <p:spTree>
+      <p:nvGrpSpPr>
+        <p:cNvPr id="1" name=""/>
+        <p:cNvGrpSpPr/>
+        <p:nvPr/>
+      </p:nvGrpSpPr>
+      <p:grpSpPr>
+        <a:xfrm>
+          <a:off x="0" y="0"/>
+          <a:ext cx="0" cy="0"/>
+          <a:chOff x="0" y="0"/>
+          <a:chExt cx="0" cy="0"/>
+        </a:xfrm>
+      </p:grpSpPr>
+      <p:sp>
+        <p:nvSpPr>
+          <p:cNvPr id="2" name="Nadpis 1">
+            <a:extLst>
+              <a:ext uri="{FF2B5EF4-FFF2-40B4-BE49-F238E27FC236}">
+                <a16:creationId xmlns:a16="http://schemas.microsoft.com/office/drawing/2014/main" id="{3EF5A898-FE9B-7A4E-AB00-A60A2FF30AE8}"/>
+              </a:ext>
+            </a:extLst>
+          </p:cNvPr>
+          <p:cNvSpPr>
+            <a:spLocks noGrp="1"/>
+          </p:cNvSpPr>
+          <p:nvPr>
+            <p:ph type="title"/>
+          </p:nvPr>
+        </p:nvSpPr>
+        <p:spPr/>
+        <p:txBody>
+          <a:bodyPr/>
+          <a:lstStyle/>
+          <a:p>
+            <a:r>
+              <a:rPr lang="sk-SK" dirty="0"/>
+              <a:t>Producent - konzument</a:t>
+            </a:r>
+          </a:p>
+        </p:txBody>
+      </p:sp>
+      <p:sp>
+        <p:nvSpPr>
+          <p:cNvPr id="28675" name="Zástupný symbol čísla snímky 3"/>
+          <p:cNvSpPr>
+            <a:spLocks noGrp="1"/>
+          </p:cNvSpPr>
+          <p:nvPr>
+            <p:ph type="sldNum" sz="quarter" idx="12"/>
+          </p:nvPr>
+        </p:nvSpPr>
+        <p:spPr>
+          <a:noFill/>
+          <a:ln/>
+          <a:extLst>
+            <a:ext uri="{909E8E84-426E-40DD-AFC4-6F175D3DCCD1}">
+              <a14:hiddenFill xmlns:a14="http://schemas.microsoft.com/office/drawing/2010/main">
+                <a:solidFill>
+                  <a:srgbClr val="FFFFFF"/>
+                </a:solidFill>
+              </a14:hiddenFill>
+            </a:ext>
+            <a:ext uri="{91240B29-F687-4F45-9708-019B960494DF}">
+              <a14:hiddenLine xmlns:a14="http://schemas.microsoft.com/office/drawing/2010/main" w="9525">
+                <a:solidFill>
+                  <a:srgbClr val="000000"/>
+                </a:solidFill>
+                <a:miter lim="800000"/>
+                <a:headEnd/>
+                <a:tailEnd/>
+              </a14:hiddenLine>
+            </a:ext>
+          </a:extLst>
+        </p:spPr>
+        <p:txBody>
+          <a:bodyPr/>
+          <a:lstStyle>
+            <a:lvl1pPr>
+              <a:defRPr sz="4000" b="1">
+                <a:solidFill>
+                  <a:schemeClr val="tx1"/>
+                </a:solidFill>
+                <a:latin typeface="Times New Roman" panose="02020603050405020304" pitchFamily="18" charset="0"/>
+              </a:defRPr>
+            </a:lvl1pPr>
+            <a:lvl2pPr marL="742950" indent="-285750">
+              <a:defRPr sz="4000" b="1">
+                <a:solidFill>
+                  <a:schemeClr val="tx1"/>
+                </a:solidFill>
+                <a:latin typeface="Times New Roman" panose="02020603050405020304" pitchFamily="18" charset="0"/>
+              </a:defRPr>
+            </a:lvl2pPr>
+            <a:lvl3pPr marL="1143000" indent="-228600">
+              <a:defRPr sz="4000" b="1">
+                <a:solidFill>
+                  <a:schemeClr val="tx1"/>
+                </a:solidFill>
+                <a:latin typeface="Times New Roman" panose="02020603050405020304" pitchFamily="18" charset="0"/>
+              </a:defRPr>
+            </a:lvl3pPr>
+            <a:lvl4pPr marL="1600200" indent="-228600">
+              <a:defRPr sz="4000" b="1">
+                <a:solidFill>
+                  <a:schemeClr val="tx1"/>
+                </a:solidFill>
+                <a:latin typeface="Times New Roman" panose="02020603050405020304" pitchFamily="18" charset="0"/>
+              </a:defRPr>
+            </a:lvl4pPr>
+            <a:lvl5pPr marL="2057400" indent="-228600">
+              <a:defRPr sz="4000" b="1">
+                <a:solidFill>
+                  <a:schemeClr val="tx1"/>
+                </a:solidFill>
+                <a:latin typeface="Times New Roman" panose="02020603050405020304" pitchFamily="18" charset="0"/>
+              </a:defRPr>
+            </a:lvl5pPr>
+            <a:lvl6pPr marL="2514600" indent="-228600" algn="ctr" eaLnBrk="0" fontAlgn="base" hangingPunct="0">
+              <a:spcBef>
+                <a:spcPct val="0"/>
+              </a:spcBef>
+              <a:spcAft>
+                <a:spcPct val="0"/>
+              </a:spcAft>
+              <a:defRPr sz="4000" b="1">
+                <a:solidFill>
+                  <a:schemeClr val="tx1"/>
+                </a:solidFill>
+                <a:latin typeface="Times New Roman" panose="02020603050405020304" pitchFamily="18" charset="0"/>
+              </a:defRPr>
+            </a:lvl6pPr>
+            <a:lvl7pPr marL="2971800" indent="-228600" algn="ctr" eaLnBrk="0" fontAlgn="base" hangingPunct="0">
+              <a:spcBef>
+                <a:spcPct val="0"/>
+              </a:spcBef>
+              <a:spcAft>
+                <a:spcPct val="0"/>
+              </a:spcAft>
+              <a:defRPr sz="4000" b="1">
+                <a:solidFill>
+                  <a:schemeClr val="tx1"/>
+                </a:solidFill>
+                <a:latin typeface="Times New Roman" panose="02020603050405020304" pitchFamily="18" charset="0"/>
+              </a:defRPr>
+            </a:lvl7pPr>
+            <a:lvl8pPr marL="3429000" indent="-228600" algn="ctr" eaLnBrk="0" fontAlgn="base" hangingPunct="0">
+              <a:spcBef>
+                <a:spcPct val="0"/>
+              </a:spcBef>
+              <a:spcAft>
+                <a:spcPct val="0"/>
+              </a:spcAft>
+              <a:defRPr sz="4000" b="1">
+                <a:solidFill>
+                  <a:schemeClr val="tx1"/>
+                </a:solidFill>
+                <a:latin typeface="Times New Roman" panose="02020603050405020304" pitchFamily="18" charset="0"/>
+              </a:defRPr>
+            </a:lvl8pPr>
+            <a:lvl9pPr marL="3886200" indent="-228600" algn="ctr" eaLnBrk="0" fontAlgn="base" hangingPunct="0">
+              <a:spcBef>
+                <a:spcPct val="0"/>
+              </a:spcBef>
+              <a:spcAft>
+                <a:spcPct val="0"/>
+              </a:spcAft>
+              <a:defRPr sz="4000" b="1">
+                <a:solidFill>
+                  <a:schemeClr val="tx1"/>
+                </a:solidFill>
+                <a:latin typeface="Times New Roman" panose="02020603050405020304" pitchFamily="18" charset="0"/>
+              </a:defRPr>
+            </a:lvl9pPr>
+          </a:lstStyle>
+          <a:p>
             <a:fld id="{3979964D-9B5F-4FA5-A96F-E424B13A75DA}" type="slidenum">
               <a:rPr lang="sk-SK" sz="1400" b="0"/>
               <a:pPr/>
-              <a:t>46</a:t>
+              <a:t>47</a:t>
             </a:fld>
             <a:endParaRPr lang="sk-SK" sz="1400" b="0"/>
           </a:p>
@@ -20154,10 +20183,10 @@
           <p:nvPr/>
         </p:nvPicPr>
         <p:blipFill>
-          <a:blip r:embed="rId2">
+          <a:blip>
             <a:extLst>
               <a:ext uri="{96DAC541-7B7A-43D3-8B79-37D633B846F1}">
-                <asvg:svgBlip xmlns:asvg="http://schemas.microsoft.com/office/drawing/2016/SVG/main" r:embed="rId3"/>
+                <asvg:svgBlip xmlns:asvg="http://schemas.microsoft.com/office/drawing/2016/SVG/main" r:embed="rId2"/>
               </a:ext>
             </a:extLst>
           </a:blip>
@@ -20188,312 +20217,6 @@
 </p:sld>
 </file>
 
-<file path=ppt/slides/slide47.xml><?xml version="1.0" encoding="utf-8"?>
-<p:sld xmlns:a="http://schemas.openxmlformats.org/drawingml/2006/main" xmlns:r="http://schemas.openxmlformats.org/officeDocument/2006/relationships" xmlns:p="http://schemas.openxmlformats.org/presentationml/2006/main">
-  <p:cSld>
-    <p:spTree>
-      <p:nvGrpSpPr>
-        <p:cNvPr id="1" name=""/>
-        <p:cNvGrpSpPr/>
-        <p:nvPr/>
-      </p:nvGrpSpPr>
-      <p:grpSpPr>
-        <a:xfrm>
-          <a:off x="0" y="0"/>
-          <a:ext cx="0" cy="0"/>
-          <a:chOff x="0" y="0"/>
-          <a:chExt cx="0" cy="0"/>
-        </a:xfrm>
-      </p:grpSpPr>
-      <p:sp>
-        <p:nvSpPr>
-          <p:cNvPr id="2" name="Nadpis 1">
-            <a:extLst>
-              <a:ext uri="{FF2B5EF4-FFF2-40B4-BE49-F238E27FC236}">
-                <a16:creationId xmlns:a16="http://schemas.microsoft.com/office/drawing/2014/main" id="{C4321BD9-639F-DA46-8A36-DBF0924A97BF}"/>
-              </a:ext>
-            </a:extLst>
-          </p:cNvPr>
-          <p:cNvSpPr>
-            <a:spLocks noGrp="1"/>
-          </p:cNvSpPr>
-          <p:nvPr>
-            <p:ph type="title"/>
-          </p:nvPr>
-        </p:nvSpPr>
-        <p:spPr/>
-        <p:txBody>
-          <a:bodyPr/>
-          <a:lstStyle/>
-          <a:p>
-            <a:r>
-              <a:rPr lang="sk-SK" dirty="0"/>
-              <a:t>Čitatelia - zapisovatelia</a:t>
-            </a:r>
-          </a:p>
-        </p:txBody>
-      </p:sp>
-      <p:sp>
-        <p:nvSpPr>
-          <p:cNvPr id="3" name="Zástupný objekt pre obsah 2">
-            <a:extLst>
-              <a:ext uri="{FF2B5EF4-FFF2-40B4-BE49-F238E27FC236}">
-                <a16:creationId xmlns:a16="http://schemas.microsoft.com/office/drawing/2014/main" id="{E229B1DD-E3D6-264C-8FF5-E95EDE172E32}"/>
-              </a:ext>
-            </a:extLst>
-          </p:cNvPr>
-          <p:cNvSpPr>
-            <a:spLocks noGrp="1"/>
-          </p:cNvSpPr>
-          <p:nvPr>
-            <p:ph idx="1"/>
-          </p:nvPr>
-        </p:nvSpPr>
-        <p:spPr/>
-        <p:txBody>
-          <a:bodyPr>
-            <a:normAutofit fontScale="77500" lnSpcReduction="20000"/>
-          </a:bodyPr>
-          <a:lstStyle/>
-          <a:p>
-            <a:pPr marL="0" indent="0">
-              <a:spcBef>
-                <a:spcPct val="50000"/>
-              </a:spcBef>
-              <a:buNone/>
-            </a:pPr>
-            <a:r>
-              <a:rPr lang="sk-SK" dirty="0"/>
-              <a:t>Čitateľ - zapisovateľ - najčastejšie uplatnenie v databázových systémoch</a:t>
-            </a:r>
-          </a:p>
-          <a:p>
-            <a:pPr>
-              <a:spcBef>
-                <a:spcPct val="50000"/>
-              </a:spcBef>
-            </a:pPr>
-            <a:endParaRPr lang="sk-SK" dirty="0"/>
-          </a:p>
-          <a:p>
-            <a:pPr marL="0" indent="0">
-              <a:spcBef>
-                <a:spcPct val="50000"/>
-              </a:spcBef>
-              <a:buNone/>
-            </a:pPr>
-            <a:r>
-              <a:rPr lang="sk-SK" dirty="0"/>
-              <a:t>Princíp </a:t>
-            </a:r>
-          </a:p>
-          <a:p>
-            <a:pPr marL="342900" indent="-342900">
-              <a:spcBef>
-                <a:spcPct val="50000"/>
-              </a:spcBef>
-            </a:pPr>
-            <a:r>
-              <a:rPr lang="sk-SK" dirty="0"/>
-              <a:t>n procesov nazývaných čitatelia s prístupom ku spoločnej dátovej štruktúre majú právo len čítať</a:t>
-            </a:r>
-          </a:p>
-          <a:p>
-            <a:pPr marL="342900" indent="-342900">
-              <a:spcBef>
-                <a:spcPct val="50000"/>
-              </a:spcBef>
-            </a:pPr>
-            <a:r>
-              <a:rPr lang="sk-SK" dirty="0"/>
-              <a:t> m procesov nazývaných zapisovatelia s prístupom ku spoločnej dátovej štruktúre majú právo len zapisovať</a:t>
-            </a:r>
-          </a:p>
-          <a:p>
-            <a:pPr marL="342900" indent="-342900">
-              <a:spcBef>
-                <a:spcPct val="50000"/>
-              </a:spcBef>
-            </a:pPr>
-            <a:r>
-              <a:rPr lang="sk-SK" dirty="0"/>
-              <a:t>je nutné procesy synchronizovať tak, aby operácie čítania mohli prebiehať súčasne, ale pritom musia byť vzájomne vylúčené s operáciou zápisu</a:t>
-            </a:r>
-          </a:p>
-          <a:p>
-            <a:pPr marL="342900" indent="-342900">
-              <a:spcBef>
-                <a:spcPct val="50000"/>
-              </a:spcBef>
-            </a:pPr>
-            <a:r>
-              <a:rPr lang="sk-SK" dirty="0"/>
-              <a:t>z operácií zápisu môže prebiehať v daný časový úsek len jedna (v </a:t>
-            </a:r>
-            <a:r>
-              <a:rPr lang="sk-SK" dirty="0" err="1"/>
-              <a:t>Petriho</a:t>
-            </a:r>
-            <a:r>
-              <a:rPr lang="sk-SK" dirty="0"/>
-              <a:t> sieti musí mať všetky bodky jedna operácia zápisu)</a:t>
-            </a:r>
-          </a:p>
-          <a:p>
-            <a:pPr marL="342900" indent="-342900">
-              <a:spcBef>
-                <a:spcPct val="50000"/>
-              </a:spcBef>
-            </a:pPr>
-            <a:r>
-              <a:rPr lang="sk-SK" dirty="0"/>
-              <a:t>model </a:t>
-            </a:r>
-            <a:r>
-              <a:rPr lang="sk-SK" dirty="0" err="1"/>
-              <a:t>Petriho</a:t>
-            </a:r>
-            <a:r>
-              <a:rPr lang="sk-SK" dirty="0"/>
-              <a:t> siete pre túto synchronizačnú úlohu viď obrázok</a:t>
-            </a:r>
-          </a:p>
-        </p:txBody>
-      </p:sp>
-      <p:sp>
-        <p:nvSpPr>
-          <p:cNvPr id="29699" name="Zástupný symbol čísla snímky 3"/>
-          <p:cNvSpPr>
-            <a:spLocks noGrp="1"/>
-          </p:cNvSpPr>
-          <p:nvPr>
-            <p:ph type="sldNum" sz="quarter" idx="12"/>
-          </p:nvPr>
-        </p:nvSpPr>
-        <p:spPr/>
-        <p:txBody>
-          <a:bodyPr/>
-          <a:lstStyle>
-            <a:lvl1pPr>
-              <a:defRPr sz="4000" b="1">
-                <a:solidFill>
-                  <a:schemeClr val="tx1"/>
-                </a:solidFill>
-                <a:latin typeface="Times New Roman" panose="02020603050405020304" pitchFamily="18" charset="0"/>
-              </a:defRPr>
-            </a:lvl1pPr>
-            <a:lvl2pPr marL="742950" indent="-285750">
-              <a:defRPr sz="4000" b="1">
-                <a:solidFill>
-                  <a:schemeClr val="tx1"/>
-                </a:solidFill>
-                <a:latin typeface="Times New Roman" panose="02020603050405020304" pitchFamily="18" charset="0"/>
-              </a:defRPr>
-            </a:lvl2pPr>
-            <a:lvl3pPr marL="1143000" indent="-228600">
-              <a:defRPr sz="4000" b="1">
-                <a:solidFill>
-                  <a:schemeClr val="tx1"/>
-                </a:solidFill>
-                <a:latin typeface="Times New Roman" panose="02020603050405020304" pitchFamily="18" charset="0"/>
-              </a:defRPr>
-            </a:lvl3pPr>
-            <a:lvl4pPr marL="1600200" indent="-228600">
-              <a:defRPr sz="4000" b="1">
-                <a:solidFill>
-                  <a:schemeClr val="tx1"/>
-                </a:solidFill>
-                <a:latin typeface="Times New Roman" panose="02020603050405020304" pitchFamily="18" charset="0"/>
-              </a:defRPr>
-            </a:lvl4pPr>
-            <a:lvl5pPr marL="2057400" indent="-228600">
-              <a:defRPr sz="4000" b="1">
-                <a:solidFill>
-                  <a:schemeClr val="tx1"/>
-                </a:solidFill>
-                <a:latin typeface="Times New Roman" panose="02020603050405020304" pitchFamily="18" charset="0"/>
-              </a:defRPr>
-            </a:lvl5pPr>
-            <a:lvl6pPr marL="2514600" indent="-228600" algn="ctr" eaLnBrk="0" fontAlgn="base" hangingPunct="0">
-              <a:spcBef>
-                <a:spcPct val="0"/>
-              </a:spcBef>
-              <a:spcAft>
-                <a:spcPct val="0"/>
-              </a:spcAft>
-              <a:defRPr sz="4000" b="1">
-                <a:solidFill>
-                  <a:schemeClr val="tx1"/>
-                </a:solidFill>
-                <a:latin typeface="Times New Roman" panose="02020603050405020304" pitchFamily="18" charset="0"/>
-              </a:defRPr>
-            </a:lvl6pPr>
-            <a:lvl7pPr marL="2971800" indent="-228600" algn="ctr" eaLnBrk="0" fontAlgn="base" hangingPunct="0">
-              <a:spcBef>
-                <a:spcPct val="0"/>
-              </a:spcBef>
-              <a:spcAft>
-                <a:spcPct val="0"/>
-              </a:spcAft>
-              <a:defRPr sz="4000" b="1">
-                <a:solidFill>
-                  <a:schemeClr val="tx1"/>
-                </a:solidFill>
-                <a:latin typeface="Times New Roman" panose="02020603050405020304" pitchFamily="18" charset="0"/>
-              </a:defRPr>
-            </a:lvl7pPr>
-            <a:lvl8pPr marL="3429000" indent="-228600" algn="ctr" eaLnBrk="0" fontAlgn="base" hangingPunct="0">
-              <a:spcBef>
-                <a:spcPct val="0"/>
-              </a:spcBef>
-              <a:spcAft>
-                <a:spcPct val="0"/>
-              </a:spcAft>
-              <a:defRPr sz="4000" b="1">
-                <a:solidFill>
-                  <a:schemeClr val="tx1"/>
-                </a:solidFill>
-                <a:latin typeface="Times New Roman" panose="02020603050405020304" pitchFamily="18" charset="0"/>
-              </a:defRPr>
-            </a:lvl8pPr>
-            <a:lvl9pPr marL="3886200" indent="-228600" algn="ctr" eaLnBrk="0" fontAlgn="base" hangingPunct="0">
-              <a:spcBef>
-                <a:spcPct val="0"/>
-              </a:spcBef>
-              <a:spcAft>
-                <a:spcPct val="0"/>
-              </a:spcAft>
-              <a:defRPr sz="4000" b="1">
-                <a:solidFill>
-                  <a:schemeClr val="tx1"/>
-                </a:solidFill>
-                <a:latin typeface="Times New Roman" panose="02020603050405020304" pitchFamily="18" charset="0"/>
-              </a:defRPr>
-            </a:lvl9pPr>
-          </a:lstStyle>
-          <a:p>
-            <a:fld id="{B71D5EF7-2928-42D6-8178-DB12634710D8}" type="slidenum">
-              <a:rPr lang="sk-SK" smtClean="0"/>
-              <a:pPr/>
-              <a:t>47</a:t>
-            </a:fld>
-            <a:endParaRPr lang="sk-SK" dirty="0"/>
-          </a:p>
-        </p:txBody>
-      </p:sp>
-    </p:spTree>
-    <p:extLst>
-      <p:ext uri="{BB962C8B-B14F-4D97-AF65-F5344CB8AC3E}">
-        <p14:creationId xmlns:p14="http://schemas.microsoft.com/office/powerpoint/2010/main" val="2886454487"/>
-      </p:ext>
-    </p:extLst>
-  </p:cSld>
-  <p:clrMapOvr>
-    <a:masterClrMapping/>
-  </p:clrMapOvr>
-</p:sld>
-</file>
-
 <file path=ppt/slides/slide48.xml><?xml version="1.0" encoding="utf-8"?>
 <p:sld xmlns:a="http://schemas.openxmlformats.org/drawingml/2006/main" xmlns:r="http://schemas.openxmlformats.org/officeDocument/2006/relationships" xmlns:p="http://schemas.openxmlformats.org/presentationml/2006/main">
   <p:cSld>
@@ -20513,6 +20236,312 @@
       </p:grpSpPr>
       <p:sp>
         <p:nvSpPr>
+          <p:cNvPr id="2" name="Nadpis 1">
+            <a:extLst>
+              <a:ext uri="{FF2B5EF4-FFF2-40B4-BE49-F238E27FC236}">
+                <a16:creationId xmlns:a16="http://schemas.microsoft.com/office/drawing/2014/main" id="{C4321BD9-639F-DA46-8A36-DBF0924A97BF}"/>
+              </a:ext>
+            </a:extLst>
+          </p:cNvPr>
+          <p:cNvSpPr>
+            <a:spLocks noGrp="1"/>
+          </p:cNvSpPr>
+          <p:nvPr>
+            <p:ph type="title"/>
+          </p:nvPr>
+        </p:nvSpPr>
+        <p:spPr/>
+        <p:txBody>
+          <a:bodyPr/>
+          <a:lstStyle/>
+          <a:p>
+            <a:r>
+              <a:rPr lang="sk-SK" dirty="0"/>
+              <a:t>Čitatelia - zapisovatelia</a:t>
+            </a:r>
+          </a:p>
+        </p:txBody>
+      </p:sp>
+      <p:sp>
+        <p:nvSpPr>
+          <p:cNvPr id="3" name="Zástupný objekt pre obsah 2">
+            <a:extLst>
+              <a:ext uri="{FF2B5EF4-FFF2-40B4-BE49-F238E27FC236}">
+                <a16:creationId xmlns:a16="http://schemas.microsoft.com/office/drawing/2014/main" id="{E229B1DD-E3D6-264C-8FF5-E95EDE172E32}"/>
+              </a:ext>
+            </a:extLst>
+          </p:cNvPr>
+          <p:cNvSpPr>
+            <a:spLocks noGrp="1"/>
+          </p:cNvSpPr>
+          <p:nvPr>
+            <p:ph idx="1"/>
+          </p:nvPr>
+        </p:nvSpPr>
+        <p:spPr/>
+        <p:txBody>
+          <a:bodyPr>
+            <a:normAutofit fontScale="77500" lnSpcReduction="20000"/>
+          </a:bodyPr>
+          <a:lstStyle/>
+          <a:p>
+            <a:pPr marL="0" indent="0">
+              <a:spcBef>
+                <a:spcPct val="50000"/>
+              </a:spcBef>
+              <a:buNone/>
+            </a:pPr>
+            <a:r>
+              <a:rPr lang="sk-SK" dirty="0"/>
+              <a:t>Čitateľ - zapisovateľ - najčastejšie uplatnenie v databázových systémoch</a:t>
+            </a:r>
+          </a:p>
+          <a:p>
+            <a:pPr>
+              <a:spcBef>
+                <a:spcPct val="50000"/>
+              </a:spcBef>
+            </a:pPr>
+            <a:endParaRPr lang="sk-SK" dirty="0"/>
+          </a:p>
+          <a:p>
+            <a:pPr marL="0" indent="0">
+              <a:spcBef>
+                <a:spcPct val="50000"/>
+              </a:spcBef>
+              <a:buNone/>
+            </a:pPr>
+            <a:r>
+              <a:rPr lang="sk-SK" dirty="0"/>
+              <a:t>Princíp </a:t>
+            </a:r>
+          </a:p>
+          <a:p>
+            <a:pPr marL="342900" indent="-342900">
+              <a:spcBef>
+                <a:spcPct val="50000"/>
+              </a:spcBef>
+            </a:pPr>
+            <a:r>
+              <a:rPr lang="sk-SK" dirty="0"/>
+              <a:t>n procesov nazývaných čitatelia s prístupom ku spoločnej dátovej štruktúre majú právo len čítať</a:t>
+            </a:r>
+          </a:p>
+          <a:p>
+            <a:pPr marL="342900" indent="-342900">
+              <a:spcBef>
+                <a:spcPct val="50000"/>
+              </a:spcBef>
+            </a:pPr>
+            <a:r>
+              <a:rPr lang="sk-SK" dirty="0"/>
+              <a:t> m procesov nazývaných zapisovatelia s prístupom ku spoločnej dátovej štruktúre majú právo len zapisovať</a:t>
+            </a:r>
+          </a:p>
+          <a:p>
+            <a:pPr marL="342900" indent="-342900">
+              <a:spcBef>
+                <a:spcPct val="50000"/>
+              </a:spcBef>
+            </a:pPr>
+            <a:r>
+              <a:rPr lang="sk-SK" dirty="0"/>
+              <a:t>je nutné procesy synchronizovať tak, aby operácie čítania mohli prebiehať súčasne, ale pritom musia byť vzájomne vylúčené s operáciou zápisu</a:t>
+            </a:r>
+          </a:p>
+          <a:p>
+            <a:pPr marL="342900" indent="-342900">
+              <a:spcBef>
+                <a:spcPct val="50000"/>
+              </a:spcBef>
+            </a:pPr>
+            <a:r>
+              <a:rPr lang="sk-SK" dirty="0"/>
+              <a:t>z operácií zápisu môže prebiehať v daný časový úsek len jedna (v </a:t>
+            </a:r>
+            <a:r>
+              <a:rPr lang="sk-SK" dirty="0" err="1"/>
+              <a:t>Petriho</a:t>
+            </a:r>
+            <a:r>
+              <a:rPr lang="sk-SK" dirty="0"/>
+              <a:t> sieti musí mať všetky bodky jedna operácia zápisu)</a:t>
+            </a:r>
+          </a:p>
+          <a:p>
+            <a:pPr marL="342900" indent="-342900">
+              <a:spcBef>
+                <a:spcPct val="50000"/>
+              </a:spcBef>
+            </a:pPr>
+            <a:r>
+              <a:rPr lang="sk-SK" dirty="0"/>
+              <a:t>model </a:t>
+            </a:r>
+            <a:r>
+              <a:rPr lang="sk-SK" dirty="0" err="1"/>
+              <a:t>Petriho</a:t>
+            </a:r>
+            <a:r>
+              <a:rPr lang="sk-SK" dirty="0"/>
+              <a:t> siete pre túto synchronizačnú úlohu viď obrázok</a:t>
+            </a:r>
+          </a:p>
+        </p:txBody>
+      </p:sp>
+      <p:sp>
+        <p:nvSpPr>
+          <p:cNvPr id="29699" name="Zástupný symbol čísla snímky 3"/>
+          <p:cNvSpPr>
+            <a:spLocks noGrp="1"/>
+          </p:cNvSpPr>
+          <p:nvPr>
+            <p:ph type="sldNum" sz="quarter" idx="12"/>
+          </p:nvPr>
+        </p:nvSpPr>
+        <p:spPr/>
+        <p:txBody>
+          <a:bodyPr/>
+          <a:lstStyle>
+            <a:lvl1pPr>
+              <a:defRPr sz="4000" b="1">
+                <a:solidFill>
+                  <a:schemeClr val="tx1"/>
+                </a:solidFill>
+                <a:latin typeface="Times New Roman" panose="02020603050405020304" pitchFamily="18" charset="0"/>
+              </a:defRPr>
+            </a:lvl1pPr>
+            <a:lvl2pPr marL="742950" indent="-285750">
+              <a:defRPr sz="4000" b="1">
+                <a:solidFill>
+                  <a:schemeClr val="tx1"/>
+                </a:solidFill>
+                <a:latin typeface="Times New Roman" panose="02020603050405020304" pitchFamily="18" charset="0"/>
+              </a:defRPr>
+            </a:lvl2pPr>
+            <a:lvl3pPr marL="1143000" indent="-228600">
+              <a:defRPr sz="4000" b="1">
+                <a:solidFill>
+                  <a:schemeClr val="tx1"/>
+                </a:solidFill>
+                <a:latin typeface="Times New Roman" panose="02020603050405020304" pitchFamily="18" charset="0"/>
+              </a:defRPr>
+            </a:lvl3pPr>
+            <a:lvl4pPr marL="1600200" indent="-228600">
+              <a:defRPr sz="4000" b="1">
+                <a:solidFill>
+                  <a:schemeClr val="tx1"/>
+                </a:solidFill>
+                <a:latin typeface="Times New Roman" panose="02020603050405020304" pitchFamily="18" charset="0"/>
+              </a:defRPr>
+            </a:lvl4pPr>
+            <a:lvl5pPr marL="2057400" indent="-228600">
+              <a:defRPr sz="4000" b="1">
+                <a:solidFill>
+                  <a:schemeClr val="tx1"/>
+                </a:solidFill>
+                <a:latin typeface="Times New Roman" panose="02020603050405020304" pitchFamily="18" charset="0"/>
+              </a:defRPr>
+            </a:lvl5pPr>
+            <a:lvl6pPr marL="2514600" indent="-228600" algn="ctr" eaLnBrk="0" fontAlgn="base" hangingPunct="0">
+              <a:spcBef>
+                <a:spcPct val="0"/>
+              </a:spcBef>
+              <a:spcAft>
+                <a:spcPct val="0"/>
+              </a:spcAft>
+              <a:defRPr sz="4000" b="1">
+                <a:solidFill>
+                  <a:schemeClr val="tx1"/>
+                </a:solidFill>
+                <a:latin typeface="Times New Roman" panose="02020603050405020304" pitchFamily="18" charset="0"/>
+              </a:defRPr>
+            </a:lvl6pPr>
+            <a:lvl7pPr marL="2971800" indent="-228600" algn="ctr" eaLnBrk="0" fontAlgn="base" hangingPunct="0">
+              <a:spcBef>
+                <a:spcPct val="0"/>
+              </a:spcBef>
+              <a:spcAft>
+                <a:spcPct val="0"/>
+              </a:spcAft>
+              <a:defRPr sz="4000" b="1">
+                <a:solidFill>
+                  <a:schemeClr val="tx1"/>
+                </a:solidFill>
+                <a:latin typeface="Times New Roman" panose="02020603050405020304" pitchFamily="18" charset="0"/>
+              </a:defRPr>
+            </a:lvl7pPr>
+            <a:lvl8pPr marL="3429000" indent="-228600" algn="ctr" eaLnBrk="0" fontAlgn="base" hangingPunct="0">
+              <a:spcBef>
+                <a:spcPct val="0"/>
+              </a:spcBef>
+              <a:spcAft>
+                <a:spcPct val="0"/>
+              </a:spcAft>
+              <a:defRPr sz="4000" b="1">
+                <a:solidFill>
+                  <a:schemeClr val="tx1"/>
+                </a:solidFill>
+                <a:latin typeface="Times New Roman" panose="02020603050405020304" pitchFamily="18" charset="0"/>
+              </a:defRPr>
+            </a:lvl8pPr>
+            <a:lvl9pPr marL="3886200" indent="-228600" algn="ctr" eaLnBrk="0" fontAlgn="base" hangingPunct="0">
+              <a:spcBef>
+                <a:spcPct val="0"/>
+              </a:spcBef>
+              <a:spcAft>
+                <a:spcPct val="0"/>
+              </a:spcAft>
+              <a:defRPr sz="4000" b="1">
+                <a:solidFill>
+                  <a:schemeClr val="tx1"/>
+                </a:solidFill>
+                <a:latin typeface="Times New Roman" panose="02020603050405020304" pitchFamily="18" charset="0"/>
+              </a:defRPr>
+            </a:lvl9pPr>
+          </a:lstStyle>
+          <a:p>
+            <a:fld id="{B71D5EF7-2928-42D6-8178-DB12634710D8}" type="slidenum">
+              <a:rPr lang="sk-SK" smtClean="0"/>
+              <a:pPr/>
+              <a:t>48</a:t>
+            </a:fld>
+            <a:endParaRPr lang="sk-SK" dirty="0"/>
+          </a:p>
+        </p:txBody>
+      </p:sp>
+    </p:spTree>
+    <p:extLst>
+      <p:ext uri="{BB962C8B-B14F-4D97-AF65-F5344CB8AC3E}">
+        <p14:creationId xmlns:p14="http://schemas.microsoft.com/office/powerpoint/2010/main" val="2886454487"/>
+      </p:ext>
+    </p:extLst>
+  </p:cSld>
+  <p:clrMapOvr>
+    <a:masterClrMapping/>
+  </p:clrMapOvr>
+</p:sld>
+</file>
+
+<file path=ppt/slides/slide49.xml><?xml version="1.0" encoding="utf-8"?>
+<p:sld xmlns:a="http://schemas.openxmlformats.org/drawingml/2006/main" xmlns:r="http://schemas.openxmlformats.org/officeDocument/2006/relationships" xmlns:p="http://schemas.openxmlformats.org/presentationml/2006/main">
+  <p:cSld>
+    <p:spTree>
+      <p:nvGrpSpPr>
+        <p:cNvPr id="1" name=""/>
+        <p:cNvGrpSpPr/>
+        <p:nvPr/>
+      </p:nvGrpSpPr>
+      <p:grpSpPr>
+        <a:xfrm>
+          <a:off x="0" y="0"/>
+          <a:ext cx="0" cy="0"/>
+          <a:chOff x="0" y="0"/>
+          <a:chExt cx="0" cy="0"/>
+        </a:xfrm>
+      </p:grpSpPr>
+      <p:sp>
+        <p:nvSpPr>
           <p:cNvPr id="30723" name="Zástupný symbol čísla snímky 3"/>
           <p:cNvSpPr>
             <a:spLocks noGrp="1"/>
@@ -20648,7 +20677,7 @@
             <a:fld id="{27ACBB4B-1B2D-4674-893F-F3ED6B24E411}" type="slidenum">
               <a:rPr lang="sk-SK" sz="1400" b="0"/>
               <a:pPr/>
-              <a:t>48</a:t>
+              <a:t>49</a:t>
             </a:fld>
             <a:endParaRPr lang="sk-SK" sz="1400" b="0"/>
           </a:p>
@@ -21262,289 +21291,6 @@
 </p:sld>
 </file>
 
-<file path=ppt/slides/slide49.xml><?xml version="1.0" encoding="utf-8"?>
-<p:sld xmlns:a="http://schemas.openxmlformats.org/drawingml/2006/main" xmlns:r="http://schemas.openxmlformats.org/officeDocument/2006/relationships" xmlns:p="http://schemas.openxmlformats.org/presentationml/2006/main">
-  <p:cSld>
-    <p:spTree>
-      <p:nvGrpSpPr>
-        <p:cNvPr id="1" name=""/>
-        <p:cNvGrpSpPr/>
-        <p:nvPr/>
-      </p:nvGrpSpPr>
-      <p:grpSpPr>
-        <a:xfrm>
-          <a:off x="0" y="0"/>
-          <a:ext cx="0" cy="0"/>
-          <a:chOff x="0" y="0"/>
-          <a:chExt cx="0" cy="0"/>
-        </a:xfrm>
-      </p:grpSpPr>
-      <p:sp>
-        <p:nvSpPr>
-          <p:cNvPr id="2" name="Nadpis 1">
-            <a:extLst>
-              <a:ext uri="{FF2B5EF4-FFF2-40B4-BE49-F238E27FC236}">
-                <a16:creationId xmlns:a16="http://schemas.microsoft.com/office/drawing/2014/main" id="{156B7AE6-1A2D-6A47-A02A-38C6D94DF938}"/>
-              </a:ext>
-            </a:extLst>
-          </p:cNvPr>
-          <p:cNvSpPr>
-            <a:spLocks noGrp="1"/>
-          </p:cNvSpPr>
-          <p:nvPr>
-            <p:ph type="title"/>
-          </p:nvPr>
-        </p:nvSpPr>
-        <p:spPr/>
-        <p:txBody>
-          <a:bodyPr/>
-          <a:lstStyle/>
-          <a:p>
-            <a:r>
-              <a:rPr lang="sk-SK" dirty="0"/>
-              <a:t>Súbeh  (</a:t>
-            </a:r>
-            <a:r>
-              <a:rPr lang="sk-SK" dirty="0" err="1"/>
-              <a:t>rendez</a:t>
-            </a:r>
-            <a:r>
-              <a:rPr lang="sk-SK" dirty="0"/>
-              <a:t> - </a:t>
-            </a:r>
-            <a:r>
-              <a:rPr lang="sk-SK" dirty="0" err="1"/>
-              <a:t>vous</a:t>
-            </a:r>
-            <a:r>
-              <a:rPr lang="sk-SK" dirty="0"/>
-              <a:t>)</a:t>
-            </a:r>
-          </a:p>
-        </p:txBody>
-      </p:sp>
-      <p:sp>
-        <p:nvSpPr>
-          <p:cNvPr id="3" name="Zástupný objekt pre obsah 2">
-            <a:extLst>
-              <a:ext uri="{FF2B5EF4-FFF2-40B4-BE49-F238E27FC236}">
-                <a16:creationId xmlns:a16="http://schemas.microsoft.com/office/drawing/2014/main" id="{B2E2E4CF-5E07-BE4D-ACCA-506417D25406}"/>
-              </a:ext>
-            </a:extLst>
-          </p:cNvPr>
-          <p:cNvSpPr>
-            <a:spLocks noGrp="1"/>
-          </p:cNvSpPr>
-          <p:nvPr>
-            <p:ph idx="1"/>
-          </p:nvPr>
-        </p:nvSpPr>
-        <p:spPr/>
-        <p:txBody>
-          <a:bodyPr/>
-          <a:lstStyle/>
-          <a:p>
-            <a:pPr>
-              <a:spcBef>
-                <a:spcPct val="50000"/>
-              </a:spcBef>
-            </a:pPr>
-            <a:r>
-              <a:rPr lang="sk-SK" dirty="0"/>
-              <a:t>Súbeh - najčastejšie sa vyskytuje u </a:t>
-            </a:r>
-            <a:r>
-              <a:rPr lang="sk-SK" dirty="0" err="1"/>
-              <a:t>paral.procesoch</a:t>
-            </a:r>
-            <a:r>
-              <a:rPr lang="sk-SK" dirty="0"/>
-              <a:t>, ktoré prebiehajú v distribuovanom prostredí </a:t>
-            </a:r>
-          </a:p>
-          <a:p>
-            <a:pPr>
-              <a:spcBef>
-                <a:spcPct val="50000"/>
-              </a:spcBef>
-            </a:pPr>
-            <a:r>
-              <a:rPr lang="sk-SK" dirty="0"/>
-              <a:t>Princíp - spoločné prevedenie určitého úseku programu dvomi procesmi</a:t>
-            </a:r>
-          </a:p>
-          <a:p>
-            <a:pPr>
-              <a:spcBef>
-                <a:spcPct val="50000"/>
-              </a:spcBef>
-            </a:pPr>
-            <a:r>
-              <a:rPr lang="sk-SK" dirty="0"/>
-              <a:t>nastáva nutnosť synchronizovať procesy tak, aby pred spoločným úsekom počkal jeden proces na príchod druhého</a:t>
-            </a:r>
-          </a:p>
-          <a:p>
-            <a:endParaRPr lang="sk-SK" dirty="0"/>
-          </a:p>
-        </p:txBody>
-      </p:sp>
-      <p:sp>
-        <p:nvSpPr>
-          <p:cNvPr id="31747" name="Zástupný symbol čísla snímky 3"/>
-          <p:cNvSpPr>
-            <a:spLocks noGrp="1"/>
-          </p:cNvSpPr>
-          <p:nvPr>
-            <p:ph type="sldNum" sz="quarter" idx="12"/>
-          </p:nvPr>
-        </p:nvSpPr>
-        <p:spPr>
-          <a:noFill/>
-          <a:ln/>
-          <a:extLst>
-            <a:ext uri="{909E8E84-426E-40DD-AFC4-6F175D3DCCD1}">
-              <a14:hiddenFill xmlns:a14="http://schemas.microsoft.com/office/drawing/2010/main">
-                <a:solidFill>
-                  <a:srgbClr val="FFFFFF"/>
-                </a:solidFill>
-              </a14:hiddenFill>
-            </a:ext>
-            <a:ext uri="{91240B29-F687-4F45-9708-019B960494DF}">
-              <a14:hiddenLine xmlns:a14="http://schemas.microsoft.com/office/drawing/2010/main" w="9525">
-                <a:solidFill>
-                  <a:srgbClr val="000000"/>
-                </a:solidFill>
-                <a:miter lim="800000"/>
-                <a:headEnd/>
-                <a:tailEnd/>
-              </a14:hiddenLine>
-            </a:ext>
-          </a:extLst>
-        </p:spPr>
-        <p:txBody>
-          <a:bodyPr/>
-          <a:lstStyle>
-            <a:lvl1pPr>
-              <a:defRPr sz="4000" b="1">
-                <a:solidFill>
-                  <a:schemeClr val="tx1"/>
-                </a:solidFill>
-                <a:latin typeface="Times New Roman" panose="02020603050405020304" pitchFamily="18" charset="0"/>
-              </a:defRPr>
-            </a:lvl1pPr>
-            <a:lvl2pPr marL="742950" indent="-285750">
-              <a:defRPr sz="4000" b="1">
-                <a:solidFill>
-                  <a:schemeClr val="tx1"/>
-                </a:solidFill>
-                <a:latin typeface="Times New Roman" panose="02020603050405020304" pitchFamily="18" charset="0"/>
-              </a:defRPr>
-            </a:lvl2pPr>
-            <a:lvl3pPr marL="1143000" indent="-228600">
-              <a:defRPr sz="4000" b="1">
-                <a:solidFill>
-                  <a:schemeClr val="tx1"/>
-                </a:solidFill>
-                <a:latin typeface="Times New Roman" panose="02020603050405020304" pitchFamily="18" charset="0"/>
-              </a:defRPr>
-            </a:lvl3pPr>
-            <a:lvl4pPr marL="1600200" indent="-228600">
-              <a:defRPr sz="4000" b="1">
-                <a:solidFill>
-                  <a:schemeClr val="tx1"/>
-                </a:solidFill>
-                <a:latin typeface="Times New Roman" panose="02020603050405020304" pitchFamily="18" charset="0"/>
-              </a:defRPr>
-            </a:lvl4pPr>
-            <a:lvl5pPr marL="2057400" indent="-228600">
-              <a:defRPr sz="4000" b="1">
-                <a:solidFill>
-                  <a:schemeClr val="tx1"/>
-                </a:solidFill>
-                <a:latin typeface="Times New Roman" panose="02020603050405020304" pitchFamily="18" charset="0"/>
-              </a:defRPr>
-            </a:lvl5pPr>
-            <a:lvl6pPr marL="2514600" indent="-228600" algn="ctr" eaLnBrk="0" fontAlgn="base" hangingPunct="0">
-              <a:spcBef>
-                <a:spcPct val="0"/>
-              </a:spcBef>
-              <a:spcAft>
-                <a:spcPct val="0"/>
-              </a:spcAft>
-              <a:defRPr sz="4000" b="1">
-                <a:solidFill>
-                  <a:schemeClr val="tx1"/>
-                </a:solidFill>
-                <a:latin typeface="Times New Roman" panose="02020603050405020304" pitchFamily="18" charset="0"/>
-              </a:defRPr>
-            </a:lvl6pPr>
-            <a:lvl7pPr marL="2971800" indent="-228600" algn="ctr" eaLnBrk="0" fontAlgn="base" hangingPunct="0">
-              <a:spcBef>
-                <a:spcPct val="0"/>
-              </a:spcBef>
-              <a:spcAft>
-                <a:spcPct val="0"/>
-              </a:spcAft>
-              <a:defRPr sz="4000" b="1">
-                <a:solidFill>
-                  <a:schemeClr val="tx1"/>
-                </a:solidFill>
-                <a:latin typeface="Times New Roman" panose="02020603050405020304" pitchFamily="18" charset="0"/>
-              </a:defRPr>
-            </a:lvl7pPr>
-            <a:lvl8pPr marL="3429000" indent="-228600" algn="ctr" eaLnBrk="0" fontAlgn="base" hangingPunct="0">
-              <a:spcBef>
-                <a:spcPct val="0"/>
-              </a:spcBef>
-              <a:spcAft>
-                <a:spcPct val="0"/>
-              </a:spcAft>
-              <a:defRPr sz="4000" b="1">
-                <a:solidFill>
-                  <a:schemeClr val="tx1"/>
-                </a:solidFill>
-                <a:latin typeface="Times New Roman" panose="02020603050405020304" pitchFamily="18" charset="0"/>
-              </a:defRPr>
-            </a:lvl8pPr>
-            <a:lvl9pPr marL="3886200" indent="-228600" algn="ctr" eaLnBrk="0" fontAlgn="base" hangingPunct="0">
-              <a:spcBef>
-                <a:spcPct val="0"/>
-              </a:spcBef>
-              <a:spcAft>
-                <a:spcPct val="0"/>
-              </a:spcAft>
-              <a:defRPr sz="4000" b="1">
-                <a:solidFill>
-                  <a:schemeClr val="tx1"/>
-                </a:solidFill>
-                <a:latin typeface="Times New Roman" panose="02020603050405020304" pitchFamily="18" charset="0"/>
-              </a:defRPr>
-            </a:lvl9pPr>
-          </a:lstStyle>
-          <a:p>
-            <a:fld id="{0AA7EE5A-377A-4315-98FF-452E3B756F74}" type="slidenum">
-              <a:rPr lang="sk-SK" sz="1400" b="0"/>
-              <a:pPr/>
-              <a:t>49</a:t>
-            </a:fld>
-            <a:endParaRPr lang="sk-SK" sz="1400" b="0"/>
-          </a:p>
-        </p:txBody>
-      </p:sp>
-    </p:spTree>
-    <p:extLst>
-      <p:ext uri="{BB962C8B-B14F-4D97-AF65-F5344CB8AC3E}">
-        <p14:creationId xmlns:p14="http://schemas.microsoft.com/office/powerpoint/2010/main" val="729735244"/>
-      </p:ext>
-    </p:extLst>
-  </p:cSld>
-  <p:clrMapOvr>
-    <a:masterClrMapping/>
-  </p:clrMapOvr>
-</p:sld>
-</file>
-
 <file path=ppt/slides/slide5.xml><?xml version="1.0" encoding="utf-8"?>
 <p:sld xmlns:a="http://schemas.openxmlformats.org/drawingml/2006/main" xmlns:r="http://schemas.openxmlformats.org/officeDocument/2006/relationships" xmlns:p="http://schemas.openxmlformats.org/presentationml/2006/main">
   <p:cSld>
@@ -21934,7 +21680,117 @@
       </p:grpSpPr>
       <p:sp>
         <p:nvSpPr>
-          <p:cNvPr id="32771" name="Zástupný symbol čísla snímky 3"/>
+          <p:cNvPr id="2" name="Nadpis 1">
+            <a:extLst>
+              <a:ext uri="{FF2B5EF4-FFF2-40B4-BE49-F238E27FC236}">
+                <a16:creationId xmlns:a16="http://schemas.microsoft.com/office/drawing/2014/main" id="{156B7AE6-1A2D-6A47-A02A-38C6D94DF938}"/>
+              </a:ext>
+            </a:extLst>
+          </p:cNvPr>
+          <p:cNvSpPr>
+            <a:spLocks noGrp="1"/>
+          </p:cNvSpPr>
+          <p:nvPr>
+            <p:ph type="title"/>
+          </p:nvPr>
+        </p:nvSpPr>
+        <p:spPr/>
+        <p:txBody>
+          <a:bodyPr/>
+          <a:lstStyle/>
+          <a:p>
+            <a:r>
+              <a:rPr lang="sk-SK" dirty="0"/>
+              <a:t>Súbeh  (</a:t>
+            </a:r>
+            <a:r>
+              <a:rPr lang="sk-SK" dirty="0" err="1"/>
+              <a:t>rendez</a:t>
+            </a:r>
+            <a:r>
+              <a:rPr lang="sk-SK" dirty="0"/>
+              <a:t> - </a:t>
+            </a:r>
+            <a:r>
+              <a:rPr lang="sk-SK" dirty="0" err="1"/>
+              <a:t>vous</a:t>
+            </a:r>
+            <a:r>
+              <a:rPr lang="sk-SK" dirty="0"/>
+              <a:t>)</a:t>
+            </a:r>
+          </a:p>
+        </p:txBody>
+      </p:sp>
+      <p:sp>
+        <p:nvSpPr>
+          <p:cNvPr id="3" name="Zástupný objekt pre obsah 2">
+            <a:extLst>
+              <a:ext uri="{FF2B5EF4-FFF2-40B4-BE49-F238E27FC236}">
+                <a16:creationId xmlns:a16="http://schemas.microsoft.com/office/drawing/2014/main" id="{B2E2E4CF-5E07-BE4D-ACCA-506417D25406}"/>
+              </a:ext>
+            </a:extLst>
+          </p:cNvPr>
+          <p:cNvSpPr>
+            <a:spLocks noGrp="1"/>
+          </p:cNvSpPr>
+          <p:nvPr>
+            <p:ph idx="1"/>
+          </p:nvPr>
+        </p:nvSpPr>
+        <p:spPr/>
+        <p:txBody>
+          <a:bodyPr/>
+          <a:lstStyle/>
+          <a:p>
+            <a:pPr>
+              <a:spcBef>
+                <a:spcPct val="50000"/>
+              </a:spcBef>
+            </a:pPr>
+            <a:r>
+              <a:rPr lang="sk-SK" dirty="0"/>
+              <a:t>Súbeh - najčastejšie sa vyskytuje u </a:t>
+            </a:r>
+            <a:r>
+              <a:rPr lang="sk-SK" dirty="0" err="1"/>
+              <a:t>paral.procesoch</a:t>
+            </a:r>
+            <a:r>
+              <a:rPr lang="sk-SK" dirty="0"/>
+              <a:t>, ktoré prebiehajú v distribuovanom prostredí </a:t>
+            </a:r>
+          </a:p>
+          <a:p>
+            <a:pPr>
+              <a:spcBef>
+                <a:spcPct val="50000"/>
+              </a:spcBef>
+            </a:pPr>
+            <a:r>
+              <a:rPr lang="sk-SK" dirty="0"/>
+              <a:t>Princíp - spoločné prevedenie určitého úseku programu dvomi procesmi</a:t>
+            </a:r>
+          </a:p>
+          <a:p>
+            <a:pPr>
+              <a:spcBef>
+                <a:spcPct val="50000"/>
+              </a:spcBef>
+            </a:pPr>
+            <a:r>
+              <a:rPr lang="sk-SK" dirty="0"/>
+              <a:t>nastáva nutnosť synchronizovať procesy tak, aby pred spoločným úsekom počkal jeden proces na príchod druhého</a:t>
+            </a:r>
+          </a:p>
+          <a:p>
+            <a:endParaRPr lang="sk-SK" dirty="0"/>
+          </a:p>
+        </p:txBody>
+      </p:sp>
+      <p:sp>
+        <p:nvSpPr>
+          <p:cNvPr id="31747" name="Zástupný symbol čísla snímky 3"/>
           <p:cNvSpPr>
             <a:spLocks noGrp="1"/>
           </p:cNvSpPr>
@@ -22066,10 +21922,183 @@
             </a:lvl9pPr>
           </a:lstStyle>
           <a:p>
+            <a:fld id="{0AA7EE5A-377A-4315-98FF-452E3B756F74}" type="slidenum">
+              <a:rPr lang="sk-SK" sz="1400" b="0"/>
+              <a:pPr/>
+              <a:t>50</a:t>
+            </a:fld>
+            <a:endParaRPr lang="sk-SK" sz="1400" b="0"/>
+          </a:p>
+        </p:txBody>
+      </p:sp>
+    </p:spTree>
+    <p:extLst>
+      <p:ext uri="{BB962C8B-B14F-4D97-AF65-F5344CB8AC3E}">
+        <p14:creationId xmlns:p14="http://schemas.microsoft.com/office/powerpoint/2010/main" val="729735244"/>
+      </p:ext>
+    </p:extLst>
+  </p:cSld>
+  <p:clrMapOvr>
+    <a:masterClrMapping/>
+  </p:clrMapOvr>
+</p:sld>
+</file>
+
+<file path=ppt/slides/slide51.xml><?xml version="1.0" encoding="utf-8"?>
+<p:sld xmlns:a="http://schemas.openxmlformats.org/drawingml/2006/main" xmlns:r="http://schemas.openxmlformats.org/officeDocument/2006/relationships" xmlns:p="http://schemas.openxmlformats.org/presentationml/2006/main">
+  <p:cSld>
+    <p:spTree>
+      <p:nvGrpSpPr>
+        <p:cNvPr id="1" name=""/>
+        <p:cNvGrpSpPr/>
+        <p:nvPr/>
+      </p:nvGrpSpPr>
+      <p:grpSpPr>
+        <a:xfrm>
+          <a:off x="0" y="0"/>
+          <a:ext cx="0" cy="0"/>
+          <a:chOff x="0" y="0"/>
+          <a:chExt cx="0" cy="0"/>
+        </a:xfrm>
+      </p:grpSpPr>
+      <p:sp>
+        <p:nvSpPr>
+          <p:cNvPr id="32771" name="Zástupný symbol čísla snímky 3"/>
+          <p:cNvSpPr>
+            <a:spLocks noGrp="1"/>
+          </p:cNvSpPr>
+          <p:nvPr>
+            <p:ph type="sldNum" sz="quarter" idx="12"/>
+          </p:nvPr>
+        </p:nvSpPr>
+        <p:spPr>
+          <a:noFill/>
+          <a:ln/>
+          <a:extLst>
+            <a:ext uri="{909E8E84-426E-40DD-AFC4-6F175D3DCCD1}">
+              <a14:hiddenFill xmlns:a14="http://schemas.microsoft.com/office/drawing/2010/main">
+                <a:solidFill>
+                  <a:srgbClr val="FFFFFF"/>
+                </a:solidFill>
+              </a14:hiddenFill>
+            </a:ext>
+            <a:ext uri="{91240B29-F687-4F45-9708-019B960494DF}">
+              <a14:hiddenLine xmlns:a14="http://schemas.microsoft.com/office/drawing/2010/main" w="9525">
+                <a:solidFill>
+                  <a:srgbClr val="000000"/>
+                </a:solidFill>
+                <a:miter lim="800000"/>
+                <a:headEnd/>
+                <a:tailEnd/>
+              </a14:hiddenLine>
+            </a:ext>
+          </a:extLst>
+        </p:spPr>
+        <p:txBody>
+          <a:bodyPr/>
+          <a:lstStyle>
+            <a:lvl1pPr>
+              <a:defRPr sz="4000" b="1">
+                <a:solidFill>
+                  <a:schemeClr val="tx1"/>
+                </a:solidFill>
+                <a:latin typeface="Times New Roman" panose="02020603050405020304" pitchFamily="18" charset="0"/>
+              </a:defRPr>
+            </a:lvl1pPr>
+            <a:lvl2pPr marL="742950" indent="-285750">
+              <a:defRPr sz="4000" b="1">
+                <a:solidFill>
+                  <a:schemeClr val="tx1"/>
+                </a:solidFill>
+                <a:latin typeface="Times New Roman" panose="02020603050405020304" pitchFamily="18" charset="0"/>
+              </a:defRPr>
+            </a:lvl2pPr>
+            <a:lvl3pPr marL="1143000" indent="-228600">
+              <a:defRPr sz="4000" b="1">
+                <a:solidFill>
+                  <a:schemeClr val="tx1"/>
+                </a:solidFill>
+                <a:latin typeface="Times New Roman" panose="02020603050405020304" pitchFamily="18" charset="0"/>
+              </a:defRPr>
+            </a:lvl3pPr>
+            <a:lvl4pPr marL="1600200" indent="-228600">
+              <a:defRPr sz="4000" b="1">
+                <a:solidFill>
+                  <a:schemeClr val="tx1"/>
+                </a:solidFill>
+                <a:latin typeface="Times New Roman" panose="02020603050405020304" pitchFamily="18" charset="0"/>
+              </a:defRPr>
+            </a:lvl4pPr>
+            <a:lvl5pPr marL="2057400" indent="-228600">
+              <a:defRPr sz="4000" b="1">
+                <a:solidFill>
+                  <a:schemeClr val="tx1"/>
+                </a:solidFill>
+                <a:latin typeface="Times New Roman" panose="02020603050405020304" pitchFamily="18" charset="0"/>
+              </a:defRPr>
+            </a:lvl5pPr>
+            <a:lvl6pPr marL="2514600" indent="-228600" algn="ctr" eaLnBrk="0" fontAlgn="base" hangingPunct="0">
+              <a:spcBef>
+                <a:spcPct val="0"/>
+              </a:spcBef>
+              <a:spcAft>
+                <a:spcPct val="0"/>
+              </a:spcAft>
+              <a:defRPr sz="4000" b="1">
+                <a:solidFill>
+                  <a:schemeClr val="tx1"/>
+                </a:solidFill>
+                <a:latin typeface="Times New Roman" panose="02020603050405020304" pitchFamily="18" charset="0"/>
+              </a:defRPr>
+            </a:lvl6pPr>
+            <a:lvl7pPr marL="2971800" indent="-228600" algn="ctr" eaLnBrk="0" fontAlgn="base" hangingPunct="0">
+              <a:spcBef>
+                <a:spcPct val="0"/>
+              </a:spcBef>
+              <a:spcAft>
+                <a:spcPct val="0"/>
+              </a:spcAft>
+              <a:defRPr sz="4000" b="1">
+                <a:solidFill>
+                  <a:schemeClr val="tx1"/>
+                </a:solidFill>
+                <a:latin typeface="Times New Roman" panose="02020603050405020304" pitchFamily="18" charset="0"/>
+              </a:defRPr>
+            </a:lvl7pPr>
+            <a:lvl8pPr marL="3429000" indent="-228600" algn="ctr" eaLnBrk="0" fontAlgn="base" hangingPunct="0">
+              <a:spcBef>
+                <a:spcPct val="0"/>
+              </a:spcBef>
+              <a:spcAft>
+                <a:spcPct val="0"/>
+              </a:spcAft>
+              <a:defRPr sz="4000" b="1">
+                <a:solidFill>
+                  <a:schemeClr val="tx1"/>
+                </a:solidFill>
+                <a:latin typeface="Times New Roman" panose="02020603050405020304" pitchFamily="18" charset="0"/>
+              </a:defRPr>
+            </a:lvl8pPr>
+            <a:lvl9pPr marL="3886200" indent="-228600" algn="ctr" eaLnBrk="0" fontAlgn="base" hangingPunct="0">
+              <a:spcBef>
+                <a:spcPct val="0"/>
+              </a:spcBef>
+              <a:spcAft>
+                <a:spcPct val="0"/>
+              </a:spcAft>
+              <a:defRPr sz="4000" b="1">
+                <a:solidFill>
+                  <a:schemeClr val="tx1"/>
+                </a:solidFill>
+                <a:latin typeface="Times New Roman" panose="02020603050405020304" pitchFamily="18" charset="0"/>
+              </a:defRPr>
+            </a:lvl9pPr>
+          </a:lstStyle>
+          <a:p>
             <a:fld id="{783640A1-3A17-442E-8F52-D5CF8886BD6F}" type="slidenum">
               <a:rPr lang="sk-SK" sz="1400" b="0"/>
               <a:pPr/>
-              <a:t>50</a:t>
+              <a:t>51</a:t>
             </a:fld>
             <a:endParaRPr lang="sk-SK" sz="1400" b="0"/>
           </a:p>
@@ -22218,274 +22247,6 @@
 </p:sld>
 </file>
 
-<file path=ppt/slides/slide51.xml><?xml version="1.0" encoding="utf-8"?>
-<p:sld xmlns:a="http://schemas.openxmlformats.org/drawingml/2006/main" xmlns:r="http://schemas.openxmlformats.org/officeDocument/2006/relationships" xmlns:p="http://schemas.openxmlformats.org/presentationml/2006/main">
-  <p:cSld>
-    <p:spTree>
-      <p:nvGrpSpPr>
-        <p:cNvPr id="1" name=""/>
-        <p:cNvGrpSpPr/>
-        <p:nvPr/>
-      </p:nvGrpSpPr>
-      <p:grpSpPr>
-        <a:xfrm>
-          <a:off x="0" y="0"/>
-          <a:ext cx="0" cy="0"/>
-          <a:chOff x="0" y="0"/>
-          <a:chExt cx="0" cy="0"/>
-        </a:xfrm>
-      </p:grpSpPr>
-      <p:sp>
-        <p:nvSpPr>
-          <p:cNvPr id="2" name="Nadpis 1">
-            <a:extLst>
-              <a:ext uri="{FF2B5EF4-FFF2-40B4-BE49-F238E27FC236}">
-                <a16:creationId xmlns:a16="http://schemas.microsoft.com/office/drawing/2014/main" id="{0D006629-8117-8846-BEEF-FE77AEE55EDF}"/>
-              </a:ext>
-            </a:extLst>
-          </p:cNvPr>
-          <p:cNvSpPr>
-            <a:spLocks noGrp="1"/>
-          </p:cNvSpPr>
-          <p:nvPr>
-            <p:ph type="title"/>
-          </p:nvPr>
-        </p:nvSpPr>
-        <p:spPr/>
-        <p:txBody>
-          <a:bodyPr/>
-          <a:lstStyle/>
-          <a:p>
-            <a:r>
-              <a:rPr lang="sk-SK" dirty="0"/>
-              <a:t>Uviaznutie a starnutie</a:t>
-            </a:r>
-          </a:p>
-        </p:txBody>
-      </p:sp>
-      <p:sp>
-        <p:nvSpPr>
-          <p:cNvPr id="3" name="Zástupný objekt pre obsah 2">
-            <a:extLst>
-              <a:ext uri="{FF2B5EF4-FFF2-40B4-BE49-F238E27FC236}">
-                <a16:creationId xmlns:a16="http://schemas.microsoft.com/office/drawing/2014/main" id="{EC598B3D-34AA-B541-8F1A-B517B1547A5E}"/>
-              </a:ext>
-            </a:extLst>
-          </p:cNvPr>
-          <p:cNvSpPr>
-            <a:spLocks noGrp="1"/>
-          </p:cNvSpPr>
-          <p:nvPr>
-            <p:ph idx="1"/>
-          </p:nvPr>
-        </p:nvSpPr>
-        <p:spPr/>
-        <p:txBody>
-          <a:bodyPr/>
-          <a:lstStyle/>
-          <a:p>
-            <a:pPr>
-              <a:spcBef>
-                <a:spcPct val="50000"/>
-              </a:spcBef>
-            </a:pPr>
-            <a:r>
-              <a:rPr lang="sk-SK" b="1" dirty="0"/>
-              <a:t>Uviaznutie</a:t>
-            </a:r>
-            <a:r>
-              <a:rPr lang="sk-SK" dirty="0"/>
-              <a:t> - po pridaní odpovedajúcej synchronizácie bude počínajúc istou akciou postup nejakého procesu úplne znemožnený</a:t>
-            </a:r>
-          </a:p>
-          <a:p>
-            <a:pPr>
-              <a:spcBef>
-                <a:spcPct val="50000"/>
-              </a:spcBef>
-            </a:pPr>
-            <a:endParaRPr lang="sk-SK" dirty="0"/>
-          </a:p>
-          <a:p>
-            <a:pPr>
-              <a:spcBef>
-                <a:spcPct val="50000"/>
-              </a:spcBef>
-            </a:pPr>
-            <a:r>
-              <a:rPr lang="sk-SK" b="1" dirty="0"/>
-              <a:t>Starnutie</a:t>
-            </a:r>
-            <a:r>
-              <a:rPr lang="sk-SK" dirty="0"/>
-              <a:t> - stav, keď sa proces nemôže dostať z oblasti čakania lebo je neustále predbiehaný inými procesmi, aby k tomu nedochádzalo je nutné zabezpečiť spravodlivosť pri čakaní procesov</a:t>
-            </a:r>
-            <a:endParaRPr lang="sk-SK" sz="6000" u="sng" dirty="0"/>
-          </a:p>
-          <a:p>
-            <a:pPr marL="0" indent="0">
-              <a:buNone/>
-            </a:pPr>
-            <a:endParaRPr lang="sk-SK" dirty="0"/>
-          </a:p>
-        </p:txBody>
-      </p:sp>
-      <p:sp>
-        <p:nvSpPr>
-          <p:cNvPr id="33795" name="Zástupný symbol čísla snímky 3"/>
-          <p:cNvSpPr>
-            <a:spLocks noGrp="1"/>
-          </p:cNvSpPr>
-          <p:nvPr>
-            <p:ph type="sldNum" sz="quarter" idx="12"/>
-          </p:nvPr>
-        </p:nvSpPr>
-        <p:spPr>
-          <a:noFill/>
-          <a:ln/>
-          <a:extLst>
-            <a:ext uri="{909E8E84-426E-40DD-AFC4-6F175D3DCCD1}">
-              <a14:hiddenFill xmlns:a14="http://schemas.microsoft.com/office/drawing/2010/main">
-                <a:solidFill>
-                  <a:srgbClr val="FFFFFF"/>
-                </a:solidFill>
-              </a14:hiddenFill>
-            </a:ext>
-            <a:ext uri="{91240B29-F687-4F45-9708-019B960494DF}">
-              <a14:hiddenLine xmlns:a14="http://schemas.microsoft.com/office/drawing/2010/main" w="9525">
-                <a:solidFill>
-                  <a:srgbClr val="000000"/>
-                </a:solidFill>
-                <a:miter lim="800000"/>
-                <a:headEnd/>
-                <a:tailEnd/>
-              </a14:hiddenLine>
-            </a:ext>
-          </a:extLst>
-        </p:spPr>
-        <p:txBody>
-          <a:bodyPr/>
-          <a:lstStyle>
-            <a:lvl1pPr>
-              <a:defRPr sz="4000" b="1">
-                <a:solidFill>
-                  <a:schemeClr val="tx1"/>
-                </a:solidFill>
-                <a:latin typeface="Times New Roman" panose="02020603050405020304" pitchFamily="18" charset="0"/>
-              </a:defRPr>
-            </a:lvl1pPr>
-            <a:lvl2pPr marL="742950" indent="-285750">
-              <a:defRPr sz="4000" b="1">
-                <a:solidFill>
-                  <a:schemeClr val="tx1"/>
-                </a:solidFill>
-                <a:latin typeface="Times New Roman" panose="02020603050405020304" pitchFamily="18" charset="0"/>
-              </a:defRPr>
-            </a:lvl2pPr>
-            <a:lvl3pPr marL="1143000" indent="-228600">
-              <a:defRPr sz="4000" b="1">
-                <a:solidFill>
-                  <a:schemeClr val="tx1"/>
-                </a:solidFill>
-                <a:latin typeface="Times New Roman" panose="02020603050405020304" pitchFamily="18" charset="0"/>
-              </a:defRPr>
-            </a:lvl3pPr>
-            <a:lvl4pPr marL="1600200" indent="-228600">
-              <a:defRPr sz="4000" b="1">
-                <a:solidFill>
-                  <a:schemeClr val="tx1"/>
-                </a:solidFill>
-                <a:latin typeface="Times New Roman" panose="02020603050405020304" pitchFamily="18" charset="0"/>
-              </a:defRPr>
-            </a:lvl4pPr>
-            <a:lvl5pPr marL="2057400" indent="-228600">
-              <a:defRPr sz="4000" b="1">
-                <a:solidFill>
-                  <a:schemeClr val="tx1"/>
-                </a:solidFill>
-                <a:latin typeface="Times New Roman" panose="02020603050405020304" pitchFamily="18" charset="0"/>
-              </a:defRPr>
-            </a:lvl5pPr>
-            <a:lvl6pPr marL="2514600" indent="-228600" algn="ctr" eaLnBrk="0" fontAlgn="base" hangingPunct="0">
-              <a:spcBef>
-                <a:spcPct val="0"/>
-              </a:spcBef>
-              <a:spcAft>
-                <a:spcPct val="0"/>
-              </a:spcAft>
-              <a:defRPr sz="4000" b="1">
-                <a:solidFill>
-                  <a:schemeClr val="tx1"/>
-                </a:solidFill>
-                <a:latin typeface="Times New Roman" panose="02020603050405020304" pitchFamily="18" charset="0"/>
-              </a:defRPr>
-            </a:lvl6pPr>
-            <a:lvl7pPr marL="2971800" indent="-228600" algn="ctr" eaLnBrk="0" fontAlgn="base" hangingPunct="0">
-              <a:spcBef>
-                <a:spcPct val="0"/>
-              </a:spcBef>
-              <a:spcAft>
-                <a:spcPct val="0"/>
-              </a:spcAft>
-              <a:defRPr sz="4000" b="1">
-                <a:solidFill>
-                  <a:schemeClr val="tx1"/>
-                </a:solidFill>
-                <a:latin typeface="Times New Roman" panose="02020603050405020304" pitchFamily="18" charset="0"/>
-              </a:defRPr>
-            </a:lvl7pPr>
-            <a:lvl8pPr marL="3429000" indent="-228600" algn="ctr" eaLnBrk="0" fontAlgn="base" hangingPunct="0">
-              <a:spcBef>
-                <a:spcPct val="0"/>
-              </a:spcBef>
-              <a:spcAft>
-                <a:spcPct val="0"/>
-              </a:spcAft>
-              <a:defRPr sz="4000" b="1">
-                <a:solidFill>
-                  <a:schemeClr val="tx1"/>
-                </a:solidFill>
-                <a:latin typeface="Times New Roman" panose="02020603050405020304" pitchFamily="18" charset="0"/>
-              </a:defRPr>
-            </a:lvl8pPr>
-            <a:lvl9pPr marL="3886200" indent="-228600" algn="ctr" eaLnBrk="0" fontAlgn="base" hangingPunct="0">
-              <a:spcBef>
-                <a:spcPct val="0"/>
-              </a:spcBef>
-              <a:spcAft>
-                <a:spcPct val="0"/>
-              </a:spcAft>
-              <a:defRPr sz="4000" b="1">
-                <a:solidFill>
-                  <a:schemeClr val="tx1"/>
-                </a:solidFill>
-                <a:latin typeface="Times New Roman" panose="02020603050405020304" pitchFamily="18" charset="0"/>
-              </a:defRPr>
-            </a:lvl9pPr>
-          </a:lstStyle>
-          <a:p>
-            <a:fld id="{E4102D23-89A9-4854-A21A-0C84771751CA}" type="slidenum">
-              <a:rPr lang="sk-SK" sz="1400" b="0"/>
-              <a:pPr/>
-              <a:t>51</a:t>
-            </a:fld>
-            <a:endParaRPr lang="sk-SK" sz="1400" b="0"/>
-          </a:p>
-        </p:txBody>
-      </p:sp>
-    </p:spTree>
-    <p:extLst>
-      <p:ext uri="{BB962C8B-B14F-4D97-AF65-F5344CB8AC3E}">
-        <p14:creationId xmlns:p14="http://schemas.microsoft.com/office/powerpoint/2010/main" val="1415647731"/>
-      </p:ext>
-    </p:extLst>
-  </p:cSld>
-  <p:clrMapOvr>
-    <a:masterClrMapping/>
-  </p:clrMapOvr>
-</p:sld>
-</file>
-
 <file path=ppt/slides/slide52.xml><?xml version="1.0" encoding="utf-8"?>
 <p:sld xmlns:a="http://schemas.openxmlformats.org/drawingml/2006/main" xmlns:r="http://schemas.openxmlformats.org/officeDocument/2006/relationships" xmlns:p="http://schemas.openxmlformats.org/presentationml/2006/main">
   <p:cSld>
@@ -22505,6 +22266,274 @@
       </p:grpSpPr>
       <p:sp>
         <p:nvSpPr>
+          <p:cNvPr id="2" name="Nadpis 1">
+            <a:extLst>
+              <a:ext uri="{FF2B5EF4-FFF2-40B4-BE49-F238E27FC236}">
+                <a16:creationId xmlns:a16="http://schemas.microsoft.com/office/drawing/2014/main" id="{0D006629-8117-8846-BEEF-FE77AEE55EDF}"/>
+              </a:ext>
+            </a:extLst>
+          </p:cNvPr>
+          <p:cNvSpPr>
+            <a:spLocks noGrp="1"/>
+          </p:cNvSpPr>
+          <p:nvPr>
+            <p:ph type="title"/>
+          </p:nvPr>
+        </p:nvSpPr>
+        <p:spPr/>
+        <p:txBody>
+          <a:bodyPr/>
+          <a:lstStyle/>
+          <a:p>
+            <a:r>
+              <a:rPr lang="sk-SK" dirty="0"/>
+              <a:t>Uviaznutie a starnutie</a:t>
+            </a:r>
+          </a:p>
+        </p:txBody>
+      </p:sp>
+      <p:sp>
+        <p:nvSpPr>
+          <p:cNvPr id="3" name="Zástupný objekt pre obsah 2">
+            <a:extLst>
+              <a:ext uri="{FF2B5EF4-FFF2-40B4-BE49-F238E27FC236}">
+                <a16:creationId xmlns:a16="http://schemas.microsoft.com/office/drawing/2014/main" id="{EC598B3D-34AA-B541-8F1A-B517B1547A5E}"/>
+              </a:ext>
+            </a:extLst>
+          </p:cNvPr>
+          <p:cNvSpPr>
+            <a:spLocks noGrp="1"/>
+          </p:cNvSpPr>
+          <p:nvPr>
+            <p:ph idx="1"/>
+          </p:nvPr>
+        </p:nvSpPr>
+        <p:spPr/>
+        <p:txBody>
+          <a:bodyPr/>
+          <a:lstStyle/>
+          <a:p>
+            <a:pPr>
+              <a:spcBef>
+                <a:spcPct val="50000"/>
+              </a:spcBef>
+            </a:pPr>
+            <a:r>
+              <a:rPr lang="sk-SK" b="1" dirty="0"/>
+              <a:t>Uviaznutie</a:t>
+            </a:r>
+            <a:r>
+              <a:rPr lang="sk-SK" dirty="0"/>
+              <a:t> - po pridaní odpovedajúcej synchronizácie bude počínajúc istou akciou postup nejakého procesu úplne znemožnený</a:t>
+            </a:r>
+          </a:p>
+          <a:p>
+            <a:pPr>
+              <a:spcBef>
+                <a:spcPct val="50000"/>
+              </a:spcBef>
+            </a:pPr>
+            <a:endParaRPr lang="sk-SK" dirty="0"/>
+          </a:p>
+          <a:p>
+            <a:pPr>
+              <a:spcBef>
+                <a:spcPct val="50000"/>
+              </a:spcBef>
+            </a:pPr>
+            <a:r>
+              <a:rPr lang="sk-SK" b="1" dirty="0"/>
+              <a:t>Starnutie</a:t>
+            </a:r>
+            <a:r>
+              <a:rPr lang="sk-SK" dirty="0"/>
+              <a:t> - stav, keď sa proces nemôže dostať z oblasti čakania lebo je neustále predbiehaný inými procesmi, aby k tomu nedochádzalo je nutné zabezpečiť spravodlivosť pri čakaní procesov</a:t>
+            </a:r>
+            <a:endParaRPr lang="sk-SK" sz="6000" u="sng" dirty="0"/>
+          </a:p>
+          <a:p>
+            <a:pPr marL="0" indent="0">
+              <a:buNone/>
+            </a:pPr>
+            <a:endParaRPr lang="sk-SK" dirty="0"/>
+          </a:p>
+        </p:txBody>
+      </p:sp>
+      <p:sp>
+        <p:nvSpPr>
+          <p:cNvPr id="33795" name="Zástupný symbol čísla snímky 3"/>
+          <p:cNvSpPr>
+            <a:spLocks noGrp="1"/>
+          </p:cNvSpPr>
+          <p:nvPr>
+            <p:ph type="sldNum" sz="quarter" idx="12"/>
+          </p:nvPr>
+        </p:nvSpPr>
+        <p:spPr>
+          <a:noFill/>
+          <a:ln/>
+          <a:extLst>
+            <a:ext uri="{909E8E84-426E-40DD-AFC4-6F175D3DCCD1}">
+              <a14:hiddenFill xmlns:a14="http://schemas.microsoft.com/office/drawing/2010/main">
+                <a:solidFill>
+                  <a:srgbClr val="FFFFFF"/>
+                </a:solidFill>
+              </a14:hiddenFill>
+            </a:ext>
+            <a:ext uri="{91240B29-F687-4F45-9708-019B960494DF}">
+              <a14:hiddenLine xmlns:a14="http://schemas.microsoft.com/office/drawing/2010/main" w="9525">
+                <a:solidFill>
+                  <a:srgbClr val="000000"/>
+                </a:solidFill>
+                <a:miter lim="800000"/>
+                <a:headEnd/>
+                <a:tailEnd/>
+              </a14:hiddenLine>
+            </a:ext>
+          </a:extLst>
+        </p:spPr>
+        <p:txBody>
+          <a:bodyPr/>
+          <a:lstStyle>
+            <a:lvl1pPr>
+              <a:defRPr sz="4000" b="1">
+                <a:solidFill>
+                  <a:schemeClr val="tx1"/>
+                </a:solidFill>
+                <a:latin typeface="Times New Roman" panose="02020603050405020304" pitchFamily="18" charset="0"/>
+              </a:defRPr>
+            </a:lvl1pPr>
+            <a:lvl2pPr marL="742950" indent="-285750">
+              <a:defRPr sz="4000" b="1">
+                <a:solidFill>
+                  <a:schemeClr val="tx1"/>
+                </a:solidFill>
+                <a:latin typeface="Times New Roman" panose="02020603050405020304" pitchFamily="18" charset="0"/>
+              </a:defRPr>
+            </a:lvl2pPr>
+            <a:lvl3pPr marL="1143000" indent="-228600">
+              <a:defRPr sz="4000" b="1">
+                <a:solidFill>
+                  <a:schemeClr val="tx1"/>
+                </a:solidFill>
+                <a:latin typeface="Times New Roman" panose="02020603050405020304" pitchFamily="18" charset="0"/>
+              </a:defRPr>
+            </a:lvl3pPr>
+            <a:lvl4pPr marL="1600200" indent="-228600">
+              <a:defRPr sz="4000" b="1">
+                <a:solidFill>
+                  <a:schemeClr val="tx1"/>
+                </a:solidFill>
+                <a:latin typeface="Times New Roman" panose="02020603050405020304" pitchFamily="18" charset="0"/>
+              </a:defRPr>
+            </a:lvl4pPr>
+            <a:lvl5pPr marL="2057400" indent="-228600">
+              <a:defRPr sz="4000" b="1">
+                <a:solidFill>
+                  <a:schemeClr val="tx1"/>
+                </a:solidFill>
+                <a:latin typeface="Times New Roman" panose="02020603050405020304" pitchFamily="18" charset="0"/>
+              </a:defRPr>
+            </a:lvl5pPr>
+            <a:lvl6pPr marL="2514600" indent="-228600" algn="ctr" eaLnBrk="0" fontAlgn="base" hangingPunct="0">
+              <a:spcBef>
+                <a:spcPct val="0"/>
+              </a:spcBef>
+              <a:spcAft>
+                <a:spcPct val="0"/>
+              </a:spcAft>
+              <a:defRPr sz="4000" b="1">
+                <a:solidFill>
+                  <a:schemeClr val="tx1"/>
+                </a:solidFill>
+                <a:latin typeface="Times New Roman" panose="02020603050405020304" pitchFamily="18" charset="0"/>
+              </a:defRPr>
+            </a:lvl6pPr>
+            <a:lvl7pPr marL="2971800" indent="-228600" algn="ctr" eaLnBrk="0" fontAlgn="base" hangingPunct="0">
+              <a:spcBef>
+                <a:spcPct val="0"/>
+              </a:spcBef>
+              <a:spcAft>
+                <a:spcPct val="0"/>
+              </a:spcAft>
+              <a:defRPr sz="4000" b="1">
+                <a:solidFill>
+                  <a:schemeClr val="tx1"/>
+                </a:solidFill>
+                <a:latin typeface="Times New Roman" panose="02020603050405020304" pitchFamily="18" charset="0"/>
+              </a:defRPr>
+            </a:lvl7pPr>
+            <a:lvl8pPr marL="3429000" indent="-228600" algn="ctr" eaLnBrk="0" fontAlgn="base" hangingPunct="0">
+              <a:spcBef>
+                <a:spcPct val="0"/>
+              </a:spcBef>
+              <a:spcAft>
+                <a:spcPct val="0"/>
+              </a:spcAft>
+              <a:defRPr sz="4000" b="1">
+                <a:solidFill>
+                  <a:schemeClr val="tx1"/>
+                </a:solidFill>
+                <a:latin typeface="Times New Roman" panose="02020603050405020304" pitchFamily="18" charset="0"/>
+              </a:defRPr>
+            </a:lvl8pPr>
+            <a:lvl9pPr marL="3886200" indent="-228600" algn="ctr" eaLnBrk="0" fontAlgn="base" hangingPunct="0">
+              <a:spcBef>
+                <a:spcPct val="0"/>
+              </a:spcBef>
+              <a:spcAft>
+                <a:spcPct val="0"/>
+              </a:spcAft>
+              <a:defRPr sz="4000" b="1">
+                <a:solidFill>
+                  <a:schemeClr val="tx1"/>
+                </a:solidFill>
+                <a:latin typeface="Times New Roman" panose="02020603050405020304" pitchFamily="18" charset="0"/>
+              </a:defRPr>
+            </a:lvl9pPr>
+          </a:lstStyle>
+          <a:p>
+            <a:fld id="{E4102D23-89A9-4854-A21A-0C84771751CA}" type="slidenum">
+              <a:rPr lang="sk-SK" sz="1400" b="0"/>
+              <a:pPr/>
+              <a:t>52</a:t>
+            </a:fld>
+            <a:endParaRPr lang="sk-SK" sz="1400" b="0"/>
+          </a:p>
+        </p:txBody>
+      </p:sp>
+    </p:spTree>
+    <p:extLst>
+      <p:ext uri="{BB962C8B-B14F-4D97-AF65-F5344CB8AC3E}">
+        <p14:creationId xmlns:p14="http://schemas.microsoft.com/office/powerpoint/2010/main" val="1415647731"/>
+      </p:ext>
+    </p:extLst>
+  </p:cSld>
+  <p:clrMapOvr>
+    <a:masterClrMapping/>
+  </p:clrMapOvr>
+</p:sld>
+</file>
+
+<file path=ppt/slides/slide53.xml><?xml version="1.0" encoding="utf-8"?>
+<p:sld xmlns:a="http://schemas.openxmlformats.org/drawingml/2006/main" xmlns:r="http://schemas.openxmlformats.org/officeDocument/2006/relationships" xmlns:p="http://schemas.openxmlformats.org/presentationml/2006/main">
+  <p:cSld>
+    <p:spTree>
+      <p:nvGrpSpPr>
+        <p:cNvPr id="1" name=""/>
+        <p:cNvGrpSpPr/>
+        <p:nvPr/>
+      </p:nvGrpSpPr>
+      <p:grpSpPr>
+        <a:xfrm>
+          <a:off x="0" y="0"/>
+          <a:ext cx="0" cy="0"/>
+          <a:chOff x="0" y="0"/>
+          <a:chExt cx="0" cy="0"/>
+        </a:xfrm>
+      </p:grpSpPr>
+      <p:sp>
+        <p:nvSpPr>
           <p:cNvPr id="3" name="Nadpis 2"/>
           <p:cNvSpPr>
             <a:spLocks noGrp="1"/>
@@ -22542,7 +22571,7 @@
           <a:p>
             <a:fld id="{5AB4CD34-DB5E-4606-AE4E-01019896DEAB}" type="slidenum">
               <a:rPr lang="sk-SK" smtClean="0"/>
-              <a:t>52</a:t>
+              <a:t>53</a:t>
             </a:fld>
             <a:endParaRPr lang="sk-SK"/>
           </a:p>
@@ -22602,7 +22631,7 @@
 </p:sld>
 </file>
 
-<file path=ppt/slides/slide53.xml><?xml version="1.0" encoding="utf-8"?>
+<file path=ppt/slides/slide54.xml><?xml version="1.0" encoding="utf-8"?>
 <p:sld xmlns:a="http://schemas.openxmlformats.org/drawingml/2006/main" xmlns:r="http://schemas.openxmlformats.org/officeDocument/2006/relationships" xmlns:p="http://schemas.openxmlformats.org/presentationml/2006/main">
   <p:cSld>
     <p:spTree>
@@ -22756,7 +22785,7 @@
             <a:fld id="{90BAB154-F63B-4E0B-B944-C49ED6189001}" type="slidenum">
               <a:rPr lang="sk-SK" sz="1400" b="0"/>
               <a:pPr/>
-              <a:t>53</a:t>
+              <a:t>54</a:t>
             </a:fld>
             <a:endParaRPr lang="sk-SK" sz="1400" b="0"/>
           </a:p>
